--- a/presentation/SIX_AI_Presentation.pptx
+++ b/presentation/SIX_AI_Presentation.pptx
@@ -12,7 +12,7 @@
     <p:sldId id="260" r:id="rId11"/>
     <p:sldId id="261" r:id="rId12"/>
   </p:sldIdLst>
-  <p:sldSz cx="9144000" cy="5143500" type="screen4x3"/>
+  <p:sldSz cx="12191695" cy="6858000" type="screen4x3"/>
   <p:notesSz cx="6858000" cy="9144000"/>
   <p:defaultTextStyle>
     <a:defPPr>
@@ -3101,314 +3101,9 @@
         <p:nvPr/>
       </p:nvGrpSpPr>
       <p:grpSpPr/>
-      <p:sp>
-        <p:nvSpPr>
-          <p:cNvPr id="2" name="TextBox 1"/>
-          <p:cNvSpPr txBox="1"/>
-          <p:nvPr/>
-        </p:nvSpPr>
-        <p:spPr>
-          <a:xfrm>
-            <a:off x="0" y="731520"/>
-            <a:ext cx="9144000" cy="1097280"/>
-          </a:xfrm>
-          <a:prstGeom prst="rect">
-            <a:avLst/>
-          </a:prstGeom>
-          <a:noFill/>
-        </p:spPr>
-        <p:txBody>
-          <a:bodyPr wrap="square">
-            <a:spAutoFit/>
-          </a:bodyPr>
-          <a:lstStyle/>
-          <a:p>
-            <a:pPr algn="ctr"/>
-            <a:r>
-              <a:rPr sz="4800" b="1">
-                <a:solidFill>
-                  <a:srgbClr val="C8102E"/>
-                </a:solidFill>
-                <a:latin typeface="Segoe UI"/>
-              </a:rPr>
-              <a:t>SIX</a:t>
-            </a:r>
-            <a:r>
-              <a:rPr sz="4800" b="0">
-                <a:solidFill>
-                  <a:srgbClr val="0F172A"/>
-                </a:solidFill>
-                <a:latin typeface="Segoe UI"/>
-              </a:rPr>
-              <a:t> AI</a:t>
-            </a:r>
-          </a:p>
-        </p:txBody>
-      </p:sp>
-      <p:sp>
-        <p:nvSpPr>
-          <p:cNvPr id="3" name="TextBox 2"/>
-          <p:cNvSpPr txBox="1"/>
-          <p:nvPr/>
-        </p:nvSpPr>
-        <p:spPr>
-          <a:xfrm>
-            <a:off x="1371600" y="1828800"/>
-            <a:ext cx="6400800" cy="548640"/>
-          </a:xfrm>
-          <a:prstGeom prst="rect">
-            <a:avLst/>
-          </a:prstGeom>
-          <a:noFill/>
-        </p:spPr>
-        <p:txBody>
-          <a:bodyPr wrap="square">
-            <a:spAutoFit/>
-          </a:bodyPr>
-          <a:lstStyle/>
-          <a:p>
-            <a:pPr algn="ctr"/>
-            <a:r>
-              <a:rPr sz="2000" b="1">
-                <a:solidFill>
-                  <a:srgbClr val="14233F"/>
-                </a:solidFill>
-                <a:latin typeface="Segoe UI"/>
-              </a:rPr>
-              <a:t>Cursor meets Palantir (for relationship managers)</a:t>
-            </a:r>
-          </a:p>
-        </p:txBody>
-      </p:sp>
-      <p:sp>
-        <p:nvSpPr>
-          <p:cNvPr id="4" name="TextBox 3"/>
-          <p:cNvSpPr txBox="1"/>
-          <p:nvPr/>
-        </p:nvSpPr>
-        <p:spPr>
-          <a:xfrm>
-            <a:off x="1097280" y="2926080"/>
-            <a:ext cx="2377440" cy="457200"/>
-          </a:xfrm>
-          <a:prstGeom prst="rect">
-            <a:avLst/>
-          </a:prstGeom>
-          <a:noFill/>
-        </p:spPr>
-        <p:txBody>
-          <a:bodyPr wrap="square">
-            <a:spAutoFit/>
-          </a:bodyPr>
-          <a:lstStyle/>
-          <a:p>
-            <a:pPr algn="ctr"/>
-            <a:r>
-              <a:rPr sz="1400" b="1">
-                <a:solidFill>
-                  <a:srgbClr val="475569"/>
-                </a:solidFill>
-                <a:latin typeface="Segoe UI"/>
-              </a:rPr>
-              <a:t>Boris Goranov</a:t>
-            </a:r>
-          </a:p>
-        </p:txBody>
-      </p:sp>
-      <p:sp>
-        <p:nvSpPr>
-          <p:cNvPr id="5" name="TextBox 4"/>
-          <p:cNvSpPr txBox="1"/>
-          <p:nvPr/>
-        </p:nvSpPr>
-        <p:spPr>
-          <a:xfrm>
-            <a:off x="3474720" y="2926080"/>
-            <a:ext cx="2377440" cy="457200"/>
-          </a:xfrm>
-          <a:prstGeom prst="rect">
-            <a:avLst/>
-          </a:prstGeom>
-          <a:noFill/>
-        </p:spPr>
-        <p:txBody>
-          <a:bodyPr wrap="square">
-            <a:spAutoFit/>
-          </a:bodyPr>
-          <a:lstStyle/>
-          <a:p>
-            <a:pPr algn="ctr"/>
-            <a:r>
-              <a:rPr sz="1400" b="1">
-                <a:solidFill>
-                  <a:srgbClr val="475569"/>
-                </a:solidFill>
-                <a:latin typeface="Segoe UI"/>
-              </a:rPr>
-              <a:t>Hristo Stefanov</a:t>
-            </a:r>
-          </a:p>
-        </p:txBody>
-      </p:sp>
-      <p:sp>
-        <p:nvSpPr>
-          <p:cNvPr id="6" name="TextBox 5"/>
-          <p:cNvSpPr txBox="1"/>
-          <p:nvPr/>
-        </p:nvSpPr>
-        <p:spPr>
-          <a:xfrm>
-            <a:off x="5852160" y="2926080"/>
-            <a:ext cx="2377440" cy="457200"/>
-          </a:xfrm>
-          <a:prstGeom prst="rect">
-            <a:avLst/>
-          </a:prstGeom>
-          <a:noFill/>
-        </p:spPr>
-        <p:txBody>
-          <a:bodyPr wrap="square">
-            <a:spAutoFit/>
-          </a:bodyPr>
-          <a:lstStyle/>
-          <a:p>
-            <a:pPr algn="ctr"/>
-            <a:r>
-              <a:rPr sz="1400" b="1">
-                <a:solidFill>
-                  <a:srgbClr val="475569"/>
-                </a:solidFill>
-                <a:latin typeface="Segoe UI"/>
-              </a:rPr>
-              <a:t>Nikola Staykov</a:t>
-            </a:r>
-          </a:p>
-        </p:txBody>
-      </p:sp>
-      <p:sp>
-        <p:nvSpPr>
-          <p:cNvPr id="7" name="Rectangle 6"/>
-          <p:cNvSpPr/>
-          <p:nvPr/>
-        </p:nvSpPr>
-        <p:spPr>
-          <a:xfrm>
-            <a:off x="3337560" y="2926080"/>
-            <a:ext cx="12700" cy="411480"/>
-          </a:xfrm>
-          <a:prstGeom prst="rect">
-            <a:avLst/>
-          </a:prstGeom>
-          <a:solidFill>
-            <a:srgbClr val="CBD5E1"/>
-          </a:solidFill>
-          <a:ln>
-            <a:noFill/>
-          </a:ln>
-        </p:spPr>
-        <p:style>
-          <a:lnRef idx="1">
-            <a:schemeClr val="accent1"/>
-          </a:lnRef>
-          <a:fillRef idx="3">
-            <a:schemeClr val="accent1"/>
-          </a:fillRef>
-          <a:effectRef idx="2">
-            <a:schemeClr val="accent1"/>
-          </a:effectRef>
-          <a:fontRef idx="minor">
-            <a:schemeClr val="lt1"/>
-          </a:fontRef>
-        </p:style>
-        <p:txBody>
-          <a:bodyPr rtlCol="0" anchor="ctr"/>
-          <a:lstStyle/>
-          <a:p>
-            <a:pPr algn="ctr"/>
-          </a:p>
-        </p:txBody>
-      </p:sp>
-      <p:sp>
-        <p:nvSpPr>
-          <p:cNvPr id="8" name="Rectangle 7"/>
-          <p:cNvSpPr/>
-          <p:nvPr/>
-        </p:nvSpPr>
-        <p:spPr>
-          <a:xfrm>
-            <a:off x="5715000" y="2926080"/>
-            <a:ext cx="12700" cy="411480"/>
-          </a:xfrm>
-          <a:prstGeom prst="rect">
-            <a:avLst/>
-          </a:prstGeom>
-          <a:solidFill>
-            <a:srgbClr val="CBD5E1"/>
-          </a:solidFill>
-          <a:ln>
-            <a:noFill/>
-          </a:ln>
-        </p:spPr>
-        <p:style>
-          <a:lnRef idx="1">
-            <a:schemeClr val="accent1"/>
-          </a:lnRef>
-          <a:fillRef idx="3">
-            <a:schemeClr val="accent1"/>
-          </a:fillRef>
-          <a:effectRef idx="2">
-            <a:schemeClr val="accent1"/>
-          </a:effectRef>
-          <a:fontRef idx="minor">
-            <a:schemeClr val="lt1"/>
-          </a:fontRef>
-        </p:style>
-        <p:txBody>
-          <a:bodyPr rtlCol="0" anchor="ctr"/>
-          <a:lstStyle/>
-          <a:p>
-            <a:pPr algn="ctr"/>
-          </a:p>
-        </p:txBody>
-      </p:sp>
-      <p:sp>
-        <p:nvSpPr>
-          <p:cNvPr id="9" name="TextBox 8"/>
-          <p:cNvSpPr txBox="1"/>
-          <p:nvPr/>
-        </p:nvSpPr>
-        <p:spPr>
-          <a:xfrm>
-            <a:off x="1828800" y="3840480"/>
-            <a:ext cx="5486400" cy="365760"/>
-          </a:xfrm>
-          <a:prstGeom prst="rect">
-            <a:avLst/>
-          </a:prstGeom>
-          <a:noFill/>
-        </p:spPr>
-        <p:txBody>
-          <a:bodyPr wrap="square">
-            <a:spAutoFit/>
-          </a:bodyPr>
-          <a:lstStyle/>
-          <a:p>
-            <a:pPr algn="ctr"/>
-            <a:r>
-              <a:rPr sz="1100" b="1">
-                <a:solidFill>
-                  <a:srgbClr val="94A3B8"/>
-                </a:solidFill>
-                <a:latin typeface="Segoe UI"/>
-              </a:rPr>
-              <a:t>SWISSHACKS 2026</a:t>
-            </a:r>
-          </a:p>
-        </p:txBody>
-      </p:sp>
       <p:pic>
         <p:nvPicPr>
-          <p:cNvPr id="10" name="Picture 9" descr="pptx_slide2_Google_Shape_64_p14.png"/>
+          <p:cNvPr id="2" name="Picture 1" descr="pptx_slide2_Google_Shape_64_p14.png"/>
           <p:cNvPicPr>
             <a:picLocks noChangeAspect="1"/>
           </p:cNvPicPr>
@@ -3422,14 +3117,363 @@
         </p:blipFill>
         <p:spPr>
           <a:xfrm>
-            <a:off x="7680960" y="228600"/>
-            <a:ext cx="1097280" cy="301168"/>
+            <a:off x="10515600" y="274320"/>
+            <a:ext cx="1371600" cy="376460"/>
           </a:xfrm>
           <a:prstGeom prst="rect">
             <a:avLst/>
           </a:prstGeom>
         </p:spPr>
       </p:pic>
+      <p:sp>
+        <p:nvSpPr>
+          <p:cNvPr id="3" name="TextBox 2"/>
+          <p:cNvSpPr txBox="1"/>
+          <p:nvPr/>
+        </p:nvSpPr>
+        <p:spPr>
+          <a:xfrm>
+            <a:off x="0" y="1371600"/>
+            <a:ext cx="12191695" cy="1097280"/>
+          </a:xfrm>
+          <a:prstGeom prst="rect">
+            <a:avLst/>
+          </a:prstGeom>
+          <a:noFill/>
+        </p:spPr>
+        <p:txBody>
+          <a:bodyPr wrap="square">
+            <a:spAutoFit/>
+          </a:bodyPr>
+          <a:lstStyle/>
+          <a:p>
+            <a:pPr algn="ctr"/>
+            <a:r>
+              <a:rPr sz="6000" b="1" i="0">
+                <a:solidFill>
+                  <a:srgbClr val="C8102E"/>
+                </a:solidFill>
+                <a:latin typeface="Segoe UI"/>
+              </a:rPr>
+              <a:t>SIX</a:t>
+            </a:r>
+            <a:r>
+              <a:rPr sz="6000" b="0" i="0">
+                <a:solidFill>
+                  <a:srgbClr val="0F172A"/>
+                </a:solidFill>
+                <a:latin typeface="Segoe UI"/>
+              </a:rPr>
+              <a:t> AI</a:t>
+            </a:r>
+          </a:p>
+        </p:txBody>
+      </p:sp>
+      <p:sp>
+        <p:nvSpPr>
+          <p:cNvPr id="4" name="TextBox 3"/>
+          <p:cNvSpPr txBox="1"/>
+          <p:nvPr/>
+        </p:nvSpPr>
+        <p:spPr>
+          <a:xfrm>
+            <a:off x="1828800" y="2560320"/>
+            <a:ext cx="8534095" cy="1097280"/>
+          </a:xfrm>
+          <a:prstGeom prst="rect">
+            <a:avLst/>
+          </a:prstGeom>
+          <a:noFill/>
+        </p:spPr>
+        <p:txBody>
+          <a:bodyPr wrap="square">
+            <a:spAutoFit/>
+          </a:bodyPr>
+          <a:lstStyle/>
+          <a:p>
+            <a:pPr algn="ctr"/>
+            <a:r>
+              <a:rPr sz="2200" b="0" i="1">
+                <a:solidFill>
+                  <a:srgbClr val="475569"/>
+                </a:solidFill>
+                <a:latin typeface="Segoe UI"/>
+              </a:rPr>
+              <a:t>"Intellectuals solve problems, geniuses prevent them."</a:t>
+            </a:r>
+          </a:p>
+          <a:p>
+            <a:pPr algn="ctr">
+              <a:spcBef>
+                <a:spcPts val="800"/>
+              </a:spcBef>
+            </a:pPr>
+            <a:r>
+              <a:rPr sz="1400" b="0" i="0">
+                <a:solidFill>
+                  <a:srgbClr val="94A3B8"/>
+                </a:solidFill>
+                <a:latin typeface="Segoe UI"/>
+              </a:rPr>
+              <a:t>— Albert Einstein, probably</a:t>
+            </a:r>
+          </a:p>
+        </p:txBody>
+      </p:sp>
+      <p:sp>
+        <p:nvSpPr>
+          <p:cNvPr id="5" name="TextBox 4"/>
+          <p:cNvSpPr txBox="1"/>
+          <p:nvPr/>
+        </p:nvSpPr>
+        <p:spPr>
+          <a:xfrm>
+            <a:off x="2438247" y="4114800"/>
+            <a:ext cx="2194560" cy="365760"/>
+          </a:xfrm>
+          <a:prstGeom prst="rect">
+            <a:avLst/>
+          </a:prstGeom>
+          <a:noFill/>
+        </p:spPr>
+        <p:txBody>
+          <a:bodyPr wrap="square">
+            <a:spAutoFit/>
+          </a:bodyPr>
+          <a:lstStyle/>
+          <a:p>
+            <a:pPr algn="ctr">
+              <a:spcBef>
+                <a:spcPts val="0"/>
+              </a:spcBef>
+              <a:spcAft>
+                <a:spcPts val="0"/>
+              </a:spcAft>
+            </a:pPr>
+            <a:r>
+              <a:rPr sz="1600" b="1" i="0">
+                <a:solidFill>
+                  <a:srgbClr val="475569"/>
+                </a:solidFill>
+                <a:latin typeface="Segoe UI"/>
+              </a:rPr>
+              <a:t>Boris Goranov</a:t>
+            </a:r>
+          </a:p>
+        </p:txBody>
+      </p:sp>
+      <p:sp>
+        <p:nvSpPr>
+          <p:cNvPr id="6" name="Rectangle 5"/>
+          <p:cNvSpPr/>
+          <p:nvPr/>
+        </p:nvSpPr>
+        <p:spPr>
+          <a:xfrm>
+            <a:off x="4815687" y="4160520"/>
+            <a:ext cx="12700" cy="274320"/>
+          </a:xfrm>
+          <a:prstGeom prst="rect">
+            <a:avLst/>
+          </a:prstGeom>
+          <a:solidFill>
+            <a:srgbClr val="CBD5E1"/>
+          </a:solidFill>
+          <a:ln>
+            <a:noFill/>
+          </a:ln>
+        </p:spPr>
+        <p:style>
+          <a:lnRef idx="1">
+            <a:schemeClr val="accent1"/>
+          </a:lnRef>
+          <a:fillRef idx="3">
+            <a:schemeClr val="accent1"/>
+          </a:fillRef>
+          <a:effectRef idx="2">
+            <a:schemeClr val="accent1"/>
+          </a:effectRef>
+          <a:fontRef idx="minor">
+            <a:schemeClr val="lt1"/>
+          </a:fontRef>
+        </p:style>
+        <p:txBody>
+          <a:bodyPr rtlCol="0" anchor="ctr"/>
+          <a:lstStyle/>
+          <a:p>
+            <a:pPr algn="ctr"/>
+          </a:p>
+        </p:txBody>
+      </p:sp>
+      <p:sp>
+        <p:nvSpPr>
+          <p:cNvPr id="7" name="TextBox 6"/>
+          <p:cNvSpPr txBox="1"/>
+          <p:nvPr/>
+        </p:nvSpPr>
+        <p:spPr>
+          <a:xfrm>
+            <a:off x="5011267" y="4114800"/>
+            <a:ext cx="2194560" cy="365760"/>
+          </a:xfrm>
+          <a:prstGeom prst="rect">
+            <a:avLst/>
+          </a:prstGeom>
+          <a:noFill/>
+        </p:spPr>
+        <p:txBody>
+          <a:bodyPr wrap="square">
+            <a:spAutoFit/>
+          </a:bodyPr>
+          <a:lstStyle/>
+          <a:p>
+            <a:pPr algn="ctr">
+              <a:spcBef>
+                <a:spcPts val="0"/>
+              </a:spcBef>
+              <a:spcAft>
+                <a:spcPts val="0"/>
+              </a:spcAft>
+            </a:pPr>
+            <a:r>
+              <a:rPr sz="1600" b="1" i="0">
+                <a:solidFill>
+                  <a:srgbClr val="475569"/>
+                </a:solidFill>
+                <a:latin typeface="Segoe UI"/>
+              </a:rPr>
+              <a:t>Hristo Stefanov</a:t>
+            </a:r>
+          </a:p>
+        </p:txBody>
+      </p:sp>
+      <p:sp>
+        <p:nvSpPr>
+          <p:cNvPr id="8" name="Rectangle 7"/>
+          <p:cNvSpPr/>
+          <p:nvPr/>
+        </p:nvSpPr>
+        <p:spPr>
+          <a:xfrm>
+            <a:off x="7388707" y="4160520"/>
+            <a:ext cx="12700" cy="274320"/>
+          </a:xfrm>
+          <a:prstGeom prst="rect">
+            <a:avLst/>
+          </a:prstGeom>
+          <a:solidFill>
+            <a:srgbClr val="CBD5E1"/>
+          </a:solidFill>
+          <a:ln>
+            <a:noFill/>
+          </a:ln>
+        </p:spPr>
+        <p:style>
+          <a:lnRef idx="1">
+            <a:schemeClr val="accent1"/>
+          </a:lnRef>
+          <a:fillRef idx="3">
+            <a:schemeClr val="accent1"/>
+          </a:fillRef>
+          <a:effectRef idx="2">
+            <a:schemeClr val="accent1"/>
+          </a:effectRef>
+          <a:fontRef idx="minor">
+            <a:schemeClr val="lt1"/>
+          </a:fontRef>
+        </p:style>
+        <p:txBody>
+          <a:bodyPr rtlCol="0" anchor="ctr"/>
+          <a:lstStyle/>
+          <a:p>
+            <a:pPr algn="ctr"/>
+          </a:p>
+        </p:txBody>
+      </p:sp>
+      <p:sp>
+        <p:nvSpPr>
+          <p:cNvPr id="9" name="TextBox 8"/>
+          <p:cNvSpPr txBox="1"/>
+          <p:nvPr/>
+        </p:nvSpPr>
+        <p:spPr>
+          <a:xfrm>
+            <a:off x="7584287" y="4114800"/>
+            <a:ext cx="2194560" cy="365760"/>
+          </a:xfrm>
+          <a:prstGeom prst="rect">
+            <a:avLst/>
+          </a:prstGeom>
+          <a:noFill/>
+        </p:spPr>
+        <p:txBody>
+          <a:bodyPr wrap="square">
+            <a:spAutoFit/>
+          </a:bodyPr>
+          <a:lstStyle/>
+          <a:p>
+            <a:pPr algn="ctr">
+              <a:spcBef>
+                <a:spcPts val="0"/>
+              </a:spcBef>
+              <a:spcAft>
+                <a:spcPts val="0"/>
+              </a:spcAft>
+            </a:pPr>
+            <a:r>
+              <a:rPr sz="1600" b="1" i="0">
+                <a:solidFill>
+                  <a:srgbClr val="475569"/>
+                </a:solidFill>
+                <a:latin typeface="Segoe UI"/>
+              </a:rPr>
+              <a:t>Nikola Staykov</a:t>
+            </a:r>
+          </a:p>
+        </p:txBody>
+      </p:sp>
+      <p:sp>
+        <p:nvSpPr>
+          <p:cNvPr id="10" name="TextBox 9"/>
+          <p:cNvSpPr txBox="1"/>
+          <p:nvPr/>
+        </p:nvSpPr>
+        <p:spPr>
+          <a:xfrm>
+            <a:off x="2743200" y="5303520"/>
+            <a:ext cx="6705295" cy="365760"/>
+          </a:xfrm>
+          <a:prstGeom prst="rect">
+            <a:avLst/>
+          </a:prstGeom>
+          <a:noFill/>
+        </p:spPr>
+        <p:txBody>
+          <a:bodyPr wrap="square">
+            <a:spAutoFit/>
+          </a:bodyPr>
+          <a:lstStyle/>
+          <a:p>
+            <a:pPr algn="ctr">
+              <a:spcBef>
+                <a:spcPts val="0"/>
+              </a:spcBef>
+              <a:spcAft>
+                <a:spcPts val="0"/>
+              </a:spcAft>
+            </a:pPr>
+            <a:r>
+              <a:rPr sz="1200" b="1" i="0">
+                <a:solidFill>
+                  <a:srgbClr val="94A3B8"/>
+                </a:solidFill>
+                <a:latin typeface="Segoe UI"/>
+              </a:rPr>
+              <a:t>SWISSHACKS 2026</a:t>
+            </a:r>
+          </a:p>
+        </p:txBody>
+      </p:sp>
     </p:spTree>
   </p:cSld>
   <p:clrMapOvr>
@@ -3458,14 +3502,57 @@
       <p:grpSpPr/>
       <p:sp>
         <p:nvSpPr>
-          <p:cNvPr id="2" name="TextBox 1"/>
+          <p:cNvPr id="2" name="Rectangle 1"/>
+          <p:cNvSpPr/>
+          <p:nvPr/>
+        </p:nvSpPr>
+        <p:spPr>
+          <a:xfrm>
+            <a:off x="0" y="502920"/>
+            <a:ext cx="12191695" cy="12700"/>
+          </a:xfrm>
+          <a:prstGeom prst="rect">
+            <a:avLst/>
+          </a:prstGeom>
+          <a:solidFill>
+            <a:srgbClr val="CBD5E1"/>
+          </a:solidFill>
+          <a:ln>
+            <a:noFill/>
+          </a:ln>
+        </p:spPr>
+        <p:style>
+          <a:lnRef idx="1">
+            <a:schemeClr val="accent1"/>
+          </a:lnRef>
+          <a:fillRef idx="3">
+            <a:schemeClr val="accent1"/>
+          </a:fillRef>
+          <a:effectRef idx="2">
+            <a:schemeClr val="accent1"/>
+          </a:effectRef>
+          <a:fontRef idx="minor">
+            <a:schemeClr val="lt1"/>
+          </a:fontRef>
+        </p:style>
+        <p:txBody>
+          <a:bodyPr rtlCol="0" anchor="ctr"/>
+          <a:lstStyle/>
+          <a:p>
+            <a:pPr algn="ctr"/>
+          </a:p>
+        </p:txBody>
+      </p:sp>
+      <p:sp>
+        <p:nvSpPr>
+          <p:cNvPr id="3" name="TextBox 2"/>
           <p:cNvSpPr txBox="1"/>
           <p:nvPr/>
         </p:nvSpPr>
         <p:spPr>
           <a:xfrm>
-            <a:off x="457200" y="274320"/>
-            <a:ext cx="1097280" cy="365760"/>
+            <a:off x="548640" y="164592"/>
+            <a:ext cx="1371600" cy="320040"/>
           </a:xfrm>
           <a:prstGeom prst="rect">
             <a:avLst/>
@@ -3479,7 +3566,7 @@
           <a:lstStyle/>
           <a:p>
             <a:r>
-              <a:rPr sz="1300" b="1">
+              <a:rPr sz="1600" b="1" i="0">
                 <a:solidFill>
                   <a:srgbClr val="C8102E"/>
                 </a:solidFill>
@@ -3488,7 +3575,7 @@
               <a:t>SIX</a:t>
             </a:r>
             <a:r>
-              <a:rPr sz="1300" b="0">
+              <a:rPr sz="1600" b="0" i="0">
                 <a:solidFill>
                   <a:srgbClr val="475569"/>
                 </a:solidFill>
@@ -3501,14 +3588,14 @@
       </p:sp>
       <p:sp>
         <p:nvSpPr>
-          <p:cNvPr id="3" name="TextBox 2"/>
+          <p:cNvPr id="4" name="TextBox 3"/>
           <p:cNvSpPr txBox="1"/>
           <p:nvPr/>
         </p:nvSpPr>
         <p:spPr>
           <a:xfrm>
-            <a:off x="6858000" y="274320"/>
-            <a:ext cx="2011680" cy="274320"/>
+            <a:off x="3657600" y="182880"/>
+            <a:ext cx="4876495" cy="274320"/>
           </a:xfrm>
           <a:prstGeom prst="rect">
             <a:avLst/>
@@ -3521,22 +3608,22 @@
           </a:bodyPr>
           <a:lstStyle/>
           <a:p>
-            <a:pPr algn="r"/>
-            <a:r>
-              <a:rPr sz="800" b="0">
+            <a:pPr algn="ctr"/>
+            <a:r>
+              <a:rPr sz="1000" b="0" i="0">
                 <a:solidFill>
                   <a:srgbClr val="94A3B8"/>
                 </a:solidFill>
                 <a:latin typeface="Segoe UI"/>
               </a:rPr>
-              <a:t>02 / 06  —  Problem</a:t>
+              <a:t>02 / 06 — PROBLEM</a:t>
             </a:r>
           </a:p>
         </p:txBody>
       </p:sp>
       <p:pic>
         <p:nvPicPr>
-          <p:cNvPr id="4" name="Picture 3" descr="pptx_slide2_Google_Shape_64_p14.png"/>
+          <p:cNvPr id="5" name="Picture 4" descr="pptx_slide2_Google_Shape_64_p14.png"/>
           <p:cNvPicPr>
             <a:picLocks noChangeAspect="1"/>
           </p:cNvPicPr>
@@ -3550,8 +3637,8 @@
         </p:blipFill>
         <p:spPr>
           <a:xfrm>
-            <a:off x="7863840" y="228600"/>
-            <a:ext cx="1005840" cy="276071"/>
+            <a:off x="10515600" y="109728"/>
+            <a:ext cx="1371600" cy="376460"/>
           </a:xfrm>
           <a:prstGeom prst="rect">
             <a:avLst/>
@@ -3560,14 +3647,14 @@
       </p:pic>
       <p:sp>
         <p:nvSpPr>
-          <p:cNvPr id="5" name="TextBox 4"/>
+          <p:cNvPr id="6" name="TextBox 5"/>
           <p:cNvSpPr txBox="1"/>
           <p:nvPr/>
         </p:nvSpPr>
         <p:spPr>
           <a:xfrm>
-            <a:off x="457200" y="822960"/>
-            <a:ext cx="8229600" cy="274320"/>
+            <a:off x="731520" y="822960"/>
+            <a:ext cx="10728655" cy="274320"/>
           </a:xfrm>
           <a:prstGeom prst="rect">
             <a:avLst/>
@@ -3589,7 +3676,7 @@
               </a:spcAft>
             </a:pPr>
             <a:r>
-              <a:rPr sz="1000" b="1">
+              <a:rPr sz="1200" b="1" i="0">
                 <a:solidFill>
                   <a:srgbClr val="C8102E"/>
                 </a:solidFill>
@@ -3602,14 +3689,14 @@
       </p:sp>
       <p:sp>
         <p:nvSpPr>
-          <p:cNvPr id="6" name="TextBox 5"/>
+          <p:cNvPr id="7" name="TextBox 6"/>
           <p:cNvSpPr txBox="1"/>
           <p:nvPr/>
         </p:nvSpPr>
         <p:spPr>
           <a:xfrm>
-            <a:off x="731520" y="1143000"/>
-            <a:ext cx="7680960" cy="822960"/>
+            <a:off x="1097280" y="1188720"/>
+            <a:ext cx="9997135" cy="1097280"/>
           </a:xfrm>
           <a:prstGeom prst="rect">
             <a:avLst/>
@@ -3624,7 +3711,7 @@
           <a:p>
             <a:pPr algn="ctr"/>
             <a:r>
-              <a:rPr sz="2800" b="1">
+              <a:rPr sz="3600" b="1" i="0">
                 <a:solidFill>
                   <a:srgbClr val="0F172A"/>
                 </a:solidFill>
@@ -3633,7 +3720,7 @@
               <a:t>Private banking is personal — </a:t>
             </a:r>
             <a:r>
-              <a:rPr sz="2800" b="1">
+              <a:rPr sz="3600" b="1" i="1">
                 <a:solidFill>
                   <a:srgbClr val="C8102E"/>
                 </a:solidFill>
@@ -3646,14 +3733,14 @@
       </p:sp>
       <p:sp>
         <p:nvSpPr>
-          <p:cNvPr id="7" name="TextBox 6"/>
+          <p:cNvPr id="8" name="TextBox 7"/>
           <p:cNvSpPr txBox="1"/>
           <p:nvPr/>
         </p:nvSpPr>
         <p:spPr>
           <a:xfrm>
-            <a:off x="1371600" y="1920240"/>
-            <a:ext cx="6400800" cy="457200"/>
+            <a:off x="1828800" y="2377440"/>
+            <a:ext cx="8534095" cy="640080"/>
           </a:xfrm>
           <a:prstGeom prst="rect">
             <a:avLst/>
@@ -3675,31 +3762,32 @@
               </a:spcAft>
             </a:pPr>
             <a:r>
-              <a:rPr sz="1400" b="0">
+              <a:rPr sz="1600" b="0" i="0">
                 <a:solidFill>
                   <a:srgbClr val="475569"/>
                 </a:solidFill>
                 <a:latin typeface="Segoe UI"/>
               </a:rPr>
-              <a:t>Ultra-high-net-worth clients get a dedicated RM who knows them deeply. Everyone else gets a template.</a:t>
-            </a:r>
-          </a:p>
-        </p:txBody>
-      </p:sp>
-      <p:sp>
-        <p:nvSpPr>
-          <p:cNvPr id="8" name="Rounded Rectangle 7"/>
+              <a:t>Ultra-high-net-worth clients get a dedicated RM who knows them deeply.
+Everyone else gets a template.</a:t>
+            </a:r>
+          </a:p>
+        </p:txBody>
+      </p:sp>
+      <p:sp>
+        <p:nvSpPr>
+          <p:cNvPr id="9" name="Rounded Rectangle 8"/>
           <p:cNvSpPr/>
           <p:nvPr/>
         </p:nvSpPr>
         <p:spPr>
           <a:xfrm>
-            <a:off x="594360" y="2560320"/>
-            <a:ext cx="2560320" cy="1920240"/>
+            <a:off x="792327" y="3657600"/>
+            <a:ext cx="3291840" cy="914400"/>
           </a:xfrm>
           <a:prstGeom prst="roundRect">
             <a:avLst>
-              <a:gd name="adj" fmla="val 2000"/>
+              <a:gd name="adj" fmla="val 1500"/>
             </a:avLst>
           </a:prstGeom>
           <a:solidFill>
@@ -3735,14 +3823,14 @@
       </p:sp>
       <p:sp>
         <p:nvSpPr>
-          <p:cNvPr id="9" name="TextBox 8"/>
+          <p:cNvPr id="10" name="TextBox 9"/>
           <p:cNvSpPr txBox="1"/>
           <p:nvPr/>
         </p:nvSpPr>
         <p:spPr>
           <a:xfrm>
-            <a:off x="777240" y="2697480"/>
-            <a:ext cx="457200" cy="365760"/>
+            <a:off x="1112367" y="3794760"/>
+            <a:ext cx="548640" cy="640080"/>
           </a:xfrm>
           <a:prstGeom prst="rect">
             <a:avLst/>
@@ -3755,7 +3843,7 @@
           </a:bodyPr>
           <a:lstStyle/>
           <a:p>
-            <a:pPr algn="l">
+            <a:pPr algn="ctr">
               <a:spcBef>
                 <a:spcPts val="0"/>
               </a:spcBef>
@@ -3764,7 +3852,7 @@
               </a:spcAft>
             </a:pPr>
             <a:r>
-              <a:rPr sz="2000" b="0">
+              <a:rPr sz="2800" b="0" i="0">
                 <a:solidFill>
                   <a:srgbClr val="0F172A"/>
                 </a:solidFill>
@@ -3777,14 +3865,14 @@
       </p:sp>
       <p:sp>
         <p:nvSpPr>
-          <p:cNvPr id="10" name="TextBox 9"/>
+          <p:cNvPr id="11" name="TextBox 10"/>
           <p:cNvSpPr txBox="1"/>
           <p:nvPr/>
         </p:nvSpPr>
         <p:spPr>
           <a:xfrm>
-            <a:off x="777240" y="3063240"/>
-            <a:ext cx="2194560" cy="320040"/>
+            <a:off x="1706727" y="3840480"/>
+            <a:ext cx="2103120" cy="548640"/>
           </a:xfrm>
           <a:prstGeom prst="rect">
             <a:avLst/>
@@ -3797,64 +3885,15 @@
           </a:bodyPr>
           <a:lstStyle/>
           <a:p>
-            <a:pPr algn="l">
-              <a:spcBef>
-                <a:spcPts val="0"/>
-              </a:spcBef>
-              <a:spcAft>
-                <a:spcPts val="0"/>
-              </a:spcAft>
-            </a:pPr>
-            <a:r>
-              <a:rPr sz="1300" b="1">
+            <a:pPr algn="l"/>
+            <a:r>
+              <a:rPr sz="1600" b="1" i="0">
                 <a:solidFill>
                   <a:srgbClr val="0F172A"/>
                 </a:solidFill>
                 <a:latin typeface="Segoe UI"/>
               </a:rPr>
               <a:t>The UHNW privilege gap</a:t>
-            </a:r>
-          </a:p>
-        </p:txBody>
-      </p:sp>
-      <p:sp>
-        <p:nvSpPr>
-          <p:cNvPr id="11" name="TextBox 10"/>
-          <p:cNvSpPr txBox="1"/>
-          <p:nvPr/>
-        </p:nvSpPr>
-        <p:spPr>
-          <a:xfrm>
-            <a:off x="777240" y="3383280"/>
-            <a:ext cx="2194560" cy="1005840"/>
-          </a:xfrm>
-          <a:prstGeom prst="rect">
-            <a:avLst/>
-          </a:prstGeom>
-          <a:noFill/>
-        </p:spPr>
-        <p:txBody>
-          <a:bodyPr wrap="square">
-            <a:spAutoFit/>
-          </a:bodyPr>
-          <a:lstStyle/>
-          <a:p>
-            <a:pPr algn="l">
-              <a:spcBef>
-                <a:spcPts val="0"/>
-              </a:spcBef>
-              <a:spcAft>
-                <a:spcPts val="0"/>
-              </a:spcAft>
-            </a:pPr>
-            <a:r>
-              <a:rPr sz="1100" b="0">
-                <a:solidFill>
-                  <a:srgbClr val="475569"/>
-                </a:solidFill>
-                <a:latin typeface="Segoe UI"/>
-              </a:rPr>
-              <a:t>Deep personalisation is reserved for the top 1%. Everyone else gets a template.</a:t>
             </a:r>
           </a:p>
         </p:txBody>
@@ -3867,12 +3906,12 @@
         </p:nvSpPr>
         <p:spPr>
           <a:xfrm>
-            <a:off x="3383280" y="2560320"/>
-            <a:ext cx="2560320" cy="1920240"/>
+            <a:off x="4449927" y="3657600"/>
+            <a:ext cx="3291840" cy="914400"/>
           </a:xfrm>
           <a:prstGeom prst="roundRect">
             <a:avLst>
-              <a:gd name="adj" fmla="val 2000"/>
+              <a:gd name="adj" fmla="val 1500"/>
             </a:avLst>
           </a:prstGeom>
           <a:solidFill>
@@ -3914,8 +3953,8 @@
         </p:nvSpPr>
         <p:spPr>
           <a:xfrm>
-            <a:off x="3566160" y="2697480"/>
-            <a:ext cx="457200" cy="365760"/>
+            <a:off x="4769967" y="3794760"/>
+            <a:ext cx="548640" cy="640080"/>
           </a:xfrm>
           <a:prstGeom prst="rect">
             <a:avLst/>
@@ -3928,7 +3967,7 @@
           </a:bodyPr>
           <a:lstStyle/>
           <a:p>
-            <a:pPr algn="l">
+            <a:pPr algn="ctr">
               <a:spcBef>
                 <a:spcPts val="0"/>
               </a:spcBef>
@@ -3937,7 +3976,7 @@
               </a:spcAft>
             </a:pPr>
             <a:r>
-              <a:rPr sz="2000" b="0">
+              <a:rPr sz="2800" b="0" i="0">
                 <a:solidFill>
                   <a:srgbClr val="0F172A"/>
                 </a:solidFill>
@@ -3956,8 +3995,8 @@
         </p:nvSpPr>
         <p:spPr>
           <a:xfrm>
-            <a:off x="3566160" y="3063240"/>
-            <a:ext cx="2194560" cy="320040"/>
+            <a:off x="5364327" y="3840480"/>
+            <a:ext cx="2103120" cy="548640"/>
           </a:xfrm>
           <a:prstGeom prst="rect">
             <a:avLst/>
@@ -3970,16 +4009,9 @@
           </a:bodyPr>
           <a:lstStyle/>
           <a:p>
-            <a:pPr algn="l">
-              <a:spcBef>
-                <a:spcPts val="0"/>
-              </a:spcBef>
-              <a:spcAft>
-                <a:spcPts val="0"/>
-              </a:spcAft>
-            </a:pPr>
-            <a:r>
-              <a:rPr sz="1300" b="1">
+            <a:pPr algn="l"/>
+            <a:r>
+              <a:rPr sz="1600" b="1" i="0">
                 <a:solidFill>
                   <a:srgbClr val="0F172A"/>
                 </a:solidFill>
@@ -3992,60 +4024,18 @@
       </p:sp>
       <p:sp>
         <p:nvSpPr>
-          <p:cNvPr id="15" name="TextBox 14"/>
-          <p:cNvSpPr txBox="1"/>
-          <p:nvPr/>
-        </p:nvSpPr>
-        <p:spPr>
-          <a:xfrm>
-            <a:off x="3566160" y="3383280"/>
-            <a:ext cx="2194560" cy="1005840"/>
-          </a:xfrm>
-          <a:prstGeom prst="rect">
-            <a:avLst/>
-          </a:prstGeom>
-          <a:noFill/>
-        </p:spPr>
-        <p:txBody>
-          <a:bodyPr wrap="square">
-            <a:spAutoFit/>
-          </a:bodyPr>
-          <a:lstStyle/>
-          <a:p>
-            <a:pPr algn="l">
-              <a:spcBef>
-                <a:spcPts val="0"/>
-              </a:spcBef>
-              <a:spcAft>
-                <a:spcPts val="0"/>
-              </a:spcAft>
-            </a:pPr>
-            <a:r>
-              <a:rPr sz="1100" b="0">
-                <a:solidFill>
-                  <a:srgbClr val="475569"/>
-                </a:solidFill>
-                <a:latin typeface="Segoe UI"/>
-              </a:rPr>
-              <a:t>50–150 clients per RM. Cross-referencing values, portfolio and news for each is humanly impossible.</a:t>
-            </a:r>
-          </a:p>
-        </p:txBody>
-      </p:sp>
-      <p:sp>
-        <p:nvSpPr>
-          <p:cNvPr id="16" name="Rounded Rectangle 15"/>
+          <p:cNvPr id="15" name="Rounded Rectangle 14"/>
           <p:cNvSpPr/>
           <p:nvPr/>
         </p:nvSpPr>
         <p:spPr>
           <a:xfrm>
-            <a:off x="6172200" y="2560320"/>
-            <a:ext cx="2560320" cy="1920240"/>
+            <a:off x="8107527" y="3657600"/>
+            <a:ext cx="3291840" cy="914400"/>
           </a:xfrm>
           <a:prstGeom prst="roundRect">
             <a:avLst>
-              <a:gd name="adj" fmla="val 2000"/>
+              <a:gd name="adj" fmla="val 1500"/>
             </a:avLst>
           </a:prstGeom>
           <a:solidFill>
@@ -4081,14 +4071,14 @@
       </p:sp>
       <p:sp>
         <p:nvSpPr>
-          <p:cNvPr id="17" name="TextBox 16"/>
+          <p:cNvPr id="16" name="TextBox 15"/>
           <p:cNvSpPr txBox="1"/>
           <p:nvPr/>
         </p:nvSpPr>
         <p:spPr>
           <a:xfrm>
-            <a:off x="6355080" y="2697480"/>
-            <a:ext cx="457200" cy="365760"/>
+            <a:off x="8427567" y="3794760"/>
+            <a:ext cx="548640" cy="640080"/>
           </a:xfrm>
           <a:prstGeom prst="rect">
             <a:avLst/>
@@ -4101,7 +4091,7 @@
           </a:bodyPr>
           <a:lstStyle/>
           <a:p>
-            <a:pPr algn="l">
+            <a:pPr algn="ctr">
               <a:spcBef>
                 <a:spcPts val="0"/>
               </a:spcBef>
@@ -4110,7 +4100,7 @@
               </a:spcAft>
             </a:pPr>
             <a:r>
-              <a:rPr sz="2000" b="0">
+              <a:rPr sz="2800" b="0" i="0">
                 <a:solidFill>
                   <a:srgbClr val="0F172A"/>
                 </a:solidFill>
@@ -4123,14 +4113,14 @@
       </p:sp>
       <p:sp>
         <p:nvSpPr>
-          <p:cNvPr id="18" name="TextBox 17"/>
+          <p:cNvPr id="17" name="TextBox 16"/>
           <p:cNvSpPr txBox="1"/>
           <p:nvPr/>
         </p:nvSpPr>
         <p:spPr>
           <a:xfrm>
-            <a:off x="6355080" y="3063240"/>
-            <a:ext cx="2194560" cy="320040"/>
+            <a:off x="9021927" y="3840480"/>
+            <a:ext cx="2103120" cy="548640"/>
           </a:xfrm>
           <a:prstGeom prst="rect">
             <a:avLst/>
@@ -4143,64 +4133,15 @@
           </a:bodyPr>
           <a:lstStyle/>
           <a:p>
-            <a:pPr algn="l">
-              <a:spcBef>
-                <a:spcPts val="0"/>
-              </a:spcBef>
-              <a:spcAft>
-                <a:spcPts val="0"/>
-              </a:spcAft>
-            </a:pPr>
-            <a:r>
-              <a:rPr sz="1300" b="1">
+            <a:pPr algn="l"/>
+            <a:r>
+              <a:rPr sz="1600" b="1" i="0">
                 <a:solidFill>
                   <a:srgbClr val="0F172A"/>
                 </a:solidFill>
                 <a:latin typeface="Segoe UI"/>
               </a:rPr>
               <a:t>Generic service loses clients</a:t>
-            </a:r>
-          </a:p>
-        </p:txBody>
-      </p:sp>
-      <p:sp>
-        <p:nvSpPr>
-          <p:cNvPr id="19" name="TextBox 18"/>
-          <p:cNvSpPr txBox="1"/>
-          <p:nvPr/>
-        </p:nvSpPr>
-        <p:spPr>
-          <a:xfrm>
-            <a:off x="6355080" y="3383280"/>
-            <a:ext cx="2194560" cy="1005840"/>
-          </a:xfrm>
-          <a:prstGeom prst="rect">
-            <a:avLst/>
-          </a:prstGeom>
-          <a:noFill/>
-        </p:spPr>
-        <p:txBody>
-          <a:bodyPr wrap="square">
-            <a:spAutoFit/>
-          </a:bodyPr>
-          <a:lstStyle/>
-          <a:p>
-            <a:pPr algn="l">
-              <a:spcBef>
-                <a:spcPts val="0"/>
-              </a:spcBef>
-              <a:spcAft>
-                <a:spcPts val="0"/>
-              </a:spcAft>
-            </a:pPr>
-            <a:r>
-              <a:rPr sz="1100" b="0">
-                <a:solidFill>
-                  <a:srgbClr val="475569"/>
-                </a:solidFill>
-                <a:latin typeface="Segoe UI"/>
-              </a:rPr>
-              <a:t>Clients who feel like a number switch banks. Poor personalisation costs AUM.</a:t>
             </a:r>
           </a:p>
         </p:txBody>
@@ -4233,14 +4174,57 @@
       <p:grpSpPr/>
       <p:sp>
         <p:nvSpPr>
-          <p:cNvPr id="2" name="TextBox 1"/>
+          <p:cNvPr id="2" name="Rectangle 1"/>
+          <p:cNvSpPr/>
+          <p:nvPr/>
+        </p:nvSpPr>
+        <p:spPr>
+          <a:xfrm>
+            <a:off x="0" y="502920"/>
+            <a:ext cx="12191695" cy="12700"/>
+          </a:xfrm>
+          <a:prstGeom prst="rect">
+            <a:avLst/>
+          </a:prstGeom>
+          <a:solidFill>
+            <a:srgbClr val="CBD5E1"/>
+          </a:solidFill>
+          <a:ln>
+            <a:noFill/>
+          </a:ln>
+        </p:spPr>
+        <p:style>
+          <a:lnRef idx="1">
+            <a:schemeClr val="accent1"/>
+          </a:lnRef>
+          <a:fillRef idx="3">
+            <a:schemeClr val="accent1"/>
+          </a:fillRef>
+          <a:effectRef idx="2">
+            <a:schemeClr val="accent1"/>
+          </a:effectRef>
+          <a:fontRef idx="minor">
+            <a:schemeClr val="lt1"/>
+          </a:fontRef>
+        </p:style>
+        <p:txBody>
+          <a:bodyPr rtlCol="0" anchor="ctr"/>
+          <a:lstStyle/>
+          <a:p>
+            <a:pPr algn="ctr"/>
+          </a:p>
+        </p:txBody>
+      </p:sp>
+      <p:sp>
+        <p:nvSpPr>
+          <p:cNvPr id="3" name="TextBox 2"/>
           <p:cNvSpPr txBox="1"/>
           <p:nvPr/>
         </p:nvSpPr>
         <p:spPr>
           <a:xfrm>
-            <a:off x="457200" y="274320"/>
-            <a:ext cx="1097280" cy="365760"/>
+            <a:off x="548640" y="164592"/>
+            <a:ext cx="1371600" cy="320040"/>
           </a:xfrm>
           <a:prstGeom prst="rect">
             <a:avLst/>
@@ -4254,7 +4238,7 @@
           <a:lstStyle/>
           <a:p>
             <a:r>
-              <a:rPr sz="1300" b="1">
+              <a:rPr sz="1600" b="1" i="0">
                 <a:solidFill>
                   <a:srgbClr val="C8102E"/>
                 </a:solidFill>
@@ -4263,7 +4247,7 @@
               <a:t>SIX</a:t>
             </a:r>
             <a:r>
-              <a:rPr sz="1300" b="0">
+              <a:rPr sz="1600" b="0" i="0">
                 <a:solidFill>
                   <a:srgbClr val="475569"/>
                 </a:solidFill>
@@ -4276,14 +4260,14 @@
       </p:sp>
       <p:sp>
         <p:nvSpPr>
-          <p:cNvPr id="3" name="TextBox 2"/>
+          <p:cNvPr id="4" name="TextBox 3"/>
           <p:cNvSpPr txBox="1"/>
           <p:nvPr/>
         </p:nvSpPr>
         <p:spPr>
           <a:xfrm>
-            <a:off x="6858000" y="274320"/>
-            <a:ext cx="2011680" cy="274320"/>
+            <a:off x="3657600" y="182880"/>
+            <a:ext cx="4876495" cy="274320"/>
           </a:xfrm>
           <a:prstGeom prst="rect">
             <a:avLst/>
@@ -4296,22 +4280,22 @@
           </a:bodyPr>
           <a:lstStyle/>
           <a:p>
-            <a:pPr algn="r"/>
-            <a:r>
-              <a:rPr sz="800" b="0">
+            <a:pPr algn="ctr"/>
+            <a:r>
+              <a:rPr sz="1000" b="0" i="0">
                 <a:solidFill>
                   <a:srgbClr val="94A3B8"/>
                 </a:solidFill>
                 <a:latin typeface="Segoe UI"/>
               </a:rPr>
-              <a:t>03 / 06  —  Solution</a:t>
+              <a:t>03 / 06 — SOLUTION</a:t>
             </a:r>
           </a:p>
         </p:txBody>
       </p:sp>
       <p:pic>
         <p:nvPicPr>
-          <p:cNvPr id="4" name="Picture 3" descr="pptx_slide2_Google_Shape_64_p14.png"/>
+          <p:cNvPr id="5" name="Picture 4" descr="pptx_slide2_Google_Shape_64_p14.png"/>
           <p:cNvPicPr>
             <a:picLocks noChangeAspect="1"/>
           </p:cNvPicPr>
@@ -4325,8 +4309,8 @@
         </p:blipFill>
         <p:spPr>
           <a:xfrm>
-            <a:off x="7863840" y="228600"/>
-            <a:ext cx="1005840" cy="276071"/>
+            <a:off x="10515600" y="109728"/>
+            <a:ext cx="1371600" cy="376460"/>
           </a:xfrm>
           <a:prstGeom prst="rect">
             <a:avLst/>
@@ -4335,14 +4319,14 @@
       </p:pic>
       <p:sp>
         <p:nvSpPr>
-          <p:cNvPr id="5" name="TextBox 4"/>
+          <p:cNvPr id="6" name="TextBox 5"/>
           <p:cNvSpPr txBox="1"/>
           <p:nvPr/>
         </p:nvSpPr>
         <p:spPr>
           <a:xfrm>
-            <a:off x="457200" y="822960"/>
-            <a:ext cx="8229600" cy="274320"/>
+            <a:off x="731520" y="777240"/>
+            <a:ext cx="10728655" cy="274320"/>
           </a:xfrm>
           <a:prstGeom prst="rect">
             <a:avLst/>
@@ -4364,7 +4348,7 @@
               </a:spcAft>
             </a:pPr>
             <a:r>
-              <a:rPr sz="1000" b="1">
+              <a:rPr sz="1200" b="1" i="0">
                 <a:solidFill>
                   <a:srgbClr val="2E6FD6"/>
                 </a:solidFill>
@@ -4377,14 +4361,14 @@
       </p:sp>
       <p:sp>
         <p:nvSpPr>
-          <p:cNvPr id="6" name="TextBox 5"/>
+          <p:cNvPr id="7" name="TextBox 6"/>
           <p:cNvSpPr txBox="1"/>
           <p:nvPr/>
         </p:nvSpPr>
         <p:spPr>
           <a:xfrm>
-            <a:off x="731520" y="1097280"/>
-            <a:ext cx="7680960" cy="731520"/>
+            <a:off x="1097280" y="1097280"/>
+            <a:ext cx="9997135" cy="731520"/>
           </a:xfrm>
           <a:prstGeom prst="rect">
             <a:avLst/>
@@ -4399,7 +4383,7 @@
           <a:p>
             <a:pPr algn="ctr"/>
             <a:r>
-              <a:rPr sz="2800" b="1">
+              <a:rPr sz="3600" b="1" i="0">
                 <a:solidFill>
                   <a:srgbClr val="0F172A"/>
                 </a:solidFill>
@@ -4408,7 +4392,7 @@
               <a:t>Give </a:t>
             </a:r>
             <a:r>
-              <a:rPr sz="2800" b="1">
+              <a:rPr sz="3600" b="1" i="1">
                 <a:solidFill>
                   <a:srgbClr val="2E6FD6"/>
                 </a:solidFill>
@@ -4417,7 +4401,7 @@
               <a:t>every client</a:t>
             </a:r>
             <a:r>
-              <a:rPr sz="2800" b="1">
+              <a:rPr sz="3600" b="1" i="0">
                 <a:solidFill>
                   <a:srgbClr val="0F172A"/>
                 </a:solidFill>
@@ -4430,22 +4414,22 @@
       </p:sp>
       <p:sp>
         <p:nvSpPr>
-          <p:cNvPr id="7" name="Rounded Rectangle 6"/>
+          <p:cNvPr id="8" name="Rounded Rectangle 7"/>
           <p:cNvSpPr/>
           <p:nvPr/>
         </p:nvSpPr>
         <p:spPr>
           <a:xfrm>
-            <a:off x="731520" y="1874519"/>
-            <a:ext cx="1554480" cy="292608"/>
+            <a:off x="1386687" y="2011680"/>
+            <a:ext cx="2011680" cy="365760"/>
           </a:xfrm>
           <a:prstGeom prst="roundRect">
             <a:avLst>
-              <a:gd name="adj" fmla="val 15000"/>
+              <a:gd name="adj" fmla="val 12000"/>
             </a:avLst>
           </a:prstGeom>
           <a:solidFill>
-            <a:srgbClr val="FFFFFF"/>
+            <a:srgbClr val="EBF1FB"/>
           </a:solidFill>
           <a:ln w="9525">
             <a:solidFill>
@@ -4468,12 +4452,12 @@
           </a:fontRef>
         </p:style>
         <p:txBody>
-          <a:bodyPr rtlCol="0" anchor="ctr" tIns="25400" bIns="25400" lIns="76200" rIns="76200" wrap="none"/>
+          <a:bodyPr rtlCol="0" anchor="ctr" tIns="25400" bIns="25400" lIns="101600" rIns="101600" wrap="none"/>
           <a:lstStyle/>
           <a:p>
             <a:pPr algn="ctr"/>
             <a:r>
-              <a:rPr sz="1000" b="0">
+              <a:rPr sz="1300" b="0" i="0">
                 <a:solidFill>
                   <a:srgbClr val="2E6FD6"/>
                 </a:solidFill>
@@ -4486,14 +4470,14 @@
       </p:sp>
       <p:sp>
         <p:nvSpPr>
-          <p:cNvPr id="8" name="TextBox 7"/>
+          <p:cNvPr id="9" name="TextBox 8"/>
           <p:cNvSpPr txBox="1"/>
           <p:nvPr/>
         </p:nvSpPr>
         <p:spPr>
           <a:xfrm>
-            <a:off x="2286000" y="1874519"/>
-            <a:ext cx="320040" cy="292608"/>
+            <a:off x="3398367" y="2011680"/>
+            <a:ext cx="457200" cy="365760"/>
           </a:xfrm>
           <a:prstGeom prst="rect">
             <a:avLst/>
@@ -4515,7 +4499,7 @@
               </a:spcAft>
             </a:pPr>
             <a:r>
-              <a:rPr sz="1200" b="0">
+              <a:rPr sz="1600" b="0" i="0">
                 <a:solidFill>
                   <a:srgbClr val="94A3B8"/>
                 </a:solidFill>
@@ -4528,22 +4512,22 @@
       </p:sp>
       <p:sp>
         <p:nvSpPr>
-          <p:cNvPr id="9" name="Rounded Rectangle 8"/>
+          <p:cNvPr id="10" name="Rounded Rectangle 9"/>
           <p:cNvSpPr/>
           <p:nvPr/>
         </p:nvSpPr>
         <p:spPr>
           <a:xfrm>
-            <a:off x="2606040" y="1874519"/>
-            <a:ext cx="1554480" cy="292608"/>
+            <a:off x="3855567" y="2011680"/>
+            <a:ext cx="2011680" cy="365760"/>
           </a:xfrm>
           <a:prstGeom prst="roundRect">
             <a:avLst>
-              <a:gd name="adj" fmla="val 15000"/>
+              <a:gd name="adj" fmla="val 12000"/>
             </a:avLst>
           </a:prstGeom>
           <a:solidFill>
-            <a:srgbClr val="FFFFFF"/>
+            <a:srgbClr val="FEF7F8"/>
           </a:solidFill>
           <a:ln w="9525">
             <a:solidFill>
@@ -4566,12 +4550,12 @@
           </a:fontRef>
         </p:style>
         <p:txBody>
-          <a:bodyPr rtlCol="0" anchor="ctr" tIns="25400" bIns="25400" lIns="76200" rIns="76200" wrap="none"/>
+          <a:bodyPr rtlCol="0" anchor="ctr" tIns="25400" bIns="25400" lIns="101600" rIns="101600" wrap="none"/>
           <a:lstStyle/>
           <a:p>
             <a:pPr algn="ctr"/>
             <a:r>
-              <a:rPr sz="1000" b="0">
+              <a:rPr sz="1300" b="0" i="0">
                 <a:solidFill>
                   <a:srgbClr val="C8102E"/>
                 </a:solidFill>
@@ -4584,14 +4568,14 @@
       </p:sp>
       <p:sp>
         <p:nvSpPr>
-          <p:cNvPr id="10" name="TextBox 9"/>
+          <p:cNvPr id="11" name="TextBox 10"/>
           <p:cNvSpPr txBox="1"/>
           <p:nvPr/>
         </p:nvSpPr>
         <p:spPr>
           <a:xfrm>
-            <a:off x="4160520" y="1874519"/>
-            <a:ext cx="320040" cy="292608"/>
+            <a:off x="5867247" y="2011680"/>
+            <a:ext cx="457200" cy="365760"/>
           </a:xfrm>
           <a:prstGeom prst="rect">
             <a:avLst/>
@@ -4613,7 +4597,7 @@
               </a:spcAft>
             </a:pPr>
             <a:r>
-              <a:rPr sz="1200" b="0">
+              <a:rPr sz="1600" b="0" i="0">
                 <a:solidFill>
                   <a:srgbClr val="94A3B8"/>
                 </a:solidFill>
@@ -4626,22 +4610,22 @@
       </p:sp>
       <p:sp>
         <p:nvSpPr>
-          <p:cNvPr id="11" name="Rounded Rectangle 10"/>
+          <p:cNvPr id="12" name="Rounded Rectangle 11"/>
           <p:cNvSpPr/>
           <p:nvPr/>
         </p:nvSpPr>
         <p:spPr>
           <a:xfrm>
-            <a:off x="4480560" y="1874519"/>
-            <a:ext cx="1554480" cy="292608"/>
+            <a:off x="6324447" y="2011680"/>
+            <a:ext cx="2011680" cy="365760"/>
           </a:xfrm>
           <a:prstGeom prst="roundRect">
             <a:avLst>
-              <a:gd name="adj" fmla="val 15000"/>
+              <a:gd name="adj" fmla="val 12000"/>
             </a:avLst>
           </a:prstGeom>
           <a:solidFill>
-            <a:srgbClr val="FFFFFF"/>
+            <a:srgbClr val="F1EBFD"/>
           </a:solidFill>
           <a:ln w="9525">
             <a:solidFill>
@@ -4664,12 +4648,12 @@
           </a:fontRef>
         </p:style>
         <p:txBody>
-          <a:bodyPr rtlCol="0" anchor="ctr" tIns="25400" bIns="25400" lIns="76200" rIns="76200" wrap="none"/>
+          <a:bodyPr rtlCol="0" anchor="ctr" tIns="25400" bIns="25400" lIns="101600" rIns="101600" wrap="none"/>
           <a:lstStyle/>
           <a:p>
             <a:pPr algn="ctr"/>
             <a:r>
-              <a:rPr sz="1000" b="0">
+              <a:rPr sz="1300" b="0" i="0">
                 <a:solidFill>
                   <a:srgbClr val="7C3AED"/>
                 </a:solidFill>
@@ -4682,14 +4666,14 @@
       </p:sp>
       <p:sp>
         <p:nvSpPr>
-          <p:cNvPr id="12" name="TextBox 11"/>
+          <p:cNvPr id="13" name="TextBox 12"/>
           <p:cNvSpPr txBox="1"/>
           <p:nvPr/>
         </p:nvSpPr>
         <p:spPr>
           <a:xfrm>
-            <a:off x="6035040" y="1874519"/>
-            <a:ext cx="320040" cy="292608"/>
+            <a:off x="8336127" y="2011680"/>
+            <a:ext cx="457200" cy="365760"/>
           </a:xfrm>
           <a:prstGeom prst="rect">
             <a:avLst/>
@@ -4711,7 +4695,7 @@
               </a:spcAft>
             </a:pPr>
             <a:r>
-              <a:rPr sz="1200" b="0">
+              <a:rPr sz="1600" b="0" i="0">
                 <a:solidFill>
                   <a:srgbClr val="94A3B8"/>
                 </a:solidFill>
@@ -4724,22 +4708,22 @@
       </p:sp>
       <p:sp>
         <p:nvSpPr>
-          <p:cNvPr id="13" name="Rounded Rectangle 12"/>
+          <p:cNvPr id="14" name="Rounded Rectangle 13"/>
           <p:cNvSpPr/>
           <p:nvPr/>
         </p:nvSpPr>
         <p:spPr>
           <a:xfrm>
-            <a:off x="6355080" y="1874519"/>
-            <a:ext cx="1554480" cy="292608"/>
+            <a:off x="8793327" y="2011680"/>
+            <a:ext cx="2011680" cy="365760"/>
           </a:xfrm>
           <a:prstGeom prst="roundRect">
             <a:avLst>
-              <a:gd name="adj" fmla="val 15000"/>
+              <a:gd name="adj" fmla="val 12000"/>
             </a:avLst>
           </a:prstGeom>
           <a:solidFill>
-            <a:srgbClr val="FFFFFF"/>
+            <a:srgbClr val="E8F8EE"/>
           </a:solidFill>
           <a:ln w="9525">
             <a:solidFill>
@@ -4762,12 +4746,12 @@
           </a:fontRef>
         </p:style>
         <p:txBody>
-          <a:bodyPr rtlCol="0" anchor="ctr" tIns="25400" bIns="25400" lIns="76200" rIns="76200" wrap="none"/>
+          <a:bodyPr rtlCol="0" anchor="ctr" tIns="25400" bIns="25400" lIns="101600" rIns="101600" wrap="none"/>
           <a:lstStyle/>
           <a:p>
             <a:pPr algn="ctr"/>
             <a:r>
-              <a:rPr sz="1000" b="0">
+              <a:rPr sz="1300" b="0" i="0">
                 <a:solidFill>
                   <a:srgbClr val="16A34A"/>
                 </a:solidFill>
@@ -4780,18 +4764,18 @@
       </p:sp>
       <p:sp>
         <p:nvSpPr>
-          <p:cNvPr id="14" name="Rounded Rectangle 13"/>
+          <p:cNvPr id="15" name="Rounded Rectangle 14"/>
           <p:cNvSpPr/>
           <p:nvPr/>
         </p:nvSpPr>
         <p:spPr>
           <a:xfrm>
-            <a:off x="502920" y="2423160"/>
-            <a:ext cx="3931920" cy="1097280"/>
+            <a:off x="609447" y="2697480"/>
+            <a:ext cx="5303520" cy="1143000"/>
           </a:xfrm>
           <a:prstGeom prst="roundRect">
             <a:avLst>
-              <a:gd name="adj" fmla="val 2000"/>
+              <a:gd name="adj" fmla="val 1500"/>
             </a:avLst>
           </a:prstGeom>
           <a:solidFill>
@@ -4827,26 +4811,26 @@
       </p:sp>
       <p:sp>
         <p:nvSpPr>
-          <p:cNvPr id="15" name="Rounded Rectangle 14"/>
+          <p:cNvPr id="16" name="Rounded Rectangle 15"/>
           <p:cNvSpPr/>
           <p:nvPr/>
         </p:nvSpPr>
         <p:spPr>
           <a:xfrm>
-            <a:off x="640080" y="2560320"/>
-            <a:ext cx="365760" cy="365760"/>
+            <a:off x="792327" y="2880360"/>
+            <a:ext cx="502920" cy="502920"/>
           </a:xfrm>
           <a:prstGeom prst="roundRect">
             <a:avLst>
-              <a:gd name="adj" fmla="val 2000"/>
+              <a:gd name="adj" fmla="val 1500"/>
             </a:avLst>
           </a:prstGeom>
           <a:solidFill>
-            <a:srgbClr val="FDEEF0"/>
+            <a:srgbClr val="FEF7F8"/>
           </a:solidFill>
           <a:ln>
             <a:solidFill>
-              <a:srgbClr val="FDEEF0"/>
+              <a:srgbClr val="FEF7F8"/>
             </a:solidFill>
           </a:ln>
         </p:spPr>
@@ -4865,12 +4849,12 @@
           </a:fontRef>
         </p:style>
         <p:txBody>
-          <a:bodyPr rtlCol="0" anchor="ctr" tIns="25400" lIns="25400"/>
+          <a:bodyPr rtlCol="0" anchor="ctr" tIns="25400"/>
           <a:lstStyle/>
           <a:p>
             <a:pPr algn="ctr"/>
             <a:r>
-              <a:rPr sz="1400" b="0">
+              <a:rPr sz="1800" b="0" i="0">
                 <a:solidFill>
                   <a:srgbClr val="0F172A"/>
                 </a:solidFill>
@@ -4883,14 +4867,14 @@
       </p:sp>
       <p:sp>
         <p:nvSpPr>
-          <p:cNvPr id="16" name="TextBox 15"/>
+          <p:cNvPr id="17" name="TextBox 16"/>
           <p:cNvSpPr txBox="1"/>
           <p:nvPr/>
         </p:nvSpPr>
         <p:spPr>
           <a:xfrm>
-            <a:off x="1097280" y="2532888"/>
-            <a:ext cx="3200400" cy="274320"/>
+            <a:off x="1432407" y="2834640"/>
+            <a:ext cx="4297680" cy="320040"/>
           </a:xfrm>
           <a:prstGeom prst="rect">
             <a:avLst/>
@@ -4912,7 +4896,7 @@
               </a:spcAft>
             </a:pPr>
             <a:r>
-              <a:rPr sz="1200" b="1">
+              <a:rPr sz="1500" b="1" i="0">
                 <a:solidFill>
                   <a:srgbClr val="0F172A"/>
                 </a:solidFill>
@@ -4925,14 +4909,14 @@
       </p:sp>
       <p:sp>
         <p:nvSpPr>
-          <p:cNvPr id="17" name="TextBox 16"/>
+          <p:cNvPr id="18" name="TextBox 17"/>
           <p:cNvSpPr txBox="1"/>
           <p:nvPr/>
         </p:nvSpPr>
         <p:spPr>
           <a:xfrm>
-            <a:off x="1097280" y="2807208"/>
-            <a:ext cx="3200400" cy="640080"/>
+            <a:off x="1432407" y="3154680"/>
+            <a:ext cx="4297680" cy="640080"/>
           </a:xfrm>
           <a:prstGeom prst="rect">
             <a:avLst/>
@@ -4954,7 +4938,7 @@
               </a:spcAft>
             </a:pPr>
             <a:r>
-              <a:rPr sz="1000" b="0">
+              <a:rPr sz="1100" b="0" i="0">
                 <a:solidFill>
                   <a:srgbClr val="475569"/>
                 </a:solidFill>
@@ -4967,18 +4951,18 @@
       </p:sp>
       <p:sp>
         <p:nvSpPr>
-          <p:cNvPr id="18" name="Rounded Rectangle 17"/>
+          <p:cNvPr id="19" name="Rounded Rectangle 18"/>
           <p:cNvSpPr/>
           <p:nvPr/>
         </p:nvSpPr>
         <p:spPr>
           <a:xfrm>
-            <a:off x="4709160" y="2423160"/>
-            <a:ext cx="3931920" cy="1097280"/>
+            <a:off x="6278727" y="2697480"/>
+            <a:ext cx="5303520" cy="1143000"/>
           </a:xfrm>
           <a:prstGeom prst="roundRect">
             <a:avLst>
-              <a:gd name="adj" fmla="val 2000"/>
+              <a:gd name="adj" fmla="val 1500"/>
             </a:avLst>
           </a:prstGeom>
           <a:solidFill>
@@ -5014,18 +4998,18 @@
       </p:sp>
       <p:sp>
         <p:nvSpPr>
-          <p:cNvPr id="19" name="Rounded Rectangle 18"/>
+          <p:cNvPr id="20" name="Rounded Rectangle 19"/>
           <p:cNvSpPr/>
           <p:nvPr/>
         </p:nvSpPr>
         <p:spPr>
           <a:xfrm>
-            <a:off x="4846320" y="2560320"/>
-            <a:ext cx="365760" cy="365760"/>
+            <a:off x="6461607" y="2880360"/>
+            <a:ext cx="502920" cy="502920"/>
           </a:xfrm>
           <a:prstGeom prst="roundRect">
             <a:avLst>
-              <a:gd name="adj" fmla="val 2000"/>
+              <a:gd name="adj" fmla="val 1500"/>
             </a:avLst>
           </a:prstGeom>
           <a:solidFill>
@@ -5052,12 +5036,12 @@
           </a:fontRef>
         </p:style>
         <p:txBody>
-          <a:bodyPr rtlCol="0" anchor="ctr" tIns="25400" lIns="25400"/>
+          <a:bodyPr rtlCol="0" anchor="ctr" tIns="25400"/>
           <a:lstStyle/>
           <a:p>
             <a:pPr algn="ctr"/>
             <a:r>
-              <a:rPr sz="1400" b="0">
+              <a:rPr sz="1800" b="0" i="0">
                 <a:solidFill>
                   <a:srgbClr val="0F172A"/>
                 </a:solidFill>
@@ -5070,14 +5054,14 @@
       </p:sp>
       <p:sp>
         <p:nvSpPr>
-          <p:cNvPr id="20" name="TextBox 19"/>
+          <p:cNvPr id="21" name="TextBox 20"/>
           <p:cNvSpPr txBox="1"/>
           <p:nvPr/>
         </p:nvSpPr>
         <p:spPr>
           <a:xfrm>
-            <a:off x="5303520" y="2532888"/>
-            <a:ext cx="3200400" cy="274320"/>
+            <a:off x="7101687" y="2834640"/>
+            <a:ext cx="4297680" cy="320040"/>
           </a:xfrm>
           <a:prstGeom prst="rect">
             <a:avLst/>
@@ -5099,7 +5083,7 @@
               </a:spcAft>
             </a:pPr>
             <a:r>
-              <a:rPr sz="1200" b="1">
+              <a:rPr sz="1500" b="1" i="0">
                 <a:solidFill>
                   <a:srgbClr val="0F172A"/>
                 </a:solidFill>
@@ -5112,14 +5096,14 @@
       </p:sp>
       <p:sp>
         <p:nvSpPr>
-          <p:cNvPr id="21" name="TextBox 20"/>
+          <p:cNvPr id="22" name="TextBox 21"/>
           <p:cNvSpPr txBox="1"/>
           <p:nvPr/>
         </p:nvSpPr>
         <p:spPr>
           <a:xfrm>
-            <a:off x="5303520" y="2807208"/>
-            <a:ext cx="3200400" cy="640080"/>
+            <a:off x="7101687" y="3154680"/>
+            <a:ext cx="4297680" cy="640080"/>
           </a:xfrm>
           <a:prstGeom prst="rect">
             <a:avLst/>
@@ -5141,7 +5125,7 @@
               </a:spcAft>
             </a:pPr>
             <a:r>
-              <a:rPr sz="1000" b="0">
+              <a:rPr sz="1100" b="0" i="0">
                 <a:solidFill>
                   <a:srgbClr val="475569"/>
                 </a:solidFill>
@@ -5154,18 +5138,18 @@
       </p:sp>
       <p:sp>
         <p:nvSpPr>
-          <p:cNvPr id="22" name="Rounded Rectangle 21"/>
+          <p:cNvPr id="23" name="Rounded Rectangle 22"/>
           <p:cNvSpPr/>
           <p:nvPr/>
         </p:nvSpPr>
         <p:spPr>
           <a:xfrm>
-            <a:off x="502920" y="3703320"/>
-            <a:ext cx="3931920" cy="1097280"/>
+            <a:off x="609447" y="4114800"/>
+            <a:ext cx="5303520" cy="1143000"/>
           </a:xfrm>
           <a:prstGeom prst="roundRect">
             <a:avLst>
-              <a:gd name="adj" fmla="val 2000"/>
+              <a:gd name="adj" fmla="val 1500"/>
             </a:avLst>
           </a:prstGeom>
           <a:solidFill>
@@ -5201,18 +5185,18 @@
       </p:sp>
       <p:sp>
         <p:nvSpPr>
-          <p:cNvPr id="23" name="Rounded Rectangle 22"/>
+          <p:cNvPr id="24" name="Rounded Rectangle 23"/>
           <p:cNvSpPr/>
           <p:nvPr/>
         </p:nvSpPr>
         <p:spPr>
           <a:xfrm>
-            <a:off x="640080" y="3840480"/>
-            <a:ext cx="365760" cy="365760"/>
+            <a:off x="792327" y="4297680"/>
+            <a:ext cx="502920" cy="502920"/>
           </a:xfrm>
           <a:prstGeom prst="roundRect">
             <a:avLst>
-              <a:gd name="adj" fmla="val 2000"/>
+              <a:gd name="adj" fmla="val 1500"/>
             </a:avLst>
           </a:prstGeom>
           <a:solidFill>
@@ -5239,12 +5223,12 @@
           </a:fontRef>
         </p:style>
         <p:txBody>
-          <a:bodyPr rtlCol="0" anchor="ctr" tIns="25400" lIns="25400"/>
+          <a:bodyPr rtlCol="0" anchor="ctr" tIns="25400"/>
           <a:lstStyle/>
           <a:p>
             <a:pPr algn="ctr"/>
             <a:r>
-              <a:rPr sz="1400" b="0">
+              <a:rPr sz="1800" b="0" i="0">
                 <a:solidFill>
                   <a:srgbClr val="0F172A"/>
                 </a:solidFill>
@@ -5257,14 +5241,14 @@
       </p:sp>
       <p:sp>
         <p:nvSpPr>
-          <p:cNvPr id="24" name="TextBox 23"/>
+          <p:cNvPr id="25" name="TextBox 24"/>
           <p:cNvSpPr txBox="1"/>
           <p:nvPr/>
         </p:nvSpPr>
         <p:spPr>
           <a:xfrm>
-            <a:off x="1097280" y="3813048"/>
-            <a:ext cx="3200400" cy="274320"/>
+            <a:off x="1432407" y="4251960"/>
+            <a:ext cx="4297680" cy="320040"/>
           </a:xfrm>
           <a:prstGeom prst="rect">
             <a:avLst/>
@@ -5286,7 +5270,7 @@
               </a:spcAft>
             </a:pPr>
             <a:r>
-              <a:rPr sz="1200" b="1">
+              <a:rPr sz="1500" b="1" i="0">
                 <a:solidFill>
                   <a:srgbClr val="0F172A"/>
                 </a:solidFill>
@@ -5299,14 +5283,14 @@
       </p:sp>
       <p:sp>
         <p:nvSpPr>
-          <p:cNvPr id="25" name="TextBox 24"/>
+          <p:cNvPr id="26" name="TextBox 25"/>
           <p:cNvSpPr txBox="1"/>
           <p:nvPr/>
         </p:nvSpPr>
         <p:spPr>
           <a:xfrm>
-            <a:off x="1097280" y="4087368"/>
-            <a:ext cx="3200400" cy="640080"/>
+            <a:off x="1432407" y="4572000"/>
+            <a:ext cx="4297680" cy="640080"/>
           </a:xfrm>
           <a:prstGeom prst="rect">
             <a:avLst/>
@@ -5328,7 +5312,7 @@
               </a:spcAft>
             </a:pPr>
             <a:r>
-              <a:rPr sz="1000" b="0">
+              <a:rPr sz="1100" b="0" i="0">
                 <a:solidFill>
                   <a:srgbClr val="475569"/>
                 </a:solidFill>
@@ -5341,18 +5325,18 @@
       </p:sp>
       <p:sp>
         <p:nvSpPr>
-          <p:cNvPr id="26" name="Rounded Rectangle 25"/>
+          <p:cNvPr id="27" name="Rounded Rectangle 26"/>
           <p:cNvSpPr/>
           <p:nvPr/>
         </p:nvSpPr>
         <p:spPr>
           <a:xfrm>
-            <a:off x="4709160" y="3703320"/>
-            <a:ext cx="3931920" cy="1097280"/>
+            <a:off x="6278727" y="4114800"/>
+            <a:ext cx="5303520" cy="1143000"/>
           </a:xfrm>
           <a:prstGeom prst="roundRect">
             <a:avLst>
-              <a:gd name="adj" fmla="val 2000"/>
+              <a:gd name="adj" fmla="val 1500"/>
             </a:avLst>
           </a:prstGeom>
           <a:solidFill>
@@ -5388,18 +5372,18 @@
       </p:sp>
       <p:sp>
         <p:nvSpPr>
-          <p:cNvPr id="27" name="Rounded Rectangle 26"/>
+          <p:cNvPr id="28" name="Rounded Rectangle 27"/>
           <p:cNvSpPr/>
           <p:nvPr/>
         </p:nvSpPr>
         <p:spPr>
           <a:xfrm>
-            <a:off x="4846320" y="3840480"/>
-            <a:ext cx="365760" cy="365760"/>
+            <a:off x="6461607" y="4297680"/>
+            <a:ext cx="502920" cy="502920"/>
           </a:xfrm>
           <a:prstGeom prst="roundRect">
             <a:avLst>
-              <a:gd name="adj" fmla="val 2000"/>
+              <a:gd name="adj" fmla="val 1500"/>
             </a:avLst>
           </a:prstGeom>
           <a:solidFill>
@@ -5426,12 +5410,12 @@
           </a:fontRef>
         </p:style>
         <p:txBody>
-          <a:bodyPr rtlCol="0" anchor="ctr" tIns="25400" lIns="25400"/>
+          <a:bodyPr rtlCol="0" anchor="ctr" tIns="25400"/>
           <a:lstStyle/>
           <a:p>
             <a:pPr algn="ctr"/>
             <a:r>
-              <a:rPr sz="1400" b="0">
+              <a:rPr sz="1800" b="0" i="0">
                 <a:solidFill>
                   <a:srgbClr val="0F172A"/>
                 </a:solidFill>
@@ -5444,14 +5428,14 @@
       </p:sp>
       <p:sp>
         <p:nvSpPr>
-          <p:cNvPr id="28" name="TextBox 27"/>
+          <p:cNvPr id="29" name="TextBox 28"/>
           <p:cNvSpPr txBox="1"/>
           <p:nvPr/>
         </p:nvSpPr>
         <p:spPr>
           <a:xfrm>
-            <a:off x="5303520" y="3813048"/>
-            <a:ext cx="3200400" cy="274320"/>
+            <a:off x="7101687" y="4251960"/>
+            <a:ext cx="4297680" cy="320040"/>
           </a:xfrm>
           <a:prstGeom prst="rect">
             <a:avLst/>
@@ -5473,7 +5457,7 @@
               </a:spcAft>
             </a:pPr>
             <a:r>
-              <a:rPr sz="1200" b="1">
+              <a:rPr sz="1500" b="1" i="0">
                 <a:solidFill>
                   <a:srgbClr val="0F172A"/>
                 </a:solidFill>
@@ -5486,14 +5470,14 @@
       </p:sp>
       <p:sp>
         <p:nvSpPr>
-          <p:cNvPr id="29" name="TextBox 28"/>
+          <p:cNvPr id="30" name="TextBox 29"/>
           <p:cNvSpPr txBox="1"/>
           <p:nvPr/>
         </p:nvSpPr>
         <p:spPr>
           <a:xfrm>
-            <a:off x="5303520" y="4087368"/>
-            <a:ext cx="3200400" cy="640080"/>
+            <a:off x="7101687" y="4572000"/>
+            <a:ext cx="4297680" cy="640080"/>
           </a:xfrm>
           <a:prstGeom prst="rect">
             <a:avLst/>
@@ -5515,7 +5499,7 @@
               </a:spcAft>
             </a:pPr>
             <a:r>
-              <a:rPr sz="1000" b="0">
+              <a:rPr sz="1100" b="0" i="0">
                 <a:solidFill>
                   <a:srgbClr val="475569"/>
                 </a:solidFill>
@@ -5554,14 +5538,57 @@
       <p:grpSpPr/>
       <p:sp>
         <p:nvSpPr>
-          <p:cNvPr id="2" name="TextBox 1"/>
+          <p:cNvPr id="2" name="Rectangle 1"/>
+          <p:cNvSpPr/>
+          <p:nvPr/>
+        </p:nvSpPr>
+        <p:spPr>
+          <a:xfrm>
+            <a:off x="0" y="502920"/>
+            <a:ext cx="12191695" cy="12700"/>
+          </a:xfrm>
+          <a:prstGeom prst="rect">
+            <a:avLst/>
+          </a:prstGeom>
+          <a:solidFill>
+            <a:srgbClr val="CBD5E1"/>
+          </a:solidFill>
+          <a:ln>
+            <a:noFill/>
+          </a:ln>
+        </p:spPr>
+        <p:style>
+          <a:lnRef idx="1">
+            <a:schemeClr val="accent1"/>
+          </a:lnRef>
+          <a:fillRef idx="3">
+            <a:schemeClr val="accent1"/>
+          </a:fillRef>
+          <a:effectRef idx="2">
+            <a:schemeClr val="accent1"/>
+          </a:effectRef>
+          <a:fontRef idx="minor">
+            <a:schemeClr val="lt1"/>
+          </a:fontRef>
+        </p:style>
+        <p:txBody>
+          <a:bodyPr rtlCol="0" anchor="ctr"/>
+          <a:lstStyle/>
+          <a:p>
+            <a:pPr algn="ctr"/>
+          </a:p>
+        </p:txBody>
+      </p:sp>
+      <p:sp>
+        <p:nvSpPr>
+          <p:cNvPr id="3" name="TextBox 2"/>
           <p:cNvSpPr txBox="1"/>
           <p:nvPr/>
         </p:nvSpPr>
         <p:spPr>
           <a:xfrm>
-            <a:off x="457200" y="274320"/>
-            <a:ext cx="1097280" cy="365760"/>
+            <a:off x="548640" y="164592"/>
+            <a:ext cx="1371600" cy="320040"/>
           </a:xfrm>
           <a:prstGeom prst="rect">
             <a:avLst/>
@@ -5575,7 +5602,7 @@
           <a:lstStyle/>
           <a:p>
             <a:r>
-              <a:rPr sz="1300" b="1">
+              <a:rPr sz="1600" b="1" i="0">
                 <a:solidFill>
                   <a:srgbClr val="C8102E"/>
                 </a:solidFill>
@@ -5584,7 +5611,7 @@
               <a:t>SIX</a:t>
             </a:r>
             <a:r>
-              <a:rPr sz="1300" b="0">
+              <a:rPr sz="1600" b="0" i="0">
                 <a:solidFill>
                   <a:srgbClr val="475569"/>
                 </a:solidFill>
@@ -5597,14 +5624,14 @@
       </p:sp>
       <p:sp>
         <p:nvSpPr>
-          <p:cNvPr id="3" name="TextBox 2"/>
+          <p:cNvPr id="4" name="TextBox 3"/>
           <p:cNvSpPr txBox="1"/>
           <p:nvPr/>
         </p:nvSpPr>
         <p:spPr>
           <a:xfrm>
-            <a:off x="6858000" y="274320"/>
-            <a:ext cx="2011680" cy="274320"/>
+            <a:off x="3657600" y="182880"/>
+            <a:ext cx="4876495" cy="274320"/>
           </a:xfrm>
           <a:prstGeom prst="rect">
             <a:avLst/>
@@ -5617,22 +5644,22 @@
           </a:bodyPr>
           <a:lstStyle/>
           <a:p>
-            <a:pPr algn="r"/>
-            <a:r>
-              <a:rPr sz="800" b="0">
+            <a:pPr algn="ctr"/>
+            <a:r>
+              <a:rPr sz="1000" b="0" i="0">
                 <a:solidFill>
                   <a:srgbClr val="94A3B8"/>
                 </a:solidFill>
                 <a:latin typeface="Segoe UI"/>
               </a:rPr>
-              <a:t>04 / 06  —  Architecture</a:t>
+              <a:t>04 / 06 — ARCHITECTURE</a:t>
             </a:r>
           </a:p>
         </p:txBody>
       </p:sp>
       <p:pic>
         <p:nvPicPr>
-          <p:cNvPr id="4" name="Picture 3" descr="pptx_slide2_Google_Shape_64_p14.png"/>
+          <p:cNvPr id="5" name="Picture 4" descr="pptx_slide2_Google_Shape_64_p14.png"/>
           <p:cNvPicPr>
             <a:picLocks noChangeAspect="1"/>
           </p:cNvPicPr>
@@ -5646,8 +5673,8 @@
         </p:blipFill>
         <p:spPr>
           <a:xfrm>
-            <a:off x="7863840" y="228600"/>
-            <a:ext cx="1005840" cy="276071"/>
+            <a:off x="10515600" y="109728"/>
+            <a:ext cx="1371600" cy="376460"/>
           </a:xfrm>
           <a:prstGeom prst="rect">
             <a:avLst/>
@@ -5656,14 +5683,14 @@
       </p:pic>
       <p:sp>
         <p:nvSpPr>
-          <p:cNvPr id="5" name="TextBox 4"/>
+          <p:cNvPr id="6" name="TextBox 5"/>
           <p:cNvSpPr txBox="1"/>
           <p:nvPr/>
         </p:nvSpPr>
         <p:spPr>
           <a:xfrm>
-            <a:off x="457200" y="777240"/>
-            <a:ext cx="8229600" cy="274320"/>
+            <a:off x="731520" y="777240"/>
+            <a:ext cx="10728655" cy="274320"/>
           </a:xfrm>
           <a:prstGeom prst="rect">
             <a:avLst/>
@@ -5685,7 +5712,7 @@
               </a:spcAft>
             </a:pPr>
             <a:r>
-              <a:rPr sz="1000" b="1">
+              <a:rPr sz="1200" b="1" i="0">
                 <a:solidFill>
                   <a:srgbClr val="C8102E"/>
                 </a:solidFill>
@@ -5698,14 +5725,14 @@
       </p:sp>
       <p:sp>
         <p:nvSpPr>
-          <p:cNvPr id="6" name="TextBox 5"/>
+          <p:cNvPr id="7" name="TextBox 6"/>
           <p:cNvSpPr txBox="1"/>
           <p:nvPr/>
         </p:nvSpPr>
         <p:spPr>
           <a:xfrm>
-            <a:off x="914400" y="1051560"/>
-            <a:ext cx="7315200" cy="548640"/>
+            <a:off x="1828800" y="1097280"/>
+            <a:ext cx="8534095" cy="640080"/>
           </a:xfrm>
           <a:prstGeom prst="rect">
             <a:avLst/>
@@ -5720,7 +5747,7 @@
           <a:p>
             <a:pPr algn="ctr"/>
             <a:r>
-              <a:rPr sz="2800" b="1">
+              <a:rPr sz="3600" b="1" i="0">
                 <a:solidFill>
                   <a:srgbClr val="0F172A"/>
                 </a:solidFill>
@@ -5729,7 +5756,7 @@
               <a:t>One </a:t>
             </a:r>
             <a:r>
-              <a:rPr sz="2800" b="1">
+              <a:rPr sz="3600" b="1" i="1">
                 <a:solidFill>
                   <a:srgbClr val="C8102E"/>
                 </a:solidFill>
@@ -5738,7 +5765,7 @@
               <a:t>intelligent</a:t>
             </a:r>
             <a:r>
-              <a:rPr sz="2800" b="1">
+              <a:rPr sz="3600" b="1" i="0">
                 <a:solidFill>
                   <a:srgbClr val="0F172A"/>
                 </a:solidFill>
@@ -5751,14 +5778,14 @@
       </p:sp>
       <p:sp>
         <p:nvSpPr>
-          <p:cNvPr id="7" name="TextBox 6"/>
+          <p:cNvPr id="8" name="TextBox 7"/>
           <p:cNvSpPr txBox="1"/>
           <p:nvPr/>
         </p:nvSpPr>
         <p:spPr>
           <a:xfrm>
-            <a:off x="1097280" y="1508760"/>
-            <a:ext cx="6949440" cy="411480"/>
+            <a:off x="1371600" y="1737360"/>
+            <a:ext cx="9448495" cy="548640"/>
           </a:xfrm>
           <a:prstGeom prst="rect">
             <a:avLst/>
@@ -5780,7 +5807,7 @@
               </a:spcAft>
             </a:pPr>
             <a:r>
-              <a:rPr sz="1000" b="0">
+              <a:rPr sz="1300" b="0" i="0">
                 <a:solidFill>
                   <a:srgbClr val="475569"/>
                 </a:solidFill>
@@ -5793,22 +5820,22 @@
       </p:sp>
       <p:sp>
         <p:nvSpPr>
-          <p:cNvPr id="8" name="Rounded Rectangle 7"/>
+          <p:cNvPr id="9" name="Rounded Rectangle 8"/>
           <p:cNvSpPr/>
           <p:nvPr/>
         </p:nvSpPr>
         <p:spPr>
           <a:xfrm>
-            <a:off x="457200" y="1965960"/>
-            <a:ext cx="8229600" cy="594360"/>
+            <a:off x="731520" y="2468880"/>
+            <a:ext cx="10728655" cy="868680"/>
           </a:xfrm>
           <a:prstGeom prst="roundRect">
             <a:avLst>
-              <a:gd name="adj" fmla="val 2000"/>
+              <a:gd name="adj" fmla="val 1500"/>
             </a:avLst>
           </a:prstGeom>
           <a:solidFill>
-            <a:srgbClr val="FFFFFF"/>
+            <a:srgbClr val="F1F5F9"/>
           </a:solidFill>
           <a:ln w="12700">
             <a:solidFill>
@@ -5840,14 +5867,14 @@
       </p:sp>
       <p:sp>
         <p:nvSpPr>
-          <p:cNvPr id="9" name="TextBox 8"/>
+          <p:cNvPr id="10" name="TextBox 9"/>
           <p:cNvSpPr txBox="1"/>
           <p:nvPr/>
         </p:nvSpPr>
         <p:spPr>
           <a:xfrm>
-            <a:off x="640080" y="1984248"/>
-            <a:ext cx="1828800" cy="228600"/>
+            <a:off x="1005840" y="2542032"/>
+            <a:ext cx="2743200" cy="274320"/>
           </a:xfrm>
           <a:prstGeom prst="rect">
             <a:avLst/>
@@ -5860,40 +5887,41 @@
           </a:bodyPr>
           <a:lstStyle/>
           <a:p>
-            <a:pPr algn="l">
-              <a:spcBef>
-                <a:spcPts val="0"/>
-              </a:spcBef>
-              <a:spcAft>
-                <a:spcPts val="0"/>
-              </a:spcAft>
-            </a:pPr>
-            <a:r>
-              <a:rPr sz="900" b="1">
+            <a:r>
+              <a:rPr sz="1000" b="1" i="0">
                 <a:solidFill>
                   <a:srgbClr val="2E6FD6"/>
                 </a:solidFill>
                 <a:latin typeface="Segoe UI"/>
               </a:rPr>
-              <a:t>● DATA SOURCES</a:t>
-            </a:r>
-          </a:p>
-        </p:txBody>
-      </p:sp>
-      <p:sp>
-        <p:nvSpPr>
-          <p:cNvPr id="10" name="Rounded Rectangle 9"/>
+              <a:t>●</a:t>
+            </a:r>
+            <a:r>
+              <a:rPr sz="1100" b="1" i="0">
+                <a:solidFill>
+                  <a:srgbClr val="2E6FD6"/>
+                </a:solidFill>
+                <a:latin typeface="Segoe UI"/>
+              </a:rPr>
+              <a:t>  DATA SOURCES</a:t>
+            </a:r>
+          </a:p>
+        </p:txBody>
+      </p:sp>
+      <p:sp>
+        <p:nvSpPr>
+          <p:cNvPr id="11" name="Rounded Rectangle 10"/>
           <p:cNvSpPr/>
           <p:nvPr/>
         </p:nvSpPr>
         <p:spPr>
           <a:xfrm>
-            <a:off x="640080" y="2240280"/>
-            <a:ext cx="1709928" cy="292608"/>
+            <a:off x="1005840" y="2880360"/>
+            <a:ext cx="2176272" cy="347472"/>
           </a:xfrm>
           <a:prstGeom prst="roundRect">
             <a:avLst>
-              <a:gd name="adj" fmla="val 15000"/>
+              <a:gd name="adj" fmla="val 12000"/>
             </a:avLst>
           </a:prstGeom>
           <a:solidFill>
@@ -5920,12 +5948,12 @@
           </a:fontRef>
         </p:style>
         <p:txBody>
-          <a:bodyPr rtlCol="0" anchor="ctr" tIns="25400" bIns="25400" lIns="76200" rIns="76200" wrap="none"/>
+          <a:bodyPr rtlCol="0" anchor="ctr" tIns="25400" bIns="25400" lIns="101600" rIns="101600" wrap="none"/>
           <a:lstStyle/>
           <a:p>
             <a:pPr algn="ctr"/>
             <a:r>
-              <a:rPr sz="1000" b="0">
+              <a:rPr sz="1200" b="0" i="0">
                 <a:solidFill>
                   <a:srgbClr val="2E6FD6"/>
                 </a:solidFill>
@@ -5938,18 +5966,18 @@
       </p:sp>
       <p:sp>
         <p:nvSpPr>
-          <p:cNvPr id="11" name="Rounded Rectangle 10"/>
+          <p:cNvPr id="12" name="Rounded Rectangle 11"/>
           <p:cNvSpPr/>
           <p:nvPr/>
         </p:nvSpPr>
         <p:spPr>
           <a:xfrm>
-            <a:off x="2487168" y="2240280"/>
-            <a:ext cx="1911095" cy="292608"/>
+            <a:off x="3364992" y="2880360"/>
+            <a:ext cx="2432304" cy="347472"/>
           </a:xfrm>
           <a:prstGeom prst="roundRect">
             <a:avLst>
-              <a:gd name="adj" fmla="val 15000"/>
+              <a:gd name="adj" fmla="val 12000"/>
             </a:avLst>
           </a:prstGeom>
           <a:solidFill>
@@ -5976,12 +6004,12 @@
           </a:fontRef>
         </p:style>
         <p:txBody>
-          <a:bodyPr rtlCol="0" anchor="ctr" tIns="25400" bIns="25400" lIns="76200" rIns="76200" wrap="none"/>
+          <a:bodyPr rtlCol="0" anchor="ctr" tIns="25400" bIns="25400" lIns="101600" rIns="101600" wrap="none"/>
           <a:lstStyle/>
           <a:p>
             <a:pPr algn="ctr"/>
             <a:r>
-              <a:rPr sz="1000" b="0">
+              <a:rPr sz="1200" b="0" i="0">
                 <a:solidFill>
                   <a:srgbClr val="2E6FD6"/>
                 </a:solidFill>
@@ -5994,18 +6022,18 @@
       </p:sp>
       <p:sp>
         <p:nvSpPr>
-          <p:cNvPr id="12" name="Rounded Rectangle 11"/>
+          <p:cNvPr id="13" name="Rounded Rectangle 12"/>
           <p:cNvSpPr/>
           <p:nvPr/>
         </p:nvSpPr>
         <p:spPr>
           <a:xfrm>
-            <a:off x="4535423" y="2240280"/>
-            <a:ext cx="1371600" cy="292608"/>
+            <a:off x="5980176" y="2880360"/>
+            <a:ext cx="1371600" cy="347472"/>
           </a:xfrm>
           <a:prstGeom prst="roundRect">
             <a:avLst>
-              <a:gd name="adj" fmla="val 15000"/>
+              <a:gd name="adj" fmla="val 12000"/>
             </a:avLst>
           </a:prstGeom>
           <a:solidFill>
@@ -6032,12 +6060,12 @@
           </a:fontRef>
         </p:style>
         <p:txBody>
-          <a:bodyPr rtlCol="0" anchor="ctr" tIns="25400" bIns="25400" lIns="76200" rIns="76200" wrap="none"/>
+          <a:bodyPr rtlCol="0" anchor="ctr" tIns="25400" bIns="25400" lIns="101600" rIns="101600" wrap="none"/>
           <a:lstStyle/>
           <a:p>
             <a:pPr algn="ctr"/>
             <a:r>
-              <a:rPr sz="1000" b="0">
+              <a:rPr sz="1200" b="0" i="0">
                 <a:solidFill>
                   <a:srgbClr val="2E6FD6"/>
                 </a:solidFill>
@@ -6050,18 +6078,18 @@
       </p:sp>
       <p:sp>
         <p:nvSpPr>
-          <p:cNvPr id="13" name="Rounded Rectangle 12"/>
+          <p:cNvPr id="14" name="Rounded Rectangle 13"/>
           <p:cNvSpPr/>
           <p:nvPr/>
         </p:nvSpPr>
         <p:spPr>
           <a:xfrm>
-            <a:off x="6044183" y="2240280"/>
-            <a:ext cx="1408176" cy="292608"/>
+            <a:off x="7534656" y="2880360"/>
+            <a:ext cx="1792224" cy="347472"/>
           </a:xfrm>
           <a:prstGeom prst="roundRect">
             <a:avLst>
-              <a:gd name="adj" fmla="val 15000"/>
+              <a:gd name="adj" fmla="val 12000"/>
             </a:avLst>
           </a:prstGeom>
           <a:solidFill>
@@ -6088,12 +6116,12 @@
           </a:fontRef>
         </p:style>
         <p:txBody>
-          <a:bodyPr rtlCol="0" anchor="ctr" tIns="25400" bIns="25400" lIns="76200" rIns="76200" wrap="none"/>
+          <a:bodyPr rtlCol="0" anchor="ctr" tIns="25400" bIns="25400" lIns="101600" rIns="101600" wrap="none"/>
           <a:lstStyle/>
           <a:p>
             <a:pPr algn="ctr"/>
             <a:r>
-              <a:rPr sz="1000" b="0">
+              <a:rPr sz="1200" b="0" i="0">
                 <a:solidFill>
                   <a:srgbClr val="2E6FD6"/>
                 </a:solidFill>
@@ -6106,14 +6134,14 @@
       </p:sp>
       <p:sp>
         <p:nvSpPr>
-          <p:cNvPr id="14" name="TextBox 13"/>
+          <p:cNvPr id="15" name="TextBox 14"/>
           <p:cNvSpPr txBox="1"/>
           <p:nvPr/>
         </p:nvSpPr>
         <p:spPr>
           <a:xfrm>
-            <a:off x="3657600" y="2578608"/>
-            <a:ext cx="1828800" cy="274320"/>
+            <a:off x="4572000" y="3383280"/>
+            <a:ext cx="3047695" cy="320040"/>
           </a:xfrm>
           <a:prstGeom prst="rect">
             <a:avLst/>
@@ -6126,16 +6154,9 @@
           </a:bodyPr>
           <a:lstStyle/>
           <a:p>
-            <a:pPr algn="ctr">
-              <a:spcBef>
-                <a:spcPts val="0"/>
-              </a:spcBef>
-              <a:spcAft>
-                <a:spcPts val="0"/>
-              </a:spcAft>
-            </a:pPr>
-            <a:r>
-              <a:rPr sz="900" b="0">
+            <a:pPr algn="ctr"/>
+            <a:r>
+              <a:rPr sz="1100" b="0" i="0">
                 <a:solidFill>
                   <a:srgbClr val="94A3B8"/>
                 </a:solidFill>
@@ -6148,18 +6169,18 @@
       </p:sp>
       <p:sp>
         <p:nvSpPr>
-          <p:cNvPr id="15" name="Rounded Rectangle 14"/>
+          <p:cNvPr id="16" name="Rounded Rectangle 15"/>
           <p:cNvSpPr/>
           <p:nvPr/>
         </p:nvSpPr>
         <p:spPr>
           <a:xfrm>
-            <a:off x="457200" y="2880360"/>
-            <a:ext cx="2606040" cy="640080"/>
+            <a:off x="731520" y="3749039"/>
+            <a:ext cx="3456432" cy="822960"/>
           </a:xfrm>
           <a:prstGeom prst="roundRect">
             <a:avLst>
-              <a:gd name="adj" fmla="val 2000"/>
+              <a:gd name="adj" fmla="val 1500"/>
             </a:avLst>
           </a:prstGeom>
           <a:solidFill>
@@ -6195,14 +6216,14 @@
       </p:sp>
       <p:sp>
         <p:nvSpPr>
-          <p:cNvPr id="16" name="TextBox 15"/>
+          <p:cNvPr id="17" name="TextBox 16"/>
           <p:cNvSpPr txBox="1"/>
           <p:nvPr/>
         </p:nvSpPr>
         <p:spPr>
           <a:xfrm>
-            <a:off x="594360" y="2898648"/>
-            <a:ext cx="2331720" cy="228600"/>
+            <a:off x="914400" y="3822191"/>
+            <a:ext cx="3090672" cy="274320"/>
           </a:xfrm>
           <a:prstGeom prst="rect">
             <a:avLst/>
@@ -6215,44 +6236,45 @@
           </a:bodyPr>
           <a:lstStyle/>
           <a:p>
-            <a:pPr algn="l">
-              <a:spcBef>
-                <a:spcPts val="0"/>
-              </a:spcBef>
-              <a:spcAft>
-                <a:spcPts val="0"/>
-              </a:spcAft>
-            </a:pPr>
-            <a:r>
-              <a:rPr sz="800" b="1">
+            <a:r>
+              <a:rPr sz="1000" b="1" i="0">
                 <a:solidFill>
                   <a:srgbClr val="C8102E"/>
                 </a:solidFill>
                 <a:latin typeface="Segoe UI"/>
               </a:rPr>
-              <a:t>● CONFLICT ASSISTANT</a:t>
-            </a:r>
-          </a:p>
-        </p:txBody>
-      </p:sp>
-      <p:sp>
-        <p:nvSpPr>
-          <p:cNvPr id="17" name="Rounded Rectangle 16"/>
+              <a:t>●</a:t>
+            </a:r>
+            <a:r>
+              <a:rPr sz="1100" b="1" i="0">
+                <a:solidFill>
+                  <a:srgbClr val="C8102E"/>
+                </a:solidFill>
+                <a:latin typeface="Segoe UI"/>
+              </a:rPr>
+              <a:t>  CONFLICT ASSISTANT</a:t>
+            </a:r>
+          </a:p>
+        </p:txBody>
+      </p:sp>
+      <p:sp>
+        <p:nvSpPr>
+          <p:cNvPr id="18" name="Rounded Rectangle 17"/>
           <p:cNvSpPr/>
           <p:nvPr/>
         </p:nvSpPr>
         <p:spPr>
           <a:xfrm>
-            <a:off x="594360" y="3182112"/>
-            <a:ext cx="1911095" cy="292608"/>
+            <a:off x="914400" y="4187951"/>
+            <a:ext cx="2615184" cy="347472"/>
           </a:xfrm>
           <a:prstGeom prst="roundRect">
             <a:avLst>
-              <a:gd name="adj" fmla="val 15000"/>
+              <a:gd name="adj" fmla="val 12000"/>
             </a:avLst>
           </a:prstGeom>
           <a:solidFill>
-            <a:srgbClr val="FDEEF0"/>
+            <a:srgbClr val="FEF7F8"/>
           </a:solidFill>
           <a:ln w="9525">
             <a:solidFill>
@@ -6275,12 +6297,12 @@
           </a:fontRef>
         </p:style>
         <p:txBody>
-          <a:bodyPr rtlCol="0" anchor="ctr" tIns="25400" bIns="25400" lIns="76200" rIns="76200" wrap="none"/>
+          <a:bodyPr rtlCol="0" anchor="ctr" tIns="25400" bIns="25400" lIns="101600" rIns="101600" wrap="none"/>
           <a:lstStyle/>
           <a:p>
             <a:pPr algn="ctr"/>
             <a:r>
-              <a:rPr sz="1000" b="0">
+              <a:rPr sz="1200" b="0" i="0">
                 <a:solidFill>
                   <a:srgbClr val="C8102E"/>
                 </a:solidFill>
@@ -6293,18 +6315,18 @@
       </p:sp>
       <p:sp>
         <p:nvSpPr>
-          <p:cNvPr id="18" name="Rounded Rectangle 17"/>
+          <p:cNvPr id="19" name="Rounded Rectangle 18"/>
           <p:cNvSpPr/>
           <p:nvPr/>
         </p:nvSpPr>
         <p:spPr>
           <a:xfrm>
-            <a:off x="3246120" y="2880360"/>
-            <a:ext cx="2606040" cy="640080"/>
+            <a:off x="4370832" y="3749039"/>
+            <a:ext cx="3456432" cy="822960"/>
           </a:xfrm>
           <a:prstGeom prst="roundRect">
             <a:avLst>
-              <a:gd name="adj" fmla="val 2000"/>
+              <a:gd name="adj" fmla="val 1500"/>
             </a:avLst>
           </a:prstGeom>
           <a:solidFill>
@@ -6340,14 +6362,14 @@
       </p:sp>
       <p:sp>
         <p:nvSpPr>
-          <p:cNvPr id="19" name="TextBox 18"/>
+          <p:cNvPr id="20" name="TextBox 19"/>
           <p:cNvSpPr txBox="1"/>
           <p:nvPr/>
         </p:nvSpPr>
         <p:spPr>
           <a:xfrm>
-            <a:off x="3383280" y="2898648"/>
-            <a:ext cx="2331720" cy="228600"/>
+            <a:off x="4553712" y="3822191"/>
+            <a:ext cx="3090672" cy="274320"/>
           </a:xfrm>
           <a:prstGeom prst="rect">
             <a:avLst/>
@@ -6360,44 +6382,45 @@
           </a:bodyPr>
           <a:lstStyle/>
           <a:p>
-            <a:pPr algn="l">
-              <a:spcBef>
-                <a:spcPts val="0"/>
-              </a:spcBef>
-              <a:spcAft>
-                <a:spcPts val="0"/>
-              </a:spcAft>
-            </a:pPr>
-            <a:r>
-              <a:rPr sz="800" b="1">
+            <a:r>
+              <a:rPr sz="1000" b="1" i="0">
                 <a:solidFill>
                   <a:srgbClr val="C8102E"/>
                 </a:solidFill>
                 <a:latin typeface="Segoe UI"/>
               </a:rPr>
-              <a:t>● MESSAGE ASSISTANT</a:t>
-            </a:r>
-          </a:p>
-        </p:txBody>
-      </p:sp>
-      <p:sp>
-        <p:nvSpPr>
-          <p:cNvPr id="20" name="Rounded Rectangle 19"/>
+              <a:t>●</a:t>
+            </a:r>
+            <a:r>
+              <a:rPr sz="1100" b="1" i="0">
+                <a:solidFill>
+                  <a:srgbClr val="C8102E"/>
+                </a:solidFill>
+                <a:latin typeface="Segoe UI"/>
+              </a:rPr>
+              <a:t>  MESSAGE ASSISTANT</a:t>
+            </a:r>
+          </a:p>
+        </p:txBody>
+      </p:sp>
+      <p:sp>
+        <p:nvSpPr>
+          <p:cNvPr id="21" name="Rounded Rectangle 20"/>
           <p:cNvSpPr/>
           <p:nvPr/>
         </p:nvSpPr>
         <p:spPr>
           <a:xfrm>
-            <a:off x="3383280" y="3182112"/>
-            <a:ext cx="2171700" cy="292608"/>
+            <a:off x="4553712" y="4187951"/>
+            <a:ext cx="2971800" cy="347472"/>
           </a:xfrm>
           <a:prstGeom prst="roundRect">
             <a:avLst>
-              <a:gd name="adj" fmla="val 15000"/>
+              <a:gd name="adj" fmla="val 12000"/>
             </a:avLst>
           </a:prstGeom>
           <a:solidFill>
-            <a:srgbClr val="FDEEF0"/>
+            <a:srgbClr val="FEF7F8"/>
           </a:solidFill>
           <a:ln w="9525">
             <a:solidFill>
@@ -6420,12 +6443,12 @@
           </a:fontRef>
         </p:style>
         <p:txBody>
-          <a:bodyPr rtlCol="0" anchor="ctr" tIns="25400" bIns="25400" lIns="76200" rIns="76200" wrap="none"/>
+          <a:bodyPr rtlCol="0" anchor="ctr" tIns="25400" bIns="25400" lIns="101600" rIns="101600" wrap="none"/>
           <a:lstStyle/>
           <a:p>
             <a:pPr algn="ctr"/>
             <a:r>
-              <a:rPr sz="1000" b="0">
+              <a:rPr sz="1200" b="0" i="0">
                 <a:solidFill>
                   <a:srgbClr val="C8102E"/>
                 </a:solidFill>
@@ -6438,18 +6461,18 @@
       </p:sp>
       <p:sp>
         <p:nvSpPr>
-          <p:cNvPr id="21" name="Rounded Rectangle 20"/>
+          <p:cNvPr id="22" name="Rounded Rectangle 21"/>
           <p:cNvSpPr/>
           <p:nvPr/>
         </p:nvSpPr>
         <p:spPr>
           <a:xfrm>
-            <a:off x="6035040" y="2880360"/>
-            <a:ext cx="2606040" cy="640080"/>
+            <a:off x="8010144" y="3749039"/>
+            <a:ext cx="3456432" cy="822960"/>
           </a:xfrm>
           <a:prstGeom prst="roundRect">
             <a:avLst>
-              <a:gd name="adj" fmla="val 2000"/>
+              <a:gd name="adj" fmla="val 1500"/>
             </a:avLst>
           </a:prstGeom>
           <a:solidFill>
@@ -6485,14 +6508,14 @@
       </p:sp>
       <p:sp>
         <p:nvSpPr>
-          <p:cNvPr id="22" name="TextBox 21"/>
+          <p:cNvPr id="23" name="TextBox 22"/>
           <p:cNvSpPr txBox="1"/>
           <p:nvPr/>
         </p:nvSpPr>
         <p:spPr>
           <a:xfrm>
-            <a:off x="6172200" y="2898648"/>
-            <a:ext cx="2331720" cy="228600"/>
+            <a:off x="8193024" y="3822191"/>
+            <a:ext cx="3090672" cy="274320"/>
           </a:xfrm>
           <a:prstGeom prst="rect">
             <a:avLst/>
@@ -6505,44 +6528,45 @@
           </a:bodyPr>
           <a:lstStyle/>
           <a:p>
-            <a:pPr algn="l">
-              <a:spcBef>
-                <a:spcPts val="0"/>
-              </a:spcBef>
-              <a:spcAft>
-                <a:spcPts val="0"/>
-              </a:spcAft>
-            </a:pPr>
-            <a:r>
-              <a:rPr sz="800" b="1">
+            <a:r>
+              <a:rPr sz="1000" b="1" i="0">
                 <a:solidFill>
                   <a:srgbClr val="C8102E"/>
                 </a:solidFill>
                 <a:latin typeface="Segoe UI"/>
               </a:rPr>
-              <a:t>● CHAT AGENT</a:t>
-            </a:r>
-          </a:p>
-        </p:txBody>
-      </p:sp>
-      <p:sp>
-        <p:nvSpPr>
-          <p:cNvPr id="23" name="Rounded Rectangle 22"/>
+              <a:t>●</a:t>
+            </a:r>
+            <a:r>
+              <a:rPr sz="1100" b="1" i="0">
+                <a:solidFill>
+                  <a:srgbClr val="C8102E"/>
+                </a:solidFill>
+                <a:latin typeface="Segoe UI"/>
+              </a:rPr>
+              <a:t>  CHAT AGENT</a:t>
+            </a:r>
+          </a:p>
+        </p:txBody>
+      </p:sp>
+      <p:sp>
+        <p:nvSpPr>
+          <p:cNvPr id="24" name="Rounded Rectangle 23"/>
           <p:cNvSpPr/>
           <p:nvPr/>
         </p:nvSpPr>
         <p:spPr>
           <a:xfrm>
-            <a:off x="6172200" y="3182112"/>
-            <a:ext cx="2331720" cy="292608"/>
+            <a:off x="8193024" y="4187951"/>
+            <a:ext cx="3090672" cy="347472"/>
           </a:xfrm>
           <a:prstGeom prst="roundRect">
             <a:avLst>
-              <a:gd name="adj" fmla="val 15000"/>
+              <a:gd name="adj" fmla="val 12000"/>
             </a:avLst>
           </a:prstGeom>
           <a:solidFill>
-            <a:srgbClr val="FDEEF0"/>
+            <a:srgbClr val="FEF7F8"/>
           </a:solidFill>
           <a:ln w="9525">
             <a:solidFill>
@@ -6565,12 +6589,12 @@
           </a:fontRef>
         </p:style>
         <p:txBody>
-          <a:bodyPr rtlCol="0" anchor="ctr" tIns="25400" bIns="25400" lIns="76200" rIns="76200" wrap="none"/>
+          <a:bodyPr rtlCol="0" anchor="ctr" tIns="25400" bIns="25400" lIns="101600" rIns="101600" wrap="none"/>
           <a:lstStyle/>
           <a:p>
             <a:pPr algn="ctr"/>
             <a:r>
-              <a:rPr sz="1000" b="0">
+              <a:rPr sz="1200" b="0" i="0">
                 <a:solidFill>
                   <a:srgbClr val="C8102E"/>
                 </a:solidFill>
@@ -6583,14 +6607,14 @@
       </p:sp>
       <p:sp>
         <p:nvSpPr>
-          <p:cNvPr id="24" name="TextBox 23"/>
+          <p:cNvPr id="25" name="TextBox 24"/>
           <p:cNvSpPr txBox="1"/>
           <p:nvPr/>
         </p:nvSpPr>
         <p:spPr>
           <a:xfrm>
-            <a:off x="3657600" y="3547872"/>
-            <a:ext cx="1828800" cy="274320"/>
+            <a:off x="4572000" y="4617720"/>
+            <a:ext cx="3047695" cy="320040"/>
           </a:xfrm>
           <a:prstGeom prst="rect">
             <a:avLst/>
@@ -6603,16 +6627,9 @@
           </a:bodyPr>
           <a:lstStyle/>
           <a:p>
-            <a:pPr algn="ctr">
-              <a:spcBef>
-                <a:spcPts val="0"/>
-              </a:spcBef>
-              <a:spcAft>
-                <a:spcPts val="0"/>
-              </a:spcAft>
-            </a:pPr>
-            <a:r>
-              <a:rPr sz="900" b="0">
+            <a:pPr algn="ctr"/>
+            <a:r>
+              <a:rPr sz="1100" b="0" i="0">
                 <a:solidFill>
                   <a:srgbClr val="94A3B8"/>
                 </a:solidFill>
@@ -6625,22 +6642,22 @@
       </p:sp>
       <p:sp>
         <p:nvSpPr>
-          <p:cNvPr id="25" name="Rounded Rectangle 24"/>
+          <p:cNvPr id="26" name="Rounded Rectangle 25"/>
           <p:cNvSpPr/>
           <p:nvPr/>
         </p:nvSpPr>
         <p:spPr>
           <a:xfrm>
-            <a:off x="457200" y="3840480"/>
-            <a:ext cx="4023360" cy="777240"/>
+            <a:off x="731520" y="5029200"/>
+            <a:ext cx="5120640" cy="1143000"/>
           </a:xfrm>
           <a:prstGeom prst="roundRect">
             <a:avLst>
-              <a:gd name="adj" fmla="val 2000"/>
+              <a:gd name="adj" fmla="val 1500"/>
             </a:avLst>
           </a:prstGeom>
           <a:solidFill>
-            <a:srgbClr val="FFFFFF"/>
+            <a:srgbClr val="F1F5F9"/>
           </a:solidFill>
           <a:ln w="12700">
             <a:solidFill>
@@ -6672,14 +6689,14 @@
       </p:sp>
       <p:sp>
         <p:nvSpPr>
-          <p:cNvPr id="26" name="TextBox 25"/>
+          <p:cNvPr id="27" name="TextBox 26"/>
           <p:cNvSpPr txBox="1"/>
           <p:nvPr/>
         </p:nvSpPr>
         <p:spPr>
           <a:xfrm>
-            <a:off x="640080" y="3858768"/>
-            <a:ext cx="2743200" cy="228600"/>
+            <a:off x="1005840" y="5102352"/>
+            <a:ext cx="2743200" cy="274320"/>
           </a:xfrm>
           <a:prstGeom prst="rect">
             <a:avLst/>
@@ -6692,40 +6709,41 @@
           </a:bodyPr>
           <a:lstStyle/>
           <a:p>
-            <a:pPr algn="l">
-              <a:spcBef>
-                <a:spcPts val="0"/>
-              </a:spcBef>
-              <a:spcAft>
-                <a:spcPts val="0"/>
-              </a:spcAft>
-            </a:pPr>
-            <a:r>
-              <a:rPr sz="800" b="1">
+            <a:r>
+              <a:rPr sz="1000" b="1" i="0">
                 <a:solidFill>
                   <a:srgbClr val="16A34A"/>
                 </a:solidFill>
                 <a:latin typeface="Segoe UI"/>
               </a:rPr>
-              <a:t>● TRUST &amp; COMPLIANCE</a:t>
-            </a:r>
-          </a:p>
-        </p:txBody>
-      </p:sp>
-      <p:sp>
-        <p:nvSpPr>
-          <p:cNvPr id="27" name="Rounded Rectangle 26"/>
+              <a:t>●</a:t>
+            </a:r>
+            <a:r>
+              <a:rPr sz="1100" b="1" i="0">
+                <a:solidFill>
+                  <a:srgbClr val="16A34A"/>
+                </a:solidFill>
+                <a:latin typeface="Segoe UI"/>
+              </a:rPr>
+              <a:t>  TRUST &amp; COMPLIANCE</a:t>
+            </a:r>
+          </a:p>
+        </p:txBody>
+      </p:sp>
+      <p:sp>
+        <p:nvSpPr>
+          <p:cNvPr id="28" name="Rounded Rectangle 27"/>
           <p:cNvSpPr/>
           <p:nvPr/>
         </p:nvSpPr>
         <p:spPr>
           <a:xfrm>
-            <a:off x="640080" y="4114800"/>
-            <a:ext cx="1005840" cy="292608"/>
+            <a:off x="1005840" y="5440680"/>
+            <a:ext cx="1307592" cy="347472"/>
           </a:xfrm>
           <a:prstGeom prst="roundRect">
             <a:avLst>
-              <a:gd name="adj" fmla="val 15000"/>
+              <a:gd name="adj" fmla="val 12000"/>
             </a:avLst>
           </a:prstGeom>
           <a:solidFill>
@@ -6752,12 +6770,12 @@
           </a:fontRef>
         </p:style>
         <p:txBody>
-          <a:bodyPr rtlCol="0" anchor="ctr" tIns="25400" bIns="25400" lIns="76200" rIns="76200" wrap="none"/>
+          <a:bodyPr rtlCol="0" anchor="ctr" tIns="25400" bIns="25400" lIns="101600" rIns="101600" wrap="none"/>
           <a:lstStyle/>
           <a:p>
             <a:pPr algn="ctr"/>
             <a:r>
-              <a:rPr sz="1000" b="0">
+              <a:rPr sz="1100" b="0" i="0">
                 <a:solidFill>
                   <a:srgbClr val="16A34A"/>
                 </a:solidFill>
@@ -6770,18 +6788,18 @@
       </p:sp>
       <p:sp>
         <p:nvSpPr>
-          <p:cNvPr id="28" name="Rounded Rectangle 27"/>
+          <p:cNvPr id="29" name="Rounded Rectangle 28"/>
           <p:cNvSpPr/>
           <p:nvPr/>
         </p:nvSpPr>
         <p:spPr>
           <a:xfrm>
-            <a:off x="1755648" y="4114800"/>
-            <a:ext cx="1280160" cy="292608"/>
+            <a:off x="2450592" y="5440680"/>
+            <a:ext cx="1664208" cy="347472"/>
           </a:xfrm>
           <a:prstGeom prst="roundRect">
             <a:avLst>
-              <a:gd name="adj" fmla="val 15000"/>
+              <a:gd name="adj" fmla="val 12000"/>
             </a:avLst>
           </a:prstGeom>
           <a:solidFill>
@@ -6808,12 +6826,12 @@
           </a:fontRef>
         </p:style>
         <p:txBody>
-          <a:bodyPr rtlCol="0" anchor="ctr" tIns="25400" bIns="25400" lIns="76200" rIns="76200" wrap="none"/>
+          <a:bodyPr rtlCol="0" anchor="ctr" tIns="25400" bIns="25400" lIns="101600" rIns="101600" wrap="none"/>
           <a:lstStyle/>
           <a:p>
             <a:pPr algn="ctr"/>
             <a:r>
-              <a:rPr sz="1000" b="0">
+              <a:rPr sz="1100" b="0" i="0">
                 <a:solidFill>
                   <a:srgbClr val="16A34A"/>
                 </a:solidFill>
@@ -6826,18 +6844,18 @@
       </p:sp>
       <p:sp>
         <p:nvSpPr>
-          <p:cNvPr id="29" name="Rounded Rectangle 28"/>
+          <p:cNvPr id="30" name="Rounded Rectangle 29"/>
           <p:cNvSpPr/>
           <p:nvPr/>
         </p:nvSpPr>
         <p:spPr>
           <a:xfrm>
-            <a:off x="3145536" y="4114800"/>
-            <a:ext cx="1188720" cy="292608"/>
+            <a:off x="4251960" y="5440680"/>
+            <a:ext cx="1545336" cy="347472"/>
           </a:xfrm>
           <a:prstGeom prst="roundRect">
             <a:avLst>
-              <a:gd name="adj" fmla="val 15000"/>
+              <a:gd name="adj" fmla="val 12000"/>
             </a:avLst>
           </a:prstGeom>
           <a:solidFill>
@@ -6864,12 +6882,12 @@
           </a:fontRef>
         </p:style>
         <p:txBody>
-          <a:bodyPr rtlCol="0" anchor="ctr" tIns="25400" bIns="25400" lIns="76200" rIns="76200" wrap="none"/>
+          <a:bodyPr rtlCol="0" anchor="ctr" tIns="25400" bIns="25400" lIns="101600" rIns="101600" wrap="none"/>
           <a:lstStyle/>
           <a:p>
             <a:pPr algn="ctr"/>
             <a:r>
-              <a:rPr sz="1000" b="0">
+              <a:rPr sz="1100" b="0" i="0">
                 <a:solidFill>
                   <a:srgbClr val="16A34A"/>
                 </a:solidFill>
@@ -6882,18 +6900,18 @@
       </p:sp>
       <p:sp>
         <p:nvSpPr>
-          <p:cNvPr id="30" name="Rounded Rectangle 29"/>
+          <p:cNvPr id="31" name="Rounded Rectangle 30"/>
           <p:cNvSpPr/>
           <p:nvPr/>
         </p:nvSpPr>
         <p:spPr>
           <a:xfrm>
-            <a:off x="640080" y="4389120"/>
-            <a:ext cx="1828800" cy="292608"/>
+            <a:off x="1005840" y="5833872"/>
+            <a:ext cx="2011680" cy="347472"/>
           </a:xfrm>
           <a:prstGeom prst="roundRect">
             <a:avLst>
-              <a:gd name="adj" fmla="val 15000"/>
+              <a:gd name="adj" fmla="val 12000"/>
             </a:avLst>
           </a:prstGeom>
           <a:solidFill>
@@ -6920,12 +6938,12 @@
           </a:fontRef>
         </p:style>
         <p:txBody>
-          <a:bodyPr rtlCol="0" anchor="ctr" tIns="25400" bIns="25400" lIns="76200" rIns="76200" wrap="none"/>
+          <a:bodyPr rtlCol="0" anchor="ctr" tIns="25400" bIns="25400" lIns="101600" rIns="101600" wrap="none"/>
           <a:lstStyle/>
           <a:p>
             <a:pPr algn="ctr"/>
             <a:r>
-              <a:rPr sz="1000" b="0">
+              <a:rPr sz="1100" b="0" i="0">
                 <a:solidFill>
                   <a:srgbClr val="16A34A"/>
                 </a:solidFill>
@@ -6938,22 +6956,22 @@
       </p:sp>
       <p:sp>
         <p:nvSpPr>
-          <p:cNvPr id="31" name="Rounded Rectangle 30"/>
+          <p:cNvPr id="32" name="Rounded Rectangle 31"/>
           <p:cNvSpPr/>
           <p:nvPr/>
         </p:nvSpPr>
         <p:spPr>
           <a:xfrm>
-            <a:off x="4663440" y="3840480"/>
-            <a:ext cx="4023360" cy="777240"/>
+            <a:off x="6035040" y="5029200"/>
+            <a:ext cx="5425135" cy="1143000"/>
           </a:xfrm>
           <a:prstGeom prst="roundRect">
             <a:avLst>
-              <a:gd name="adj" fmla="val 2000"/>
+              <a:gd name="adj" fmla="val 1500"/>
             </a:avLst>
           </a:prstGeom>
           <a:solidFill>
-            <a:srgbClr val="FFFFFF"/>
+            <a:srgbClr val="F1F5F9"/>
           </a:solidFill>
           <a:ln w="12700">
             <a:solidFill>
@@ -6985,14 +7003,14 @@
       </p:sp>
       <p:sp>
         <p:nvSpPr>
-          <p:cNvPr id="32" name="TextBox 31"/>
+          <p:cNvPr id="33" name="TextBox 32"/>
           <p:cNvSpPr txBox="1"/>
           <p:nvPr/>
         </p:nvSpPr>
         <p:spPr>
           <a:xfrm>
-            <a:off x="4846320" y="3858768"/>
-            <a:ext cx="2743200" cy="228600"/>
+            <a:off x="6309360" y="5102352"/>
+            <a:ext cx="2743200" cy="274320"/>
           </a:xfrm>
           <a:prstGeom prst="rect">
             <a:avLst/>
@@ -7005,40 +7023,41 @@
           </a:bodyPr>
           <a:lstStyle/>
           <a:p>
-            <a:pPr algn="l">
-              <a:spcBef>
-                <a:spcPts val="0"/>
-              </a:spcBef>
-              <a:spcAft>
-                <a:spcPts val="0"/>
-              </a:spcAft>
-            </a:pPr>
-            <a:r>
-              <a:rPr sz="800" b="1">
+            <a:r>
+              <a:rPr sz="1000" b="1" i="0">
                 <a:solidFill>
                   <a:srgbClr val="2E6FD6"/>
                 </a:solidFill>
                 <a:latin typeface="Segoe UI"/>
               </a:rPr>
-              <a:t>● RM DASHBOARD</a:t>
-            </a:r>
-          </a:p>
-        </p:txBody>
-      </p:sp>
-      <p:sp>
-        <p:nvSpPr>
-          <p:cNvPr id="33" name="Rounded Rectangle 32"/>
+              <a:t>●</a:t>
+            </a:r>
+            <a:r>
+              <a:rPr sz="1100" b="1" i="0">
+                <a:solidFill>
+                  <a:srgbClr val="2E6FD6"/>
+                </a:solidFill>
+                <a:latin typeface="Segoe UI"/>
+              </a:rPr>
+              <a:t>  RM DASHBOARD</a:t>
+            </a:r>
+          </a:p>
+        </p:txBody>
+      </p:sp>
+      <p:sp>
+        <p:nvSpPr>
+          <p:cNvPr id="34" name="Rounded Rectangle 33"/>
           <p:cNvSpPr/>
           <p:nvPr/>
         </p:nvSpPr>
         <p:spPr>
           <a:xfrm>
-            <a:off x="4846320" y="4114800"/>
-            <a:ext cx="1824228" cy="292608"/>
+            <a:off x="6309360" y="5440680"/>
+            <a:ext cx="2432304" cy="347472"/>
           </a:xfrm>
           <a:prstGeom prst="roundRect">
             <a:avLst>
-              <a:gd name="adj" fmla="val 15000"/>
+              <a:gd name="adj" fmla="val 12000"/>
             </a:avLst>
           </a:prstGeom>
           <a:solidFill>
@@ -7065,12 +7084,12 @@
           </a:fontRef>
         </p:style>
         <p:txBody>
-          <a:bodyPr rtlCol="0" anchor="ctr" tIns="25400" bIns="25400" lIns="76200" rIns="76200" wrap="none"/>
+          <a:bodyPr rtlCol="0" anchor="ctr" tIns="25400" bIns="25400" lIns="101600" rIns="101600" wrap="none"/>
           <a:lstStyle/>
           <a:p>
             <a:pPr algn="ctr"/>
             <a:r>
-              <a:rPr sz="1000" b="0">
+              <a:rPr sz="1100" b="0" i="0">
                 <a:solidFill>
                   <a:srgbClr val="2E6FD6"/>
                 </a:solidFill>
@@ -7083,18 +7102,18 @@
       </p:sp>
       <p:sp>
         <p:nvSpPr>
-          <p:cNvPr id="34" name="Rounded Rectangle 33"/>
+          <p:cNvPr id="35" name="Rounded Rectangle 34"/>
           <p:cNvSpPr/>
           <p:nvPr/>
         </p:nvSpPr>
         <p:spPr>
           <a:xfrm>
-            <a:off x="6780276" y="4114800"/>
-            <a:ext cx="1536192" cy="292608"/>
+            <a:off x="8878824" y="5440680"/>
+            <a:ext cx="2048256" cy="347472"/>
           </a:xfrm>
           <a:prstGeom prst="roundRect">
             <a:avLst>
-              <a:gd name="adj" fmla="val 15000"/>
+              <a:gd name="adj" fmla="val 12000"/>
             </a:avLst>
           </a:prstGeom>
           <a:solidFill>
@@ -7121,12 +7140,12 @@
           </a:fontRef>
         </p:style>
         <p:txBody>
-          <a:bodyPr rtlCol="0" anchor="ctr" tIns="25400" bIns="25400" lIns="76200" rIns="76200" wrap="none"/>
+          <a:bodyPr rtlCol="0" anchor="ctr" tIns="25400" bIns="25400" lIns="101600" rIns="101600" wrap="none"/>
           <a:lstStyle/>
           <a:p>
             <a:pPr algn="ctr"/>
             <a:r>
-              <a:rPr sz="1000" b="0">
+              <a:rPr sz="1100" b="0" i="0">
                 <a:solidFill>
                   <a:srgbClr val="2E6FD6"/>
                 </a:solidFill>
@@ -7139,18 +7158,18 @@
       </p:sp>
       <p:sp>
         <p:nvSpPr>
-          <p:cNvPr id="35" name="Rounded Rectangle 34"/>
+          <p:cNvPr id="36" name="Rounded Rectangle 35"/>
           <p:cNvSpPr/>
           <p:nvPr/>
         </p:nvSpPr>
         <p:spPr>
           <a:xfrm>
-            <a:off x="8426196" y="4114800"/>
-            <a:ext cx="1248156" cy="292608"/>
+            <a:off x="6309360" y="5833872"/>
+            <a:ext cx="1463040" cy="347472"/>
           </a:xfrm>
           <a:prstGeom prst="roundRect">
             <a:avLst>
-              <a:gd name="adj" fmla="val 15000"/>
+              <a:gd name="adj" fmla="val 12000"/>
             </a:avLst>
           </a:prstGeom>
           <a:solidFill>
@@ -7177,12 +7196,12 @@
           </a:fontRef>
         </p:style>
         <p:txBody>
-          <a:bodyPr rtlCol="0" anchor="ctr" tIns="25400" bIns="25400" lIns="76200" rIns="76200" wrap="none"/>
+          <a:bodyPr rtlCol="0" anchor="ctr" tIns="25400" bIns="25400" lIns="101600" rIns="101600" wrap="none"/>
           <a:lstStyle/>
           <a:p>
             <a:pPr algn="ctr"/>
             <a:r>
-              <a:rPr sz="1000" b="0">
+              <a:rPr sz="1100" b="0" i="0">
                 <a:solidFill>
                   <a:srgbClr val="2E6FD6"/>
                 </a:solidFill>
@@ -7221,14 +7240,57 @@
       <p:grpSpPr/>
       <p:sp>
         <p:nvSpPr>
-          <p:cNvPr id="2" name="TextBox 1"/>
+          <p:cNvPr id="2" name="Rectangle 1"/>
+          <p:cNvSpPr/>
+          <p:nvPr/>
+        </p:nvSpPr>
+        <p:spPr>
+          <a:xfrm>
+            <a:off x="0" y="502920"/>
+            <a:ext cx="12191695" cy="12700"/>
+          </a:xfrm>
+          <a:prstGeom prst="rect">
+            <a:avLst/>
+          </a:prstGeom>
+          <a:solidFill>
+            <a:srgbClr val="CBD5E1"/>
+          </a:solidFill>
+          <a:ln>
+            <a:noFill/>
+          </a:ln>
+        </p:spPr>
+        <p:style>
+          <a:lnRef idx="1">
+            <a:schemeClr val="accent1"/>
+          </a:lnRef>
+          <a:fillRef idx="3">
+            <a:schemeClr val="accent1"/>
+          </a:fillRef>
+          <a:effectRef idx="2">
+            <a:schemeClr val="accent1"/>
+          </a:effectRef>
+          <a:fontRef idx="minor">
+            <a:schemeClr val="lt1"/>
+          </a:fontRef>
+        </p:style>
+        <p:txBody>
+          <a:bodyPr rtlCol="0" anchor="ctr"/>
+          <a:lstStyle/>
+          <a:p>
+            <a:pPr algn="ctr"/>
+          </a:p>
+        </p:txBody>
+      </p:sp>
+      <p:sp>
+        <p:nvSpPr>
+          <p:cNvPr id="3" name="TextBox 2"/>
           <p:cNvSpPr txBox="1"/>
           <p:nvPr/>
         </p:nvSpPr>
         <p:spPr>
           <a:xfrm>
-            <a:off x="457200" y="274320"/>
-            <a:ext cx="1097280" cy="365760"/>
+            <a:off x="548640" y="164592"/>
+            <a:ext cx="1371600" cy="320040"/>
           </a:xfrm>
           <a:prstGeom prst="rect">
             <a:avLst/>
@@ -7242,7 +7304,7 @@
           <a:lstStyle/>
           <a:p>
             <a:r>
-              <a:rPr sz="1300" b="1">
+              <a:rPr sz="1600" b="1" i="0">
                 <a:solidFill>
                   <a:srgbClr val="C8102E"/>
                 </a:solidFill>
@@ -7251,7 +7313,7 @@
               <a:t>SIX</a:t>
             </a:r>
             <a:r>
-              <a:rPr sz="1300" b="0">
+              <a:rPr sz="1600" b="0" i="0">
                 <a:solidFill>
                   <a:srgbClr val="475569"/>
                 </a:solidFill>
@@ -7264,14 +7326,14 @@
       </p:sp>
       <p:sp>
         <p:nvSpPr>
-          <p:cNvPr id="3" name="TextBox 2"/>
+          <p:cNvPr id="4" name="TextBox 3"/>
           <p:cNvSpPr txBox="1"/>
           <p:nvPr/>
         </p:nvSpPr>
         <p:spPr>
           <a:xfrm>
-            <a:off x="6858000" y="274320"/>
-            <a:ext cx="2011680" cy="274320"/>
+            <a:off x="3657600" y="182880"/>
+            <a:ext cx="4876495" cy="274320"/>
           </a:xfrm>
           <a:prstGeom prst="rect">
             <a:avLst/>
@@ -7284,22 +7346,22 @@
           </a:bodyPr>
           <a:lstStyle/>
           <a:p>
-            <a:pPr algn="r"/>
-            <a:r>
-              <a:rPr sz="800" b="0">
+            <a:pPr algn="ctr"/>
+            <a:r>
+              <a:rPr sz="1000" b="0" i="0">
                 <a:solidFill>
                   <a:srgbClr val="94A3B8"/>
                 </a:solidFill>
                 <a:latin typeface="Segoe UI"/>
               </a:rPr>
-              <a:t>05 / 06  —  Live Demo</a:t>
+              <a:t>05 / 06 — LIVE DEMO</a:t>
             </a:r>
           </a:p>
         </p:txBody>
       </p:sp>
       <p:pic>
         <p:nvPicPr>
-          <p:cNvPr id="4" name="Picture 3" descr="pptx_slide2_Google_Shape_64_p14.png"/>
+          <p:cNvPr id="5" name="Picture 4" descr="pptx_slide2_Google_Shape_64_p14.png"/>
           <p:cNvPicPr>
             <a:picLocks noChangeAspect="1"/>
           </p:cNvPicPr>
@@ -7313,8 +7375,8 @@
         </p:blipFill>
         <p:spPr>
           <a:xfrm>
-            <a:off x="7863840" y="228600"/>
-            <a:ext cx="1005840" cy="276071"/>
+            <a:off x="10515600" y="109728"/>
+            <a:ext cx="1371600" cy="376460"/>
           </a:xfrm>
           <a:prstGeom prst="rect">
             <a:avLst/>
@@ -7323,14 +7385,14 @@
       </p:pic>
       <p:sp>
         <p:nvSpPr>
-          <p:cNvPr id="5" name="TextBox 4"/>
+          <p:cNvPr id="6" name="TextBox 5"/>
           <p:cNvSpPr txBox="1"/>
           <p:nvPr/>
         </p:nvSpPr>
         <p:spPr>
           <a:xfrm>
-            <a:off x="548640" y="822960"/>
-            <a:ext cx="3657600" cy="274320"/>
+            <a:off x="731520" y="914400"/>
+            <a:ext cx="5029200" cy="274320"/>
           </a:xfrm>
           <a:prstGeom prst="rect">
             <a:avLst/>
@@ -7352,7 +7414,7 @@
               </a:spcAft>
             </a:pPr>
             <a:r>
-              <a:rPr sz="1000" b="1">
+              <a:rPr sz="1200" b="1" i="0">
                 <a:solidFill>
                   <a:srgbClr val="C8102E"/>
                 </a:solidFill>
@@ -7365,14 +7427,14 @@
       </p:sp>
       <p:sp>
         <p:nvSpPr>
-          <p:cNvPr id="6" name="TextBox 5"/>
+          <p:cNvPr id="7" name="TextBox 6"/>
           <p:cNvSpPr txBox="1"/>
           <p:nvPr/>
         </p:nvSpPr>
         <p:spPr>
           <a:xfrm>
-            <a:off x="548640" y="1143000"/>
-            <a:ext cx="3840480" cy="731520"/>
+            <a:off x="731520" y="1371600"/>
+            <a:ext cx="5029200" cy="914400"/>
           </a:xfrm>
           <a:prstGeom prst="rect">
             <a:avLst/>
@@ -7386,7 +7448,7 @@
           <a:lstStyle/>
           <a:p>
             <a:r>
-              <a:rPr sz="2600" b="1">
+              <a:rPr sz="3200" b="1" i="0">
                 <a:solidFill>
                   <a:srgbClr val="0F172A"/>
                 </a:solidFill>
@@ -7395,7 +7457,7 @@
               <a:t>From CRM to advisory </a:t>
             </a:r>
             <a:r>
-              <a:rPr sz="2600" b="1">
+              <a:rPr sz="3200" b="1" i="1">
                 <a:solidFill>
                   <a:srgbClr val="C8102E"/>
                 </a:solidFill>
@@ -7408,14 +7470,14 @@
       </p:sp>
       <p:sp>
         <p:nvSpPr>
-          <p:cNvPr id="7" name="TextBox 6"/>
+          <p:cNvPr id="8" name="TextBox 7"/>
           <p:cNvSpPr txBox="1"/>
           <p:nvPr/>
         </p:nvSpPr>
         <p:spPr>
           <a:xfrm>
-            <a:off x="548640" y="1920240"/>
-            <a:ext cx="3657600" cy="548640"/>
+            <a:off x="731520" y="2468880"/>
+            <a:ext cx="4754880" cy="640080"/>
           </a:xfrm>
           <a:prstGeom prst="rect">
             <a:avLst/>
@@ -7437,7 +7499,7 @@
               </a:spcAft>
             </a:pPr>
             <a:r>
-              <a:rPr sz="1100" b="0">
+              <a:rPr sz="1400" b="0" i="0">
                 <a:solidFill>
                   <a:srgbClr val="475569"/>
                 </a:solidFill>
@@ -7450,14 +7512,14 @@
       </p:sp>
       <p:sp>
         <p:nvSpPr>
-          <p:cNvPr id="8" name="Oval 7"/>
+          <p:cNvPr id="9" name="Oval 8"/>
           <p:cNvSpPr/>
           <p:nvPr/>
         </p:nvSpPr>
         <p:spPr>
           <a:xfrm>
-            <a:off x="548640" y="2560320"/>
-            <a:ext cx="228600" cy="228600"/>
+            <a:off x="731520" y="3291840"/>
+            <a:ext cx="274320" cy="274320"/>
           </a:xfrm>
           <a:prstGeom prst="ellipse">
             <a:avLst/>
@@ -7489,7 +7551,7 @@
           <a:p>
             <a:pPr algn="ctr"/>
             <a:r>
-              <a:rPr sz="800" b="1">
+              <a:rPr sz="1000" b="1" i="0">
                 <a:solidFill>
                   <a:srgbClr val="FFFFFF"/>
                 </a:solidFill>
@@ -7502,14 +7564,14 @@
       </p:sp>
       <p:sp>
         <p:nvSpPr>
-          <p:cNvPr id="9" name="TextBox 8"/>
+          <p:cNvPr id="10" name="TextBox 9"/>
           <p:cNvSpPr txBox="1"/>
           <p:nvPr/>
         </p:nvSpPr>
         <p:spPr>
           <a:xfrm>
-            <a:off x="868680" y="2560320"/>
-            <a:ext cx="3474720" cy="274320"/>
+            <a:off x="1143000" y="3291840"/>
+            <a:ext cx="4572000" cy="365760"/>
           </a:xfrm>
           <a:prstGeom prst="rect">
             <a:avLst/>
@@ -7531,7 +7593,7 @@
               </a:spcAft>
             </a:pPr>
             <a:r>
-              <a:rPr sz="1000" b="0">
+              <a:rPr sz="1200" b="0" i="0">
                 <a:solidFill>
                   <a:srgbClr val="475569"/>
                 </a:solidFill>
@@ -7544,14 +7606,14 @@
       </p:sp>
       <p:sp>
         <p:nvSpPr>
-          <p:cNvPr id="10" name="Oval 9"/>
+          <p:cNvPr id="11" name="Oval 10"/>
           <p:cNvSpPr/>
           <p:nvPr/>
         </p:nvSpPr>
         <p:spPr>
           <a:xfrm>
-            <a:off x="548640" y="2907792"/>
-            <a:ext cx="228600" cy="228600"/>
+            <a:off x="731520" y="3749040"/>
+            <a:ext cx="274320" cy="274320"/>
           </a:xfrm>
           <a:prstGeom prst="ellipse">
             <a:avLst/>
@@ -7583,7 +7645,7 @@
           <a:p>
             <a:pPr algn="ctr"/>
             <a:r>
-              <a:rPr sz="800" b="1">
+              <a:rPr sz="1000" b="1" i="0">
                 <a:solidFill>
                   <a:srgbClr val="FFFFFF"/>
                 </a:solidFill>
@@ -7596,14 +7658,14 @@
       </p:sp>
       <p:sp>
         <p:nvSpPr>
-          <p:cNvPr id="11" name="TextBox 10"/>
+          <p:cNvPr id="12" name="TextBox 11"/>
           <p:cNvSpPr txBox="1"/>
           <p:nvPr/>
         </p:nvSpPr>
         <p:spPr>
           <a:xfrm>
-            <a:off x="868680" y="2907792"/>
-            <a:ext cx="3474720" cy="274320"/>
+            <a:off x="1143000" y="3749040"/>
+            <a:ext cx="4572000" cy="365760"/>
           </a:xfrm>
           <a:prstGeom prst="rect">
             <a:avLst/>
@@ -7625,7 +7687,7 @@
               </a:spcAft>
             </a:pPr>
             <a:r>
-              <a:rPr sz="1000" b="0">
+              <a:rPr sz="1200" b="0" i="0">
                 <a:solidFill>
                   <a:srgbClr val="475569"/>
                 </a:solidFill>
@@ -7638,14 +7700,14 @@
       </p:sp>
       <p:sp>
         <p:nvSpPr>
-          <p:cNvPr id="12" name="Oval 11"/>
+          <p:cNvPr id="13" name="Oval 12"/>
           <p:cNvSpPr/>
           <p:nvPr/>
         </p:nvSpPr>
         <p:spPr>
           <a:xfrm>
-            <a:off x="548640" y="3255264"/>
-            <a:ext cx="228600" cy="228600"/>
+            <a:off x="731520" y="4206240"/>
+            <a:ext cx="274320" cy="274320"/>
           </a:xfrm>
           <a:prstGeom prst="ellipse">
             <a:avLst/>
@@ -7677,7 +7739,7 @@
           <a:p>
             <a:pPr algn="ctr"/>
             <a:r>
-              <a:rPr sz="800" b="1">
+              <a:rPr sz="1000" b="1" i="0">
                 <a:solidFill>
                   <a:srgbClr val="FFFFFF"/>
                 </a:solidFill>
@@ -7690,14 +7752,14 @@
       </p:sp>
       <p:sp>
         <p:nvSpPr>
-          <p:cNvPr id="13" name="TextBox 12"/>
+          <p:cNvPr id="14" name="TextBox 13"/>
           <p:cNvSpPr txBox="1"/>
           <p:nvPr/>
         </p:nvSpPr>
         <p:spPr>
           <a:xfrm>
-            <a:off x="868680" y="3255264"/>
-            <a:ext cx="3474720" cy="274320"/>
+            <a:off x="1143000" y="4206240"/>
+            <a:ext cx="4572000" cy="365760"/>
           </a:xfrm>
           <a:prstGeom prst="rect">
             <a:avLst/>
@@ -7719,7 +7781,7 @@
               </a:spcAft>
             </a:pPr>
             <a:r>
-              <a:rPr sz="1000" b="0">
+              <a:rPr sz="1200" b="0" i="0">
                 <a:solidFill>
                   <a:srgbClr val="475569"/>
                 </a:solidFill>
@@ -7732,14 +7794,14 @@
       </p:sp>
       <p:sp>
         <p:nvSpPr>
-          <p:cNvPr id="14" name="Oval 13"/>
+          <p:cNvPr id="15" name="Oval 14"/>
           <p:cNvSpPr/>
           <p:nvPr/>
         </p:nvSpPr>
         <p:spPr>
           <a:xfrm>
-            <a:off x="548640" y="3602736"/>
-            <a:ext cx="228600" cy="228600"/>
+            <a:off x="731520" y="4663440"/>
+            <a:ext cx="274320" cy="274320"/>
           </a:xfrm>
           <a:prstGeom prst="ellipse">
             <a:avLst/>
@@ -7771,7 +7833,7 @@
           <a:p>
             <a:pPr algn="ctr"/>
             <a:r>
-              <a:rPr sz="800" b="1">
+              <a:rPr sz="1000" b="1" i="0">
                 <a:solidFill>
                   <a:srgbClr val="FFFFFF"/>
                 </a:solidFill>
@@ -7784,14 +7846,14 @@
       </p:sp>
       <p:sp>
         <p:nvSpPr>
-          <p:cNvPr id="15" name="TextBox 14"/>
+          <p:cNvPr id="16" name="TextBox 15"/>
           <p:cNvSpPr txBox="1"/>
           <p:nvPr/>
         </p:nvSpPr>
         <p:spPr>
           <a:xfrm>
-            <a:off x="868680" y="3602736"/>
-            <a:ext cx="3474720" cy="274320"/>
+            <a:off x="1143000" y="4663440"/>
+            <a:ext cx="4572000" cy="365760"/>
           </a:xfrm>
           <a:prstGeom prst="rect">
             <a:avLst/>
@@ -7813,7 +7875,7 @@
               </a:spcAft>
             </a:pPr>
             <a:r>
-              <a:rPr sz="1000" b="0">
+              <a:rPr sz="1200" b="0" i="0">
                 <a:solidFill>
                   <a:srgbClr val="475569"/>
                 </a:solidFill>
@@ -7826,18 +7888,18 @@
       </p:sp>
       <p:sp>
         <p:nvSpPr>
-          <p:cNvPr id="16" name="Rounded Rectangle 15"/>
+          <p:cNvPr id="17" name="Rounded Rectangle 16"/>
           <p:cNvSpPr/>
           <p:nvPr/>
         </p:nvSpPr>
         <p:spPr>
           <a:xfrm>
-            <a:off x="548640" y="4069080"/>
-            <a:ext cx="2286000" cy="320040"/>
+            <a:off x="731520" y="5394960"/>
+            <a:ext cx="2926080" cy="365760"/>
           </a:xfrm>
           <a:prstGeom prst="roundRect">
             <a:avLst>
-              <a:gd name="adj" fmla="val 2000"/>
+              <a:gd name="adj" fmla="val 1500"/>
             </a:avLst>
           </a:prstGeom>
           <a:solidFill>
@@ -7873,14 +7935,14 @@
       </p:sp>
       <p:sp>
         <p:nvSpPr>
-          <p:cNvPr id="17" name="TextBox 16"/>
+          <p:cNvPr id="18" name="TextBox 17"/>
           <p:cNvSpPr txBox="1"/>
           <p:nvPr/>
         </p:nvSpPr>
         <p:spPr>
           <a:xfrm>
-            <a:off x="685800" y="4069080"/>
-            <a:ext cx="2103120" cy="320040"/>
+            <a:off x="868680" y="5394960"/>
+            <a:ext cx="2743200" cy="365760"/>
           </a:xfrm>
           <a:prstGeom prst="rect">
             <a:avLst/>
@@ -7893,18 +7955,17 @@
           </a:bodyPr>
           <a:lstStyle/>
           <a:p>
-            <a:pPr algn="l"/>
-            <a:r>
-              <a:rPr sz="1000" b="0">
+            <a:r>
+              <a:rPr sz="1200" b="0" i="0">
                 <a:solidFill>
                   <a:srgbClr val="16A34A"/>
                 </a:solidFill>
                 <a:latin typeface="Segoe UI"/>
               </a:rPr>
-              <a:t>● </a:t>
-            </a:r>
-            <a:r>
-              <a:rPr sz="1000" b="0">
+              <a:t>●  </a:t>
+            </a:r>
+            <a:r>
+              <a:rPr sz="1200" b="0" i="0">
                 <a:solidFill>
                   <a:srgbClr val="475569"/>
                 </a:solidFill>
@@ -7917,18 +7978,112 @@
       </p:sp>
       <p:sp>
         <p:nvSpPr>
-          <p:cNvPr id="18" name="Rounded Rectangle 17"/>
+          <p:cNvPr id="19" name="Rounded Rectangle 18"/>
           <p:cNvSpPr/>
           <p:nvPr/>
         </p:nvSpPr>
         <p:spPr>
           <a:xfrm>
-            <a:off x="4572000" y="0"/>
-            <a:ext cx="4572000" cy="5143500"/>
+            <a:off x="6035040" y="0"/>
+            <a:ext cx="6156655" cy="6858000"/>
           </a:xfrm>
           <a:prstGeom prst="roundRect">
             <a:avLst>
-              <a:gd name="adj" fmla="val 2000"/>
+              <a:gd name="adj" fmla="val 1500"/>
+            </a:avLst>
+          </a:prstGeom>
+          <a:solidFill>
+            <a:srgbClr val="F1F5F9"/>
+          </a:solidFill>
+          <a:ln>
+            <a:solidFill>
+              <a:srgbClr val="F1F5F9"/>
+            </a:solidFill>
+          </a:ln>
+        </p:spPr>
+        <p:style>
+          <a:lnRef idx="1">
+            <a:schemeClr val="accent1"/>
+          </a:lnRef>
+          <a:fillRef idx="3">
+            <a:schemeClr val="accent1"/>
+          </a:fillRef>
+          <a:effectRef idx="2">
+            <a:schemeClr val="accent1"/>
+          </a:effectRef>
+          <a:fontRef idx="minor">
+            <a:schemeClr val="lt1"/>
+          </a:fontRef>
+        </p:style>
+        <p:txBody>
+          <a:bodyPr rtlCol="0" anchor="ctr"/>
+          <a:lstStyle/>
+          <a:p>
+            <a:pPr algn="ctr"/>
+          </a:p>
+        </p:txBody>
+      </p:sp>
+      <p:sp>
+        <p:nvSpPr>
+          <p:cNvPr id="20" name="Rounded Rectangle 19"/>
+          <p:cNvSpPr/>
+          <p:nvPr/>
+        </p:nvSpPr>
+        <p:spPr>
+          <a:xfrm>
+            <a:off x="6400800" y="640080"/>
+            <a:ext cx="5425135" cy="5669280"/>
+          </a:xfrm>
+          <a:prstGeom prst="roundRect">
+            <a:avLst>
+              <a:gd name="adj" fmla="val 1500"/>
+            </a:avLst>
+          </a:prstGeom>
+          <a:solidFill>
+            <a:srgbClr val="FFFFFF"/>
+          </a:solidFill>
+          <a:ln w="12700">
+            <a:solidFill>
+              <a:srgbClr val="CBD5E1"/>
+            </a:solidFill>
+          </a:ln>
+        </p:spPr>
+        <p:style>
+          <a:lnRef idx="1">
+            <a:schemeClr val="accent1"/>
+          </a:lnRef>
+          <a:fillRef idx="3">
+            <a:schemeClr val="accent1"/>
+          </a:fillRef>
+          <a:effectRef idx="2">
+            <a:schemeClr val="accent1"/>
+          </a:effectRef>
+          <a:fontRef idx="minor">
+            <a:schemeClr val="lt1"/>
+          </a:fontRef>
+        </p:style>
+        <p:txBody>
+          <a:bodyPr rtlCol="0" anchor="ctr"/>
+          <a:lstStyle/>
+          <a:p>
+            <a:pPr algn="ctr"/>
+          </a:p>
+        </p:txBody>
+      </p:sp>
+      <p:sp>
+        <p:nvSpPr>
+          <p:cNvPr id="21" name="Rounded Rectangle 20"/>
+          <p:cNvSpPr/>
+          <p:nvPr/>
+        </p:nvSpPr>
+        <p:spPr>
+          <a:xfrm>
+            <a:off x="6400800" y="640080"/>
+            <a:ext cx="5425135" cy="411480"/>
+          </a:xfrm>
+          <a:prstGeom prst="roundRect">
+            <a:avLst>
+              <a:gd name="adj" fmla="val 1500"/>
             </a:avLst>
           </a:prstGeom>
           <a:solidFill>
@@ -7964,18 +8119,147 @@
       </p:sp>
       <p:sp>
         <p:nvSpPr>
-          <p:cNvPr id="19" name="Rounded Rectangle 18"/>
+          <p:cNvPr id="22" name="Oval 21"/>
           <p:cNvSpPr/>
           <p:nvPr/>
         </p:nvSpPr>
         <p:spPr>
           <a:xfrm>
-            <a:off x="4846320" y="457200"/>
-            <a:ext cx="4023360" cy="4206240"/>
+            <a:off x="6583680" y="758952"/>
+            <a:ext cx="137160" cy="137160"/>
+          </a:xfrm>
+          <a:prstGeom prst="ellipse">
+            <a:avLst/>
+          </a:prstGeom>
+          <a:solidFill>
+            <a:srgbClr val="EF4444"/>
+          </a:solidFill>
+          <a:ln>
+            <a:noFill/>
+          </a:ln>
+        </p:spPr>
+        <p:style>
+          <a:lnRef idx="1">
+            <a:schemeClr val="accent1"/>
+          </a:lnRef>
+          <a:fillRef idx="3">
+            <a:schemeClr val="accent1"/>
+          </a:fillRef>
+          <a:effectRef idx="2">
+            <a:schemeClr val="accent1"/>
+          </a:effectRef>
+          <a:fontRef idx="minor">
+            <a:schemeClr val="lt1"/>
+          </a:fontRef>
+        </p:style>
+        <p:txBody>
+          <a:bodyPr rtlCol="0" anchor="ctr"/>
+          <a:lstStyle/>
+          <a:p>
+            <a:pPr algn="ctr"/>
+          </a:p>
+        </p:txBody>
+      </p:sp>
+      <p:sp>
+        <p:nvSpPr>
+          <p:cNvPr id="23" name="Oval 22"/>
+          <p:cNvSpPr/>
+          <p:nvPr/>
+        </p:nvSpPr>
+        <p:spPr>
+          <a:xfrm>
+            <a:off x="6812280" y="758952"/>
+            <a:ext cx="137160" cy="137160"/>
+          </a:xfrm>
+          <a:prstGeom prst="ellipse">
+            <a:avLst/>
+          </a:prstGeom>
+          <a:solidFill>
+            <a:srgbClr val="F59E0B"/>
+          </a:solidFill>
+          <a:ln>
+            <a:noFill/>
+          </a:ln>
+        </p:spPr>
+        <p:style>
+          <a:lnRef idx="1">
+            <a:schemeClr val="accent1"/>
+          </a:lnRef>
+          <a:fillRef idx="3">
+            <a:schemeClr val="accent1"/>
+          </a:fillRef>
+          <a:effectRef idx="2">
+            <a:schemeClr val="accent1"/>
+          </a:effectRef>
+          <a:fontRef idx="minor">
+            <a:schemeClr val="lt1"/>
+          </a:fontRef>
+        </p:style>
+        <p:txBody>
+          <a:bodyPr rtlCol="0" anchor="ctr"/>
+          <a:lstStyle/>
+          <a:p>
+            <a:pPr algn="ctr"/>
+          </a:p>
+        </p:txBody>
+      </p:sp>
+      <p:sp>
+        <p:nvSpPr>
+          <p:cNvPr id="24" name="Oval 23"/>
+          <p:cNvSpPr/>
+          <p:nvPr/>
+        </p:nvSpPr>
+        <p:spPr>
+          <a:xfrm>
+            <a:off x="7040880" y="758952"/>
+            <a:ext cx="137160" cy="137160"/>
+          </a:xfrm>
+          <a:prstGeom prst="ellipse">
+            <a:avLst/>
+          </a:prstGeom>
+          <a:solidFill>
+            <a:srgbClr val="22C55E"/>
+          </a:solidFill>
+          <a:ln>
+            <a:noFill/>
+          </a:ln>
+        </p:spPr>
+        <p:style>
+          <a:lnRef idx="1">
+            <a:schemeClr val="accent1"/>
+          </a:lnRef>
+          <a:fillRef idx="3">
+            <a:schemeClr val="accent1"/>
+          </a:fillRef>
+          <a:effectRef idx="2">
+            <a:schemeClr val="accent1"/>
+          </a:effectRef>
+          <a:fontRef idx="minor">
+            <a:schemeClr val="lt1"/>
+          </a:fontRef>
+        </p:style>
+        <p:txBody>
+          <a:bodyPr rtlCol="0" anchor="ctr"/>
+          <a:lstStyle/>
+          <a:p>
+            <a:pPr algn="ctr"/>
+          </a:p>
+        </p:txBody>
+      </p:sp>
+      <p:sp>
+        <p:nvSpPr>
+          <p:cNvPr id="25" name="Rounded Rectangle 24"/>
+          <p:cNvSpPr/>
+          <p:nvPr/>
+        </p:nvSpPr>
+        <p:spPr>
+          <a:xfrm>
+            <a:off x="7498080" y="749808"/>
+            <a:ext cx="2926080" cy="201168"/>
           </a:xfrm>
           <a:prstGeom prst="roundRect">
             <a:avLst>
-              <a:gd name="adj" fmla="val 2000"/>
+              <a:gd name="adj" fmla="val 1500"/>
             </a:avLst>
           </a:prstGeom>
           <a:solidFill>
@@ -8002,27 +8286,36 @@
           </a:fontRef>
         </p:style>
         <p:txBody>
-          <a:bodyPr rtlCol="0" anchor="ctr"/>
+          <a:bodyPr rtlCol="0" anchor="ctr" tIns="0" bIns="0" lIns="76200"/>
           <a:lstStyle/>
           <a:p>
             <a:pPr algn="ctr"/>
-          </a:p>
-        </p:txBody>
-      </p:sp>
-      <p:sp>
-        <p:nvSpPr>
-          <p:cNvPr id="20" name="Rounded Rectangle 19"/>
+            <a:r>
+              <a:rPr sz="800" b="0" i="0">
+                <a:solidFill>
+                  <a:srgbClr val="475569"/>
+                </a:solidFill>
+                <a:latin typeface="Consolas"/>
+              </a:rPr>
+              <a:t>wealthadvisor-ai.fly.dev</a:t>
+            </a:r>
+          </a:p>
+        </p:txBody>
+      </p:sp>
+      <p:sp>
+        <p:nvSpPr>
+          <p:cNvPr id="26" name="Rounded Rectangle 25"/>
           <p:cNvSpPr/>
           <p:nvPr/>
         </p:nvSpPr>
         <p:spPr>
           <a:xfrm>
-            <a:off x="4846320" y="457200"/>
-            <a:ext cx="4023360" cy="320040"/>
+            <a:off x="6400800" y="1051560"/>
+            <a:ext cx="1463040" cy="5257800"/>
           </a:xfrm>
           <a:prstGeom prst="roundRect">
             <a:avLst>
-              <a:gd name="adj" fmla="val 2000"/>
+              <a:gd name="adj" fmla="val 1500"/>
             </a:avLst>
           </a:prstGeom>
           <a:solidFill>
@@ -8058,23 +8351,70 @@
       </p:sp>
       <p:sp>
         <p:nvSpPr>
-          <p:cNvPr id="21" name="Oval 20"/>
+          <p:cNvPr id="27" name="TextBox 26"/>
+          <p:cNvSpPr txBox="1"/>
+          <p:nvPr/>
+        </p:nvSpPr>
+        <p:spPr>
+          <a:xfrm>
+            <a:off x="6510528" y="1097280"/>
+            <a:ext cx="1188720" cy="228600"/>
+          </a:xfrm>
+          <a:prstGeom prst="rect">
+            <a:avLst/>
+          </a:prstGeom>
+          <a:noFill/>
+        </p:spPr>
+        <p:txBody>
+          <a:bodyPr wrap="square">
+            <a:spAutoFit/>
+          </a:bodyPr>
+          <a:lstStyle/>
+          <a:p>
+            <a:r>
+              <a:rPr sz="900" b="1" i="0">
+                <a:solidFill>
+                  <a:srgbClr val="C8102E"/>
+                </a:solidFill>
+                <a:latin typeface="Segoe UI"/>
+              </a:rPr>
+              <a:t>SIX </a:t>
+            </a:r>
+            <a:r>
+              <a:rPr sz="900" b="0" i="0">
+                <a:solidFill>
+                  <a:srgbClr val="475569"/>
+                </a:solidFill>
+                <a:latin typeface="Segoe UI"/>
+              </a:rPr>
+              <a:t>AI</a:t>
+            </a:r>
+          </a:p>
+        </p:txBody>
+      </p:sp>
+      <p:sp>
+        <p:nvSpPr>
+          <p:cNvPr id="28" name="Rounded Rectangle 27"/>
           <p:cNvSpPr/>
           <p:nvPr/>
         </p:nvSpPr>
         <p:spPr>
           <a:xfrm>
-            <a:off x="4983480" y="530352"/>
-            <a:ext cx="109728" cy="109728"/>
-          </a:xfrm>
-          <a:prstGeom prst="ellipse">
-            <a:avLst/>
+            <a:off x="6446520" y="1417320"/>
+            <a:ext cx="1371600" cy="384048"/>
+          </a:xfrm>
+          <a:prstGeom prst="roundRect">
+            <a:avLst>
+              <a:gd name="adj" fmla="val 1500"/>
+            </a:avLst>
           </a:prstGeom>
           <a:solidFill>
-            <a:srgbClr val="EF4444"/>
+            <a:srgbClr val="FEF7F8"/>
           </a:solidFill>
           <a:ln>
-            <a:noFill/>
+            <a:solidFill>
+              <a:srgbClr val="FEF7F8"/>
+            </a:solidFill>
           </a:ln>
         </p:spPr>
         <p:style>
@@ -8101,20 +8441,20 @@
       </p:sp>
       <p:sp>
         <p:nvSpPr>
-          <p:cNvPr id="22" name="Oval 21"/>
+          <p:cNvPr id="29" name="Oval 28"/>
           <p:cNvSpPr/>
           <p:nvPr/>
         </p:nvSpPr>
         <p:spPr>
           <a:xfrm>
-            <a:off x="5166360" y="530352"/>
-            <a:ext cx="109728" cy="109728"/>
+            <a:off x="6510528" y="1463040"/>
+            <a:ext cx="237744" cy="237744"/>
           </a:xfrm>
           <a:prstGeom prst="ellipse">
             <a:avLst/>
           </a:prstGeom>
           <a:solidFill>
-            <a:srgbClr val="F59E0B"/>
+            <a:srgbClr val="C8102E"/>
           </a:solidFill>
           <a:ln>
             <a:noFill/>
@@ -8135,29 +8475,99 @@
           </a:fontRef>
         </p:style>
         <p:txBody>
-          <a:bodyPr rtlCol="0" anchor="ctr"/>
+          <a:bodyPr rtlCol="0" anchor="ctr" tIns="0" bIns="0"/>
           <a:lstStyle/>
           <a:p>
             <a:pPr algn="ctr"/>
-          </a:p>
-        </p:txBody>
-      </p:sp>
-      <p:sp>
-        <p:nvSpPr>
-          <p:cNvPr id="23" name="Oval 22"/>
+            <a:r>
+              <a:rPr sz="700" b="1" i="0">
+                <a:solidFill>
+                  <a:srgbClr val="FFFFFF"/>
+                </a:solidFill>
+                <a:latin typeface="Segoe UI"/>
+              </a:rPr>
+              <a:t>HS</a:t>
+            </a:r>
+          </a:p>
+        </p:txBody>
+      </p:sp>
+      <p:sp>
+        <p:nvSpPr>
+          <p:cNvPr id="30" name="TextBox 29"/>
+          <p:cNvSpPr txBox="1"/>
+          <p:nvPr/>
+        </p:nvSpPr>
+        <p:spPr>
+          <a:xfrm>
+            <a:off x="6812280" y="1435608"/>
+            <a:ext cx="1005840" cy="320040"/>
+          </a:xfrm>
+          <a:prstGeom prst="rect">
+            <a:avLst/>
+          </a:prstGeom>
+          <a:noFill/>
+        </p:spPr>
+        <p:txBody>
+          <a:bodyPr wrap="square">
+            <a:spAutoFit/>
+          </a:bodyPr>
+          <a:lstStyle/>
+          <a:p>
+            <a:pPr algn="l">
+              <a:spcBef>
+                <a:spcPts val="0"/>
+              </a:spcBef>
+              <a:spcAft>
+                <a:spcPts val="0"/>
+              </a:spcAft>
+            </a:pPr>
+            <a:r>
+              <a:rPr sz="800" b="1" i="0">
+                <a:solidFill>
+                  <a:srgbClr val="0F172A"/>
+                </a:solidFill>
+                <a:latin typeface="Segoe UI"/>
+              </a:rPr>
+              <a:t>H. Schneider</a:t>
+            </a:r>
+          </a:p>
+          <a:p>
+            <a:pPr algn="l">
+              <a:spcBef>
+                <a:spcPts val="0"/>
+              </a:spcBef>
+              <a:spcAft>
+                <a:spcPts val="0"/>
+              </a:spcAft>
+            </a:pPr>
+            <a:r>
+              <a:rPr sz="700" b="0" i="0">
+                <a:solidFill>
+                  <a:srgbClr val="475569"/>
+                </a:solidFill>
+                <a:latin typeface="Segoe UI"/>
+              </a:rPr>
+              <a:t>Balanced</a:t>
+            </a:r>
+          </a:p>
+        </p:txBody>
+      </p:sp>
+      <p:sp>
+        <p:nvSpPr>
+          <p:cNvPr id="31" name="Oval 30"/>
           <p:cNvSpPr/>
           <p:nvPr/>
         </p:nvSpPr>
         <p:spPr>
           <a:xfrm>
-            <a:off x="5349240" y="530352"/>
-            <a:ext cx="109728" cy="109728"/>
+            <a:off x="6510528" y="1920240"/>
+            <a:ext cx="237744" cy="237744"/>
           </a:xfrm>
           <a:prstGeom prst="ellipse">
             <a:avLst/>
           </a:prstGeom>
           <a:solidFill>
-            <a:srgbClr val="22C55E"/>
+            <a:srgbClr val="2E6FD6"/>
           </a:solidFill>
           <a:ln>
             <a:noFill/>
@@ -8178,36 +8588,102 @@
           </a:fontRef>
         </p:style>
         <p:txBody>
-          <a:bodyPr rtlCol="0" anchor="ctr"/>
+          <a:bodyPr rtlCol="0" anchor="ctr" tIns="0" bIns="0"/>
           <a:lstStyle/>
           <a:p>
             <a:pPr algn="ctr"/>
-          </a:p>
-        </p:txBody>
-      </p:sp>
-      <p:sp>
-        <p:nvSpPr>
-          <p:cNvPr id="24" name="Rounded Rectangle 23"/>
+            <a:r>
+              <a:rPr sz="700" b="1" i="0">
+                <a:solidFill>
+                  <a:srgbClr val="FFFFFF"/>
+                </a:solidFill>
+                <a:latin typeface="Segoe UI"/>
+              </a:rPr>
+              <a:t>MH</a:t>
+            </a:r>
+          </a:p>
+        </p:txBody>
+      </p:sp>
+      <p:sp>
+        <p:nvSpPr>
+          <p:cNvPr id="32" name="TextBox 31"/>
+          <p:cNvSpPr txBox="1"/>
+          <p:nvPr/>
+        </p:nvSpPr>
+        <p:spPr>
+          <a:xfrm>
+            <a:off x="6812280" y="1892808"/>
+            <a:ext cx="1005840" cy="320040"/>
+          </a:xfrm>
+          <a:prstGeom prst="rect">
+            <a:avLst/>
+          </a:prstGeom>
+          <a:noFill/>
+        </p:spPr>
+        <p:txBody>
+          <a:bodyPr wrap="square">
+            <a:spAutoFit/>
+          </a:bodyPr>
+          <a:lstStyle/>
+          <a:p>
+            <a:pPr algn="l">
+              <a:spcBef>
+                <a:spcPts val="0"/>
+              </a:spcBef>
+              <a:spcAft>
+                <a:spcPts val="0"/>
+              </a:spcAft>
+            </a:pPr>
+            <a:r>
+              <a:rPr sz="800" b="1" i="0">
+                <a:solidFill>
+                  <a:srgbClr val="0F172A"/>
+                </a:solidFill>
+                <a:latin typeface="Segoe UI"/>
+              </a:rPr>
+              <a:t>M. Huber</a:t>
+            </a:r>
+          </a:p>
+          <a:p>
+            <a:pPr algn="l">
+              <a:spcBef>
+                <a:spcPts val="0"/>
+              </a:spcBef>
+              <a:spcAft>
+                <a:spcPts val="0"/>
+              </a:spcAft>
+            </a:pPr>
+            <a:r>
+              <a:rPr sz="700" b="0" i="0">
+                <a:solidFill>
+                  <a:srgbClr val="475569"/>
+                </a:solidFill>
+                <a:latin typeface="Segoe UI"/>
+              </a:rPr>
+              <a:t>Defensive</a:t>
+            </a:r>
+          </a:p>
+        </p:txBody>
+      </p:sp>
+      <p:sp>
+        <p:nvSpPr>
+          <p:cNvPr id="33" name="Oval 32"/>
           <p:cNvSpPr/>
           <p:nvPr/>
         </p:nvSpPr>
         <p:spPr>
           <a:xfrm>
-            <a:off x="5669280" y="521207"/>
-            <a:ext cx="2286000" cy="182880"/>
-          </a:xfrm>
-          <a:prstGeom prst="roundRect">
-            <a:avLst>
-              <a:gd name="adj" fmla="val 2000"/>
-            </a:avLst>
+            <a:off x="6510528" y="2377440"/>
+            <a:ext cx="237744" cy="237744"/>
+          </a:xfrm>
+          <a:prstGeom prst="ellipse">
+            <a:avLst/>
           </a:prstGeom>
           <a:solidFill>
-            <a:srgbClr val="FFFFFF"/>
+            <a:srgbClr val="9B0C23"/>
           </a:solidFill>
-          <a:ln w="12700">
-            <a:solidFill>
-              <a:srgbClr val="CBD5E1"/>
-            </a:solidFill>
+          <a:ln>
+            <a:noFill/>
           </a:ln>
         </p:spPr>
         <p:style>
@@ -8225,36 +8701,300 @@
           </a:fontRef>
         </p:style>
         <p:txBody>
-          <a:bodyPr rtlCol="0" anchor="ctr" tIns="0" bIns="0" lIns="50800"/>
+          <a:bodyPr rtlCol="0" anchor="ctr" tIns="0" bIns="0"/>
           <a:lstStyle/>
           <a:p>
             <a:pPr algn="ctr"/>
             <a:r>
-              <a:rPr sz="700" b="0">
+              <a:rPr sz="700" b="1" i="0">
+                <a:solidFill>
+                  <a:srgbClr val="FFFFFF"/>
+                </a:solidFill>
+                <a:latin typeface="Segoe UI"/>
+              </a:rPr>
+              <a:t>ER</a:t>
+            </a:r>
+          </a:p>
+        </p:txBody>
+      </p:sp>
+      <p:sp>
+        <p:nvSpPr>
+          <p:cNvPr id="34" name="TextBox 33"/>
+          <p:cNvSpPr txBox="1"/>
+          <p:nvPr/>
+        </p:nvSpPr>
+        <p:spPr>
+          <a:xfrm>
+            <a:off x="6812280" y="2350008"/>
+            <a:ext cx="1005840" cy="320040"/>
+          </a:xfrm>
+          <a:prstGeom prst="rect">
+            <a:avLst/>
+          </a:prstGeom>
+          <a:noFill/>
+        </p:spPr>
+        <p:txBody>
+          <a:bodyPr wrap="square">
+            <a:spAutoFit/>
+          </a:bodyPr>
+          <a:lstStyle/>
+          <a:p>
+            <a:pPr algn="l">
+              <a:spcBef>
+                <a:spcPts val="0"/>
+              </a:spcBef>
+              <a:spcAft>
+                <a:spcPts val="0"/>
+              </a:spcAft>
+            </a:pPr>
+            <a:r>
+              <a:rPr sz="800" b="1" i="0">
+                <a:solidFill>
+                  <a:srgbClr val="0F172A"/>
+                </a:solidFill>
+                <a:latin typeface="Segoe UI"/>
+              </a:rPr>
+              <a:t>E. Räber</a:t>
+            </a:r>
+          </a:p>
+          <a:p>
+            <a:pPr algn="l">
+              <a:spcBef>
+                <a:spcPts val="0"/>
+              </a:spcBef>
+              <a:spcAft>
+                <a:spcPts val="0"/>
+              </a:spcAft>
+            </a:pPr>
+            <a:r>
+              <a:rPr sz="700" b="0" i="0">
                 <a:solidFill>
                   <a:srgbClr val="475569"/>
                 </a:solidFill>
-                <a:latin typeface="Consolas"/>
-              </a:rPr>
-              <a:t>wealthadvisor-ai.fly.dev</a:t>
-            </a:r>
-          </a:p>
-        </p:txBody>
-      </p:sp>
-      <p:sp>
-        <p:nvSpPr>
-          <p:cNvPr id="25" name="Rounded Rectangle 24"/>
+                <a:latin typeface="Segoe UI"/>
+              </a:rPr>
+              <a:t>Defensive</a:t>
+            </a:r>
+          </a:p>
+        </p:txBody>
+      </p:sp>
+      <p:sp>
+        <p:nvSpPr>
+          <p:cNvPr id="35" name="Oval 34"/>
           <p:cNvSpPr/>
           <p:nvPr/>
         </p:nvSpPr>
         <p:spPr>
           <a:xfrm>
-            <a:off x="4846320" y="777240"/>
-            <a:ext cx="1188720" cy="3886200"/>
+            <a:off x="6510528" y="2834640"/>
+            <a:ext cx="237744" cy="237744"/>
+          </a:xfrm>
+          <a:prstGeom prst="ellipse">
+            <a:avLst/>
+          </a:prstGeom>
+          <a:solidFill>
+            <a:srgbClr val="4F8BF0"/>
+          </a:solidFill>
+          <a:ln>
+            <a:noFill/>
+          </a:ln>
+        </p:spPr>
+        <p:style>
+          <a:lnRef idx="1">
+            <a:schemeClr val="accent1"/>
+          </a:lnRef>
+          <a:fillRef idx="3">
+            <a:schemeClr val="accent1"/>
+          </a:fillRef>
+          <a:effectRef idx="2">
+            <a:schemeClr val="accent1"/>
+          </a:effectRef>
+          <a:fontRef idx="minor">
+            <a:schemeClr val="lt1"/>
+          </a:fontRef>
+        </p:style>
+        <p:txBody>
+          <a:bodyPr rtlCol="0" anchor="ctr" tIns="0" bIns="0"/>
+          <a:lstStyle/>
+          <a:p>
+            <a:pPr algn="ctr"/>
+            <a:r>
+              <a:rPr sz="700" b="1" i="0">
+                <a:solidFill>
+                  <a:srgbClr val="FFFFFF"/>
+                </a:solidFill>
+                <a:latin typeface="Segoe UI"/>
+              </a:rPr>
+              <a:t>JA</a:t>
+            </a:r>
+          </a:p>
+        </p:txBody>
+      </p:sp>
+      <p:sp>
+        <p:nvSpPr>
+          <p:cNvPr id="36" name="TextBox 35"/>
+          <p:cNvSpPr txBox="1"/>
+          <p:nvPr/>
+        </p:nvSpPr>
+        <p:spPr>
+          <a:xfrm>
+            <a:off x="6812280" y="2807208"/>
+            <a:ext cx="1005840" cy="320040"/>
+          </a:xfrm>
+          <a:prstGeom prst="rect">
+            <a:avLst/>
+          </a:prstGeom>
+          <a:noFill/>
+        </p:spPr>
+        <p:txBody>
+          <a:bodyPr wrap="square">
+            <a:spAutoFit/>
+          </a:bodyPr>
+          <a:lstStyle/>
+          <a:p>
+            <a:pPr algn="l">
+              <a:spcBef>
+                <a:spcPts val="0"/>
+              </a:spcBef>
+              <a:spcAft>
+                <a:spcPts val="0"/>
+              </a:spcAft>
+            </a:pPr>
+            <a:r>
+              <a:rPr sz="800" b="1" i="0">
+                <a:solidFill>
+                  <a:srgbClr val="0F172A"/>
+                </a:solidFill>
+                <a:latin typeface="Segoe UI"/>
+              </a:rPr>
+              <a:t>J. Ammann</a:t>
+            </a:r>
+          </a:p>
+          <a:p>
+            <a:pPr algn="l">
+              <a:spcBef>
+                <a:spcPts val="0"/>
+              </a:spcBef>
+              <a:spcAft>
+                <a:spcPts val="0"/>
+              </a:spcAft>
+            </a:pPr>
+            <a:r>
+              <a:rPr sz="700" b="0" i="0">
+                <a:solidFill>
+                  <a:srgbClr val="475569"/>
+                </a:solidFill>
+                <a:latin typeface="Segoe UI"/>
+              </a:rPr>
+              <a:t>Growth</a:t>
+            </a:r>
+          </a:p>
+        </p:txBody>
+      </p:sp>
+      <p:sp>
+        <p:nvSpPr>
+          <p:cNvPr id="37" name="Rounded Rectangle 36"/>
+          <p:cNvSpPr/>
+          <p:nvPr/>
+        </p:nvSpPr>
+        <p:spPr>
+          <a:xfrm>
+            <a:off x="8092440" y="1143000"/>
+            <a:ext cx="3596335" cy="1097280"/>
           </a:xfrm>
           <a:prstGeom prst="roundRect">
             <a:avLst>
-              <a:gd name="adj" fmla="val 2000"/>
+              <a:gd name="adj" fmla="val 1500"/>
+            </a:avLst>
+          </a:prstGeom>
+          <a:solidFill>
+            <a:srgbClr val="FEF7F8"/>
+          </a:solidFill>
+          <a:ln w="12700">
+            <a:solidFill>
+              <a:srgbClr val="F0D0D5"/>
+            </a:solidFill>
+          </a:ln>
+        </p:spPr>
+        <p:style>
+          <a:lnRef idx="1">
+            <a:schemeClr val="accent1"/>
+          </a:lnRef>
+          <a:fillRef idx="3">
+            <a:schemeClr val="accent1"/>
+          </a:fillRef>
+          <a:effectRef idx="2">
+            <a:schemeClr val="accent1"/>
+          </a:effectRef>
+          <a:fontRef idx="minor">
+            <a:schemeClr val="lt1"/>
+          </a:fontRef>
+        </p:style>
+        <p:txBody>
+          <a:bodyPr rtlCol="0" anchor="ctr"/>
+          <a:lstStyle/>
+          <a:p>
+            <a:pPr algn="ctr"/>
+          </a:p>
+        </p:txBody>
+      </p:sp>
+      <p:sp>
+        <p:nvSpPr>
+          <p:cNvPr id="38" name="TextBox 37"/>
+          <p:cNvSpPr txBox="1"/>
+          <p:nvPr/>
+        </p:nvSpPr>
+        <p:spPr>
+          <a:xfrm>
+            <a:off x="8229600" y="1188720"/>
+            <a:ext cx="3322015" cy="1005840"/>
+          </a:xfrm>
+          <a:prstGeom prst="rect">
+            <a:avLst/>
+          </a:prstGeom>
+          <a:noFill/>
+        </p:spPr>
+        <p:txBody>
+          <a:bodyPr wrap="square">
+            <a:spAutoFit/>
+          </a:bodyPr>
+          <a:lstStyle/>
+          <a:p>
+            <a:r>
+              <a:rPr sz="800" b="1" i="0">
+                <a:solidFill>
+                  <a:srgbClr val="C8102E"/>
+                </a:solidFill>
+                <a:latin typeface="Segoe UI"/>
+              </a:rPr>
+              <a:t>Advisory Draft — </a:t>
+            </a:r>
+            <a:r>
+              <a:rPr sz="800" b="0" i="0">
+                <a:solidFill>
+                  <a:srgbClr val="475569"/>
+                </a:solidFill>
+                <a:latin typeface="Segoe UI"/>
+              </a:rPr>
+              <a:t>Dear Hubertus, the announced shutdown of AstraZeneca's chronic-illness research division directly conflicts with your foundation's mission. We recommend a swap into Roche Holding.</a:t>
+            </a:r>
+          </a:p>
+        </p:txBody>
+      </p:sp>
+      <p:sp>
+        <p:nvSpPr>
+          <p:cNvPr id="39" name="Rounded Rectangle 38"/>
+          <p:cNvSpPr/>
+          <p:nvPr/>
+        </p:nvSpPr>
+        <p:spPr>
+          <a:xfrm>
+            <a:off x="8092440" y="2331720"/>
+            <a:ext cx="3596335" cy="777240"/>
+          </a:xfrm>
+          <a:prstGeom prst="roundRect">
+            <a:avLst>
+              <a:gd name="adj" fmla="val 1500"/>
             </a:avLst>
           </a:prstGeom>
           <a:solidFill>
@@ -8290,156 +9030,14 @@
       </p:sp>
       <p:sp>
         <p:nvSpPr>
-          <p:cNvPr id="26" name="TextBox 25"/>
+          <p:cNvPr id="40" name="TextBox 39"/>
           <p:cNvSpPr txBox="1"/>
           <p:nvPr/>
         </p:nvSpPr>
         <p:spPr>
           <a:xfrm>
-            <a:off x="4937760" y="822960"/>
-            <a:ext cx="1005840" cy="228600"/>
-          </a:xfrm>
-          <a:prstGeom prst="rect">
-            <a:avLst/>
-          </a:prstGeom>
-          <a:noFill/>
-        </p:spPr>
-        <p:txBody>
-          <a:bodyPr wrap="square">
-            <a:spAutoFit/>
-          </a:bodyPr>
-          <a:lstStyle/>
-          <a:p>
-            <a:r>
-              <a:rPr sz="800" b="1">
-                <a:solidFill>
-                  <a:srgbClr val="C8102E"/>
-                </a:solidFill>
-                <a:latin typeface="Segoe UI"/>
-              </a:rPr>
-              <a:t>SIX </a:t>
-            </a:r>
-            <a:r>
-              <a:rPr sz="800" b="0">
-                <a:solidFill>
-                  <a:srgbClr val="475569"/>
-                </a:solidFill>
-                <a:latin typeface="Segoe UI"/>
-              </a:rPr>
-              <a:t>AI</a:t>
-            </a:r>
-          </a:p>
-        </p:txBody>
-      </p:sp>
-      <p:sp>
-        <p:nvSpPr>
-          <p:cNvPr id="27" name="Rounded Rectangle 26"/>
-          <p:cNvSpPr/>
-          <p:nvPr/>
-        </p:nvSpPr>
-        <p:spPr>
-          <a:xfrm>
-            <a:off x="4892040" y="1106424"/>
-            <a:ext cx="1097280" cy="320040"/>
-          </a:xfrm>
-          <a:prstGeom prst="roundRect">
-            <a:avLst>
-              <a:gd name="adj" fmla="val 2000"/>
-            </a:avLst>
-          </a:prstGeom>
-          <a:solidFill>
-            <a:srgbClr val="FDEEF0"/>
-          </a:solidFill>
-          <a:ln>
-            <a:solidFill>
-              <a:srgbClr val="FDEEF0"/>
-            </a:solidFill>
-          </a:ln>
-        </p:spPr>
-        <p:style>
-          <a:lnRef idx="1">
-            <a:schemeClr val="accent1"/>
-          </a:lnRef>
-          <a:fillRef idx="3">
-            <a:schemeClr val="accent1"/>
-          </a:fillRef>
-          <a:effectRef idx="2">
-            <a:schemeClr val="accent1"/>
-          </a:effectRef>
-          <a:fontRef idx="minor">
-            <a:schemeClr val="lt1"/>
-          </a:fontRef>
-        </p:style>
-        <p:txBody>
-          <a:bodyPr rtlCol="0" anchor="ctr"/>
-          <a:lstStyle/>
-          <a:p>
-            <a:pPr algn="ctr"/>
-          </a:p>
-        </p:txBody>
-      </p:sp>
-      <p:sp>
-        <p:nvSpPr>
-          <p:cNvPr id="28" name="Oval 27"/>
-          <p:cNvSpPr/>
-          <p:nvPr/>
-        </p:nvSpPr>
-        <p:spPr>
-          <a:xfrm>
-            <a:off x="4983480" y="1143000"/>
-            <a:ext cx="201168" cy="201168"/>
-          </a:xfrm>
-          <a:prstGeom prst="ellipse">
-            <a:avLst/>
-          </a:prstGeom>
-          <a:solidFill>
-            <a:srgbClr val="C8102E"/>
-          </a:solidFill>
-          <a:ln>
-            <a:noFill/>
-          </a:ln>
-        </p:spPr>
-        <p:style>
-          <a:lnRef idx="1">
-            <a:schemeClr val="accent1"/>
-          </a:lnRef>
-          <a:fillRef idx="3">
-            <a:schemeClr val="accent1"/>
-          </a:fillRef>
-          <a:effectRef idx="2">
-            <a:schemeClr val="accent1"/>
-          </a:effectRef>
-          <a:fontRef idx="minor">
-            <a:schemeClr val="lt1"/>
-          </a:fontRef>
-        </p:style>
-        <p:txBody>
-          <a:bodyPr rtlCol="0" anchor="ctr" tIns="0" bIns="0"/>
-          <a:lstStyle/>
-          <a:p>
-            <a:pPr algn="ctr"/>
-            <a:r>
-              <a:rPr sz="600" b="1">
-                <a:solidFill>
-                  <a:srgbClr val="FFFFFF"/>
-                </a:solidFill>
-                <a:latin typeface="Segoe UI"/>
-              </a:rPr>
-              <a:t>HS</a:t>
-            </a:r>
-          </a:p>
-        </p:txBody>
-      </p:sp>
-      <p:sp>
-        <p:nvSpPr>
-          <p:cNvPr id="29" name="TextBox 28"/>
-          <p:cNvSpPr txBox="1"/>
-          <p:nvPr/>
-        </p:nvSpPr>
-        <p:spPr>
-          <a:xfrm>
-            <a:off x="5230368" y="1124712"/>
-            <a:ext cx="822960" cy="274320"/>
+            <a:off x="8229600" y="2359152"/>
+            <a:ext cx="1828800" cy="228600"/>
           </a:xfrm>
           <a:prstGeom prst="rect">
             <a:avLst/>
@@ -8461,15 +9059,309 @@
               </a:spcAft>
             </a:pPr>
             <a:r>
-              <a:rPr sz="700" b="1">
-                <a:solidFill>
-                  <a:srgbClr val="0F172A"/>
-                </a:solidFill>
-                <a:latin typeface="Segoe UI"/>
-              </a:rPr>
-              <a:t>H. Schneider</a:t>
-            </a:r>
-          </a:p>
+              <a:rPr sz="800" b="1" i="0">
+                <a:solidFill>
+                  <a:srgbClr val="C8102E"/>
+                </a:solidFill>
+                <a:latin typeface="Segoe UI"/>
+              </a:rPr>
+              <a:t>CLIENT DNA</a:t>
+            </a:r>
+          </a:p>
+        </p:txBody>
+      </p:sp>
+      <p:sp>
+        <p:nvSpPr>
+          <p:cNvPr id="41" name="Rounded Rectangle 40"/>
+          <p:cNvSpPr/>
+          <p:nvPr/>
+        </p:nvSpPr>
+        <p:spPr>
+          <a:xfrm>
+            <a:off x="8229600" y="2651760"/>
+            <a:ext cx="1188720" cy="256032"/>
+          </a:xfrm>
+          <a:prstGeom prst="roundRect">
+            <a:avLst>
+              <a:gd name="adj" fmla="val 12000"/>
+            </a:avLst>
+          </a:prstGeom>
+          <a:solidFill>
+            <a:srgbClr val="EBF1FB"/>
+          </a:solidFill>
+          <a:ln w="9525">
+            <a:solidFill>
+              <a:srgbClr val="2E6FD6"/>
+            </a:solidFill>
+          </a:ln>
+        </p:spPr>
+        <p:style>
+          <a:lnRef idx="1">
+            <a:schemeClr val="accent1"/>
+          </a:lnRef>
+          <a:fillRef idx="3">
+            <a:schemeClr val="accent1"/>
+          </a:fillRef>
+          <a:effectRef idx="2">
+            <a:schemeClr val="accent1"/>
+          </a:effectRef>
+          <a:fontRef idx="minor">
+            <a:schemeClr val="lt1"/>
+          </a:fontRef>
+        </p:style>
+        <p:txBody>
+          <a:bodyPr rtlCol="0" anchor="ctr" tIns="25400" bIns="25400" lIns="101600" rIns="101600" wrap="none"/>
+          <a:lstStyle/>
+          <a:p>
+            <a:pPr algn="ctr"/>
+            <a:r>
+              <a:rPr sz="800" b="0" i="0">
+                <a:solidFill>
+                  <a:srgbClr val="2E6FD6"/>
+                </a:solidFill>
+                <a:latin typeface="Segoe UI"/>
+              </a:rPr>
+              <a:t>health legacy</a:t>
+            </a:r>
+          </a:p>
+        </p:txBody>
+      </p:sp>
+      <p:sp>
+        <p:nvSpPr>
+          <p:cNvPr id="42" name="Rounded Rectangle 41"/>
+          <p:cNvSpPr/>
+          <p:nvPr/>
+        </p:nvSpPr>
+        <p:spPr>
+          <a:xfrm>
+            <a:off x="9509760" y="2651760"/>
+            <a:ext cx="1188720" cy="256032"/>
+          </a:xfrm>
+          <a:prstGeom prst="roundRect">
+            <a:avLst>
+              <a:gd name="adj" fmla="val 12000"/>
+            </a:avLst>
+          </a:prstGeom>
+          <a:solidFill>
+            <a:srgbClr val="EBF1FB"/>
+          </a:solidFill>
+          <a:ln w="9525">
+            <a:solidFill>
+              <a:srgbClr val="2E6FD6"/>
+            </a:solidFill>
+          </a:ln>
+        </p:spPr>
+        <p:style>
+          <a:lnRef idx="1">
+            <a:schemeClr val="accent1"/>
+          </a:lnRef>
+          <a:fillRef idx="3">
+            <a:schemeClr val="accent1"/>
+          </a:fillRef>
+          <a:effectRef idx="2">
+            <a:schemeClr val="accent1"/>
+          </a:effectRef>
+          <a:fontRef idx="minor">
+            <a:schemeClr val="lt1"/>
+          </a:fontRef>
+        </p:style>
+        <p:txBody>
+          <a:bodyPr rtlCol="0" anchor="ctr" tIns="25400" bIns="25400" lIns="101600" rIns="101600" wrap="none"/>
+          <a:lstStyle/>
+          <a:p>
+            <a:pPr algn="ctr"/>
+            <a:r>
+              <a:rPr sz="800" b="0" i="0">
+                <a:solidFill>
+                  <a:srgbClr val="2E6FD6"/>
+                </a:solidFill>
+                <a:latin typeface="Segoe UI"/>
+              </a:rPr>
+              <a:t>ESG alignment</a:t>
+            </a:r>
+          </a:p>
+        </p:txBody>
+      </p:sp>
+      <p:sp>
+        <p:nvSpPr>
+          <p:cNvPr id="43" name="Rounded Rectangle 42"/>
+          <p:cNvSpPr/>
+          <p:nvPr/>
+        </p:nvSpPr>
+        <p:spPr>
+          <a:xfrm>
+            <a:off x="10789920" y="2651760"/>
+            <a:ext cx="1005840" cy="256032"/>
+          </a:xfrm>
+          <a:prstGeom prst="roundRect">
+            <a:avLst>
+              <a:gd name="adj" fmla="val 12000"/>
+            </a:avLst>
+          </a:prstGeom>
+          <a:solidFill>
+            <a:srgbClr val="FEF7F8"/>
+          </a:solidFill>
+          <a:ln w="9525">
+            <a:solidFill>
+              <a:srgbClr val="C8102E"/>
+            </a:solidFill>
+          </a:ln>
+        </p:spPr>
+        <p:style>
+          <a:lnRef idx="1">
+            <a:schemeClr val="accent1"/>
+          </a:lnRef>
+          <a:fillRef idx="3">
+            <a:schemeClr val="accent1"/>
+          </a:fillRef>
+          <a:effectRef idx="2">
+            <a:schemeClr val="accent1"/>
+          </a:effectRef>
+          <a:fontRef idx="minor">
+            <a:schemeClr val="lt1"/>
+          </a:fontRef>
+        </p:style>
+        <p:txBody>
+          <a:bodyPr rtlCol="0" anchor="ctr" tIns="25400" bIns="25400" lIns="101600" rIns="101600" wrap="none"/>
+          <a:lstStyle/>
+          <a:p>
+            <a:pPr algn="ctr"/>
+            <a:r>
+              <a:rPr sz="800" b="0" i="0">
+                <a:solidFill>
+                  <a:srgbClr val="C8102E"/>
+                </a:solidFill>
+                <a:latin typeface="Segoe UI"/>
+              </a:rPr>
+              <a:t>pharma risk</a:t>
+            </a:r>
+          </a:p>
+        </p:txBody>
+      </p:sp>
+      <p:sp>
+        <p:nvSpPr>
+          <p:cNvPr id="44" name="Rounded Rectangle 43"/>
+          <p:cNvSpPr/>
+          <p:nvPr/>
+        </p:nvSpPr>
+        <p:spPr>
+          <a:xfrm>
+            <a:off x="11887200" y="2651760"/>
+            <a:ext cx="1554480" cy="256032"/>
+          </a:xfrm>
+          <a:prstGeom prst="roundRect">
+            <a:avLst>
+              <a:gd name="adj" fmla="val 12000"/>
+            </a:avLst>
+          </a:prstGeom>
+          <a:solidFill>
+            <a:srgbClr val="F1EBFD"/>
+          </a:solidFill>
+          <a:ln w="9525">
+            <a:solidFill>
+              <a:srgbClr val="7C3AED"/>
+            </a:solidFill>
+          </a:ln>
+        </p:spPr>
+        <p:style>
+          <a:lnRef idx="1">
+            <a:schemeClr val="accent1"/>
+          </a:lnRef>
+          <a:fillRef idx="3">
+            <a:schemeClr val="accent1"/>
+          </a:fillRef>
+          <a:effectRef idx="2">
+            <a:schemeClr val="accent1"/>
+          </a:effectRef>
+          <a:fontRef idx="minor">
+            <a:schemeClr val="lt1"/>
+          </a:fontRef>
+        </p:style>
+        <p:txBody>
+          <a:bodyPr rtlCol="0" anchor="ctr" tIns="25400" bIns="25400" lIns="101600" rIns="101600" wrap="none"/>
+          <a:lstStyle/>
+          <a:p>
+            <a:pPr algn="ctr"/>
+            <a:r>
+              <a:rPr sz="800" b="0" i="0">
+                <a:solidFill>
+                  <a:srgbClr val="7C3AED"/>
+                </a:solidFill>
+                <a:latin typeface="Segoe UI"/>
+              </a:rPr>
+              <a:t>family foundation</a:t>
+            </a:r>
+          </a:p>
+        </p:txBody>
+      </p:sp>
+      <p:sp>
+        <p:nvSpPr>
+          <p:cNvPr id="45" name="Rounded Rectangle 44"/>
+          <p:cNvSpPr/>
+          <p:nvPr/>
+        </p:nvSpPr>
+        <p:spPr>
+          <a:xfrm>
+            <a:off x="8092440" y="3200400"/>
+            <a:ext cx="3596335" cy="457200"/>
+          </a:xfrm>
+          <a:prstGeom prst="roundRect">
+            <a:avLst>
+              <a:gd name="adj" fmla="val 1500"/>
+            </a:avLst>
+          </a:prstGeom>
+          <a:solidFill>
+            <a:srgbClr val="FEF7F8"/>
+          </a:solidFill>
+          <a:ln w="12700">
+            <a:solidFill>
+              <a:srgbClr val="F0D0D5"/>
+            </a:solidFill>
+          </a:ln>
+        </p:spPr>
+        <p:style>
+          <a:lnRef idx="1">
+            <a:schemeClr val="accent1"/>
+          </a:lnRef>
+          <a:fillRef idx="3">
+            <a:schemeClr val="accent1"/>
+          </a:fillRef>
+          <a:effectRef idx="2">
+            <a:schemeClr val="accent1"/>
+          </a:effectRef>
+          <a:fontRef idx="minor">
+            <a:schemeClr val="lt1"/>
+          </a:fontRef>
+        </p:style>
+        <p:txBody>
+          <a:bodyPr rtlCol="0" anchor="ctr"/>
+          <a:lstStyle/>
+          <a:p>
+            <a:pPr algn="ctr"/>
+          </a:p>
+        </p:txBody>
+      </p:sp>
+      <p:sp>
+        <p:nvSpPr>
+          <p:cNvPr id="46" name="TextBox 45"/>
+          <p:cNvSpPr txBox="1"/>
+          <p:nvPr/>
+        </p:nvSpPr>
+        <p:spPr>
+          <a:xfrm>
+            <a:off x="8229600" y="3218688"/>
+            <a:ext cx="3322015" cy="411480"/>
+          </a:xfrm>
+          <a:prstGeom prst="rect">
+            <a:avLst/>
+          </a:prstGeom>
+          <a:noFill/>
+        </p:spPr>
+        <p:txBody>
+          <a:bodyPr wrap="square">
+            <a:spAutoFit/>
+          </a:bodyPr>
+          <a:lstStyle/>
           <a:p>
             <a:pPr algn="l">
               <a:spcBef>
@@ -8480,838 +9372,7 @@
               </a:spcAft>
             </a:pPr>
             <a:r>
-              <a:rPr sz="600" b="0">
-                <a:solidFill>
-                  <a:srgbClr val="475569"/>
-                </a:solidFill>
-                <a:latin typeface="Segoe UI"/>
-              </a:rPr>
-              <a:t>Balanced</a:t>
-            </a:r>
-          </a:p>
-        </p:txBody>
-      </p:sp>
-      <p:sp>
-        <p:nvSpPr>
-          <p:cNvPr id="30" name="Oval 29"/>
-          <p:cNvSpPr/>
-          <p:nvPr/>
-        </p:nvSpPr>
-        <p:spPr>
-          <a:xfrm>
-            <a:off x="4983480" y="1508760"/>
-            <a:ext cx="201168" cy="201168"/>
-          </a:xfrm>
-          <a:prstGeom prst="ellipse">
-            <a:avLst/>
-          </a:prstGeom>
-          <a:solidFill>
-            <a:srgbClr val="2E6FD6"/>
-          </a:solidFill>
-          <a:ln>
-            <a:noFill/>
-          </a:ln>
-        </p:spPr>
-        <p:style>
-          <a:lnRef idx="1">
-            <a:schemeClr val="accent1"/>
-          </a:lnRef>
-          <a:fillRef idx="3">
-            <a:schemeClr val="accent1"/>
-          </a:fillRef>
-          <a:effectRef idx="2">
-            <a:schemeClr val="accent1"/>
-          </a:effectRef>
-          <a:fontRef idx="minor">
-            <a:schemeClr val="lt1"/>
-          </a:fontRef>
-        </p:style>
-        <p:txBody>
-          <a:bodyPr rtlCol="0" anchor="ctr" tIns="0" bIns="0"/>
-          <a:lstStyle/>
-          <a:p>
-            <a:pPr algn="ctr"/>
-            <a:r>
-              <a:rPr sz="600" b="1">
-                <a:solidFill>
-                  <a:srgbClr val="FFFFFF"/>
-                </a:solidFill>
-                <a:latin typeface="Segoe UI"/>
-              </a:rPr>
-              <a:t>MH</a:t>
-            </a:r>
-          </a:p>
-        </p:txBody>
-      </p:sp>
-      <p:sp>
-        <p:nvSpPr>
-          <p:cNvPr id="31" name="TextBox 30"/>
-          <p:cNvSpPr txBox="1"/>
-          <p:nvPr/>
-        </p:nvSpPr>
-        <p:spPr>
-          <a:xfrm>
-            <a:off x="5230368" y="1490472"/>
-            <a:ext cx="822960" cy="274320"/>
-          </a:xfrm>
-          <a:prstGeom prst="rect">
-            <a:avLst/>
-          </a:prstGeom>
-          <a:noFill/>
-        </p:spPr>
-        <p:txBody>
-          <a:bodyPr wrap="square">
-            <a:spAutoFit/>
-          </a:bodyPr>
-          <a:lstStyle/>
-          <a:p>
-            <a:pPr algn="l">
-              <a:spcBef>
-                <a:spcPts val="0"/>
-              </a:spcBef>
-              <a:spcAft>
-                <a:spcPts val="0"/>
-              </a:spcAft>
-            </a:pPr>
-            <a:r>
-              <a:rPr sz="700" b="1">
-                <a:solidFill>
-                  <a:srgbClr val="0F172A"/>
-                </a:solidFill>
-                <a:latin typeface="Segoe UI"/>
-              </a:rPr>
-              <a:t>M. Huber</a:t>
-            </a:r>
-          </a:p>
-          <a:p>
-            <a:pPr algn="l">
-              <a:spcBef>
-                <a:spcPts val="0"/>
-              </a:spcBef>
-              <a:spcAft>
-                <a:spcPts val="0"/>
-              </a:spcAft>
-            </a:pPr>
-            <a:r>
-              <a:rPr sz="600" b="0">
-                <a:solidFill>
-                  <a:srgbClr val="475569"/>
-                </a:solidFill>
-                <a:latin typeface="Segoe UI"/>
-              </a:rPr>
-              <a:t>Defensive</a:t>
-            </a:r>
-          </a:p>
-        </p:txBody>
-      </p:sp>
-      <p:sp>
-        <p:nvSpPr>
-          <p:cNvPr id="32" name="Oval 31"/>
-          <p:cNvSpPr/>
-          <p:nvPr/>
-        </p:nvSpPr>
-        <p:spPr>
-          <a:xfrm>
-            <a:off x="4983480" y="1874519"/>
-            <a:ext cx="201168" cy="201168"/>
-          </a:xfrm>
-          <a:prstGeom prst="ellipse">
-            <a:avLst/>
-          </a:prstGeom>
-          <a:solidFill>
-            <a:srgbClr val="9B0C23"/>
-          </a:solidFill>
-          <a:ln>
-            <a:noFill/>
-          </a:ln>
-        </p:spPr>
-        <p:style>
-          <a:lnRef idx="1">
-            <a:schemeClr val="accent1"/>
-          </a:lnRef>
-          <a:fillRef idx="3">
-            <a:schemeClr val="accent1"/>
-          </a:fillRef>
-          <a:effectRef idx="2">
-            <a:schemeClr val="accent1"/>
-          </a:effectRef>
-          <a:fontRef idx="minor">
-            <a:schemeClr val="lt1"/>
-          </a:fontRef>
-        </p:style>
-        <p:txBody>
-          <a:bodyPr rtlCol="0" anchor="ctr" tIns="0" bIns="0"/>
-          <a:lstStyle/>
-          <a:p>
-            <a:pPr algn="ctr"/>
-            <a:r>
-              <a:rPr sz="600" b="1">
-                <a:solidFill>
-                  <a:srgbClr val="FFFFFF"/>
-                </a:solidFill>
-                <a:latin typeface="Segoe UI"/>
-              </a:rPr>
-              <a:t>ER</a:t>
-            </a:r>
-          </a:p>
-        </p:txBody>
-      </p:sp>
-      <p:sp>
-        <p:nvSpPr>
-          <p:cNvPr id="33" name="TextBox 32"/>
-          <p:cNvSpPr txBox="1"/>
-          <p:nvPr/>
-        </p:nvSpPr>
-        <p:spPr>
-          <a:xfrm>
-            <a:off x="5230368" y="1856231"/>
-            <a:ext cx="822960" cy="274320"/>
-          </a:xfrm>
-          <a:prstGeom prst="rect">
-            <a:avLst/>
-          </a:prstGeom>
-          <a:noFill/>
-        </p:spPr>
-        <p:txBody>
-          <a:bodyPr wrap="square">
-            <a:spAutoFit/>
-          </a:bodyPr>
-          <a:lstStyle/>
-          <a:p>
-            <a:pPr algn="l">
-              <a:spcBef>
-                <a:spcPts val="0"/>
-              </a:spcBef>
-              <a:spcAft>
-                <a:spcPts val="0"/>
-              </a:spcAft>
-            </a:pPr>
-            <a:r>
-              <a:rPr sz="700" b="1">
-                <a:solidFill>
-                  <a:srgbClr val="0F172A"/>
-                </a:solidFill>
-                <a:latin typeface="Segoe UI"/>
-              </a:rPr>
-              <a:t>E. Räber</a:t>
-            </a:r>
-          </a:p>
-          <a:p>
-            <a:pPr algn="l">
-              <a:spcBef>
-                <a:spcPts val="0"/>
-              </a:spcBef>
-              <a:spcAft>
-                <a:spcPts val="0"/>
-              </a:spcAft>
-            </a:pPr>
-            <a:r>
-              <a:rPr sz="600" b="0">
-                <a:solidFill>
-                  <a:srgbClr val="475569"/>
-                </a:solidFill>
-                <a:latin typeface="Segoe UI"/>
-              </a:rPr>
-              <a:t>Defensive</a:t>
-            </a:r>
-          </a:p>
-        </p:txBody>
-      </p:sp>
-      <p:sp>
-        <p:nvSpPr>
-          <p:cNvPr id="34" name="Oval 33"/>
-          <p:cNvSpPr/>
-          <p:nvPr/>
-        </p:nvSpPr>
-        <p:spPr>
-          <a:xfrm>
-            <a:off x="4983480" y="2240280"/>
-            <a:ext cx="201168" cy="201168"/>
-          </a:xfrm>
-          <a:prstGeom prst="ellipse">
-            <a:avLst/>
-          </a:prstGeom>
-          <a:solidFill>
-            <a:srgbClr val="4F8BF0"/>
-          </a:solidFill>
-          <a:ln>
-            <a:noFill/>
-          </a:ln>
-        </p:spPr>
-        <p:style>
-          <a:lnRef idx="1">
-            <a:schemeClr val="accent1"/>
-          </a:lnRef>
-          <a:fillRef idx="3">
-            <a:schemeClr val="accent1"/>
-          </a:fillRef>
-          <a:effectRef idx="2">
-            <a:schemeClr val="accent1"/>
-          </a:effectRef>
-          <a:fontRef idx="minor">
-            <a:schemeClr val="lt1"/>
-          </a:fontRef>
-        </p:style>
-        <p:txBody>
-          <a:bodyPr rtlCol="0" anchor="ctr" tIns="0" bIns="0"/>
-          <a:lstStyle/>
-          <a:p>
-            <a:pPr algn="ctr"/>
-            <a:r>
-              <a:rPr sz="600" b="1">
-                <a:solidFill>
-                  <a:srgbClr val="FFFFFF"/>
-                </a:solidFill>
-                <a:latin typeface="Segoe UI"/>
-              </a:rPr>
-              <a:t>JA</a:t>
-            </a:r>
-          </a:p>
-        </p:txBody>
-      </p:sp>
-      <p:sp>
-        <p:nvSpPr>
-          <p:cNvPr id="35" name="TextBox 34"/>
-          <p:cNvSpPr txBox="1"/>
-          <p:nvPr/>
-        </p:nvSpPr>
-        <p:spPr>
-          <a:xfrm>
-            <a:off x="5230368" y="2221992"/>
-            <a:ext cx="822960" cy="274320"/>
-          </a:xfrm>
-          <a:prstGeom prst="rect">
-            <a:avLst/>
-          </a:prstGeom>
-          <a:noFill/>
-        </p:spPr>
-        <p:txBody>
-          <a:bodyPr wrap="square">
-            <a:spAutoFit/>
-          </a:bodyPr>
-          <a:lstStyle/>
-          <a:p>
-            <a:pPr algn="l">
-              <a:spcBef>
-                <a:spcPts val="0"/>
-              </a:spcBef>
-              <a:spcAft>
-                <a:spcPts val="0"/>
-              </a:spcAft>
-            </a:pPr>
-            <a:r>
-              <a:rPr sz="700" b="1">
-                <a:solidFill>
-                  <a:srgbClr val="0F172A"/>
-                </a:solidFill>
-                <a:latin typeface="Segoe UI"/>
-              </a:rPr>
-              <a:t>J. Ammann</a:t>
-            </a:r>
-          </a:p>
-          <a:p>
-            <a:pPr algn="l">
-              <a:spcBef>
-                <a:spcPts val="0"/>
-              </a:spcBef>
-              <a:spcAft>
-                <a:spcPts val="0"/>
-              </a:spcAft>
-            </a:pPr>
-            <a:r>
-              <a:rPr sz="600" b="0">
-                <a:solidFill>
-                  <a:srgbClr val="475569"/>
-                </a:solidFill>
-                <a:latin typeface="Segoe UI"/>
-              </a:rPr>
-              <a:t>Growth</a:t>
-            </a:r>
-          </a:p>
-        </p:txBody>
-      </p:sp>
-      <p:sp>
-        <p:nvSpPr>
-          <p:cNvPr id="36" name="Rounded Rectangle 35"/>
-          <p:cNvSpPr/>
-          <p:nvPr/>
-        </p:nvSpPr>
-        <p:spPr>
-          <a:xfrm>
-            <a:off x="6172200" y="868680"/>
-            <a:ext cx="2560320" cy="1005840"/>
-          </a:xfrm>
-          <a:prstGeom prst="roundRect">
-            <a:avLst>
-              <a:gd name="adj" fmla="val 2000"/>
-            </a:avLst>
-          </a:prstGeom>
-          <a:solidFill>
-            <a:srgbClr val="FEF9FA"/>
-          </a:solidFill>
-          <a:ln w="12700">
-            <a:solidFill>
-              <a:srgbClr val="F0D0D5"/>
-            </a:solidFill>
-          </a:ln>
-        </p:spPr>
-        <p:style>
-          <a:lnRef idx="1">
-            <a:schemeClr val="accent1"/>
-          </a:lnRef>
-          <a:fillRef idx="3">
-            <a:schemeClr val="accent1"/>
-          </a:fillRef>
-          <a:effectRef idx="2">
-            <a:schemeClr val="accent1"/>
-          </a:effectRef>
-          <a:fontRef idx="minor">
-            <a:schemeClr val="lt1"/>
-          </a:fontRef>
-        </p:style>
-        <p:txBody>
-          <a:bodyPr rtlCol="0" anchor="ctr"/>
-          <a:lstStyle/>
-          <a:p>
-            <a:pPr algn="ctr"/>
-          </a:p>
-        </p:txBody>
-      </p:sp>
-      <p:sp>
-        <p:nvSpPr>
-          <p:cNvPr id="37" name="TextBox 36"/>
-          <p:cNvSpPr txBox="1"/>
-          <p:nvPr/>
-        </p:nvSpPr>
-        <p:spPr>
-          <a:xfrm>
-            <a:off x="6263640" y="896112"/>
-            <a:ext cx="2377440" cy="914400"/>
-          </a:xfrm>
-          <a:prstGeom prst="rect">
-            <a:avLst/>
-          </a:prstGeom>
-          <a:noFill/>
-        </p:spPr>
-        <p:txBody>
-          <a:bodyPr wrap="square">
-            <a:spAutoFit/>
-          </a:bodyPr>
-          <a:lstStyle/>
-          <a:p>
-            <a:r>
-              <a:rPr sz="700" b="1">
-                <a:solidFill>
-                  <a:srgbClr val="C8102E"/>
-                </a:solidFill>
-                <a:latin typeface="Segoe UI"/>
-              </a:rPr>
-              <a:t>Advisory Draft — </a:t>
-            </a:r>
-            <a:r>
-              <a:rPr sz="700" b="0">
-                <a:solidFill>
-                  <a:srgbClr val="475569"/>
-                </a:solidFill>
-                <a:latin typeface="Segoe UI"/>
-              </a:rPr>
-              <a:t>Dear Hubertus, the announced shutdown of AstraZeneca's chronic-illness research division directly conflicts with your foundation's mission. We recommend a swap into Roche Holding.</a:t>
-            </a:r>
-          </a:p>
-        </p:txBody>
-      </p:sp>
-      <p:sp>
-        <p:nvSpPr>
-          <p:cNvPr id="38" name="Rounded Rectangle 37"/>
-          <p:cNvSpPr/>
-          <p:nvPr/>
-        </p:nvSpPr>
-        <p:spPr>
-          <a:xfrm>
-            <a:off x="6172200" y="1965960"/>
-            <a:ext cx="2560320" cy="640080"/>
-          </a:xfrm>
-          <a:prstGeom prst="roundRect">
-            <a:avLst>
-              <a:gd name="adj" fmla="val 2000"/>
-            </a:avLst>
-          </a:prstGeom>
-          <a:solidFill>
-            <a:srgbClr val="F1F5F9"/>
-          </a:solidFill>
-          <a:ln w="12700">
-            <a:solidFill>
-              <a:srgbClr val="CBD5E1"/>
-            </a:solidFill>
-          </a:ln>
-        </p:spPr>
-        <p:style>
-          <a:lnRef idx="1">
-            <a:schemeClr val="accent1"/>
-          </a:lnRef>
-          <a:fillRef idx="3">
-            <a:schemeClr val="accent1"/>
-          </a:fillRef>
-          <a:effectRef idx="2">
-            <a:schemeClr val="accent1"/>
-          </a:effectRef>
-          <a:fontRef idx="minor">
-            <a:schemeClr val="lt1"/>
-          </a:fontRef>
-        </p:style>
-        <p:txBody>
-          <a:bodyPr rtlCol="0" anchor="ctr"/>
-          <a:lstStyle/>
-          <a:p>
-            <a:pPr algn="ctr"/>
-          </a:p>
-        </p:txBody>
-      </p:sp>
-      <p:sp>
-        <p:nvSpPr>
-          <p:cNvPr id="39" name="TextBox 38"/>
-          <p:cNvSpPr txBox="1"/>
-          <p:nvPr/>
-        </p:nvSpPr>
-        <p:spPr>
-          <a:xfrm>
-            <a:off x="6263640" y="1993392"/>
-            <a:ext cx="1828800" cy="182880"/>
-          </a:xfrm>
-          <a:prstGeom prst="rect">
-            <a:avLst/>
-          </a:prstGeom>
-          <a:noFill/>
-        </p:spPr>
-        <p:txBody>
-          <a:bodyPr wrap="square">
-            <a:spAutoFit/>
-          </a:bodyPr>
-          <a:lstStyle/>
-          <a:p>
-            <a:pPr algn="l">
-              <a:spcBef>
-                <a:spcPts val="0"/>
-              </a:spcBef>
-              <a:spcAft>
-                <a:spcPts val="0"/>
-              </a:spcAft>
-            </a:pPr>
-            <a:r>
-              <a:rPr sz="700" b="1">
-                <a:solidFill>
-                  <a:srgbClr val="C8102E"/>
-                </a:solidFill>
-                <a:latin typeface="Segoe UI"/>
-              </a:rPr>
-              <a:t>CLIENT DNA</a:t>
-            </a:r>
-          </a:p>
-        </p:txBody>
-      </p:sp>
-      <p:sp>
-        <p:nvSpPr>
-          <p:cNvPr id="40" name="Rounded Rectangle 39"/>
-          <p:cNvSpPr/>
-          <p:nvPr/>
-        </p:nvSpPr>
-        <p:spPr>
-          <a:xfrm>
-            <a:off x="6263640" y="2240280"/>
-            <a:ext cx="950976" cy="292608"/>
-          </a:xfrm>
-          <a:prstGeom prst="roundRect">
-            <a:avLst>
-              <a:gd name="adj" fmla="val 15000"/>
-            </a:avLst>
-          </a:prstGeom>
-          <a:solidFill>
-            <a:srgbClr val="EBF1FB"/>
-          </a:solidFill>
-          <a:ln w="9525">
-            <a:solidFill>
-              <a:srgbClr val="2E6FD6"/>
-            </a:solidFill>
-          </a:ln>
-        </p:spPr>
-        <p:style>
-          <a:lnRef idx="1">
-            <a:schemeClr val="accent1"/>
-          </a:lnRef>
-          <a:fillRef idx="3">
-            <a:schemeClr val="accent1"/>
-          </a:fillRef>
-          <a:effectRef idx="2">
-            <a:schemeClr val="accent1"/>
-          </a:effectRef>
-          <a:fontRef idx="minor">
-            <a:schemeClr val="lt1"/>
-          </a:fontRef>
-        </p:style>
-        <p:txBody>
-          <a:bodyPr rtlCol="0" anchor="ctr" tIns="25400" bIns="25400" lIns="76200" rIns="76200" wrap="none"/>
-          <a:lstStyle/>
-          <a:p>
-            <a:pPr algn="ctr"/>
-            <a:r>
-              <a:rPr sz="1000" b="0">
-                <a:solidFill>
-                  <a:srgbClr val="2E6FD6"/>
-                </a:solidFill>
-                <a:latin typeface="Segoe UI"/>
-              </a:rPr>
-              <a:t>health legacy</a:t>
-            </a:r>
-          </a:p>
-        </p:txBody>
-      </p:sp>
-      <p:sp>
-        <p:nvSpPr>
-          <p:cNvPr id="41" name="Rounded Rectangle 40"/>
-          <p:cNvSpPr/>
-          <p:nvPr/>
-        </p:nvSpPr>
-        <p:spPr>
-          <a:xfrm>
-            <a:off x="7287768" y="2240280"/>
-            <a:ext cx="950976" cy="292608"/>
-          </a:xfrm>
-          <a:prstGeom prst="roundRect">
-            <a:avLst>
-              <a:gd name="adj" fmla="val 15000"/>
-            </a:avLst>
-          </a:prstGeom>
-          <a:solidFill>
-            <a:srgbClr val="EBF1FB"/>
-          </a:solidFill>
-          <a:ln w="9525">
-            <a:solidFill>
-              <a:srgbClr val="2E6FD6"/>
-            </a:solidFill>
-          </a:ln>
-        </p:spPr>
-        <p:style>
-          <a:lnRef idx="1">
-            <a:schemeClr val="accent1"/>
-          </a:lnRef>
-          <a:fillRef idx="3">
-            <a:schemeClr val="accent1"/>
-          </a:fillRef>
-          <a:effectRef idx="2">
-            <a:schemeClr val="accent1"/>
-          </a:effectRef>
-          <a:fontRef idx="minor">
-            <a:schemeClr val="lt1"/>
-          </a:fontRef>
-        </p:style>
-        <p:txBody>
-          <a:bodyPr rtlCol="0" anchor="ctr" tIns="25400" bIns="25400" lIns="76200" rIns="76200" wrap="none"/>
-          <a:lstStyle/>
-          <a:p>
-            <a:pPr algn="ctr"/>
-            <a:r>
-              <a:rPr sz="1000" b="0">
-                <a:solidFill>
-                  <a:srgbClr val="2E6FD6"/>
-                </a:solidFill>
-                <a:latin typeface="Segoe UI"/>
-              </a:rPr>
-              <a:t>ESG alignment</a:t>
-            </a:r>
-          </a:p>
-        </p:txBody>
-      </p:sp>
-      <p:sp>
-        <p:nvSpPr>
-          <p:cNvPr id="42" name="Rounded Rectangle 41"/>
-          <p:cNvSpPr/>
-          <p:nvPr/>
-        </p:nvSpPr>
-        <p:spPr>
-          <a:xfrm>
-            <a:off x="6263640" y="2240280"/>
-            <a:ext cx="804672" cy="292608"/>
-          </a:xfrm>
-          <a:prstGeom prst="roundRect">
-            <a:avLst>
-              <a:gd name="adj" fmla="val 15000"/>
-            </a:avLst>
-          </a:prstGeom>
-          <a:solidFill>
-            <a:srgbClr val="FDEEF0"/>
-          </a:solidFill>
-          <a:ln w="9525">
-            <a:solidFill>
-              <a:srgbClr val="C8102E"/>
-            </a:solidFill>
-          </a:ln>
-        </p:spPr>
-        <p:style>
-          <a:lnRef idx="1">
-            <a:schemeClr val="accent1"/>
-          </a:lnRef>
-          <a:fillRef idx="3">
-            <a:schemeClr val="accent1"/>
-          </a:fillRef>
-          <a:effectRef idx="2">
-            <a:schemeClr val="accent1"/>
-          </a:effectRef>
-          <a:fontRef idx="minor">
-            <a:schemeClr val="lt1"/>
-          </a:fontRef>
-        </p:style>
-        <p:txBody>
-          <a:bodyPr rtlCol="0" anchor="ctr" tIns="25400" bIns="25400" lIns="76200" rIns="76200" wrap="none"/>
-          <a:lstStyle/>
-          <a:p>
-            <a:pPr algn="ctr"/>
-            <a:r>
-              <a:rPr sz="1000" b="0">
-                <a:solidFill>
-                  <a:srgbClr val="C8102E"/>
-                </a:solidFill>
-                <a:latin typeface="Segoe UI"/>
-              </a:rPr>
-              <a:t>pharma risk</a:t>
-            </a:r>
-          </a:p>
-        </p:txBody>
-      </p:sp>
-      <p:sp>
-        <p:nvSpPr>
-          <p:cNvPr id="43" name="Rounded Rectangle 42"/>
-          <p:cNvSpPr/>
-          <p:nvPr/>
-        </p:nvSpPr>
-        <p:spPr>
-          <a:xfrm>
-            <a:off x="7141464" y="2240280"/>
-            <a:ext cx="1243584" cy="292608"/>
-          </a:xfrm>
-          <a:prstGeom prst="roundRect">
-            <a:avLst>
-              <a:gd name="adj" fmla="val 15000"/>
-            </a:avLst>
-          </a:prstGeom>
-          <a:solidFill>
-            <a:srgbClr val="F1EBFD"/>
-          </a:solidFill>
-          <a:ln w="9525">
-            <a:solidFill>
-              <a:srgbClr val="7C3AED"/>
-            </a:solidFill>
-          </a:ln>
-        </p:spPr>
-        <p:style>
-          <a:lnRef idx="1">
-            <a:schemeClr val="accent1"/>
-          </a:lnRef>
-          <a:fillRef idx="3">
-            <a:schemeClr val="accent1"/>
-          </a:fillRef>
-          <a:effectRef idx="2">
-            <a:schemeClr val="accent1"/>
-          </a:effectRef>
-          <a:fontRef idx="minor">
-            <a:schemeClr val="lt1"/>
-          </a:fontRef>
-        </p:style>
-        <p:txBody>
-          <a:bodyPr rtlCol="0" anchor="ctr" tIns="25400" bIns="25400" lIns="76200" rIns="76200" wrap="none"/>
-          <a:lstStyle/>
-          <a:p>
-            <a:pPr algn="ctr"/>
-            <a:r>
-              <a:rPr sz="1000" b="0">
-                <a:solidFill>
-                  <a:srgbClr val="7C3AED"/>
-                </a:solidFill>
-                <a:latin typeface="Segoe UI"/>
-              </a:rPr>
-              <a:t>family foundation</a:t>
-            </a:r>
-          </a:p>
-        </p:txBody>
-      </p:sp>
-      <p:sp>
-        <p:nvSpPr>
-          <p:cNvPr id="44" name="Rounded Rectangle 43"/>
-          <p:cNvSpPr/>
-          <p:nvPr/>
-        </p:nvSpPr>
-        <p:spPr>
-          <a:xfrm>
-            <a:off x="6172200" y="2697480"/>
-            <a:ext cx="2560320" cy="365760"/>
-          </a:xfrm>
-          <a:prstGeom prst="roundRect">
-            <a:avLst>
-              <a:gd name="adj" fmla="val 2000"/>
-            </a:avLst>
-          </a:prstGeom>
-          <a:solidFill>
-            <a:srgbClr val="FDEEF0"/>
-          </a:solidFill>
-          <a:ln w="12700">
-            <a:solidFill>
-              <a:srgbClr val="F0D0D5"/>
-            </a:solidFill>
-          </a:ln>
-        </p:spPr>
-        <p:style>
-          <a:lnRef idx="1">
-            <a:schemeClr val="accent1"/>
-          </a:lnRef>
-          <a:fillRef idx="3">
-            <a:schemeClr val="accent1"/>
-          </a:fillRef>
-          <a:effectRef idx="2">
-            <a:schemeClr val="accent1"/>
-          </a:effectRef>
-          <a:fontRef idx="minor">
-            <a:schemeClr val="lt1"/>
-          </a:fontRef>
-        </p:style>
-        <p:txBody>
-          <a:bodyPr rtlCol="0" anchor="ctr"/>
-          <a:lstStyle/>
-          <a:p>
-            <a:pPr algn="ctr"/>
-          </a:p>
-        </p:txBody>
-      </p:sp>
-      <p:sp>
-        <p:nvSpPr>
-          <p:cNvPr id="45" name="TextBox 44"/>
-          <p:cNvSpPr txBox="1"/>
-          <p:nvPr/>
-        </p:nvSpPr>
-        <p:spPr>
-          <a:xfrm>
-            <a:off x="6263640" y="2715768"/>
-            <a:ext cx="2377440" cy="320040"/>
-          </a:xfrm>
-          <a:prstGeom prst="rect">
-            <a:avLst/>
-          </a:prstGeom>
-          <a:noFill/>
-        </p:spPr>
-        <p:txBody>
-          <a:bodyPr wrap="square">
-            <a:spAutoFit/>
-          </a:bodyPr>
-          <a:lstStyle/>
-          <a:p>
-            <a:pPr algn="l">
-              <a:spcBef>
-                <a:spcPts val="0"/>
-              </a:spcBef>
-              <a:spcAft>
-                <a:spcPts val="0"/>
-              </a:spcAft>
-            </a:pPr>
-            <a:r>
-              <a:rPr sz="700" b="0">
+              <a:rPr sz="800" b="0" i="0">
                 <a:solidFill>
                   <a:srgbClr val="9B0C23"/>
                 </a:solidFill>
@@ -9350,14 +9411,57 @@
       <p:grpSpPr/>
       <p:sp>
         <p:nvSpPr>
-          <p:cNvPr id="2" name="TextBox 1"/>
+          <p:cNvPr id="2" name="Rectangle 1"/>
+          <p:cNvSpPr/>
+          <p:nvPr/>
+        </p:nvSpPr>
+        <p:spPr>
+          <a:xfrm>
+            <a:off x="0" y="502920"/>
+            <a:ext cx="12191695" cy="12700"/>
+          </a:xfrm>
+          <a:prstGeom prst="rect">
+            <a:avLst/>
+          </a:prstGeom>
+          <a:solidFill>
+            <a:srgbClr val="CBD5E1"/>
+          </a:solidFill>
+          <a:ln>
+            <a:noFill/>
+          </a:ln>
+        </p:spPr>
+        <p:style>
+          <a:lnRef idx="1">
+            <a:schemeClr val="accent1"/>
+          </a:lnRef>
+          <a:fillRef idx="3">
+            <a:schemeClr val="accent1"/>
+          </a:fillRef>
+          <a:effectRef idx="2">
+            <a:schemeClr val="accent1"/>
+          </a:effectRef>
+          <a:fontRef idx="minor">
+            <a:schemeClr val="lt1"/>
+          </a:fontRef>
+        </p:style>
+        <p:txBody>
+          <a:bodyPr rtlCol="0" anchor="ctr"/>
+          <a:lstStyle/>
+          <a:p>
+            <a:pPr algn="ctr"/>
+          </a:p>
+        </p:txBody>
+      </p:sp>
+      <p:sp>
+        <p:nvSpPr>
+          <p:cNvPr id="3" name="TextBox 2"/>
           <p:cNvSpPr txBox="1"/>
           <p:nvPr/>
         </p:nvSpPr>
         <p:spPr>
           <a:xfrm>
-            <a:off x="457200" y="274320"/>
-            <a:ext cx="1097280" cy="365760"/>
+            <a:off x="548640" y="164592"/>
+            <a:ext cx="1371600" cy="320040"/>
           </a:xfrm>
           <a:prstGeom prst="rect">
             <a:avLst/>
@@ -9371,7 +9475,7 @@
           <a:lstStyle/>
           <a:p>
             <a:r>
-              <a:rPr sz="1300" b="1">
+              <a:rPr sz="1600" b="1" i="0">
                 <a:solidFill>
                   <a:srgbClr val="C8102E"/>
                 </a:solidFill>
@@ -9380,7 +9484,7 @@
               <a:t>SIX</a:t>
             </a:r>
             <a:r>
-              <a:rPr sz="1300" b="0">
+              <a:rPr sz="1600" b="0" i="0">
                 <a:solidFill>
                   <a:srgbClr val="475569"/>
                 </a:solidFill>
@@ -9393,14 +9497,14 @@
       </p:sp>
       <p:sp>
         <p:nvSpPr>
-          <p:cNvPr id="3" name="TextBox 2"/>
+          <p:cNvPr id="4" name="TextBox 3"/>
           <p:cNvSpPr txBox="1"/>
           <p:nvPr/>
         </p:nvSpPr>
         <p:spPr>
           <a:xfrm>
-            <a:off x="6858000" y="274320"/>
-            <a:ext cx="2011680" cy="274320"/>
+            <a:off x="3657600" y="182880"/>
+            <a:ext cx="4876495" cy="274320"/>
           </a:xfrm>
           <a:prstGeom prst="rect">
             <a:avLst/>
@@ -9413,22 +9517,22 @@
           </a:bodyPr>
           <a:lstStyle/>
           <a:p>
-            <a:pPr algn="r"/>
-            <a:r>
-              <a:rPr sz="800" b="0">
+            <a:pPr algn="ctr"/>
+            <a:r>
+              <a:rPr sz="1000" b="0" i="0">
                 <a:solidFill>
                   <a:srgbClr val="94A3B8"/>
                 </a:solidFill>
                 <a:latin typeface="Segoe UI"/>
               </a:rPr>
-              <a:t>06 / 06  —  Q&amp;A</a:t>
+              <a:t>06 / 06 — Q&amp;A</a:t>
             </a:r>
           </a:p>
         </p:txBody>
       </p:sp>
       <p:pic>
         <p:nvPicPr>
-          <p:cNvPr id="4" name="Picture 3" descr="pptx_slide2_Google_Shape_64_p14.png"/>
+          <p:cNvPr id="5" name="Picture 4" descr="pptx_slide2_Google_Shape_64_p14.png"/>
           <p:cNvPicPr>
             <a:picLocks noChangeAspect="1"/>
           </p:cNvPicPr>
@@ -9442,8 +9546,8 @@
         </p:blipFill>
         <p:spPr>
           <a:xfrm>
-            <a:off x="7863840" y="228600"/>
-            <a:ext cx="1005840" cy="276071"/>
+            <a:off x="10515600" y="109728"/>
+            <a:ext cx="1371600" cy="376460"/>
           </a:xfrm>
           <a:prstGeom prst="rect">
             <a:avLst/>
@@ -9452,14 +9556,14 @@
       </p:pic>
       <p:sp>
         <p:nvSpPr>
-          <p:cNvPr id="5" name="TextBox 4"/>
+          <p:cNvPr id="6" name="TextBox 5"/>
           <p:cNvSpPr txBox="1"/>
           <p:nvPr/>
         </p:nvSpPr>
         <p:spPr>
           <a:xfrm>
-            <a:off x="457200" y="777240"/>
-            <a:ext cx="8229600" cy="274320"/>
+            <a:off x="731520" y="777240"/>
+            <a:ext cx="10728655" cy="274320"/>
           </a:xfrm>
           <a:prstGeom prst="rect">
             <a:avLst/>
@@ -9481,7 +9585,7 @@
               </a:spcAft>
             </a:pPr>
             <a:r>
-              <a:rPr sz="1000" b="1">
+              <a:rPr sz="1200" b="1" i="0">
                 <a:solidFill>
                   <a:srgbClr val="C8102E"/>
                 </a:solidFill>
@@ -9494,14 +9598,14 @@
       </p:sp>
       <p:sp>
         <p:nvSpPr>
-          <p:cNvPr id="6" name="TextBox 5"/>
+          <p:cNvPr id="7" name="TextBox 6"/>
           <p:cNvSpPr txBox="1"/>
           <p:nvPr/>
         </p:nvSpPr>
         <p:spPr>
           <a:xfrm>
-            <a:off x="914400" y="1051560"/>
-            <a:ext cx="7315200" cy="548640"/>
+            <a:off x="1828800" y="1097280"/>
+            <a:ext cx="8534095" cy="640080"/>
           </a:xfrm>
           <a:prstGeom prst="rect">
             <a:avLst/>
@@ -9516,7 +9620,7 @@
           <a:p>
             <a:pPr algn="ctr"/>
             <a:r>
-              <a:rPr sz="2800" b="1">
+              <a:rPr sz="3600" b="1" i="0">
                 <a:solidFill>
                   <a:srgbClr val="0F172A"/>
                 </a:solidFill>
@@ -9525,7 +9629,7 @@
               <a:t>Questions &amp; </a:t>
             </a:r>
             <a:r>
-              <a:rPr sz="2800" b="1">
+              <a:rPr sz="3600" b="1" i="1">
                 <a:solidFill>
                   <a:srgbClr val="C8102E"/>
                 </a:solidFill>
@@ -9538,14 +9642,14 @@
       </p:sp>
       <p:sp>
         <p:nvSpPr>
-          <p:cNvPr id="7" name="TextBox 6"/>
+          <p:cNvPr id="8" name="TextBox 7"/>
           <p:cNvSpPr txBox="1"/>
           <p:nvPr/>
         </p:nvSpPr>
         <p:spPr>
           <a:xfrm>
-            <a:off x="1828800" y="1554480"/>
-            <a:ext cx="5486400" cy="365760"/>
+            <a:off x="1828800" y="1737360"/>
+            <a:ext cx="8534095" cy="365760"/>
           </a:xfrm>
           <a:prstGeom prst="rect">
             <a:avLst/>
@@ -9567,7 +9671,7 @@
               </a:spcAft>
             </a:pPr>
             <a:r>
-              <a:rPr sz="1300" b="0">
+              <a:rPr sz="1500" b="0" i="0">
                 <a:solidFill>
                   <a:srgbClr val="475569"/>
                 </a:solidFill>
@@ -9580,18 +9684,18 @@
       </p:sp>
       <p:sp>
         <p:nvSpPr>
-          <p:cNvPr id="8" name="Rounded Rectangle 7"/>
+          <p:cNvPr id="9" name="Rounded Rectangle 8"/>
           <p:cNvSpPr/>
           <p:nvPr/>
         </p:nvSpPr>
         <p:spPr>
           <a:xfrm>
-            <a:off x="914400" y="1965960"/>
-            <a:ext cx="2194560" cy="2377440"/>
+            <a:off x="1249527" y="2286000"/>
+            <a:ext cx="2926080" cy="3108960"/>
           </a:xfrm>
           <a:prstGeom prst="roundRect">
             <a:avLst>
-              <a:gd name="adj" fmla="val 2000"/>
+              <a:gd name="adj" fmla="val 1500"/>
             </a:avLst>
           </a:prstGeom>
           <a:solidFill>
@@ -9627,7 +9731,7 @@
       </p:sp>
       <p:pic>
         <p:nvPicPr>
-          <p:cNvPr id="9" name="Picture 8" descr="boris.JPG"/>
+          <p:cNvPr id="10" name="Picture 9" descr="boris.JPG"/>
           <p:cNvPicPr>
             <a:picLocks noChangeAspect="1"/>
           </p:cNvPicPr>
@@ -9641,8 +9745,8 @@
         </p:blipFill>
         <p:spPr>
           <a:xfrm>
-            <a:off x="1371600" y="2148840"/>
-            <a:ext cx="1280160" cy="1280160"/>
+            <a:off x="1889607" y="2560320"/>
+            <a:ext cx="1645920" cy="1645920"/>
           </a:xfrm>
           <a:prstGeom prst="rect">
             <a:avLst/>
@@ -9651,14 +9755,14 @@
       </p:pic>
       <p:sp>
         <p:nvSpPr>
-          <p:cNvPr id="10" name="TextBox 9"/>
+          <p:cNvPr id="11" name="TextBox 10"/>
           <p:cNvSpPr txBox="1"/>
           <p:nvPr/>
         </p:nvSpPr>
         <p:spPr>
           <a:xfrm>
-            <a:off x="914400" y="3520440"/>
-            <a:ext cx="2194560" cy="320040"/>
+            <a:off x="1249527" y="4297680"/>
+            <a:ext cx="2926080" cy="365760"/>
           </a:xfrm>
           <a:prstGeom prst="rect">
             <a:avLst/>
@@ -9680,7 +9784,7 @@
               </a:spcAft>
             </a:pPr>
             <a:r>
-              <a:rPr sz="1400" b="1">
+              <a:rPr sz="1600" b="1" i="0">
                 <a:solidFill>
                   <a:srgbClr val="0F172A"/>
                 </a:solidFill>
@@ -9693,18 +9797,18 @@
       </p:sp>
       <p:sp>
         <p:nvSpPr>
-          <p:cNvPr id="11" name="Rounded Rectangle 10"/>
+          <p:cNvPr id="12" name="Rounded Rectangle 11"/>
           <p:cNvSpPr/>
           <p:nvPr/>
         </p:nvSpPr>
         <p:spPr>
           <a:xfrm>
-            <a:off x="1517904" y="3886200"/>
-            <a:ext cx="987552" cy="292608"/>
+            <a:off x="2136495" y="4754880"/>
+            <a:ext cx="1152144" cy="347472"/>
           </a:xfrm>
           <a:prstGeom prst="roundRect">
             <a:avLst>
-              <a:gd name="adj" fmla="val 15000"/>
+              <a:gd name="adj" fmla="val 12000"/>
             </a:avLst>
           </a:prstGeom>
           <a:solidFill>
@@ -9731,12 +9835,12 @@
           </a:fontRef>
         </p:style>
         <p:txBody>
-          <a:bodyPr rtlCol="0" anchor="ctr" tIns="25400" bIns="25400" lIns="76200" rIns="76200" wrap="none"/>
+          <a:bodyPr rtlCol="0" anchor="ctr" tIns="25400" bIns="25400" lIns="101600" rIns="101600" wrap="none"/>
           <a:lstStyle/>
           <a:p>
             <a:pPr algn="ctr"/>
             <a:r>
-              <a:rPr sz="1000" b="0">
+              <a:rPr sz="1100" b="0" i="0">
                 <a:solidFill>
                   <a:srgbClr val="2E6FD6"/>
                 </a:solidFill>
@@ -9749,18 +9853,18 @@
       </p:sp>
       <p:sp>
         <p:nvSpPr>
-          <p:cNvPr id="12" name="Rounded Rectangle 11"/>
+          <p:cNvPr id="13" name="Rounded Rectangle 12"/>
           <p:cNvSpPr/>
           <p:nvPr/>
         </p:nvSpPr>
         <p:spPr>
           <a:xfrm>
-            <a:off x="3474720" y="1965960"/>
-            <a:ext cx="2194560" cy="2377440"/>
+            <a:off x="4632807" y="2286000"/>
+            <a:ext cx="2926080" cy="3108960"/>
           </a:xfrm>
           <a:prstGeom prst="roundRect">
             <a:avLst>
-              <a:gd name="adj" fmla="val 2000"/>
+              <a:gd name="adj" fmla="val 1500"/>
             </a:avLst>
           </a:prstGeom>
           <a:solidFill>
@@ -9796,7 +9900,7 @@
       </p:sp>
       <p:pic>
         <p:nvPicPr>
-          <p:cNvPr id="13" name="Picture 12" descr="hristo.jpeg"/>
+          <p:cNvPr id="14" name="Picture 13" descr="hristo.jpeg"/>
           <p:cNvPicPr>
             <a:picLocks noChangeAspect="1"/>
           </p:cNvPicPr>
@@ -9810,8 +9914,8 @@
         </p:blipFill>
         <p:spPr>
           <a:xfrm>
-            <a:off x="3931920" y="2148840"/>
-            <a:ext cx="1280160" cy="1280160"/>
+            <a:off x="5272887" y="2560320"/>
+            <a:ext cx="1645920" cy="1645920"/>
           </a:xfrm>
           <a:prstGeom prst="rect">
             <a:avLst/>
@@ -9820,14 +9924,14 @@
       </p:pic>
       <p:sp>
         <p:nvSpPr>
-          <p:cNvPr id="14" name="TextBox 13"/>
+          <p:cNvPr id="15" name="TextBox 14"/>
           <p:cNvSpPr txBox="1"/>
           <p:nvPr/>
         </p:nvSpPr>
         <p:spPr>
           <a:xfrm>
-            <a:off x="3474720" y="3520440"/>
-            <a:ext cx="2194560" cy="320040"/>
+            <a:off x="4632807" y="4297680"/>
+            <a:ext cx="2926080" cy="365760"/>
           </a:xfrm>
           <a:prstGeom prst="rect">
             <a:avLst/>
@@ -9849,7 +9953,7 @@
               </a:spcAft>
             </a:pPr>
             <a:r>
-              <a:rPr sz="1400" b="1">
+              <a:rPr sz="1600" b="1" i="0">
                 <a:solidFill>
                   <a:srgbClr val="0F172A"/>
                 </a:solidFill>
@@ -9862,18 +9966,18 @@
       </p:sp>
       <p:sp>
         <p:nvSpPr>
-          <p:cNvPr id="15" name="Rounded Rectangle 14"/>
+          <p:cNvPr id="16" name="Rounded Rectangle 15"/>
           <p:cNvSpPr/>
           <p:nvPr/>
         </p:nvSpPr>
         <p:spPr>
           <a:xfrm>
-            <a:off x="4114800" y="3886200"/>
-            <a:ext cx="914400" cy="292608"/>
+            <a:off x="5547207" y="4754880"/>
+            <a:ext cx="1097280" cy="347472"/>
           </a:xfrm>
           <a:prstGeom prst="roundRect">
             <a:avLst>
-              <a:gd name="adj" fmla="val 15000"/>
+              <a:gd name="adj" fmla="val 12000"/>
             </a:avLst>
           </a:prstGeom>
           <a:solidFill>
@@ -9900,12 +10004,12 @@
           </a:fontRef>
         </p:style>
         <p:txBody>
-          <a:bodyPr rtlCol="0" anchor="ctr" tIns="25400" bIns="25400" lIns="76200" rIns="76200" wrap="none"/>
+          <a:bodyPr rtlCol="0" anchor="ctr" tIns="25400" bIns="25400" lIns="101600" rIns="101600" wrap="none"/>
           <a:lstStyle/>
           <a:p>
             <a:pPr algn="ctr"/>
             <a:r>
-              <a:rPr sz="1000" b="0">
+              <a:rPr sz="1100" b="0" i="0">
                 <a:solidFill>
                   <a:srgbClr val="16A34A"/>
                 </a:solidFill>
@@ -9918,18 +10022,18 @@
       </p:sp>
       <p:sp>
         <p:nvSpPr>
-          <p:cNvPr id="16" name="Rounded Rectangle 15"/>
+          <p:cNvPr id="17" name="Rounded Rectangle 16"/>
           <p:cNvSpPr/>
           <p:nvPr/>
         </p:nvSpPr>
         <p:spPr>
           <a:xfrm>
-            <a:off x="6035040" y="1965960"/>
-            <a:ext cx="2194560" cy="2377440"/>
+            <a:off x="8016087" y="2286000"/>
+            <a:ext cx="2926080" cy="3108960"/>
           </a:xfrm>
           <a:prstGeom prst="roundRect">
             <a:avLst>
-              <a:gd name="adj" fmla="val 2000"/>
+              <a:gd name="adj" fmla="val 1500"/>
             </a:avLst>
           </a:prstGeom>
           <a:solidFill>
@@ -9965,7 +10069,7 @@
       </p:sp>
       <p:pic>
         <p:nvPicPr>
-          <p:cNvPr id="17" name="Picture 16" descr="nikola.jpeg"/>
+          <p:cNvPr id="18" name="Picture 17" descr="nikola.jpeg"/>
           <p:cNvPicPr>
             <a:picLocks noChangeAspect="1"/>
           </p:cNvPicPr>
@@ -9979,8 +10083,8 @@
         </p:blipFill>
         <p:spPr>
           <a:xfrm>
-            <a:off x="6492240" y="2148840"/>
-            <a:ext cx="1280160" cy="1280160"/>
+            <a:off x="8656166" y="2560320"/>
+            <a:ext cx="1645920" cy="1645920"/>
           </a:xfrm>
           <a:prstGeom prst="rect">
             <a:avLst/>
@@ -9989,14 +10093,14 @@
       </p:pic>
       <p:sp>
         <p:nvSpPr>
-          <p:cNvPr id="18" name="TextBox 17"/>
+          <p:cNvPr id="19" name="TextBox 18"/>
           <p:cNvSpPr txBox="1"/>
           <p:nvPr/>
         </p:nvSpPr>
         <p:spPr>
           <a:xfrm>
-            <a:off x="6035040" y="3520440"/>
-            <a:ext cx="2194560" cy="320040"/>
+            <a:off x="8016087" y="4297680"/>
+            <a:ext cx="2926080" cy="365760"/>
           </a:xfrm>
           <a:prstGeom prst="rect">
             <a:avLst/>
@@ -10018,7 +10122,7 @@
               </a:spcAft>
             </a:pPr>
             <a:r>
-              <a:rPr sz="1400" b="1">
+              <a:rPr sz="1600" b="1" i="0">
                 <a:solidFill>
                   <a:srgbClr val="0F172A"/>
                 </a:solidFill>
@@ -10031,18 +10135,18 @@
       </p:sp>
       <p:sp>
         <p:nvSpPr>
-          <p:cNvPr id="19" name="Rounded Rectangle 18"/>
+          <p:cNvPr id="20" name="Rounded Rectangle 19"/>
           <p:cNvSpPr/>
           <p:nvPr/>
         </p:nvSpPr>
         <p:spPr>
           <a:xfrm>
-            <a:off x="6675120" y="3886200"/>
-            <a:ext cx="914400" cy="292608"/>
+            <a:off x="8930487" y="4754880"/>
+            <a:ext cx="1097280" cy="347472"/>
           </a:xfrm>
           <a:prstGeom prst="roundRect">
             <a:avLst>
-              <a:gd name="adj" fmla="val 15000"/>
+              <a:gd name="adj" fmla="val 12000"/>
             </a:avLst>
           </a:prstGeom>
           <a:solidFill>
@@ -10069,12 +10173,12 @@
           </a:fontRef>
         </p:style>
         <p:txBody>
-          <a:bodyPr rtlCol="0" anchor="ctr" tIns="25400" bIns="25400" lIns="76200" rIns="76200" wrap="none"/>
+          <a:bodyPr rtlCol="0" anchor="ctr" tIns="25400" bIns="25400" lIns="101600" rIns="101600" wrap="none"/>
           <a:lstStyle/>
           <a:p>
             <a:pPr algn="ctr"/>
             <a:r>
-              <a:rPr sz="1000" b="0">
+              <a:rPr sz="1100" b="0" i="0">
                 <a:solidFill>
                   <a:srgbClr val="D97706"/>
                 </a:solidFill>
@@ -10087,14 +10191,14 @@
       </p:sp>
       <p:sp>
         <p:nvSpPr>
-          <p:cNvPr id="20" name="TextBox 19"/>
+          <p:cNvPr id="21" name="TextBox 20"/>
           <p:cNvSpPr txBox="1"/>
           <p:nvPr/>
         </p:nvSpPr>
         <p:spPr>
           <a:xfrm>
-            <a:off x="1371600" y="4160520"/>
-            <a:ext cx="6400800" cy="365760"/>
+            <a:off x="1828800" y="5623560"/>
+            <a:ext cx="8534095" cy="457200"/>
           </a:xfrm>
           <a:prstGeom prst="rect">
             <a:avLst/>
@@ -10116,7 +10220,7 @@
               </a:spcAft>
             </a:pPr>
             <a:r>
-              <a:rPr sz="1600" b="1">
+              <a:rPr sz="2000" b="1" i="0">
                 <a:solidFill>
                   <a:srgbClr val="0F172A"/>
                 </a:solidFill>
@@ -10129,14 +10233,14 @@
       </p:sp>
       <p:sp>
         <p:nvSpPr>
-          <p:cNvPr id="21" name="TextBox 20"/>
+          <p:cNvPr id="22" name="TextBox 21"/>
           <p:cNvSpPr txBox="1"/>
           <p:nvPr/>
         </p:nvSpPr>
         <p:spPr>
           <a:xfrm>
-            <a:off x="2743200" y="4572000"/>
-            <a:ext cx="3657600" cy="320040"/>
+            <a:off x="3657600" y="6126480"/>
+            <a:ext cx="4876495" cy="365760"/>
           </a:xfrm>
           <a:prstGeom prst="rect">
             <a:avLst/>
@@ -10158,7 +10262,7 @@
               </a:spcAft>
             </a:pPr>
             <a:r>
-              <a:rPr sz="1400" b="1">
+              <a:rPr sz="1600" b="1" i="0">
                 <a:solidFill>
                   <a:srgbClr val="475569"/>
                 </a:solidFill>

--- a/presentation/SIX_AI_Presentation.pptx
+++ b/presentation/SIX_AI_Presentation.pptx
@@ -3117,24 +3117,48 @@
         </p:blipFill>
         <p:spPr>
           <a:xfrm>
-            <a:off x="10515600" y="274320"/>
-            <a:ext cx="1371600" cy="376460"/>
+            <a:off x="10545775" y="228600"/>
+            <a:ext cx="1280160" cy="351363"/>
           </a:xfrm>
           <a:prstGeom prst="rect">
             <a:avLst/>
           </a:prstGeom>
         </p:spPr>
       </p:pic>
-      <p:sp>
-        <p:nvSpPr>
-          <p:cNvPr id="3" name="TextBox 2"/>
+      <p:pic>
+        <p:nvPicPr>
+          <p:cNvPr id="3" name="Picture 2" descr="six_logo_large.png"/>
+          <p:cNvPicPr>
+            <a:picLocks noChangeAspect="1"/>
+          </p:cNvPicPr>
+          <p:nvPr/>
+        </p:nvPicPr>
+        <p:blipFill>
+          <a:blip r:embed="rId3"/>
+          <a:stretch>
+            <a:fillRect/>
+          </a:stretch>
+        </p:blipFill>
+        <p:spPr>
+          <a:xfrm>
+            <a:off x="4587087" y="2011680"/>
+            <a:ext cx="2011680" cy="566928"/>
+          </a:xfrm>
+          <a:prstGeom prst="rect">
+            <a:avLst/>
+          </a:prstGeom>
+        </p:spPr>
+      </p:pic>
+      <p:sp>
+        <p:nvSpPr>
+          <p:cNvPr id="4" name="TextBox 3"/>
           <p:cNvSpPr txBox="1"/>
           <p:nvPr/>
         </p:nvSpPr>
         <p:spPr>
           <a:xfrm>
-            <a:off x="0" y="1371600"/>
-            <a:ext cx="12191695" cy="1097280"/>
+            <a:off x="6690207" y="1828800"/>
+            <a:ext cx="914400" cy="822960"/>
           </a:xfrm>
           <a:prstGeom prst="rect">
             <a:avLst/>
@@ -3147,38 +3171,28 @@
           </a:bodyPr>
           <a:lstStyle/>
           <a:p>
-            <a:pPr algn="ctr"/>
-            <a:r>
-              <a:rPr sz="6000" b="1" i="0">
-                <a:solidFill>
-                  <a:srgbClr val="C8102E"/>
-                </a:solidFill>
-                <a:latin typeface="Segoe UI"/>
-              </a:rPr>
-              <a:t>SIX</a:t>
-            </a:r>
-            <a:r>
-              <a:rPr sz="6000" b="0" i="0">
+            <a:r>
+              <a:rPr sz="4800" b="0" i="0">
                 <a:solidFill>
                   <a:srgbClr val="0F172A"/>
                 </a:solidFill>
                 <a:latin typeface="Segoe UI"/>
               </a:rPr>
-              <a:t> AI</a:t>
-            </a:r>
-          </a:p>
-        </p:txBody>
-      </p:sp>
-      <p:sp>
-        <p:nvSpPr>
-          <p:cNvPr id="4" name="TextBox 3"/>
+              <a:t>AI</a:t>
+            </a:r>
+          </a:p>
+        </p:txBody>
+      </p:sp>
+      <p:sp>
+        <p:nvSpPr>
+          <p:cNvPr id="5" name="TextBox 4"/>
           <p:cNvSpPr txBox="1"/>
           <p:nvPr/>
         </p:nvSpPr>
         <p:spPr>
           <a:xfrm>
-            <a:off x="1828800" y="2560320"/>
-            <a:ext cx="8534095" cy="1097280"/>
+            <a:off x="2286000" y="2834640"/>
+            <a:ext cx="7619695" cy="914400"/>
           </a:xfrm>
           <a:prstGeom prst="rect">
             <a:avLst/>
@@ -3193,7 +3207,7 @@
           <a:p>
             <a:pPr algn="ctr"/>
             <a:r>
-              <a:rPr sz="2200" b="0" i="1">
+              <a:rPr sz="2000" b="0" i="1">
                 <a:solidFill>
                   <a:srgbClr val="475569"/>
                 </a:solidFill>
@@ -3209,7 +3223,7 @@
               </a:spcBef>
             </a:pPr>
             <a:r>
-              <a:rPr sz="1400" b="0" i="0">
+              <a:rPr sz="1300" b="0" i="0">
                 <a:solidFill>
                   <a:srgbClr val="94A3B8"/>
                 </a:solidFill>
@@ -3222,14 +3236,14 @@
       </p:sp>
       <p:sp>
         <p:nvSpPr>
-          <p:cNvPr id="5" name="TextBox 4"/>
+          <p:cNvPr id="6" name="TextBox 5"/>
           <p:cNvSpPr txBox="1"/>
           <p:nvPr/>
         </p:nvSpPr>
         <p:spPr>
           <a:xfrm>
-            <a:off x="2438247" y="4114800"/>
-            <a:ext cx="2194560" cy="365760"/>
+            <a:off x="2785719" y="4206240"/>
+            <a:ext cx="2011680" cy="320040"/>
           </a:xfrm>
           <a:prstGeom prst="rect">
             <a:avLst/>
@@ -3242,16 +3256,9 @@
           </a:bodyPr>
           <a:lstStyle/>
           <a:p>
-            <a:pPr algn="ctr">
-              <a:spcBef>
-                <a:spcPts val="0"/>
-              </a:spcBef>
-              <a:spcAft>
-                <a:spcPts val="0"/>
-              </a:spcAft>
-            </a:pPr>
-            <a:r>
-              <a:rPr sz="1600" b="1" i="0">
+            <a:pPr algn="ctr"/>
+            <a:r>
+              <a:rPr sz="1500" b="1" i="0">
                 <a:solidFill>
                   <a:srgbClr val="475569"/>
                 </a:solidFill>
@@ -3264,14 +3271,14 @@
       </p:sp>
       <p:sp>
         <p:nvSpPr>
-          <p:cNvPr id="6" name="Rectangle 5"/>
+          <p:cNvPr id="7" name="Rectangle 6"/>
           <p:cNvSpPr/>
           <p:nvPr/>
         </p:nvSpPr>
         <p:spPr>
           <a:xfrm>
-            <a:off x="4815687" y="4160520"/>
-            <a:ext cx="12700" cy="274320"/>
+            <a:off x="4934559" y="4251960"/>
+            <a:ext cx="12700" cy="228600"/>
           </a:xfrm>
           <a:prstGeom prst="rect">
             <a:avLst/>
@@ -3307,14 +3314,14 @@
       </p:sp>
       <p:sp>
         <p:nvSpPr>
-          <p:cNvPr id="7" name="TextBox 6"/>
+          <p:cNvPr id="8" name="TextBox 7"/>
           <p:cNvSpPr txBox="1"/>
           <p:nvPr/>
         </p:nvSpPr>
         <p:spPr>
           <a:xfrm>
-            <a:off x="5011267" y="4114800"/>
-            <a:ext cx="2194560" cy="365760"/>
+            <a:off x="5090007" y="4206240"/>
+            <a:ext cx="2011680" cy="320040"/>
           </a:xfrm>
           <a:prstGeom prst="rect">
             <a:avLst/>
@@ -3327,16 +3334,9 @@
           </a:bodyPr>
           <a:lstStyle/>
           <a:p>
-            <a:pPr algn="ctr">
-              <a:spcBef>
-                <a:spcPts val="0"/>
-              </a:spcBef>
-              <a:spcAft>
-                <a:spcPts val="0"/>
-              </a:spcAft>
-            </a:pPr>
-            <a:r>
-              <a:rPr sz="1600" b="1" i="0">
+            <a:pPr algn="ctr"/>
+            <a:r>
+              <a:rPr sz="1500" b="1" i="0">
                 <a:solidFill>
                   <a:srgbClr val="475569"/>
                 </a:solidFill>
@@ -3349,14 +3349,14 @@
       </p:sp>
       <p:sp>
         <p:nvSpPr>
-          <p:cNvPr id="8" name="Rectangle 7"/>
+          <p:cNvPr id="9" name="Rectangle 8"/>
           <p:cNvSpPr/>
           <p:nvPr/>
         </p:nvSpPr>
         <p:spPr>
           <a:xfrm>
-            <a:off x="7388707" y="4160520"/>
-            <a:ext cx="12700" cy="274320"/>
+            <a:off x="7238847" y="4251960"/>
+            <a:ext cx="12700" cy="228600"/>
           </a:xfrm>
           <a:prstGeom prst="rect">
             <a:avLst/>
@@ -3392,14 +3392,14 @@
       </p:sp>
       <p:sp>
         <p:nvSpPr>
-          <p:cNvPr id="9" name="TextBox 8"/>
+          <p:cNvPr id="10" name="TextBox 9"/>
           <p:cNvSpPr txBox="1"/>
           <p:nvPr/>
         </p:nvSpPr>
         <p:spPr>
           <a:xfrm>
-            <a:off x="7584287" y="4114800"/>
-            <a:ext cx="2194560" cy="365760"/>
+            <a:off x="7394295" y="4206240"/>
+            <a:ext cx="2011680" cy="320040"/>
           </a:xfrm>
           <a:prstGeom prst="rect">
             <a:avLst/>
@@ -3412,16 +3412,9 @@
           </a:bodyPr>
           <a:lstStyle/>
           <a:p>
-            <a:pPr algn="ctr">
-              <a:spcBef>
-                <a:spcPts val="0"/>
-              </a:spcBef>
-              <a:spcAft>
-                <a:spcPts val="0"/>
-              </a:spcAft>
-            </a:pPr>
-            <a:r>
-              <a:rPr sz="1600" b="1" i="0">
+            <a:pPr algn="ctr"/>
+            <a:r>
+              <a:rPr sz="1500" b="1" i="0">
                 <a:solidFill>
                   <a:srgbClr val="475569"/>
                 </a:solidFill>
@@ -3434,14 +3427,14 @@
       </p:sp>
       <p:sp>
         <p:nvSpPr>
-          <p:cNvPr id="10" name="TextBox 9"/>
+          <p:cNvPr id="11" name="TextBox 10"/>
           <p:cNvSpPr txBox="1"/>
           <p:nvPr/>
         </p:nvSpPr>
         <p:spPr>
           <a:xfrm>
-            <a:off x="2743200" y="5303520"/>
-            <a:ext cx="6705295" cy="365760"/>
+            <a:off x="2743200" y="5120640"/>
+            <a:ext cx="6705295" cy="320040"/>
           </a:xfrm>
           <a:prstGeom prst="rect">
             <a:avLst/>
@@ -3454,16 +3447,9 @@
           </a:bodyPr>
           <a:lstStyle/>
           <a:p>
-            <a:pPr algn="ctr">
-              <a:spcBef>
-                <a:spcPts val="0"/>
-              </a:spcBef>
-              <a:spcAft>
-                <a:spcPts val="0"/>
-              </a:spcAft>
-            </a:pPr>
-            <a:r>
-              <a:rPr sz="1200" b="1" i="0">
+            <a:pPr algn="ctr"/>
+            <a:r>
+              <a:rPr sz="1100" b="1" i="0">
                 <a:solidFill>
                   <a:srgbClr val="94A3B8"/>
                 </a:solidFill>
@@ -3508,8 +3494,8 @@
         </p:nvSpPr>
         <p:spPr>
           <a:xfrm>
-            <a:off x="0" y="502920"/>
-            <a:ext cx="12191695" cy="12700"/>
+            <a:off x="0" y="475488"/>
+            <a:ext cx="12191695" cy="9525"/>
           </a:xfrm>
           <a:prstGeom prst="rect">
             <a:avLst/>
@@ -3543,87 +3529,9 @@
           </a:p>
         </p:txBody>
       </p:sp>
-      <p:sp>
-        <p:nvSpPr>
-          <p:cNvPr id="3" name="TextBox 2"/>
-          <p:cNvSpPr txBox="1"/>
-          <p:nvPr/>
-        </p:nvSpPr>
-        <p:spPr>
-          <a:xfrm>
-            <a:off x="548640" y="164592"/>
-            <a:ext cx="1371600" cy="320040"/>
-          </a:xfrm>
-          <a:prstGeom prst="rect">
-            <a:avLst/>
-          </a:prstGeom>
-          <a:noFill/>
-        </p:spPr>
-        <p:txBody>
-          <a:bodyPr wrap="square">
-            <a:spAutoFit/>
-          </a:bodyPr>
-          <a:lstStyle/>
-          <a:p>
-            <a:r>
-              <a:rPr sz="1600" b="1" i="0">
-                <a:solidFill>
-                  <a:srgbClr val="C8102E"/>
-                </a:solidFill>
-                <a:latin typeface="Segoe UI"/>
-              </a:rPr>
-              <a:t>SIX</a:t>
-            </a:r>
-            <a:r>
-              <a:rPr sz="1600" b="0" i="0">
-                <a:solidFill>
-                  <a:srgbClr val="475569"/>
-                </a:solidFill>
-                <a:latin typeface="Segoe UI"/>
-              </a:rPr>
-              <a:t> AI</a:t>
-            </a:r>
-          </a:p>
-        </p:txBody>
-      </p:sp>
-      <p:sp>
-        <p:nvSpPr>
-          <p:cNvPr id="4" name="TextBox 3"/>
-          <p:cNvSpPr txBox="1"/>
-          <p:nvPr/>
-        </p:nvSpPr>
-        <p:spPr>
-          <a:xfrm>
-            <a:off x="3657600" y="182880"/>
-            <a:ext cx="4876495" cy="274320"/>
-          </a:xfrm>
-          <a:prstGeom prst="rect">
-            <a:avLst/>
-          </a:prstGeom>
-          <a:noFill/>
-        </p:spPr>
-        <p:txBody>
-          <a:bodyPr wrap="square">
-            <a:spAutoFit/>
-          </a:bodyPr>
-          <a:lstStyle/>
-          <a:p>
-            <a:pPr algn="ctr"/>
-            <a:r>
-              <a:rPr sz="1000" b="0" i="0">
-                <a:solidFill>
-                  <a:srgbClr val="94A3B8"/>
-                </a:solidFill>
-                <a:latin typeface="Segoe UI"/>
-              </a:rPr>
-              <a:t>02 / 06 — PROBLEM</a:t>
-            </a:r>
-          </a:p>
-        </p:txBody>
-      </p:sp>
       <p:pic>
         <p:nvPicPr>
-          <p:cNvPr id="5" name="Picture 4" descr="pptx_slide2_Google_Shape_64_p14.png"/>
+          <p:cNvPr id="3" name="Picture 2" descr="six_logo_small.png"/>
           <p:cNvPicPr>
             <a:picLocks noChangeAspect="1"/>
           </p:cNvPicPr>
@@ -3637,8 +3545,8 @@
         </p:blipFill>
         <p:spPr>
           <a:xfrm>
-            <a:off x="10515600" y="109728"/>
-            <a:ext cx="1371600" cy="376460"/>
+            <a:off x="365760" y="128016"/>
+            <a:ext cx="457200" cy="228600"/>
           </a:xfrm>
           <a:prstGeom prst="rect">
             <a:avLst/>
@@ -3647,14 +3555,14 @@
       </p:pic>
       <p:sp>
         <p:nvSpPr>
-          <p:cNvPr id="6" name="TextBox 5"/>
+          <p:cNvPr id="4" name="TextBox 3"/>
           <p:cNvSpPr txBox="1"/>
           <p:nvPr/>
         </p:nvSpPr>
         <p:spPr>
           <a:xfrm>
-            <a:off x="731520" y="822960"/>
-            <a:ext cx="10728655" cy="274320"/>
+            <a:off x="822960" y="137160"/>
+            <a:ext cx="365760" cy="256032"/>
           </a:xfrm>
           <a:prstGeom prst="rect">
             <a:avLst/>
@@ -3667,36 +3575,28 @@
           </a:bodyPr>
           <a:lstStyle/>
           <a:p>
-            <a:pPr algn="ctr">
-              <a:spcBef>
-                <a:spcPts val="0"/>
-              </a:spcBef>
-              <a:spcAft>
-                <a:spcPts val="0"/>
-              </a:spcAft>
-            </a:pPr>
-            <a:r>
-              <a:rPr sz="1200" b="1" i="0">
-                <a:solidFill>
-                  <a:srgbClr val="C8102E"/>
-                </a:solidFill>
-                <a:latin typeface="Segoe UI"/>
-              </a:rPr>
-              <a:t>THE PROBLEM</a:t>
-            </a:r>
-          </a:p>
-        </p:txBody>
-      </p:sp>
-      <p:sp>
-        <p:nvSpPr>
-          <p:cNvPr id="7" name="TextBox 6"/>
+            <a:r>
+              <a:rPr sz="1300" b="0" i="0">
+                <a:solidFill>
+                  <a:srgbClr val="475569"/>
+                </a:solidFill>
+                <a:latin typeface="Segoe UI"/>
+              </a:rPr>
+              <a:t>AI</a:t>
+            </a:r>
+          </a:p>
+        </p:txBody>
+      </p:sp>
+      <p:sp>
+        <p:nvSpPr>
+          <p:cNvPr id="5" name="TextBox 4"/>
           <p:cNvSpPr txBox="1"/>
           <p:nvPr/>
         </p:nvSpPr>
         <p:spPr>
           <a:xfrm>
-            <a:off x="1097280" y="1188720"/>
-            <a:ext cx="9997135" cy="1097280"/>
+            <a:off x="2743200" y="155448"/>
+            <a:ext cx="6705295" cy="228600"/>
           </a:xfrm>
           <a:prstGeom prst="rect">
             <a:avLst/>
@@ -3711,36 +3611,51 @@
           <a:p>
             <a:pPr algn="ctr"/>
             <a:r>
-              <a:rPr sz="3600" b="1" i="0">
-                <a:solidFill>
-                  <a:srgbClr val="0F172A"/>
-                </a:solidFill>
-                <a:latin typeface="Segoe UI"/>
-              </a:rPr>
-              <a:t>Private banking is personal — </a:t>
-            </a:r>
-            <a:r>
-              <a:rPr sz="3600" b="1" i="1">
-                <a:solidFill>
-                  <a:srgbClr val="C8102E"/>
-                </a:solidFill>
-                <a:latin typeface="Segoe UI"/>
-              </a:rPr>
-              <a:t>but only if you have CHF 50M+</a:t>
-            </a:r>
-          </a:p>
-        </p:txBody>
-      </p:sp>
-      <p:sp>
-        <p:nvSpPr>
-          <p:cNvPr id="8" name="TextBox 7"/>
+              <a:rPr sz="900" b="0" i="0">
+                <a:solidFill>
+                  <a:srgbClr val="94A3B8"/>
+                </a:solidFill>
+                <a:latin typeface="Segoe UI"/>
+              </a:rPr>
+              <a:t>02 / 06 — PROBLEM</a:t>
+            </a:r>
+          </a:p>
+        </p:txBody>
+      </p:sp>
+      <p:pic>
+        <p:nvPicPr>
+          <p:cNvPr id="6" name="Picture 5" descr="pptx_slide2_Google_Shape_64_p14.png"/>
+          <p:cNvPicPr>
+            <a:picLocks noChangeAspect="1"/>
+          </p:cNvPicPr>
+          <p:nvPr/>
+        </p:nvPicPr>
+        <p:blipFill>
+          <a:blip r:embed="rId3"/>
+          <a:stretch>
+            <a:fillRect/>
+          </a:stretch>
+        </p:blipFill>
+        <p:spPr>
+          <a:xfrm>
+            <a:off x="10728655" y="91440"/>
+            <a:ext cx="1188720" cy="326266"/>
+          </a:xfrm>
+          <a:prstGeom prst="rect">
+            <a:avLst/>
+          </a:prstGeom>
+        </p:spPr>
+      </p:pic>
+      <p:sp>
+        <p:nvSpPr>
+          <p:cNvPr id="7" name="TextBox 6"/>
           <p:cNvSpPr txBox="1"/>
           <p:nvPr/>
         </p:nvSpPr>
         <p:spPr>
           <a:xfrm>
-            <a:off x="1828800" y="2377440"/>
-            <a:ext cx="8534095" cy="640080"/>
+            <a:off x="914400" y="1005840"/>
+            <a:ext cx="10362895" cy="274320"/>
           </a:xfrm>
           <a:prstGeom prst="rect">
             <a:avLst/>
@@ -3753,37 +3668,120 @@
           </a:bodyPr>
           <a:lstStyle/>
           <a:p>
-            <a:pPr algn="ctr">
-              <a:spcBef>
-                <a:spcPts val="0"/>
-              </a:spcBef>
-              <a:spcAft>
-                <a:spcPts val="0"/>
-              </a:spcAft>
-            </a:pPr>
-            <a:r>
-              <a:rPr sz="1600" b="0" i="0">
+            <a:pPr algn="ctr"/>
+            <a:r>
+              <a:rPr sz="1200" b="1" i="0">
+                <a:solidFill>
+                  <a:srgbClr val="C8102E"/>
+                </a:solidFill>
+                <a:latin typeface="Segoe UI"/>
+              </a:rPr>
+              <a:t>THE PROBLEM</a:t>
+            </a:r>
+          </a:p>
+        </p:txBody>
+      </p:sp>
+      <p:sp>
+        <p:nvSpPr>
+          <p:cNvPr id="8" name="TextBox 7"/>
+          <p:cNvSpPr txBox="1"/>
+          <p:nvPr/>
+        </p:nvSpPr>
+        <p:spPr>
+          <a:xfrm>
+            <a:off x="1371600" y="1417320"/>
+            <a:ext cx="9448495" cy="1097280"/>
+          </a:xfrm>
+          <a:prstGeom prst="rect">
+            <a:avLst/>
+          </a:prstGeom>
+          <a:noFill/>
+        </p:spPr>
+        <p:txBody>
+          <a:bodyPr wrap="square">
+            <a:spAutoFit/>
+          </a:bodyPr>
+          <a:lstStyle/>
+          <a:p>
+            <a:pPr algn="ctr"/>
+            <a:r>
+              <a:rPr sz="3400" b="1" i="0">
+                <a:solidFill>
+                  <a:srgbClr val="0F172A"/>
+                </a:solidFill>
+                <a:latin typeface="Segoe UI"/>
+              </a:rPr>
+              <a:t>Private banking is personal — </a:t>
+            </a:r>
+            <a:r>
+              <a:rPr sz="3400" b="1" i="1">
+                <a:solidFill>
+                  <a:srgbClr val="C8102E"/>
+                </a:solidFill>
+                <a:latin typeface="Segoe UI"/>
+              </a:rPr>
+              <a:t>but only if you have CHF 50M+</a:t>
+            </a:r>
+          </a:p>
+        </p:txBody>
+      </p:sp>
+      <p:sp>
+        <p:nvSpPr>
+          <p:cNvPr id="9" name="TextBox 8"/>
+          <p:cNvSpPr txBox="1"/>
+          <p:nvPr/>
+        </p:nvSpPr>
+        <p:spPr>
+          <a:xfrm>
+            <a:off x="2286000" y="2651760"/>
+            <a:ext cx="7619695" cy="594360"/>
+          </a:xfrm>
+          <a:prstGeom prst="rect">
+            <a:avLst/>
+          </a:prstGeom>
+          <a:noFill/>
+        </p:spPr>
+        <p:txBody>
+          <a:bodyPr wrap="square">
+            <a:spAutoFit/>
+          </a:bodyPr>
+          <a:lstStyle/>
+          <a:p>
+            <a:pPr algn="ctr"/>
+            <a:r>
+              <a:rPr sz="1500" b="0" i="0">
                 <a:solidFill>
                   <a:srgbClr val="475569"/>
                 </a:solidFill>
                 <a:latin typeface="Segoe UI"/>
               </a:rPr>
-              <a:t>Ultra-high-net-worth clients get a dedicated RM who knows them deeply.
-Everyone else gets a template.</a:t>
-            </a:r>
-          </a:p>
-        </p:txBody>
-      </p:sp>
-      <p:sp>
-        <p:nvSpPr>
-          <p:cNvPr id="9" name="Rounded Rectangle 8"/>
+              <a:t>Ultra-high-net-worth clients get a dedicated RM who knows them deeply.</a:t>
+            </a:r>
+          </a:p>
+          <a:p>
+            <a:pPr algn="ctr"/>
+            <a:r>
+              <a:rPr sz="1500" b="0" i="0">
+                <a:solidFill>
+                  <a:srgbClr val="475569"/>
+                </a:solidFill>
+                <a:latin typeface="Segoe UI"/>
+              </a:rPr>
+              <a:t>Everyone else gets a template.</a:t>
+            </a:r>
+          </a:p>
+        </p:txBody>
+      </p:sp>
+      <p:sp>
+        <p:nvSpPr>
+          <p:cNvPr id="10" name="Rounded Rectangle 9"/>
           <p:cNvSpPr/>
           <p:nvPr/>
         </p:nvSpPr>
         <p:spPr>
           <a:xfrm>
-            <a:off x="792327" y="3657600"/>
-            <a:ext cx="3291840" cy="914400"/>
+            <a:off x="1112367" y="3840480"/>
+            <a:ext cx="3108960" cy="868680"/>
           </a:xfrm>
           <a:prstGeom prst="roundRect">
             <a:avLst>
@@ -3823,14 +3821,14 @@
       </p:sp>
       <p:sp>
         <p:nvSpPr>
-          <p:cNvPr id="10" name="TextBox 9"/>
+          <p:cNvPr id="11" name="TextBox 10"/>
           <p:cNvSpPr txBox="1"/>
           <p:nvPr/>
         </p:nvSpPr>
         <p:spPr>
           <a:xfrm>
-            <a:off x="1112367" y="3794760"/>
-            <a:ext cx="548640" cy="640080"/>
+            <a:off x="1340967" y="3977640"/>
+            <a:ext cx="457200" cy="548640"/>
           </a:xfrm>
           <a:prstGeom prst="rect">
             <a:avLst/>
@@ -3843,16 +3841,9 @@
           </a:bodyPr>
           <a:lstStyle/>
           <a:p>
-            <a:pPr algn="ctr">
-              <a:spcBef>
-                <a:spcPts val="0"/>
-              </a:spcBef>
-              <a:spcAft>
-                <a:spcPts val="0"/>
-              </a:spcAft>
-            </a:pPr>
-            <a:r>
-              <a:rPr sz="2800" b="0" i="0">
+            <a:pPr algn="ctr"/>
+            <a:r>
+              <a:rPr sz="2600" b="0" i="0">
                 <a:solidFill>
                   <a:srgbClr val="0F172A"/>
                 </a:solidFill>
@@ -3865,14 +3856,14 @@
       </p:sp>
       <p:sp>
         <p:nvSpPr>
-          <p:cNvPr id="11" name="TextBox 10"/>
+          <p:cNvPr id="12" name="TextBox 11"/>
           <p:cNvSpPr txBox="1"/>
           <p:nvPr/>
         </p:nvSpPr>
         <p:spPr>
           <a:xfrm>
-            <a:off x="1706727" y="3840480"/>
-            <a:ext cx="2103120" cy="548640"/>
+            <a:off x="1889607" y="4023360"/>
+            <a:ext cx="2103120" cy="502920"/>
           </a:xfrm>
           <a:prstGeom prst="rect">
             <a:avLst/>
@@ -3887,7 +3878,7 @@
           <a:p>
             <a:pPr algn="l"/>
             <a:r>
-              <a:rPr sz="1600" b="1" i="0">
+              <a:rPr sz="1500" b="1" i="0">
                 <a:solidFill>
                   <a:srgbClr val="0F172A"/>
                 </a:solidFill>
@@ -3900,14 +3891,14 @@
       </p:sp>
       <p:sp>
         <p:nvSpPr>
-          <p:cNvPr id="12" name="Rounded Rectangle 11"/>
+          <p:cNvPr id="13" name="Rounded Rectangle 12"/>
           <p:cNvSpPr/>
           <p:nvPr/>
         </p:nvSpPr>
         <p:spPr>
           <a:xfrm>
-            <a:off x="4449927" y="3657600"/>
-            <a:ext cx="3291840" cy="914400"/>
+            <a:off x="4541367" y="3840480"/>
+            <a:ext cx="3108960" cy="868680"/>
           </a:xfrm>
           <a:prstGeom prst="roundRect">
             <a:avLst>
@@ -3947,14 +3938,14 @@
       </p:sp>
       <p:sp>
         <p:nvSpPr>
-          <p:cNvPr id="13" name="TextBox 12"/>
+          <p:cNvPr id="14" name="TextBox 13"/>
           <p:cNvSpPr txBox="1"/>
           <p:nvPr/>
         </p:nvSpPr>
         <p:spPr>
           <a:xfrm>
-            <a:off x="4769967" y="3794760"/>
-            <a:ext cx="548640" cy="640080"/>
+            <a:off x="4769967" y="3977640"/>
+            <a:ext cx="457200" cy="548640"/>
           </a:xfrm>
           <a:prstGeom prst="rect">
             <a:avLst/>
@@ -3967,16 +3958,9 @@
           </a:bodyPr>
           <a:lstStyle/>
           <a:p>
-            <a:pPr algn="ctr">
-              <a:spcBef>
-                <a:spcPts val="0"/>
-              </a:spcBef>
-              <a:spcAft>
-                <a:spcPts val="0"/>
-              </a:spcAft>
-            </a:pPr>
-            <a:r>
-              <a:rPr sz="2800" b="0" i="0">
+            <a:pPr algn="ctr"/>
+            <a:r>
+              <a:rPr sz="2600" b="0" i="0">
                 <a:solidFill>
                   <a:srgbClr val="0F172A"/>
                 </a:solidFill>
@@ -3989,14 +3973,14 @@
       </p:sp>
       <p:sp>
         <p:nvSpPr>
-          <p:cNvPr id="14" name="TextBox 13"/>
+          <p:cNvPr id="15" name="TextBox 14"/>
           <p:cNvSpPr txBox="1"/>
           <p:nvPr/>
         </p:nvSpPr>
         <p:spPr>
           <a:xfrm>
-            <a:off x="5364327" y="3840480"/>
-            <a:ext cx="2103120" cy="548640"/>
+            <a:off x="5318607" y="4023360"/>
+            <a:ext cx="2103120" cy="502920"/>
           </a:xfrm>
           <a:prstGeom prst="rect">
             <a:avLst/>
@@ -4011,7 +3995,7 @@
           <a:p>
             <a:pPr algn="l"/>
             <a:r>
-              <a:rPr sz="1600" b="1" i="0">
+              <a:rPr sz="1500" b="1" i="0">
                 <a:solidFill>
                   <a:srgbClr val="0F172A"/>
                 </a:solidFill>
@@ -4024,14 +4008,14 @@
       </p:sp>
       <p:sp>
         <p:nvSpPr>
-          <p:cNvPr id="15" name="Rounded Rectangle 14"/>
+          <p:cNvPr id="16" name="Rounded Rectangle 15"/>
           <p:cNvSpPr/>
           <p:nvPr/>
         </p:nvSpPr>
         <p:spPr>
           <a:xfrm>
-            <a:off x="8107527" y="3657600"/>
-            <a:ext cx="3291840" cy="914400"/>
+            <a:off x="7970367" y="3840480"/>
+            <a:ext cx="3108960" cy="868680"/>
           </a:xfrm>
           <a:prstGeom prst="roundRect">
             <a:avLst>
@@ -4071,14 +4055,14 @@
       </p:sp>
       <p:sp>
         <p:nvSpPr>
-          <p:cNvPr id="16" name="TextBox 15"/>
+          <p:cNvPr id="17" name="TextBox 16"/>
           <p:cNvSpPr txBox="1"/>
           <p:nvPr/>
         </p:nvSpPr>
         <p:spPr>
           <a:xfrm>
-            <a:off x="8427567" y="3794760"/>
-            <a:ext cx="548640" cy="640080"/>
+            <a:off x="8198967" y="3977640"/>
+            <a:ext cx="457200" cy="548640"/>
           </a:xfrm>
           <a:prstGeom prst="rect">
             <a:avLst/>
@@ -4091,16 +4075,9 @@
           </a:bodyPr>
           <a:lstStyle/>
           <a:p>
-            <a:pPr algn="ctr">
-              <a:spcBef>
-                <a:spcPts val="0"/>
-              </a:spcBef>
-              <a:spcAft>
-                <a:spcPts val="0"/>
-              </a:spcAft>
-            </a:pPr>
-            <a:r>
-              <a:rPr sz="2800" b="0" i="0">
+            <a:pPr algn="ctr"/>
+            <a:r>
+              <a:rPr sz="2600" b="0" i="0">
                 <a:solidFill>
                   <a:srgbClr val="0F172A"/>
                 </a:solidFill>
@@ -4113,14 +4090,14 @@
       </p:sp>
       <p:sp>
         <p:nvSpPr>
-          <p:cNvPr id="17" name="TextBox 16"/>
+          <p:cNvPr id="18" name="TextBox 17"/>
           <p:cNvSpPr txBox="1"/>
           <p:nvPr/>
         </p:nvSpPr>
         <p:spPr>
           <a:xfrm>
-            <a:off x="9021927" y="3840480"/>
-            <a:ext cx="2103120" cy="548640"/>
+            <a:off x="8747607" y="4023360"/>
+            <a:ext cx="2103120" cy="502920"/>
           </a:xfrm>
           <a:prstGeom prst="rect">
             <a:avLst/>
@@ -4135,7 +4112,7 @@
           <a:p>
             <a:pPr algn="l"/>
             <a:r>
-              <a:rPr sz="1600" b="1" i="0">
+              <a:rPr sz="1500" b="1" i="0">
                 <a:solidFill>
                   <a:srgbClr val="0F172A"/>
                 </a:solidFill>
@@ -4180,8 +4157,8 @@
         </p:nvSpPr>
         <p:spPr>
           <a:xfrm>
-            <a:off x="0" y="502920"/>
-            <a:ext cx="12191695" cy="12700"/>
+            <a:off x="0" y="475488"/>
+            <a:ext cx="12191695" cy="9525"/>
           </a:xfrm>
           <a:prstGeom prst="rect">
             <a:avLst/>
@@ -4215,87 +4192,9 @@
           </a:p>
         </p:txBody>
       </p:sp>
-      <p:sp>
-        <p:nvSpPr>
-          <p:cNvPr id="3" name="TextBox 2"/>
-          <p:cNvSpPr txBox="1"/>
-          <p:nvPr/>
-        </p:nvSpPr>
-        <p:spPr>
-          <a:xfrm>
-            <a:off x="548640" y="164592"/>
-            <a:ext cx="1371600" cy="320040"/>
-          </a:xfrm>
-          <a:prstGeom prst="rect">
-            <a:avLst/>
-          </a:prstGeom>
-          <a:noFill/>
-        </p:spPr>
-        <p:txBody>
-          <a:bodyPr wrap="square">
-            <a:spAutoFit/>
-          </a:bodyPr>
-          <a:lstStyle/>
-          <a:p>
-            <a:r>
-              <a:rPr sz="1600" b="1" i="0">
-                <a:solidFill>
-                  <a:srgbClr val="C8102E"/>
-                </a:solidFill>
-                <a:latin typeface="Segoe UI"/>
-              </a:rPr>
-              <a:t>SIX</a:t>
-            </a:r>
-            <a:r>
-              <a:rPr sz="1600" b="0" i="0">
-                <a:solidFill>
-                  <a:srgbClr val="475569"/>
-                </a:solidFill>
-                <a:latin typeface="Segoe UI"/>
-              </a:rPr>
-              <a:t> AI</a:t>
-            </a:r>
-          </a:p>
-        </p:txBody>
-      </p:sp>
-      <p:sp>
-        <p:nvSpPr>
-          <p:cNvPr id="4" name="TextBox 3"/>
-          <p:cNvSpPr txBox="1"/>
-          <p:nvPr/>
-        </p:nvSpPr>
-        <p:spPr>
-          <a:xfrm>
-            <a:off x="3657600" y="182880"/>
-            <a:ext cx="4876495" cy="274320"/>
-          </a:xfrm>
-          <a:prstGeom prst="rect">
-            <a:avLst/>
-          </a:prstGeom>
-          <a:noFill/>
-        </p:spPr>
-        <p:txBody>
-          <a:bodyPr wrap="square">
-            <a:spAutoFit/>
-          </a:bodyPr>
-          <a:lstStyle/>
-          <a:p>
-            <a:pPr algn="ctr"/>
-            <a:r>
-              <a:rPr sz="1000" b="0" i="0">
-                <a:solidFill>
-                  <a:srgbClr val="94A3B8"/>
-                </a:solidFill>
-                <a:latin typeface="Segoe UI"/>
-              </a:rPr>
-              <a:t>03 / 06 — SOLUTION</a:t>
-            </a:r>
-          </a:p>
-        </p:txBody>
-      </p:sp>
       <p:pic>
         <p:nvPicPr>
-          <p:cNvPr id="5" name="Picture 4" descr="pptx_slide2_Google_Shape_64_p14.png"/>
+          <p:cNvPr id="3" name="Picture 2" descr="six_logo_small.png"/>
           <p:cNvPicPr>
             <a:picLocks noChangeAspect="1"/>
           </p:cNvPicPr>
@@ -4309,8 +4208,8 @@
         </p:blipFill>
         <p:spPr>
           <a:xfrm>
-            <a:off x="10515600" y="109728"/>
-            <a:ext cx="1371600" cy="376460"/>
+            <a:off x="365760" y="128016"/>
+            <a:ext cx="457200" cy="228600"/>
           </a:xfrm>
           <a:prstGeom prst="rect">
             <a:avLst/>
@@ -4319,14 +4218,14 @@
       </p:pic>
       <p:sp>
         <p:nvSpPr>
-          <p:cNvPr id="6" name="TextBox 5"/>
+          <p:cNvPr id="4" name="TextBox 3"/>
           <p:cNvSpPr txBox="1"/>
           <p:nvPr/>
         </p:nvSpPr>
         <p:spPr>
           <a:xfrm>
-            <a:off x="731520" y="777240"/>
-            <a:ext cx="10728655" cy="274320"/>
+            <a:off x="822960" y="137160"/>
+            <a:ext cx="365760" cy="256032"/>
           </a:xfrm>
           <a:prstGeom prst="rect">
             <a:avLst/>
@@ -4339,36 +4238,28 @@
           </a:bodyPr>
           <a:lstStyle/>
           <a:p>
-            <a:pPr algn="ctr">
-              <a:spcBef>
-                <a:spcPts val="0"/>
-              </a:spcBef>
-              <a:spcAft>
-                <a:spcPts val="0"/>
-              </a:spcAft>
-            </a:pPr>
-            <a:r>
-              <a:rPr sz="1200" b="1" i="0">
-                <a:solidFill>
-                  <a:srgbClr val="2E6FD6"/>
-                </a:solidFill>
-                <a:latin typeface="Segoe UI"/>
-              </a:rPr>
-              <a:t>OUR SOLUTION</a:t>
-            </a:r>
-          </a:p>
-        </p:txBody>
-      </p:sp>
-      <p:sp>
-        <p:nvSpPr>
-          <p:cNvPr id="7" name="TextBox 6"/>
+            <a:r>
+              <a:rPr sz="1300" b="0" i="0">
+                <a:solidFill>
+                  <a:srgbClr val="475569"/>
+                </a:solidFill>
+                <a:latin typeface="Segoe UI"/>
+              </a:rPr>
+              <a:t>AI</a:t>
+            </a:r>
+          </a:p>
+        </p:txBody>
+      </p:sp>
+      <p:sp>
+        <p:nvSpPr>
+          <p:cNvPr id="5" name="TextBox 4"/>
           <p:cNvSpPr txBox="1"/>
           <p:nvPr/>
         </p:nvSpPr>
         <p:spPr>
           <a:xfrm>
-            <a:off x="1097280" y="1097280"/>
-            <a:ext cx="9997135" cy="731520"/>
+            <a:off x="2743200" y="155448"/>
+            <a:ext cx="6705295" cy="228600"/>
           </a:xfrm>
           <a:prstGeom prst="rect">
             <a:avLst/>
@@ -4383,7 +4274,101 @@
           <a:p>
             <a:pPr algn="ctr"/>
             <a:r>
-              <a:rPr sz="3600" b="1" i="0">
+              <a:rPr sz="900" b="0" i="0">
+                <a:solidFill>
+                  <a:srgbClr val="94A3B8"/>
+                </a:solidFill>
+                <a:latin typeface="Segoe UI"/>
+              </a:rPr>
+              <a:t>03 / 06 — SOLUTION</a:t>
+            </a:r>
+          </a:p>
+        </p:txBody>
+      </p:sp>
+      <p:pic>
+        <p:nvPicPr>
+          <p:cNvPr id="6" name="Picture 5" descr="pptx_slide2_Google_Shape_64_p14.png"/>
+          <p:cNvPicPr>
+            <a:picLocks noChangeAspect="1"/>
+          </p:cNvPicPr>
+          <p:nvPr/>
+        </p:nvPicPr>
+        <p:blipFill>
+          <a:blip r:embed="rId3"/>
+          <a:stretch>
+            <a:fillRect/>
+          </a:stretch>
+        </p:blipFill>
+        <p:spPr>
+          <a:xfrm>
+            <a:off x="10728655" y="91440"/>
+            <a:ext cx="1188720" cy="326266"/>
+          </a:xfrm>
+          <a:prstGeom prst="rect">
+            <a:avLst/>
+          </a:prstGeom>
+        </p:spPr>
+      </p:pic>
+      <p:sp>
+        <p:nvSpPr>
+          <p:cNvPr id="7" name="TextBox 6"/>
+          <p:cNvSpPr txBox="1"/>
+          <p:nvPr/>
+        </p:nvSpPr>
+        <p:spPr>
+          <a:xfrm>
+            <a:off x="914400" y="777240"/>
+            <a:ext cx="10362895" cy="274320"/>
+          </a:xfrm>
+          <a:prstGeom prst="rect">
+            <a:avLst/>
+          </a:prstGeom>
+          <a:noFill/>
+        </p:spPr>
+        <p:txBody>
+          <a:bodyPr wrap="square">
+            <a:spAutoFit/>
+          </a:bodyPr>
+          <a:lstStyle/>
+          <a:p>
+            <a:pPr algn="ctr"/>
+            <a:r>
+              <a:rPr sz="1200" b="1" i="0">
+                <a:solidFill>
+                  <a:srgbClr val="2E6FD6"/>
+                </a:solidFill>
+                <a:latin typeface="Segoe UI"/>
+              </a:rPr>
+              <a:t>OUR SOLUTION</a:t>
+            </a:r>
+          </a:p>
+        </p:txBody>
+      </p:sp>
+      <p:sp>
+        <p:nvSpPr>
+          <p:cNvPr id="8" name="TextBox 7"/>
+          <p:cNvSpPr txBox="1"/>
+          <p:nvPr/>
+        </p:nvSpPr>
+        <p:spPr>
+          <a:xfrm>
+            <a:off x="1371600" y="1097280"/>
+            <a:ext cx="9448495" cy="1097280"/>
+          </a:xfrm>
+          <a:prstGeom prst="rect">
+            <a:avLst/>
+          </a:prstGeom>
+          <a:noFill/>
+        </p:spPr>
+        <p:txBody>
+          <a:bodyPr wrap="square">
+            <a:spAutoFit/>
+          </a:bodyPr>
+          <a:lstStyle/>
+          <a:p>
+            <a:pPr algn="ctr"/>
+            <a:r>
+              <a:rPr sz="3400" b="1" i="0">
                 <a:solidFill>
                   <a:srgbClr val="0F172A"/>
                 </a:solidFill>
@@ -4392,7 +4377,7 @@
               <a:t>Give </a:t>
             </a:r>
             <a:r>
-              <a:rPr sz="3600" b="1" i="1">
+              <a:rPr sz="3400" b="1" i="1">
                 <a:solidFill>
                   <a:srgbClr val="2E6FD6"/>
                 </a:solidFill>
@@ -4401,27 +4386,39 @@
               <a:t>every client</a:t>
             </a:r>
             <a:r>
-              <a:rPr sz="3600" b="1" i="0">
+              <a:rPr sz="3400" b="1" i="0">
                 <a:solidFill>
                   <a:srgbClr val="0F172A"/>
                 </a:solidFill>
                 <a:latin typeface="Segoe UI"/>
               </a:rPr>
-              <a:t> the UHNW experience — at scale</a:t>
-            </a:r>
-          </a:p>
-        </p:txBody>
-      </p:sp>
-      <p:sp>
-        <p:nvSpPr>
-          <p:cNvPr id="8" name="Rounded Rectangle 7"/>
+              <a:t> the UHNW</a:t>
+            </a:r>
+          </a:p>
+          <a:p>
+            <a:pPr algn="ctr"/>
+            <a:r>
+              <a:rPr sz="3400" b="1" i="0">
+                <a:solidFill>
+                  <a:srgbClr val="0F172A"/>
+                </a:solidFill>
+                <a:latin typeface="Segoe UI"/>
+              </a:rPr>
+              <a:t>experience — at scale</a:t>
+            </a:r>
+          </a:p>
+        </p:txBody>
+      </p:sp>
+      <p:sp>
+        <p:nvSpPr>
+          <p:cNvPr id="9" name="Rounded Rectangle 8"/>
           <p:cNvSpPr/>
           <p:nvPr/>
         </p:nvSpPr>
         <p:spPr>
           <a:xfrm>
-            <a:off x="1386687" y="2011680"/>
-            <a:ext cx="2011680" cy="365760"/>
+            <a:off x="2255367" y="2423160"/>
+            <a:ext cx="1645920" cy="320040"/>
           </a:xfrm>
           <a:prstGeom prst="roundRect">
             <a:avLst>
@@ -4429,7 +4426,7 @@
             </a:avLst>
           </a:prstGeom>
           <a:solidFill>
-            <a:srgbClr val="EBF1FB"/>
+            <a:srgbClr val="FFFFFF"/>
           </a:solidFill>
           <a:ln w="9525">
             <a:solidFill>
@@ -4452,32 +4449,32 @@
           </a:fontRef>
         </p:style>
         <p:txBody>
-          <a:bodyPr rtlCol="0" anchor="ctr" tIns="25400" bIns="25400" lIns="101600" rIns="101600" wrap="none"/>
-          <a:lstStyle/>
-          <a:p>
-            <a:pPr algn="ctr"/>
-            <a:r>
-              <a:rPr sz="1300" b="0" i="0">
+          <a:bodyPr rtlCol="0" anchor="ctr" tIns="12700" bIns="12700" lIns="76200" rIns="76200" wrap="none"/>
+          <a:lstStyle/>
+          <a:p>
+            <a:pPr algn="ctr"/>
+            <a:r>
+              <a:rPr sz="1100" b="0" i="0">
                 <a:solidFill>
                   <a:srgbClr val="2E6FD6"/>
                 </a:solidFill>
                 <a:latin typeface="Segoe UI"/>
               </a:rPr>
-              <a:t>CRM History</a:t>
-            </a:r>
-          </a:p>
-        </p:txBody>
-      </p:sp>
-      <p:sp>
-        <p:nvSpPr>
-          <p:cNvPr id="9" name="TextBox 8"/>
+              <a:t>● CRM History</a:t>
+            </a:r>
+          </a:p>
+        </p:txBody>
+      </p:sp>
+      <p:sp>
+        <p:nvSpPr>
+          <p:cNvPr id="10" name="TextBox 9"/>
           <p:cNvSpPr txBox="1"/>
           <p:nvPr/>
         </p:nvSpPr>
         <p:spPr>
           <a:xfrm>
-            <a:off x="3398367" y="2011680"/>
-            <a:ext cx="457200" cy="365760"/>
+            <a:off x="3901287" y="2423160"/>
+            <a:ext cx="365760" cy="320040"/>
           </a:xfrm>
           <a:prstGeom prst="rect">
             <a:avLst/>
@@ -4490,16 +4487,9 @@
           </a:bodyPr>
           <a:lstStyle/>
           <a:p>
-            <a:pPr algn="ctr">
-              <a:spcBef>
-                <a:spcPts val="0"/>
-              </a:spcBef>
-              <a:spcAft>
-                <a:spcPts val="0"/>
-              </a:spcAft>
-            </a:pPr>
-            <a:r>
-              <a:rPr sz="1600" b="0" i="0">
+            <a:pPr algn="ctr"/>
+            <a:r>
+              <a:rPr sz="1400" b="0" i="0">
                 <a:solidFill>
                   <a:srgbClr val="94A3B8"/>
                 </a:solidFill>
@@ -4512,14 +4502,14 @@
       </p:sp>
       <p:sp>
         <p:nvSpPr>
-          <p:cNvPr id="10" name="Rounded Rectangle 9"/>
+          <p:cNvPr id="11" name="Rounded Rectangle 10"/>
           <p:cNvSpPr/>
           <p:nvPr/>
         </p:nvSpPr>
         <p:spPr>
           <a:xfrm>
-            <a:off x="3855567" y="2011680"/>
-            <a:ext cx="2011680" cy="365760"/>
+            <a:off x="4267047" y="2423160"/>
+            <a:ext cx="1645920" cy="320040"/>
           </a:xfrm>
           <a:prstGeom prst="roundRect">
             <a:avLst>
@@ -4527,7 +4517,7 @@
             </a:avLst>
           </a:prstGeom>
           <a:solidFill>
-            <a:srgbClr val="FEF7F8"/>
+            <a:srgbClr val="FFFFFF"/>
           </a:solidFill>
           <a:ln w="9525">
             <a:solidFill>
@@ -4550,32 +4540,32 @@
           </a:fontRef>
         </p:style>
         <p:txBody>
-          <a:bodyPr rtlCol="0" anchor="ctr" tIns="25400" bIns="25400" lIns="101600" rIns="101600" wrap="none"/>
-          <a:lstStyle/>
-          <a:p>
-            <a:pPr algn="ctr"/>
-            <a:r>
-              <a:rPr sz="1300" b="0" i="0">
+          <a:bodyPr rtlCol="0" anchor="ctr" tIns="12700" bIns="12700" lIns="76200" rIns="76200" wrap="none"/>
+          <a:lstStyle/>
+          <a:p>
+            <a:pPr algn="ctr"/>
+            <a:r>
+              <a:rPr sz="1100" b="0" i="0">
                 <a:solidFill>
                   <a:srgbClr val="C8102E"/>
                 </a:solidFill>
                 <a:latin typeface="Segoe UI"/>
               </a:rPr>
-              <a:t>Client DNA</a:t>
-            </a:r>
-          </a:p>
-        </p:txBody>
-      </p:sp>
-      <p:sp>
-        <p:nvSpPr>
-          <p:cNvPr id="11" name="TextBox 10"/>
+              <a:t>● Client DNA</a:t>
+            </a:r>
+          </a:p>
+        </p:txBody>
+      </p:sp>
+      <p:sp>
+        <p:nvSpPr>
+          <p:cNvPr id="12" name="TextBox 11"/>
           <p:cNvSpPr txBox="1"/>
           <p:nvPr/>
         </p:nvSpPr>
         <p:spPr>
           <a:xfrm>
-            <a:off x="5867247" y="2011680"/>
-            <a:ext cx="457200" cy="365760"/>
+            <a:off x="5912967" y="2423160"/>
+            <a:ext cx="365760" cy="320040"/>
           </a:xfrm>
           <a:prstGeom prst="rect">
             <a:avLst/>
@@ -4588,16 +4578,9 @@
           </a:bodyPr>
           <a:lstStyle/>
           <a:p>
-            <a:pPr algn="ctr">
-              <a:spcBef>
-                <a:spcPts val="0"/>
-              </a:spcBef>
-              <a:spcAft>
-                <a:spcPts val="0"/>
-              </a:spcAft>
-            </a:pPr>
-            <a:r>
-              <a:rPr sz="1600" b="0" i="0">
+            <a:pPr algn="ctr"/>
+            <a:r>
+              <a:rPr sz="1400" b="0" i="0">
                 <a:solidFill>
                   <a:srgbClr val="94A3B8"/>
                 </a:solidFill>
@@ -4610,14 +4593,14 @@
       </p:sp>
       <p:sp>
         <p:nvSpPr>
-          <p:cNvPr id="12" name="Rounded Rectangle 11"/>
+          <p:cNvPr id="13" name="Rounded Rectangle 12"/>
           <p:cNvSpPr/>
           <p:nvPr/>
         </p:nvSpPr>
         <p:spPr>
           <a:xfrm>
-            <a:off x="6324447" y="2011680"/>
-            <a:ext cx="2011680" cy="365760"/>
+            <a:off x="6278727" y="2423160"/>
+            <a:ext cx="1645920" cy="320040"/>
           </a:xfrm>
           <a:prstGeom prst="roundRect">
             <a:avLst>
@@ -4625,7 +4608,7 @@
             </a:avLst>
           </a:prstGeom>
           <a:solidFill>
-            <a:srgbClr val="F1EBFD"/>
+            <a:srgbClr val="FFFFFF"/>
           </a:solidFill>
           <a:ln w="9525">
             <a:solidFill>
@@ -4648,32 +4631,32 @@
           </a:fontRef>
         </p:style>
         <p:txBody>
-          <a:bodyPr rtlCol="0" anchor="ctr" tIns="25400" bIns="25400" lIns="101600" rIns="101600" wrap="none"/>
-          <a:lstStyle/>
-          <a:p>
-            <a:pPr algn="ctr"/>
-            <a:r>
-              <a:rPr sz="1300" b="0" i="0">
+          <a:bodyPr rtlCol="0" anchor="ctr" tIns="12700" bIns="12700" lIns="76200" rIns="76200" wrap="none"/>
+          <a:lstStyle/>
+          <a:p>
+            <a:pPr algn="ctr"/>
+            <a:r>
+              <a:rPr sz="1100" b="0" i="0">
                 <a:solidFill>
                   <a:srgbClr val="7C3AED"/>
                 </a:solidFill>
                 <a:latin typeface="Segoe UI"/>
               </a:rPr>
-              <a:t>Live Intelligence</a:t>
-            </a:r>
-          </a:p>
-        </p:txBody>
-      </p:sp>
-      <p:sp>
-        <p:nvSpPr>
-          <p:cNvPr id="13" name="TextBox 12"/>
+              <a:t>● Live Intelligence</a:t>
+            </a:r>
+          </a:p>
+        </p:txBody>
+      </p:sp>
+      <p:sp>
+        <p:nvSpPr>
+          <p:cNvPr id="14" name="TextBox 13"/>
           <p:cNvSpPr txBox="1"/>
           <p:nvPr/>
         </p:nvSpPr>
         <p:spPr>
           <a:xfrm>
-            <a:off x="8336127" y="2011680"/>
-            <a:ext cx="457200" cy="365760"/>
+            <a:off x="7924647" y="2423160"/>
+            <a:ext cx="365760" cy="320040"/>
           </a:xfrm>
           <a:prstGeom prst="rect">
             <a:avLst/>
@@ -4686,16 +4669,9 @@
           </a:bodyPr>
           <a:lstStyle/>
           <a:p>
-            <a:pPr algn="ctr">
-              <a:spcBef>
-                <a:spcPts val="0"/>
-              </a:spcBef>
-              <a:spcAft>
-                <a:spcPts val="0"/>
-              </a:spcAft>
-            </a:pPr>
-            <a:r>
-              <a:rPr sz="1600" b="0" i="0">
+            <a:pPr algn="ctr"/>
+            <a:r>
+              <a:rPr sz="1400" b="0" i="0">
                 <a:solidFill>
                   <a:srgbClr val="94A3B8"/>
                 </a:solidFill>
@@ -4708,14 +4684,14 @@
       </p:sp>
       <p:sp>
         <p:nvSpPr>
-          <p:cNvPr id="14" name="Rounded Rectangle 13"/>
+          <p:cNvPr id="15" name="Rounded Rectangle 14"/>
           <p:cNvSpPr/>
           <p:nvPr/>
         </p:nvSpPr>
         <p:spPr>
           <a:xfrm>
-            <a:off x="8793327" y="2011680"/>
-            <a:ext cx="2011680" cy="365760"/>
+            <a:off x="8290407" y="2423160"/>
+            <a:ext cx="1645920" cy="320040"/>
           </a:xfrm>
           <a:prstGeom prst="roundRect">
             <a:avLst>
@@ -4723,7 +4699,7 @@
             </a:avLst>
           </a:prstGeom>
           <a:solidFill>
-            <a:srgbClr val="E8F8EE"/>
+            <a:srgbClr val="FFFFFF"/>
           </a:solidFill>
           <a:ln w="9525">
             <a:solidFill>
@@ -4746,32 +4722,32 @@
           </a:fontRef>
         </p:style>
         <p:txBody>
-          <a:bodyPr rtlCol="0" anchor="ctr" tIns="25400" bIns="25400" lIns="101600" rIns="101600" wrap="none"/>
-          <a:lstStyle/>
-          <a:p>
-            <a:pPr algn="ctr"/>
-            <a:r>
-              <a:rPr sz="1300" b="0" i="0">
+          <a:bodyPr rtlCol="0" anchor="ctr" tIns="12700" bIns="12700" lIns="76200" rIns="76200" wrap="none"/>
+          <a:lstStyle/>
+          <a:p>
+            <a:pPr algn="ctr"/>
+            <a:r>
+              <a:rPr sz="1100" b="0" i="0">
                 <a:solidFill>
                   <a:srgbClr val="16A34A"/>
                 </a:solidFill>
                 <a:latin typeface="Segoe UI"/>
               </a:rPr>
-              <a:t>Personalised Advisory</a:t>
-            </a:r>
-          </a:p>
-        </p:txBody>
-      </p:sp>
-      <p:sp>
-        <p:nvSpPr>
-          <p:cNvPr id="15" name="Rounded Rectangle 14"/>
+              <a:t>● Personalised Advisory</a:t>
+            </a:r>
+          </a:p>
+        </p:txBody>
+      </p:sp>
+      <p:sp>
+        <p:nvSpPr>
+          <p:cNvPr id="16" name="Rounded Rectangle 15"/>
           <p:cNvSpPr/>
           <p:nvPr/>
         </p:nvSpPr>
         <p:spPr>
           <a:xfrm>
-            <a:off x="609447" y="2697480"/>
-            <a:ext cx="5303520" cy="1143000"/>
+            <a:off x="998067" y="3063240"/>
+            <a:ext cx="4937760" cy="1051560"/>
           </a:xfrm>
           <a:prstGeom prst="roundRect">
             <a:avLst>
@@ -4811,14 +4787,14 @@
       </p:sp>
       <p:sp>
         <p:nvSpPr>
-          <p:cNvPr id="16" name="Rounded Rectangle 15"/>
+          <p:cNvPr id="17" name="Rounded Rectangle 16"/>
           <p:cNvSpPr/>
           <p:nvPr/>
         </p:nvSpPr>
         <p:spPr>
           <a:xfrm>
-            <a:off x="792327" y="2880360"/>
-            <a:ext cx="502920" cy="502920"/>
+            <a:off x="1162659" y="3246120"/>
+            <a:ext cx="411480" cy="411480"/>
           </a:xfrm>
           <a:prstGeom prst="roundRect">
             <a:avLst>
@@ -4849,12 +4825,12 @@
           </a:fontRef>
         </p:style>
         <p:txBody>
-          <a:bodyPr rtlCol="0" anchor="ctr" tIns="25400"/>
-          <a:lstStyle/>
-          <a:p>
-            <a:pPr algn="ctr"/>
-            <a:r>
-              <a:rPr sz="1800" b="0" i="0">
+          <a:bodyPr rtlCol="0" anchor="ctr"/>
+          <a:lstStyle/>
+          <a:p>
+            <a:pPr algn="ctr"/>
+            <a:r>
+              <a:rPr sz="1600" b="0" i="0">
                 <a:solidFill>
                   <a:srgbClr val="0F172A"/>
                 </a:solidFill>
@@ -4867,14 +4843,14 @@
       </p:sp>
       <p:sp>
         <p:nvSpPr>
-          <p:cNvPr id="17" name="TextBox 16"/>
+          <p:cNvPr id="18" name="TextBox 17"/>
           <p:cNvSpPr txBox="1"/>
           <p:nvPr/>
         </p:nvSpPr>
         <p:spPr>
           <a:xfrm>
-            <a:off x="1432407" y="2834640"/>
-            <a:ext cx="4297680" cy="320040"/>
+            <a:off x="1683867" y="3172968"/>
+            <a:ext cx="4069080" cy="274320"/>
           </a:xfrm>
           <a:prstGeom prst="rect">
             <a:avLst/>
@@ -4887,16 +4863,9 @@
           </a:bodyPr>
           <a:lstStyle/>
           <a:p>
-            <a:pPr algn="l">
-              <a:spcBef>
-                <a:spcPts val="0"/>
-              </a:spcBef>
-              <a:spcAft>
-                <a:spcPts val="0"/>
-              </a:spcAft>
-            </a:pPr>
-            <a:r>
-              <a:rPr sz="1500" b="1" i="0">
+            <a:pPr algn="l"/>
+            <a:r>
+              <a:rPr sz="1400" b="1" i="0">
                 <a:solidFill>
                   <a:srgbClr val="0F172A"/>
                 </a:solidFill>
@@ -4909,14 +4878,14 @@
       </p:sp>
       <p:sp>
         <p:nvSpPr>
-          <p:cNvPr id="18" name="TextBox 17"/>
+          <p:cNvPr id="19" name="TextBox 18"/>
           <p:cNvSpPr txBox="1"/>
           <p:nvPr/>
         </p:nvSpPr>
         <p:spPr>
           <a:xfrm>
-            <a:off x="1432407" y="3154680"/>
-            <a:ext cx="4297680" cy="640080"/>
+            <a:off x="1683867" y="3474720"/>
+            <a:ext cx="4069080" cy="594360"/>
           </a:xfrm>
           <a:prstGeom prst="rect">
             <a:avLst/>
@@ -4929,16 +4898,9 @@
           </a:bodyPr>
           <a:lstStyle/>
           <a:p>
-            <a:pPr algn="l">
-              <a:spcBef>
-                <a:spcPts val="0"/>
-              </a:spcBef>
-              <a:spcAft>
-                <a:spcPts val="0"/>
-              </a:spcAft>
-            </a:pPr>
-            <a:r>
-              <a:rPr sz="1100" b="0" i="0">
+            <a:pPr algn="l"/>
+            <a:r>
+              <a:rPr sz="1000" b="0" i="0">
                 <a:solidFill>
                   <a:srgbClr val="475569"/>
                 </a:solidFill>
@@ -4951,14 +4913,14 @@
       </p:sp>
       <p:sp>
         <p:nvSpPr>
-          <p:cNvPr id="19" name="Rounded Rectangle 18"/>
+          <p:cNvPr id="20" name="Rounded Rectangle 19"/>
           <p:cNvSpPr/>
           <p:nvPr/>
         </p:nvSpPr>
         <p:spPr>
           <a:xfrm>
-            <a:off x="6278727" y="2697480"/>
-            <a:ext cx="5303520" cy="1143000"/>
+            <a:off x="6255867" y="3063240"/>
+            <a:ext cx="4937760" cy="1051560"/>
           </a:xfrm>
           <a:prstGeom prst="roundRect">
             <a:avLst>
@@ -4998,14 +4960,14 @@
       </p:sp>
       <p:sp>
         <p:nvSpPr>
-          <p:cNvPr id="20" name="Rounded Rectangle 19"/>
+          <p:cNvPr id="21" name="Rounded Rectangle 20"/>
           <p:cNvSpPr/>
           <p:nvPr/>
         </p:nvSpPr>
         <p:spPr>
           <a:xfrm>
-            <a:off x="6461607" y="2880360"/>
-            <a:ext cx="502920" cy="502920"/>
+            <a:off x="6420459" y="3246120"/>
+            <a:ext cx="411480" cy="411480"/>
           </a:xfrm>
           <a:prstGeom prst="roundRect">
             <a:avLst>
@@ -5036,12 +4998,12 @@
           </a:fontRef>
         </p:style>
         <p:txBody>
-          <a:bodyPr rtlCol="0" anchor="ctr" tIns="25400"/>
-          <a:lstStyle/>
-          <a:p>
-            <a:pPr algn="ctr"/>
-            <a:r>
-              <a:rPr sz="1800" b="0" i="0">
+          <a:bodyPr rtlCol="0" anchor="ctr"/>
+          <a:lstStyle/>
+          <a:p>
+            <a:pPr algn="ctr"/>
+            <a:r>
+              <a:rPr sz="1600" b="0" i="0">
                 <a:solidFill>
                   <a:srgbClr val="0F172A"/>
                 </a:solidFill>
@@ -5054,14 +5016,14 @@
       </p:sp>
       <p:sp>
         <p:nvSpPr>
-          <p:cNvPr id="21" name="TextBox 20"/>
+          <p:cNvPr id="22" name="TextBox 21"/>
           <p:cNvSpPr txBox="1"/>
           <p:nvPr/>
         </p:nvSpPr>
         <p:spPr>
           <a:xfrm>
-            <a:off x="7101687" y="2834640"/>
-            <a:ext cx="4297680" cy="320040"/>
+            <a:off x="6941667" y="3172968"/>
+            <a:ext cx="4069080" cy="274320"/>
           </a:xfrm>
           <a:prstGeom prst="rect">
             <a:avLst/>
@@ -5074,16 +5036,9 @@
           </a:bodyPr>
           <a:lstStyle/>
           <a:p>
-            <a:pPr algn="l">
-              <a:spcBef>
-                <a:spcPts val="0"/>
-              </a:spcBef>
-              <a:spcAft>
-                <a:spcPts val="0"/>
-              </a:spcAft>
-            </a:pPr>
-            <a:r>
-              <a:rPr sz="1500" b="1" i="0">
+            <a:pPr algn="l"/>
+            <a:r>
+              <a:rPr sz="1400" b="1" i="0">
                 <a:solidFill>
                   <a:srgbClr val="0F172A"/>
                 </a:solidFill>
@@ -5096,14 +5051,14 @@
       </p:sp>
       <p:sp>
         <p:nvSpPr>
-          <p:cNvPr id="22" name="TextBox 21"/>
+          <p:cNvPr id="23" name="TextBox 22"/>
           <p:cNvSpPr txBox="1"/>
           <p:nvPr/>
         </p:nvSpPr>
         <p:spPr>
           <a:xfrm>
-            <a:off x="7101687" y="3154680"/>
-            <a:ext cx="4297680" cy="640080"/>
+            <a:off x="6941667" y="3474720"/>
+            <a:ext cx="4069080" cy="594360"/>
           </a:xfrm>
           <a:prstGeom prst="rect">
             <a:avLst/>
@@ -5116,16 +5071,9 @@
           </a:bodyPr>
           <a:lstStyle/>
           <a:p>
-            <a:pPr algn="l">
-              <a:spcBef>
-                <a:spcPts val="0"/>
-              </a:spcBef>
-              <a:spcAft>
-                <a:spcPts val="0"/>
-              </a:spcAft>
-            </a:pPr>
-            <a:r>
-              <a:rPr sz="1100" b="0" i="0">
+            <a:pPr algn="l"/>
+            <a:r>
+              <a:rPr sz="1000" b="0" i="0">
                 <a:solidFill>
                   <a:srgbClr val="475569"/>
                 </a:solidFill>
@@ -5138,14 +5086,14 @@
       </p:sp>
       <p:sp>
         <p:nvSpPr>
-          <p:cNvPr id="23" name="Rounded Rectangle 22"/>
+          <p:cNvPr id="24" name="Rounded Rectangle 23"/>
           <p:cNvSpPr/>
           <p:nvPr/>
         </p:nvSpPr>
         <p:spPr>
           <a:xfrm>
-            <a:off x="609447" y="4114800"/>
-            <a:ext cx="5303520" cy="1143000"/>
+            <a:off x="998067" y="4343400"/>
+            <a:ext cx="4937760" cy="1051560"/>
           </a:xfrm>
           <a:prstGeom prst="roundRect">
             <a:avLst>
@@ -5185,14 +5133,14 @@
       </p:sp>
       <p:sp>
         <p:nvSpPr>
-          <p:cNvPr id="24" name="Rounded Rectangle 23"/>
+          <p:cNvPr id="25" name="Rounded Rectangle 24"/>
           <p:cNvSpPr/>
           <p:nvPr/>
         </p:nvSpPr>
         <p:spPr>
           <a:xfrm>
-            <a:off x="792327" y="4297680"/>
-            <a:ext cx="502920" cy="502920"/>
+            <a:off x="1162659" y="4526280"/>
+            <a:ext cx="411480" cy="411480"/>
           </a:xfrm>
           <a:prstGeom prst="roundRect">
             <a:avLst>
@@ -5223,12 +5171,12 @@
           </a:fontRef>
         </p:style>
         <p:txBody>
-          <a:bodyPr rtlCol="0" anchor="ctr" tIns="25400"/>
-          <a:lstStyle/>
-          <a:p>
-            <a:pPr algn="ctr"/>
-            <a:r>
-              <a:rPr sz="1800" b="0" i="0">
+          <a:bodyPr rtlCol="0" anchor="ctr"/>
+          <a:lstStyle/>
+          <a:p>
+            <a:pPr algn="ctr"/>
+            <a:r>
+              <a:rPr sz="1600" b="0" i="0">
                 <a:solidFill>
                   <a:srgbClr val="0F172A"/>
                 </a:solidFill>
@@ -5241,14 +5189,14 @@
       </p:sp>
       <p:sp>
         <p:nvSpPr>
-          <p:cNvPr id="25" name="TextBox 24"/>
+          <p:cNvPr id="26" name="TextBox 25"/>
           <p:cNvSpPr txBox="1"/>
           <p:nvPr/>
         </p:nvSpPr>
         <p:spPr>
           <a:xfrm>
-            <a:off x="1432407" y="4251960"/>
-            <a:ext cx="4297680" cy="320040"/>
+            <a:off x="1683867" y="4453128"/>
+            <a:ext cx="4069080" cy="274320"/>
           </a:xfrm>
           <a:prstGeom prst="rect">
             <a:avLst/>
@@ -5261,16 +5209,9 @@
           </a:bodyPr>
           <a:lstStyle/>
           <a:p>
-            <a:pPr algn="l">
-              <a:spcBef>
-                <a:spcPts val="0"/>
-              </a:spcBef>
-              <a:spcAft>
-                <a:spcPts val="0"/>
-              </a:spcAft>
-            </a:pPr>
-            <a:r>
-              <a:rPr sz="1500" b="1" i="0">
+            <a:pPr algn="l"/>
+            <a:r>
+              <a:rPr sz="1400" b="1" i="0">
                 <a:solidFill>
                   <a:srgbClr val="0F172A"/>
                 </a:solidFill>
@@ -5283,14 +5224,14 @@
       </p:sp>
       <p:sp>
         <p:nvSpPr>
-          <p:cNvPr id="26" name="TextBox 25"/>
+          <p:cNvPr id="27" name="TextBox 26"/>
           <p:cNvSpPr txBox="1"/>
           <p:nvPr/>
         </p:nvSpPr>
         <p:spPr>
           <a:xfrm>
-            <a:off x="1432407" y="4572000"/>
-            <a:ext cx="4297680" cy="640080"/>
+            <a:off x="1683867" y="4754880"/>
+            <a:ext cx="4069080" cy="594360"/>
           </a:xfrm>
           <a:prstGeom prst="rect">
             <a:avLst/>
@@ -5303,16 +5244,9 @@
           </a:bodyPr>
           <a:lstStyle/>
           <a:p>
-            <a:pPr algn="l">
-              <a:spcBef>
-                <a:spcPts val="0"/>
-              </a:spcBef>
-              <a:spcAft>
-                <a:spcPts val="0"/>
-              </a:spcAft>
-            </a:pPr>
-            <a:r>
-              <a:rPr sz="1100" b="0" i="0">
+            <a:pPr algn="l"/>
+            <a:r>
+              <a:rPr sz="1000" b="0" i="0">
                 <a:solidFill>
                   <a:srgbClr val="475569"/>
                 </a:solidFill>
@@ -5325,14 +5259,14 @@
       </p:sp>
       <p:sp>
         <p:nvSpPr>
-          <p:cNvPr id="27" name="Rounded Rectangle 26"/>
+          <p:cNvPr id="28" name="Rounded Rectangle 27"/>
           <p:cNvSpPr/>
           <p:nvPr/>
         </p:nvSpPr>
         <p:spPr>
           <a:xfrm>
-            <a:off x="6278727" y="4114800"/>
-            <a:ext cx="5303520" cy="1143000"/>
+            <a:off x="6255867" y="4343400"/>
+            <a:ext cx="4937760" cy="1051560"/>
           </a:xfrm>
           <a:prstGeom prst="roundRect">
             <a:avLst>
@@ -5372,14 +5306,14 @@
       </p:sp>
       <p:sp>
         <p:nvSpPr>
-          <p:cNvPr id="28" name="Rounded Rectangle 27"/>
+          <p:cNvPr id="29" name="Rounded Rectangle 28"/>
           <p:cNvSpPr/>
           <p:nvPr/>
         </p:nvSpPr>
         <p:spPr>
           <a:xfrm>
-            <a:off x="6461607" y="4297680"/>
-            <a:ext cx="502920" cy="502920"/>
+            <a:off x="6420459" y="4526280"/>
+            <a:ext cx="411480" cy="411480"/>
           </a:xfrm>
           <a:prstGeom prst="roundRect">
             <a:avLst>
@@ -5410,12 +5344,12 @@
           </a:fontRef>
         </p:style>
         <p:txBody>
-          <a:bodyPr rtlCol="0" anchor="ctr" tIns="25400"/>
-          <a:lstStyle/>
-          <a:p>
-            <a:pPr algn="ctr"/>
-            <a:r>
-              <a:rPr sz="1800" b="0" i="0">
+          <a:bodyPr rtlCol="0" anchor="ctr"/>
+          <a:lstStyle/>
+          <a:p>
+            <a:pPr algn="ctr"/>
+            <a:r>
+              <a:rPr sz="1600" b="0" i="0">
                 <a:solidFill>
                   <a:srgbClr val="0F172A"/>
                 </a:solidFill>
@@ -5428,14 +5362,14 @@
       </p:sp>
       <p:sp>
         <p:nvSpPr>
-          <p:cNvPr id="29" name="TextBox 28"/>
+          <p:cNvPr id="30" name="TextBox 29"/>
           <p:cNvSpPr txBox="1"/>
           <p:nvPr/>
         </p:nvSpPr>
         <p:spPr>
           <a:xfrm>
-            <a:off x="7101687" y="4251960"/>
-            <a:ext cx="4297680" cy="320040"/>
+            <a:off x="6941667" y="4453128"/>
+            <a:ext cx="4069080" cy="274320"/>
           </a:xfrm>
           <a:prstGeom prst="rect">
             <a:avLst/>
@@ -5448,16 +5382,9 @@
           </a:bodyPr>
           <a:lstStyle/>
           <a:p>
-            <a:pPr algn="l">
-              <a:spcBef>
-                <a:spcPts val="0"/>
-              </a:spcBef>
-              <a:spcAft>
-                <a:spcPts val="0"/>
-              </a:spcAft>
-            </a:pPr>
-            <a:r>
-              <a:rPr sz="1500" b="1" i="0">
+            <a:pPr algn="l"/>
+            <a:r>
+              <a:rPr sz="1400" b="1" i="0">
                 <a:solidFill>
                   <a:srgbClr val="0F172A"/>
                 </a:solidFill>
@@ -5470,14 +5397,14 @@
       </p:sp>
       <p:sp>
         <p:nvSpPr>
-          <p:cNvPr id="30" name="TextBox 29"/>
+          <p:cNvPr id="31" name="TextBox 30"/>
           <p:cNvSpPr txBox="1"/>
           <p:nvPr/>
         </p:nvSpPr>
         <p:spPr>
           <a:xfrm>
-            <a:off x="7101687" y="4572000"/>
-            <a:ext cx="4297680" cy="640080"/>
+            <a:off x="6941667" y="4754880"/>
+            <a:ext cx="4069080" cy="594360"/>
           </a:xfrm>
           <a:prstGeom prst="rect">
             <a:avLst/>
@@ -5490,16 +5417,9 @@
           </a:bodyPr>
           <a:lstStyle/>
           <a:p>
-            <a:pPr algn="l">
-              <a:spcBef>
-                <a:spcPts val="0"/>
-              </a:spcBef>
-              <a:spcAft>
-                <a:spcPts val="0"/>
-              </a:spcAft>
-            </a:pPr>
-            <a:r>
-              <a:rPr sz="1100" b="0" i="0">
+            <a:pPr algn="l"/>
+            <a:r>
+              <a:rPr sz="1000" b="0" i="0">
                 <a:solidFill>
                   <a:srgbClr val="475569"/>
                 </a:solidFill>
@@ -5544,8 +5464,8 @@
         </p:nvSpPr>
         <p:spPr>
           <a:xfrm>
-            <a:off x="0" y="502920"/>
-            <a:ext cx="12191695" cy="12700"/>
+            <a:off x="0" y="475488"/>
+            <a:ext cx="12191695" cy="9525"/>
           </a:xfrm>
           <a:prstGeom prst="rect">
             <a:avLst/>
@@ -5579,87 +5499,9 @@
           </a:p>
         </p:txBody>
       </p:sp>
-      <p:sp>
-        <p:nvSpPr>
-          <p:cNvPr id="3" name="TextBox 2"/>
-          <p:cNvSpPr txBox="1"/>
-          <p:nvPr/>
-        </p:nvSpPr>
-        <p:spPr>
-          <a:xfrm>
-            <a:off x="548640" y="164592"/>
-            <a:ext cx="1371600" cy="320040"/>
-          </a:xfrm>
-          <a:prstGeom prst="rect">
-            <a:avLst/>
-          </a:prstGeom>
-          <a:noFill/>
-        </p:spPr>
-        <p:txBody>
-          <a:bodyPr wrap="square">
-            <a:spAutoFit/>
-          </a:bodyPr>
-          <a:lstStyle/>
-          <a:p>
-            <a:r>
-              <a:rPr sz="1600" b="1" i="0">
-                <a:solidFill>
-                  <a:srgbClr val="C8102E"/>
-                </a:solidFill>
-                <a:latin typeface="Segoe UI"/>
-              </a:rPr>
-              <a:t>SIX</a:t>
-            </a:r>
-            <a:r>
-              <a:rPr sz="1600" b="0" i="0">
-                <a:solidFill>
-                  <a:srgbClr val="475569"/>
-                </a:solidFill>
-                <a:latin typeface="Segoe UI"/>
-              </a:rPr>
-              <a:t> AI</a:t>
-            </a:r>
-          </a:p>
-        </p:txBody>
-      </p:sp>
-      <p:sp>
-        <p:nvSpPr>
-          <p:cNvPr id="4" name="TextBox 3"/>
-          <p:cNvSpPr txBox="1"/>
-          <p:nvPr/>
-        </p:nvSpPr>
-        <p:spPr>
-          <a:xfrm>
-            <a:off x="3657600" y="182880"/>
-            <a:ext cx="4876495" cy="274320"/>
-          </a:xfrm>
-          <a:prstGeom prst="rect">
-            <a:avLst/>
-          </a:prstGeom>
-          <a:noFill/>
-        </p:spPr>
-        <p:txBody>
-          <a:bodyPr wrap="square">
-            <a:spAutoFit/>
-          </a:bodyPr>
-          <a:lstStyle/>
-          <a:p>
-            <a:pPr algn="ctr"/>
-            <a:r>
-              <a:rPr sz="1000" b="0" i="0">
-                <a:solidFill>
-                  <a:srgbClr val="94A3B8"/>
-                </a:solidFill>
-                <a:latin typeface="Segoe UI"/>
-              </a:rPr>
-              <a:t>04 / 06 — ARCHITECTURE</a:t>
-            </a:r>
-          </a:p>
-        </p:txBody>
-      </p:sp>
       <p:pic>
         <p:nvPicPr>
-          <p:cNvPr id="5" name="Picture 4" descr="pptx_slide2_Google_Shape_64_p14.png"/>
+          <p:cNvPr id="3" name="Picture 2" descr="six_logo_small.png"/>
           <p:cNvPicPr>
             <a:picLocks noChangeAspect="1"/>
           </p:cNvPicPr>
@@ -5673,8 +5515,8 @@
         </p:blipFill>
         <p:spPr>
           <a:xfrm>
-            <a:off x="10515600" y="109728"/>
-            <a:ext cx="1371600" cy="376460"/>
+            <a:off x="365760" y="128016"/>
+            <a:ext cx="457200" cy="228600"/>
           </a:xfrm>
           <a:prstGeom prst="rect">
             <a:avLst/>
@@ -5683,14 +5525,14 @@
       </p:pic>
       <p:sp>
         <p:nvSpPr>
-          <p:cNvPr id="6" name="TextBox 5"/>
+          <p:cNvPr id="4" name="TextBox 3"/>
           <p:cNvSpPr txBox="1"/>
           <p:nvPr/>
         </p:nvSpPr>
         <p:spPr>
           <a:xfrm>
-            <a:off x="731520" y="777240"/>
-            <a:ext cx="10728655" cy="274320"/>
+            <a:off x="822960" y="137160"/>
+            <a:ext cx="365760" cy="256032"/>
           </a:xfrm>
           <a:prstGeom prst="rect">
             <a:avLst/>
@@ -5703,36 +5545,28 @@
           </a:bodyPr>
           <a:lstStyle/>
           <a:p>
-            <a:pPr algn="ctr">
-              <a:spcBef>
-                <a:spcPts val="0"/>
-              </a:spcBef>
-              <a:spcAft>
-                <a:spcPts val="0"/>
-              </a:spcAft>
-            </a:pPr>
-            <a:r>
-              <a:rPr sz="1200" b="1" i="0">
-                <a:solidFill>
-                  <a:srgbClr val="C8102E"/>
-                </a:solidFill>
-                <a:latin typeface="Segoe UI"/>
-              </a:rPr>
-              <a:t>ARCHITECTURE</a:t>
-            </a:r>
-          </a:p>
-        </p:txBody>
-      </p:sp>
-      <p:sp>
-        <p:nvSpPr>
-          <p:cNvPr id="7" name="TextBox 6"/>
+            <a:r>
+              <a:rPr sz="1300" b="0" i="0">
+                <a:solidFill>
+                  <a:srgbClr val="475569"/>
+                </a:solidFill>
+                <a:latin typeface="Segoe UI"/>
+              </a:rPr>
+              <a:t>AI</a:t>
+            </a:r>
+          </a:p>
+        </p:txBody>
+      </p:sp>
+      <p:sp>
+        <p:nvSpPr>
+          <p:cNvPr id="5" name="TextBox 4"/>
           <p:cNvSpPr txBox="1"/>
           <p:nvPr/>
         </p:nvSpPr>
         <p:spPr>
           <a:xfrm>
-            <a:off x="1828800" y="1097280"/>
-            <a:ext cx="8534095" cy="640080"/>
+            <a:off x="2743200" y="155448"/>
+            <a:ext cx="6705295" cy="228600"/>
           </a:xfrm>
           <a:prstGeom prst="rect">
             <a:avLst/>
@@ -5747,45 +5581,51 @@
           <a:p>
             <a:pPr algn="ctr"/>
             <a:r>
-              <a:rPr sz="3600" b="1" i="0">
-                <a:solidFill>
-                  <a:srgbClr val="0F172A"/>
-                </a:solidFill>
-                <a:latin typeface="Segoe UI"/>
-              </a:rPr>
-              <a:t>One </a:t>
-            </a:r>
-            <a:r>
-              <a:rPr sz="3600" b="1" i="1">
-                <a:solidFill>
-                  <a:srgbClr val="C8102E"/>
-                </a:solidFill>
-                <a:latin typeface="Segoe UI"/>
-              </a:rPr>
-              <a:t>intelligent</a:t>
-            </a:r>
-            <a:r>
-              <a:rPr sz="3600" b="1" i="0">
-                <a:solidFill>
-                  <a:srgbClr val="0F172A"/>
-                </a:solidFill>
-                <a:latin typeface="Segoe UI"/>
-              </a:rPr>
-              <a:t> platform</a:t>
-            </a:r>
-          </a:p>
-        </p:txBody>
-      </p:sp>
-      <p:sp>
-        <p:nvSpPr>
-          <p:cNvPr id="8" name="TextBox 7"/>
+              <a:rPr sz="900" b="0" i="0">
+                <a:solidFill>
+                  <a:srgbClr val="94A3B8"/>
+                </a:solidFill>
+                <a:latin typeface="Segoe UI"/>
+              </a:rPr>
+              <a:t>04 / 06 — ARCHITECTURE</a:t>
+            </a:r>
+          </a:p>
+        </p:txBody>
+      </p:sp>
+      <p:pic>
+        <p:nvPicPr>
+          <p:cNvPr id="6" name="Picture 5" descr="pptx_slide2_Google_Shape_64_p14.png"/>
+          <p:cNvPicPr>
+            <a:picLocks noChangeAspect="1"/>
+          </p:cNvPicPr>
+          <p:nvPr/>
+        </p:nvPicPr>
+        <p:blipFill>
+          <a:blip r:embed="rId3"/>
+          <a:stretch>
+            <a:fillRect/>
+          </a:stretch>
+        </p:blipFill>
+        <p:spPr>
+          <a:xfrm>
+            <a:off x="10728655" y="91440"/>
+            <a:ext cx="1188720" cy="326266"/>
+          </a:xfrm>
+          <a:prstGeom prst="rect">
+            <a:avLst/>
+          </a:prstGeom>
+        </p:spPr>
+      </p:pic>
+      <p:sp>
+        <p:nvSpPr>
+          <p:cNvPr id="7" name="TextBox 6"/>
           <p:cNvSpPr txBox="1"/>
           <p:nvPr/>
         </p:nvSpPr>
         <p:spPr>
           <a:xfrm>
-            <a:off x="1371600" y="1737360"/>
-            <a:ext cx="9448495" cy="548640"/>
+            <a:off x="914400" y="777240"/>
+            <a:ext cx="10362895" cy="274320"/>
           </a:xfrm>
           <a:prstGeom prst="rect">
             <a:avLst/>
@@ -5798,16 +5638,97 @@
           </a:bodyPr>
           <a:lstStyle/>
           <a:p>
-            <a:pPr algn="ctr">
-              <a:spcBef>
-                <a:spcPts val="0"/>
-              </a:spcBef>
-              <a:spcAft>
-                <a:spcPts val="0"/>
-              </a:spcAft>
-            </a:pPr>
-            <a:r>
-              <a:rPr sz="1300" b="0" i="0">
+            <a:pPr algn="ctr"/>
+            <a:r>
+              <a:rPr sz="1200" b="1" i="0">
+                <a:solidFill>
+                  <a:srgbClr val="C8102E"/>
+                </a:solidFill>
+                <a:latin typeface="Segoe UI"/>
+              </a:rPr>
+              <a:t>ARCHITECTURE</a:t>
+            </a:r>
+          </a:p>
+        </p:txBody>
+      </p:sp>
+      <p:sp>
+        <p:nvSpPr>
+          <p:cNvPr id="8" name="TextBox 7"/>
+          <p:cNvSpPr txBox="1"/>
+          <p:nvPr/>
+        </p:nvSpPr>
+        <p:spPr>
+          <a:xfrm>
+            <a:off x="1828800" y="1051560"/>
+            <a:ext cx="8534095" cy="640080"/>
+          </a:xfrm>
+          <a:prstGeom prst="rect">
+            <a:avLst/>
+          </a:prstGeom>
+          <a:noFill/>
+        </p:spPr>
+        <p:txBody>
+          <a:bodyPr wrap="square">
+            <a:spAutoFit/>
+          </a:bodyPr>
+          <a:lstStyle/>
+          <a:p>
+            <a:pPr algn="ctr"/>
+            <a:r>
+              <a:rPr sz="3400" b="1" i="0">
+                <a:solidFill>
+                  <a:srgbClr val="0F172A"/>
+                </a:solidFill>
+                <a:latin typeface="Segoe UI"/>
+              </a:rPr>
+              <a:t>One </a:t>
+            </a:r>
+            <a:r>
+              <a:rPr sz="3400" b="1" i="1">
+                <a:solidFill>
+                  <a:srgbClr val="C8102E"/>
+                </a:solidFill>
+                <a:latin typeface="Segoe UI"/>
+              </a:rPr>
+              <a:t>intelligent</a:t>
+            </a:r>
+            <a:r>
+              <a:rPr sz="3400" b="1" i="0">
+                <a:solidFill>
+                  <a:srgbClr val="0F172A"/>
+                </a:solidFill>
+                <a:latin typeface="Segoe UI"/>
+              </a:rPr>
+              <a:t> platform</a:t>
+            </a:r>
+          </a:p>
+        </p:txBody>
+      </p:sp>
+      <p:sp>
+        <p:nvSpPr>
+          <p:cNvPr id="9" name="TextBox 8"/>
+          <p:cNvSpPr txBox="1"/>
+          <p:nvPr/>
+        </p:nvSpPr>
+        <p:spPr>
+          <a:xfrm>
+            <a:off x="1828800" y="1691640"/>
+            <a:ext cx="8534095" cy="457200"/>
+          </a:xfrm>
+          <a:prstGeom prst="rect">
+            <a:avLst/>
+          </a:prstGeom>
+          <a:noFill/>
+        </p:spPr>
+        <p:txBody>
+          <a:bodyPr wrap="square">
+            <a:spAutoFit/>
+          </a:bodyPr>
+          <a:lstStyle/>
+          <a:p>
+            <a:pPr algn="ctr"/>
+            <a:r>
+              <a:rPr sz="1200" b="0" i="0">
                 <a:solidFill>
                   <a:srgbClr val="475569"/>
                 </a:solidFill>
@@ -5820,14 +5741,14 @@
       </p:sp>
       <p:sp>
         <p:nvSpPr>
-          <p:cNvPr id="9" name="Rounded Rectangle 8"/>
+          <p:cNvPr id="10" name="Rounded Rectangle 9"/>
           <p:cNvSpPr/>
           <p:nvPr/>
         </p:nvSpPr>
         <p:spPr>
           <a:xfrm>
-            <a:off x="731520" y="2468880"/>
-            <a:ext cx="10728655" cy="868680"/>
+            <a:off x="914400" y="2286000"/>
+            <a:ext cx="10362895" cy="777240"/>
           </a:xfrm>
           <a:prstGeom prst="roundRect">
             <a:avLst>
@@ -5837,7 +5758,7 @@
           <a:solidFill>
             <a:srgbClr val="F1F5F9"/>
           </a:solidFill>
-          <a:ln w="12700">
+          <a:ln w="9525">
             <a:solidFill>
               <a:srgbClr val="CBD5E1"/>
             </a:solidFill>
@@ -5867,14 +5788,14 @@
       </p:sp>
       <p:sp>
         <p:nvSpPr>
-          <p:cNvPr id="10" name="TextBox 9"/>
+          <p:cNvPr id="11" name="TextBox 10"/>
           <p:cNvSpPr txBox="1"/>
           <p:nvPr/>
         </p:nvSpPr>
         <p:spPr>
           <a:xfrm>
-            <a:off x="1005840" y="2542032"/>
-            <a:ext cx="2743200" cy="274320"/>
+            <a:off x="1143000" y="2359152"/>
+            <a:ext cx="2743200" cy="228600"/>
           </a:xfrm>
           <a:prstGeom prst="rect">
             <a:avLst/>
@@ -5888,21 +5809,21 @@
           <a:lstStyle/>
           <a:p>
             <a:r>
+              <a:rPr sz="900" b="1" i="0">
+                <a:solidFill>
+                  <a:srgbClr val="2E6FD6"/>
+                </a:solidFill>
+                <a:latin typeface="Segoe UI"/>
+              </a:rPr>
+              <a:t>●</a:t>
+            </a:r>
+            <a:r>
               <a:rPr sz="1000" b="1" i="0">
                 <a:solidFill>
                   <a:srgbClr val="2E6FD6"/>
                 </a:solidFill>
                 <a:latin typeface="Segoe UI"/>
               </a:rPr>
-              <a:t>●</a:t>
-            </a:r>
-            <a:r>
-              <a:rPr sz="1100" b="1" i="0">
-                <a:solidFill>
-                  <a:srgbClr val="2E6FD6"/>
-                </a:solidFill>
-                <a:latin typeface="Segoe UI"/>
-              </a:rPr>
               <a:t>  DATA SOURCES</a:t>
             </a:r>
           </a:p>
@@ -5910,14 +5831,14 @@
       </p:sp>
       <p:sp>
         <p:nvSpPr>
-          <p:cNvPr id="11" name="Rounded Rectangle 10"/>
+          <p:cNvPr id="12" name="Rounded Rectangle 11"/>
           <p:cNvSpPr/>
           <p:nvPr/>
         </p:nvSpPr>
         <p:spPr>
           <a:xfrm>
-            <a:off x="1005840" y="2880360"/>
-            <a:ext cx="2176272" cy="347472"/>
+            <a:off x="1143000" y="2670048"/>
+            <a:ext cx="2020824" cy="320040"/>
           </a:xfrm>
           <a:prstGeom prst="roundRect">
             <a:avLst>
@@ -5948,12 +5869,12 @@
           </a:fontRef>
         </p:style>
         <p:txBody>
-          <a:bodyPr rtlCol="0" anchor="ctr" tIns="25400" bIns="25400" lIns="101600" rIns="101600" wrap="none"/>
-          <a:lstStyle/>
-          <a:p>
-            <a:pPr algn="ctr"/>
-            <a:r>
-              <a:rPr sz="1200" b="0" i="0">
+          <a:bodyPr rtlCol="0" anchor="ctr" tIns="12700" bIns="12700" lIns="76200" rIns="76200" wrap="none"/>
+          <a:lstStyle/>
+          <a:p>
+            <a:pPr algn="ctr"/>
+            <a:r>
+              <a:rPr sz="1100" b="0" i="0">
                 <a:solidFill>
                   <a:srgbClr val="2E6FD6"/>
                 </a:solidFill>
@@ -5966,14 +5887,14 @@
       </p:sp>
       <p:sp>
         <p:nvSpPr>
-          <p:cNvPr id="12" name="Rounded Rectangle 11"/>
+          <p:cNvPr id="13" name="Rounded Rectangle 12"/>
           <p:cNvSpPr/>
           <p:nvPr/>
         </p:nvSpPr>
         <p:spPr>
           <a:xfrm>
-            <a:off x="3364992" y="2880360"/>
-            <a:ext cx="2432304" cy="347472"/>
+            <a:off x="3300984" y="2670048"/>
+            <a:ext cx="2258568" cy="320040"/>
           </a:xfrm>
           <a:prstGeom prst="roundRect">
             <a:avLst>
@@ -6004,12 +5925,12 @@
           </a:fontRef>
         </p:style>
         <p:txBody>
-          <a:bodyPr rtlCol="0" anchor="ctr" tIns="25400" bIns="25400" lIns="101600" rIns="101600" wrap="none"/>
-          <a:lstStyle/>
-          <a:p>
-            <a:pPr algn="ctr"/>
-            <a:r>
-              <a:rPr sz="1200" b="0" i="0">
+          <a:bodyPr rtlCol="0" anchor="ctr" tIns="12700" bIns="12700" lIns="76200" rIns="76200" wrap="none"/>
+          <a:lstStyle/>
+          <a:p>
+            <a:pPr algn="ctr"/>
+            <a:r>
+              <a:rPr sz="1100" b="0" i="0">
                 <a:solidFill>
                   <a:srgbClr val="2E6FD6"/>
                 </a:solidFill>
@@ -6022,14 +5943,14 @@
       </p:sp>
       <p:sp>
         <p:nvSpPr>
-          <p:cNvPr id="13" name="Rounded Rectangle 12"/>
+          <p:cNvPr id="14" name="Rounded Rectangle 13"/>
           <p:cNvSpPr/>
           <p:nvPr/>
         </p:nvSpPr>
         <p:spPr>
           <a:xfrm>
-            <a:off x="5980176" y="2880360"/>
-            <a:ext cx="1371600" cy="347472"/>
+            <a:off x="5696712" y="2670048"/>
+            <a:ext cx="1280160" cy="320040"/>
           </a:xfrm>
           <a:prstGeom prst="roundRect">
             <a:avLst>
@@ -6060,12 +5981,12 @@
           </a:fontRef>
         </p:style>
         <p:txBody>
-          <a:bodyPr rtlCol="0" anchor="ctr" tIns="25400" bIns="25400" lIns="101600" rIns="101600" wrap="none"/>
-          <a:lstStyle/>
-          <a:p>
-            <a:pPr algn="ctr"/>
-            <a:r>
-              <a:rPr sz="1200" b="0" i="0">
+          <a:bodyPr rtlCol="0" anchor="ctr" tIns="12700" bIns="12700" lIns="76200" rIns="76200" wrap="none"/>
+          <a:lstStyle/>
+          <a:p>
+            <a:pPr algn="ctr"/>
+            <a:r>
+              <a:rPr sz="1100" b="0" i="0">
                 <a:solidFill>
                   <a:srgbClr val="2E6FD6"/>
                 </a:solidFill>
@@ -6078,14 +5999,14 @@
       </p:sp>
       <p:sp>
         <p:nvSpPr>
-          <p:cNvPr id="14" name="Rounded Rectangle 13"/>
+          <p:cNvPr id="15" name="Rounded Rectangle 14"/>
           <p:cNvSpPr/>
           <p:nvPr/>
         </p:nvSpPr>
         <p:spPr>
           <a:xfrm>
-            <a:off x="7534656" y="2880360"/>
-            <a:ext cx="1792224" cy="347472"/>
+            <a:off x="7114032" y="2670048"/>
+            <a:ext cx="1664208" cy="320040"/>
           </a:xfrm>
           <a:prstGeom prst="roundRect">
             <a:avLst>
@@ -6116,12 +6037,12 @@
           </a:fontRef>
         </p:style>
         <p:txBody>
-          <a:bodyPr rtlCol="0" anchor="ctr" tIns="25400" bIns="25400" lIns="101600" rIns="101600" wrap="none"/>
-          <a:lstStyle/>
-          <a:p>
-            <a:pPr algn="ctr"/>
-            <a:r>
-              <a:rPr sz="1200" b="0" i="0">
+          <a:bodyPr rtlCol="0" anchor="ctr" tIns="12700" bIns="12700" lIns="76200" rIns="76200" wrap="none"/>
+          <a:lstStyle/>
+          <a:p>
+            <a:pPr algn="ctr"/>
+            <a:r>
+              <a:rPr sz="1100" b="0" i="0">
                 <a:solidFill>
                   <a:srgbClr val="2E6FD6"/>
                 </a:solidFill>
@@ -6134,14 +6055,14 @@
       </p:sp>
       <p:sp>
         <p:nvSpPr>
-          <p:cNvPr id="15" name="TextBox 14"/>
+          <p:cNvPr id="16" name="TextBox 15"/>
           <p:cNvSpPr txBox="1"/>
           <p:nvPr/>
         </p:nvSpPr>
         <p:spPr>
           <a:xfrm>
-            <a:off x="4572000" y="3383280"/>
-            <a:ext cx="3047695" cy="320040"/>
+            <a:off x="4572000" y="3108960"/>
+            <a:ext cx="3047695" cy="274320"/>
           </a:xfrm>
           <a:prstGeom prst="rect">
             <a:avLst/>
@@ -6156,7 +6077,7 @@
           <a:p>
             <a:pPr algn="ctr"/>
             <a:r>
-              <a:rPr sz="1100" b="0" i="0">
+              <a:rPr sz="1000" b="0" i="0">
                 <a:solidFill>
                   <a:srgbClr val="94A3B8"/>
                 </a:solidFill>
@@ -6169,108 +6090,18 @@
       </p:sp>
       <p:sp>
         <p:nvSpPr>
-          <p:cNvPr id="16" name="Rounded Rectangle 15"/>
+          <p:cNvPr id="17" name="Rounded Rectangle 16"/>
           <p:cNvSpPr/>
           <p:nvPr/>
         </p:nvSpPr>
         <p:spPr>
           <a:xfrm>
-            <a:off x="731520" y="3749039"/>
-            <a:ext cx="3456432" cy="822960"/>
+            <a:off x="914400" y="3429000"/>
+            <a:ext cx="3271418" cy="777240"/>
           </a:xfrm>
           <a:prstGeom prst="roundRect">
             <a:avLst>
               <a:gd name="adj" fmla="val 1500"/>
-            </a:avLst>
-          </a:prstGeom>
-          <a:solidFill>
-            <a:srgbClr val="FEF7F8"/>
-          </a:solidFill>
-          <a:ln w="12700">
-            <a:solidFill>
-              <a:srgbClr val="C8102E"/>
-            </a:solidFill>
-          </a:ln>
-        </p:spPr>
-        <p:style>
-          <a:lnRef idx="1">
-            <a:schemeClr val="accent1"/>
-          </a:lnRef>
-          <a:fillRef idx="3">
-            <a:schemeClr val="accent1"/>
-          </a:fillRef>
-          <a:effectRef idx="2">
-            <a:schemeClr val="accent1"/>
-          </a:effectRef>
-          <a:fontRef idx="minor">
-            <a:schemeClr val="lt1"/>
-          </a:fontRef>
-        </p:style>
-        <p:txBody>
-          <a:bodyPr rtlCol="0" anchor="ctr"/>
-          <a:lstStyle/>
-          <a:p>
-            <a:pPr algn="ctr"/>
-          </a:p>
-        </p:txBody>
-      </p:sp>
-      <p:sp>
-        <p:nvSpPr>
-          <p:cNvPr id="17" name="TextBox 16"/>
-          <p:cNvSpPr txBox="1"/>
-          <p:nvPr/>
-        </p:nvSpPr>
-        <p:spPr>
-          <a:xfrm>
-            <a:off x="914400" y="3822191"/>
-            <a:ext cx="3090672" cy="274320"/>
-          </a:xfrm>
-          <a:prstGeom prst="rect">
-            <a:avLst/>
-          </a:prstGeom>
-          <a:noFill/>
-        </p:spPr>
-        <p:txBody>
-          <a:bodyPr wrap="square">
-            <a:spAutoFit/>
-          </a:bodyPr>
-          <a:lstStyle/>
-          <a:p>
-            <a:r>
-              <a:rPr sz="1000" b="1" i="0">
-                <a:solidFill>
-                  <a:srgbClr val="C8102E"/>
-                </a:solidFill>
-                <a:latin typeface="Segoe UI"/>
-              </a:rPr>
-              <a:t>●</a:t>
-            </a:r>
-            <a:r>
-              <a:rPr sz="1100" b="1" i="0">
-                <a:solidFill>
-                  <a:srgbClr val="C8102E"/>
-                </a:solidFill>
-                <a:latin typeface="Segoe UI"/>
-              </a:rPr>
-              <a:t>  CONFLICT ASSISTANT</a:t>
-            </a:r>
-          </a:p>
-        </p:txBody>
-      </p:sp>
-      <p:sp>
-        <p:nvSpPr>
-          <p:cNvPr id="18" name="Rounded Rectangle 17"/>
-          <p:cNvSpPr/>
-          <p:nvPr/>
-        </p:nvSpPr>
-        <p:spPr>
-          <a:xfrm>
-            <a:off x="914400" y="4187951"/>
-            <a:ext cx="2615184" cy="347472"/>
-          </a:xfrm>
-          <a:prstGeom prst="roundRect">
-            <a:avLst>
-              <a:gd name="adj" fmla="val 12000"/>
             </a:avLst>
           </a:prstGeom>
           <a:solidFill>
@@ -6297,62 +6128,6 @@
           </a:fontRef>
         </p:style>
         <p:txBody>
-          <a:bodyPr rtlCol="0" anchor="ctr" tIns="25400" bIns="25400" lIns="101600" rIns="101600" wrap="none"/>
-          <a:lstStyle/>
-          <a:p>
-            <a:pPr algn="ctr"/>
-            <a:r>
-              <a:rPr sz="1200" b="0" i="0">
-                <a:solidFill>
-                  <a:srgbClr val="C8102E"/>
-                </a:solidFill>
-                <a:latin typeface="Segoe UI"/>
-              </a:rPr>
-              <a:t>Monitors the portfolio</a:t>
-            </a:r>
-          </a:p>
-        </p:txBody>
-      </p:sp>
-      <p:sp>
-        <p:nvSpPr>
-          <p:cNvPr id="19" name="Rounded Rectangle 18"/>
-          <p:cNvSpPr/>
-          <p:nvPr/>
-        </p:nvSpPr>
-        <p:spPr>
-          <a:xfrm>
-            <a:off x="4370832" y="3749039"/>
-            <a:ext cx="3456432" cy="822960"/>
-          </a:xfrm>
-          <a:prstGeom prst="roundRect">
-            <a:avLst>
-              <a:gd name="adj" fmla="val 1500"/>
-            </a:avLst>
-          </a:prstGeom>
-          <a:solidFill>
-            <a:srgbClr val="FEF7F8"/>
-          </a:solidFill>
-          <a:ln w="12700">
-            <a:solidFill>
-              <a:srgbClr val="C8102E"/>
-            </a:solidFill>
-          </a:ln>
-        </p:spPr>
-        <p:style>
-          <a:lnRef idx="1">
-            <a:schemeClr val="accent1"/>
-          </a:lnRef>
-          <a:fillRef idx="3">
-            <a:schemeClr val="accent1"/>
-          </a:fillRef>
-          <a:effectRef idx="2">
-            <a:schemeClr val="accent1"/>
-          </a:effectRef>
-          <a:fontRef idx="minor">
-            <a:schemeClr val="lt1"/>
-          </a:fontRef>
-        </p:style>
-        <p:txBody>
           <a:bodyPr rtlCol="0" anchor="ctr"/>
           <a:lstStyle/>
           <a:p>
@@ -6362,14 +6137,14 @@
       </p:sp>
       <p:sp>
         <p:nvSpPr>
-          <p:cNvPr id="20" name="TextBox 19"/>
+          <p:cNvPr id="18" name="TextBox 17"/>
           <p:cNvSpPr txBox="1"/>
           <p:nvPr/>
         </p:nvSpPr>
         <p:spPr>
           <a:xfrm>
-            <a:off x="4553712" y="3822191"/>
-            <a:ext cx="3090672" cy="274320"/>
+            <a:off x="1097280" y="3502152"/>
+            <a:ext cx="2905658" cy="228600"/>
           </a:xfrm>
           <a:prstGeom prst="rect">
             <a:avLst/>
@@ -6383,36 +6158,36 @@
           <a:lstStyle/>
           <a:p>
             <a:r>
+              <a:rPr sz="900" b="1" i="0">
+                <a:solidFill>
+                  <a:srgbClr val="C8102E"/>
+                </a:solidFill>
+                <a:latin typeface="Segoe UI"/>
+              </a:rPr>
+              <a:t>●</a:t>
+            </a:r>
+            <a:r>
               <a:rPr sz="1000" b="1" i="0">
                 <a:solidFill>
                   <a:srgbClr val="C8102E"/>
                 </a:solidFill>
                 <a:latin typeface="Segoe UI"/>
               </a:rPr>
-              <a:t>●</a:t>
-            </a:r>
-            <a:r>
-              <a:rPr sz="1100" b="1" i="0">
-                <a:solidFill>
-                  <a:srgbClr val="C8102E"/>
-                </a:solidFill>
-                <a:latin typeface="Segoe UI"/>
-              </a:rPr>
-              <a:t>  MESSAGE ASSISTANT</a:t>
-            </a:r>
-          </a:p>
-        </p:txBody>
-      </p:sp>
-      <p:sp>
-        <p:nvSpPr>
-          <p:cNvPr id="21" name="Rounded Rectangle 20"/>
+              <a:t>  CONFLICT ASSISTANT</a:t>
+            </a:r>
+          </a:p>
+        </p:txBody>
+      </p:sp>
+      <p:sp>
+        <p:nvSpPr>
+          <p:cNvPr id="19" name="Rounded Rectangle 18"/>
           <p:cNvSpPr/>
           <p:nvPr/>
         </p:nvSpPr>
         <p:spPr>
           <a:xfrm>
-            <a:off x="4553712" y="4187951"/>
-            <a:ext cx="2971800" cy="347472"/>
+            <a:off x="1097280" y="3813048"/>
+            <a:ext cx="2414015" cy="320040"/>
           </a:xfrm>
           <a:prstGeom prst="roundRect">
             <a:avLst>
@@ -6443,126 +6218,36 @@
           </a:fontRef>
         </p:style>
         <p:txBody>
-          <a:bodyPr rtlCol="0" anchor="ctr" tIns="25400" bIns="25400" lIns="101600" rIns="101600" wrap="none"/>
-          <a:lstStyle/>
-          <a:p>
-            <a:pPr algn="ctr"/>
-            <a:r>
-              <a:rPr sz="1200" b="0" i="0">
+          <a:bodyPr rtlCol="0" anchor="ctr" tIns="12700" bIns="12700" lIns="76200" rIns="76200" wrap="none"/>
+          <a:lstStyle/>
+          <a:p>
+            <a:pPr algn="ctr"/>
+            <a:r>
+              <a:rPr sz="1100" b="0" i="0">
                 <a:solidFill>
                   <a:srgbClr val="C8102E"/>
                 </a:solidFill>
                 <a:latin typeface="Segoe UI"/>
               </a:rPr>
-              <a:t>Drafts the advisory notes</a:t>
-            </a:r>
-          </a:p>
-        </p:txBody>
-      </p:sp>
-      <p:sp>
-        <p:nvSpPr>
-          <p:cNvPr id="22" name="Rounded Rectangle 21"/>
+              <a:t>Monitors the portfolio</a:t>
+            </a:r>
+          </a:p>
+        </p:txBody>
+      </p:sp>
+      <p:sp>
+        <p:nvSpPr>
+          <p:cNvPr id="20" name="Rounded Rectangle 19"/>
           <p:cNvSpPr/>
           <p:nvPr/>
         </p:nvSpPr>
         <p:spPr>
           <a:xfrm>
-            <a:off x="8010144" y="3749039"/>
-            <a:ext cx="3456432" cy="822960"/>
+            <a:off x="4460138" y="3429000"/>
+            <a:ext cx="3271418" cy="777240"/>
           </a:xfrm>
           <a:prstGeom prst="roundRect">
             <a:avLst>
               <a:gd name="adj" fmla="val 1500"/>
-            </a:avLst>
-          </a:prstGeom>
-          <a:solidFill>
-            <a:srgbClr val="FEF7F8"/>
-          </a:solidFill>
-          <a:ln w="12700">
-            <a:solidFill>
-              <a:srgbClr val="C8102E"/>
-            </a:solidFill>
-          </a:ln>
-        </p:spPr>
-        <p:style>
-          <a:lnRef idx="1">
-            <a:schemeClr val="accent1"/>
-          </a:lnRef>
-          <a:fillRef idx="3">
-            <a:schemeClr val="accent1"/>
-          </a:fillRef>
-          <a:effectRef idx="2">
-            <a:schemeClr val="accent1"/>
-          </a:effectRef>
-          <a:fontRef idx="minor">
-            <a:schemeClr val="lt1"/>
-          </a:fontRef>
-        </p:style>
-        <p:txBody>
-          <a:bodyPr rtlCol="0" anchor="ctr"/>
-          <a:lstStyle/>
-          <a:p>
-            <a:pPr algn="ctr"/>
-          </a:p>
-        </p:txBody>
-      </p:sp>
-      <p:sp>
-        <p:nvSpPr>
-          <p:cNvPr id="23" name="TextBox 22"/>
-          <p:cNvSpPr txBox="1"/>
-          <p:nvPr/>
-        </p:nvSpPr>
-        <p:spPr>
-          <a:xfrm>
-            <a:off x="8193024" y="3822191"/>
-            <a:ext cx="3090672" cy="274320"/>
-          </a:xfrm>
-          <a:prstGeom prst="rect">
-            <a:avLst/>
-          </a:prstGeom>
-          <a:noFill/>
-        </p:spPr>
-        <p:txBody>
-          <a:bodyPr wrap="square">
-            <a:spAutoFit/>
-          </a:bodyPr>
-          <a:lstStyle/>
-          <a:p>
-            <a:r>
-              <a:rPr sz="1000" b="1" i="0">
-                <a:solidFill>
-                  <a:srgbClr val="C8102E"/>
-                </a:solidFill>
-                <a:latin typeface="Segoe UI"/>
-              </a:rPr>
-              <a:t>●</a:t>
-            </a:r>
-            <a:r>
-              <a:rPr sz="1100" b="1" i="0">
-                <a:solidFill>
-                  <a:srgbClr val="C8102E"/>
-                </a:solidFill>
-                <a:latin typeface="Segoe UI"/>
-              </a:rPr>
-              <a:t>  CHAT AGENT</a:t>
-            </a:r>
-          </a:p>
-        </p:txBody>
-      </p:sp>
-      <p:sp>
-        <p:nvSpPr>
-          <p:cNvPr id="24" name="Rounded Rectangle 23"/>
-          <p:cNvSpPr/>
-          <p:nvPr/>
-        </p:nvSpPr>
-        <p:spPr>
-          <a:xfrm>
-            <a:off x="8193024" y="4187951"/>
-            <a:ext cx="3090672" cy="347472"/>
-          </a:xfrm>
-          <a:prstGeom prst="roundRect">
-            <a:avLst>
-              <a:gd name="adj" fmla="val 12000"/>
             </a:avLst>
           </a:prstGeom>
           <a:solidFill>
@@ -6589,32 +6274,23 @@
           </a:fontRef>
         </p:style>
         <p:txBody>
-          <a:bodyPr rtlCol="0" anchor="ctr" tIns="25400" bIns="25400" lIns="101600" rIns="101600" wrap="none"/>
-          <a:lstStyle/>
-          <a:p>
-            <a:pPr algn="ctr"/>
-            <a:r>
-              <a:rPr sz="1200" b="0" i="0">
-                <a:solidFill>
-                  <a:srgbClr val="C8102E"/>
-                </a:solidFill>
-                <a:latin typeface="Segoe UI"/>
-              </a:rPr>
-              <a:t>Natural language tool use across the system</a:t>
-            </a:r>
-          </a:p>
-        </p:txBody>
-      </p:sp>
-      <p:sp>
-        <p:nvSpPr>
-          <p:cNvPr id="25" name="TextBox 24"/>
+          <a:bodyPr rtlCol="0" anchor="ctr"/>
+          <a:lstStyle/>
+          <a:p>
+            <a:pPr algn="ctr"/>
+          </a:p>
+        </p:txBody>
+      </p:sp>
+      <p:sp>
+        <p:nvSpPr>
+          <p:cNvPr id="21" name="TextBox 20"/>
           <p:cNvSpPr txBox="1"/>
           <p:nvPr/>
         </p:nvSpPr>
         <p:spPr>
           <a:xfrm>
-            <a:off x="4572000" y="4617720"/>
-            <a:ext cx="3047695" cy="320040"/>
+            <a:off x="4643018" y="3502152"/>
+            <a:ext cx="2905658" cy="228600"/>
           </a:xfrm>
           <a:prstGeom prst="rect">
             <a:avLst/>
@@ -6627,41 +6303,49 @@
           </a:bodyPr>
           <a:lstStyle/>
           <a:p>
-            <a:pPr algn="ctr"/>
-            <a:r>
-              <a:rPr sz="1100" b="0" i="0">
-                <a:solidFill>
-                  <a:srgbClr val="94A3B8"/>
-                </a:solidFill>
-                <a:latin typeface="Segoe UI"/>
-              </a:rPr>
-              <a:t>↓  REST API</a:t>
-            </a:r>
-          </a:p>
-        </p:txBody>
-      </p:sp>
-      <p:sp>
-        <p:nvSpPr>
-          <p:cNvPr id="26" name="Rounded Rectangle 25"/>
+            <a:r>
+              <a:rPr sz="900" b="1" i="0">
+                <a:solidFill>
+                  <a:srgbClr val="C8102E"/>
+                </a:solidFill>
+                <a:latin typeface="Segoe UI"/>
+              </a:rPr>
+              <a:t>●</a:t>
+            </a:r>
+            <a:r>
+              <a:rPr sz="1000" b="1" i="0">
+                <a:solidFill>
+                  <a:srgbClr val="C8102E"/>
+                </a:solidFill>
+                <a:latin typeface="Segoe UI"/>
+              </a:rPr>
+              <a:t>  MESSAGE ASSISTANT</a:t>
+            </a:r>
+          </a:p>
+        </p:txBody>
+      </p:sp>
+      <p:sp>
+        <p:nvSpPr>
+          <p:cNvPr id="22" name="Rounded Rectangle 21"/>
           <p:cNvSpPr/>
           <p:nvPr/>
         </p:nvSpPr>
         <p:spPr>
           <a:xfrm>
-            <a:off x="731520" y="5029200"/>
-            <a:ext cx="5120640" cy="1143000"/>
+            <a:off x="4643018" y="3813048"/>
+            <a:ext cx="2743200" cy="320040"/>
           </a:xfrm>
           <a:prstGeom prst="roundRect">
             <a:avLst>
-              <a:gd name="adj" fmla="val 1500"/>
+              <a:gd name="adj" fmla="val 12000"/>
             </a:avLst>
           </a:prstGeom>
           <a:solidFill>
-            <a:srgbClr val="F1F5F9"/>
+            <a:srgbClr val="FEF7F8"/>
           </a:solidFill>
-          <a:ln w="12700">
+          <a:ln w="9525">
             <a:solidFill>
-              <a:srgbClr val="CBD5E1"/>
+              <a:srgbClr val="C8102E"/>
             </a:solidFill>
           </a:ln>
         </p:spPr>
@@ -6680,6 +6364,62 @@
           </a:fontRef>
         </p:style>
         <p:txBody>
+          <a:bodyPr rtlCol="0" anchor="ctr" tIns="12700" bIns="12700" lIns="76200" rIns="76200" wrap="none"/>
+          <a:lstStyle/>
+          <a:p>
+            <a:pPr algn="ctr"/>
+            <a:r>
+              <a:rPr sz="1100" b="0" i="0">
+                <a:solidFill>
+                  <a:srgbClr val="C8102E"/>
+                </a:solidFill>
+                <a:latin typeface="Segoe UI"/>
+              </a:rPr>
+              <a:t>Drafts the advisory notes</a:t>
+            </a:r>
+          </a:p>
+        </p:txBody>
+      </p:sp>
+      <p:sp>
+        <p:nvSpPr>
+          <p:cNvPr id="23" name="Rounded Rectangle 22"/>
+          <p:cNvSpPr/>
+          <p:nvPr/>
+        </p:nvSpPr>
+        <p:spPr>
+          <a:xfrm>
+            <a:off x="8005876" y="3429000"/>
+            <a:ext cx="3271418" cy="777240"/>
+          </a:xfrm>
+          <a:prstGeom prst="roundRect">
+            <a:avLst>
+              <a:gd name="adj" fmla="val 1500"/>
+            </a:avLst>
+          </a:prstGeom>
+          <a:solidFill>
+            <a:srgbClr val="FEF7F8"/>
+          </a:solidFill>
+          <a:ln w="9525">
+            <a:solidFill>
+              <a:srgbClr val="C8102E"/>
+            </a:solidFill>
+          </a:ln>
+        </p:spPr>
+        <p:style>
+          <a:lnRef idx="1">
+            <a:schemeClr val="accent1"/>
+          </a:lnRef>
+          <a:fillRef idx="3">
+            <a:schemeClr val="accent1"/>
+          </a:fillRef>
+          <a:effectRef idx="2">
+            <a:schemeClr val="accent1"/>
+          </a:effectRef>
+          <a:fontRef idx="minor">
+            <a:schemeClr val="lt1"/>
+          </a:fontRef>
+        </p:style>
+        <p:txBody>
           <a:bodyPr rtlCol="0" anchor="ctr"/>
           <a:lstStyle/>
           <a:p>
@@ -6689,14 +6429,14 @@
       </p:sp>
       <p:sp>
         <p:nvSpPr>
-          <p:cNvPr id="27" name="TextBox 26"/>
+          <p:cNvPr id="24" name="TextBox 23"/>
           <p:cNvSpPr txBox="1"/>
           <p:nvPr/>
         </p:nvSpPr>
         <p:spPr>
           <a:xfrm>
-            <a:off x="1005840" y="5102352"/>
-            <a:ext cx="2743200" cy="274320"/>
+            <a:off x="8188756" y="3502152"/>
+            <a:ext cx="2905658" cy="228600"/>
           </a:xfrm>
           <a:prstGeom prst="rect">
             <a:avLst/>
@@ -6710,8 +6450,189 @@
           <a:lstStyle/>
           <a:p>
             <a:r>
+              <a:rPr sz="900" b="1" i="0">
+                <a:solidFill>
+                  <a:srgbClr val="C8102E"/>
+                </a:solidFill>
+                <a:latin typeface="Segoe UI"/>
+              </a:rPr>
+              <a:t>●</a:t>
+            </a:r>
+            <a:r>
               <a:rPr sz="1000" b="1" i="0">
                 <a:solidFill>
+                  <a:srgbClr val="C8102E"/>
+                </a:solidFill>
+                <a:latin typeface="Segoe UI"/>
+              </a:rPr>
+              <a:t>  CHAT AGENT</a:t>
+            </a:r>
+          </a:p>
+        </p:txBody>
+      </p:sp>
+      <p:sp>
+        <p:nvSpPr>
+          <p:cNvPr id="25" name="Rounded Rectangle 24"/>
+          <p:cNvSpPr/>
+          <p:nvPr/>
+        </p:nvSpPr>
+        <p:spPr>
+          <a:xfrm>
+            <a:off x="8188756" y="3813048"/>
+            <a:ext cx="2905658" cy="320040"/>
+          </a:xfrm>
+          <a:prstGeom prst="roundRect">
+            <a:avLst>
+              <a:gd name="adj" fmla="val 12000"/>
+            </a:avLst>
+          </a:prstGeom>
+          <a:solidFill>
+            <a:srgbClr val="FEF7F8"/>
+          </a:solidFill>
+          <a:ln w="9525">
+            <a:solidFill>
+              <a:srgbClr val="C8102E"/>
+            </a:solidFill>
+          </a:ln>
+        </p:spPr>
+        <p:style>
+          <a:lnRef idx="1">
+            <a:schemeClr val="accent1"/>
+          </a:lnRef>
+          <a:fillRef idx="3">
+            <a:schemeClr val="accent1"/>
+          </a:fillRef>
+          <a:effectRef idx="2">
+            <a:schemeClr val="accent1"/>
+          </a:effectRef>
+          <a:fontRef idx="minor">
+            <a:schemeClr val="lt1"/>
+          </a:fontRef>
+        </p:style>
+        <p:txBody>
+          <a:bodyPr rtlCol="0" anchor="ctr" tIns="12700" bIns="12700" lIns="76200" rIns="76200" wrap="none"/>
+          <a:lstStyle/>
+          <a:p>
+            <a:pPr algn="ctr"/>
+            <a:r>
+              <a:rPr sz="1100" b="0" i="0">
+                <a:solidFill>
+                  <a:srgbClr val="C8102E"/>
+                </a:solidFill>
+                <a:latin typeface="Segoe UI"/>
+              </a:rPr>
+              <a:t>Natural language tool use across the system</a:t>
+            </a:r>
+          </a:p>
+        </p:txBody>
+      </p:sp>
+      <p:sp>
+        <p:nvSpPr>
+          <p:cNvPr id="26" name="TextBox 25"/>
+          <p:cNvSpPr txBox="1"/>
+          <p:nvPr/>
+        </p:nvSpPr>
+        <p:spPr>
+          <a:xfrm>
+            <a:off x="4572000" y="4251960"/>
+            <a:ext cx="3047695" cy="274320"/>
+          </a:xfrm>
+          <a:prstGeom prst="rect">
+            <a:avLst/>
+          </a:prstGeom>
+          <a:noFill/>
+        </p:spPr>
+        <p:txBody>
+          <a:bodyPr wrap="square">
+            <a:spAutoFit/>
+          </a:bodyPr>
+          <a:lstStyle/>
+          <a:p>
+            <a:pPr algn="ctr"/>
+            <a:r>
+              <a:rPr sz="1000" b="0" i="0">
+                <a:solidFill>
+                  <a:srgbClr val="94A3B8"/>
+                </a:solidFill>
+                <a:latin typeface="Segoe UI"/>
+              </a:rPr>
+              <a:t>↓  REST API</a:t>
+            </a:r>
+          </a:p>
+        </p:txBody>
+      </p:sp>
+      <p:sp>
+        <p:nvSpPr>
+          <p:cNvPr id="27" name="Rounded Rectangle 26"/>
+          <p:cNvSpPr/>
+          <p:nvPr/>
+        </p:nvSpPr>
+        <p:spPr>
+          <a:xfrm>
+            <a:off x="914400" y="4572000"/>
+            <a:ext cx="4974189" cy="1051560"/>
+          </a:xfrm>
+          <a:prstGeom prst="roundRect">
+            <a:avLst>
+              <a:gd name="adj" fmla="val 1500"/>
+            </a:avLst>
+          </a:prstGeom>
+          <a:solidFill>
+            <a:srgbClr val="F1F5F9"/>
+          </a:solidFill>
+          <a:ln w="9525">
+            <a:solidFill>
+              <a:srgbClr val="CBD5E1"/>
+            </a:solidFill>
+          </a:ln>
+        </p:spPr>
+        <p:style>
+          <a:lnRef idx="1">
+            <a:schemeClr val="accent1"/>
+          </a:lnRef>
+          <a:fillRef idx="3">
+            <a:schemeClr val="accent1"/>
+          </a:fillRef>
+          <a:effectRef idx="2">
+            <a:schemeClr val="accent1"/>
+          </a:effectRef>
+          <a:fontRef idx="minor">
+            <a:schemeClr val="lt1"/>
+          </a:fontRef>
+        </p:style>
+        <p:txBody>
+          <a:bodyPr rtlCol="0" anchor="ctr"/>
+          <a:lstStyle/>
+          <a:p>
+            <a:pPr algn="ctr"/>
+          </a:p>
+        </p:txBody>
+      </p:sp>
+      <p:sp>
+        <p:nvSpPr>
+          <p:cNvPr id="28" name="TextBox 27"/>
+          <p:cNvSpPr txBox="1"/>
+          <p:nvPr/>
+        </p:nvSpPr>
+        <p:spPr>
+          <a:xfrm>
+            <a:off x="1143000" y="4645152"/>
+            <a:ext cx="2743200" cy="228600"/>
+          </a:xfrm>
+          <a:prstGeom prst="rect">
+            <a:avLst/>
+          </a:prstGeom>
+          <a:noFill/>
+        </p:spPr>
+        <p:txBody>
+          <a:bodyPr wrap="square">
+            <a:spAutoFit/>
+          </a:bodyPr>
+          <a:lstStyle/>
+          <a:p>
+            <a:r>
+              <a:rPr sz="900" b="1" i="0">
+                <a:solidFill>
                   <a:srgbClr val="16A34A"/>
                 </a:solidFill>
                 <a:latin typeface="Segoe UI"/>
@@ -6719,7 +6640,7 @@
               <a:t>●</a:t>
             </a:r>
             <a:r>
-              <a:rPr sz="1100" b="1" i="0">
+              <a:rPr sz="1000" b="1" i="0">
                 <a:solidFill>
                   <a:srgbClr val="16A34A"/>
                 </a:solidFill>
@@ -6732,14 +6653,14 @@
       </p:sp>
       <p:sp>
         <p:nvSpPr>
-          <p:cNvPr id="28" name="Rounded Rectangle 27"/>
+          <p:cNvPr id="29" name="Rounded Rectangle 28"/>
           <p:cNvSpPr/>
           <p:nvPr/>
         </p:nvSpPr>
         <p:spPr>
           <a:xfrm>
-            <a:off x="1005840" y="5440680"/>
-            <a:ext cx="1307592" cy="347472"/>
+            <a:off x="1143000" y="4937760"/>
+            <a:ext cx="1207007" cy="320040"/>
           </a:xfrm>
           <a:prstGeom prst="roundRect">
             <a:avLst>
@@ -6770,12 +6691,12 @@
           </a:fontRef>
         </p:style>
         <p:txBody>
-          <a:bodyPr rtlCol="0" anchor="ctr" tIns="25400" bIns="25400" lIns="101600" rIns="101600" wrap="none"/>
-          <a:lstStyle/>
-          <a:p>
-            <a:pPr algn="ctr"/>
-            <a:r>
-              <a:rPr sz="1100" b="0" i="0">
+          <a:bodyPr rtlCol="0" anchor="ctr" tIns="12700" bIns="12700" lIns="76200" rIns="76200" wrap="none"/>
+          <a:lstStyle/>
+          <a:p>
+            <a:pPr algn="ctr"/>
+            <a:r>
+              <a:rPr sz="1000" b="0" i="0">
                 <a:solidFill>
                   <a:srgbClr val="16A34A"/>
                 </a:solidFill>
@@ -6788,14 +6709,14 @@
       </p:sp>
       <p:sp>
         <p:nvSpPr>
-          <p:cNvPr id="29" name="Rounded Rectangle 28"/>
+          <p:cNvPr id="30" name="Rounded Rectangle 29"/>
           <p:cNvSpPr/>
           <p:nvPr/>
         </p:nvSpPr>
         <p:spPr>
           <a:xfrm>
-            <a:off x="2450592" y="5440680"/>
-            <a:ext cx="1664208" cy="347472"/>
+            <a:off x="2459736" y="4937760"/>
+            <a:ext cx="1536192" cy="320040"/>
           </a:xfrm>
           <a:prstGeom prst="roundRect">
             <a:avLst>
@@ -6826,12 +6747,12 @@
           </a:fontRef>
         </p:style>
         <p:txBody>
-          <a:bodyPr rtlCol="0" anchor="ctr" tIns="25400" bIns="25400" lIns="101600" rIns="101600" wrap="none"/>
-          <a:lstStyle/>
-          <a:p>
-            <a:pPr algn="ctr"/>
-            <a:r>
-              <a:rPr sz="1100" b="0" i="0">
+          <a:bodyPr rtlCol="0" anchor="ctr" tIns="12700" bIns="12700" lIns="76200" rIns="76200" wrap="none"/>
+          <a:lstStyle/>
+          <a:p>
+            <a:pPr algn="ctr"/>
+            <a:r>
+              <a:rPr sz="1000" b="0" i="0">
                 <a:solidFill>
                   <a:srgbClr val="16A34A"/>
                 </a:solidFill>
@@ -6844,14 +6765,14 @@
       </p:sp>
       <p:sp>
         <p:nvSpPr>
-          <p:cNvPr id="30" name="Rounded Rectangle 29"/>
+          <p:cNvPr id="31" name="Rounded Rectangle 30"/>
           <p:cNvSpPr/>
           <p:nvPr/>
         </p:nvSpPr>
         <p:spPr>
           <a:xfrm>
-            <a:off x="4251960" y="5440680"/>
-            <a:ext cx="1545336" cy="347472"/>
+            <a:off x="4105656" y="4937760"/>
+            <a:ext cx="1426464" cy="320040"/>
           </a:xfrm>
           <a:prstGeom prst="roundRect">
             <a:avLst>
@@ -6882,12 +6803,12 @@
           </a:fontRef>
         </p:style>
         <p:txBody>
-          <a:bodyPr rtlCol="0" anchor="ctr" tIns="25400" bIns="25400" lIns="101600" rIns="101600" wrap="none"/>
-          <a:lstStyle/>
-          <a:p>
-            <a:pPr algn="ctr"/>
-            <a:r>
-              <a:rPr sz="1100" b="0" i="0">
+          <a:bodyPr rtlCol="0" anchor="ctr" tIns="12700" bIns="12700" lIns="76200" rIns="76200" wrap="none"/>
+          <a:lstStyle/>
+          <a:p>
+            <a:pPr algn="ctr"/>
+            <a:r>
+              <a:rPr sz="1000" b="0" i="0">
                 <a:solidFill>
                   <a:srgbClr val="16A34A"/>
                 </a:solidFill>
@@ -6900,14 +6821,14 @@
       </p:sp>
       <p:sp>
         <p:nvSpPr>
-          <p:cNvPr id="31" name="Rounded Rectangle 30"/>
+          <p:cNvPr id="32" name="Rounded Rectangle 31"/>
           <p:cNvSpPr/>
           <p:nvPr/>
         </p:nvSpPr>
         <p:spPr>
           <a:xfrm>
-            <a:off x="1005840" y="5833872"/>
-            <a:ext cx="2011680" cy="347472"/>
+            <a:off x="1143000" y="5285232"/>
+            <a:ext cx="1828800" cy="320040"/>
           </a:xfrm>
           <a:prstGeom prst="roundRect">
             <a:avLst>
@@ -6938,12 +6859,12 @@
           </a:fontRef>
         </p:style>
         <p:txBody>
-          <a:bodyPr rtlCol="0" anchor="ctr" tIns="25400" bIns="25400" lIns="101600" rIns="101600" wrap="none"/>
-          <a:lstStyle/>
-          <a:p>
-            <a:pPr algn="ctr"/>
-            <a:r>
-              <a:rPr sz="1100" b="0" i="0">
+          <a:bodyPr rtlCol="0" anchor="ctr" tIns="12700" bIns="12700" lIns="76200" rIns="76200" wrap="none"/>
+          <a:lstStyle/>
+          <a:p>
+            <a:pPr algn="ctr"/>
+            <a:r>
+              <a:rPr sz="1000" b="0" i="0">
                 <a:solidFill>
                   <a:srgbClr val="16A34A"/>
                 </a:solidFill>
@@ -6956,14 +6877,14 @@
       </p:sp>
       <p:sp>
         <p:nvSpPr>
-          <p:cNvPr id="32" name="Rounded Rectangle 31"/>
+          <p:cNvPr id="33" name="Rounded Rectangle 32"/>
           <p:cNvSpPr/>
           <p:nvPr/>
         </p:nvSpPr>
         <p:spPr>
           <a:xfrm>
-            <a:off x="6035040" y="5029200"/>
-            <a:ext cx="5425135" cy="1143000"/>
+            <a:off x="6303105" y="4572000"/>
+            <a:ext cx="4974189" cy="1051560"/>
           </a:xfrm>
           <a:prstGeom prst="roundRect">
             <a:avLst>
@@ -6973,7 +6894,7 @@
           <a:solidFill>
             <a:srgbClr val="F1F5F9"/>
           </a:solidFill>
-          <a:ln w="12700">
+          <a:ln w="9525">
             <a:solidFill>
               <a:srgbClr val="CBD5E1"/>
             </a:solidFill>
@@ -7003,14 +6924,14 @@
       </p:sp>
       <p:sp>
         <p:nvSpPr>
-          <p:cNvPr id="33" name="TextBox 32"/>
+          <p:cNvPr id="34" name="TextBox 33"/>
           <p:cNvSpPr txBox="1"/>
           <p:nvPr/>
         </p:nvSpPr>
         <p:spPr>
           <a:xfrm>
-            <a:off x="6309360" y="5102352"/>
-            <a:ext cx="2743200" cy="274320"/>
+            <a:off x="6531705" y="4645152"/>
+            <a:ext cx="2743200" cy="228600"/>
           </a:xfrm>
           <a:prstGeom prst="rect">
             <a:avLst/>
@@ -7024,21 +6945,21 @@
           <a:lstStyle/>
           <a:p>
             <a:r>
+              <a:rPr sz="900" b="1" i="0">
+                <a:solidFill>
+                  <a:srgbClr val="2E6FD6"/>
+                </a:solidFill>
+                <a:latin typeface="Segoe UI"/>
+              </a:rPr>
+              <a:t>●</a:t>
+            </a:r>
+            <a:r>
               <a:rPr sz="1000" b="1" i="0">
                 <a:solidFill>
                   <a:srgbClr val="2E6FD6"/>
                 </a:solidFill>
                 <a:latin typeface="Segoe UI"/>
               </a:rPr>
-              <a:t>●</a:t>
-            </a:r>
-            <a:r>
-              <a:rPr sz="1100" b="1" i="0">
-                <a:solidFill>
-                  <a:srgbClr val="2E6FD6"/>
-                </a:solidFill>
-                <a:latin typeface="Segoe UI"/>
-              </a:rPr>
               <a:t>  RM DASHBOARD</a:t>
             </a:r>
           </a:p>
@@ -7046,14 +6967,14 @@
       </p:sp>
       <p:sp>
         <p:nvSpPr>
-          <p:cNvPr id="34" name="Rounded Rectangle 33"/>
+          <p:cNvPr id="35" name="Rounded Rectangle 34"/>
           <p:cNvSpPr/>
           <p:nvPr/>
         </p:nvSpPr>
         <p:spPr>
           <a:xfrm>
-            <a:off x="6309360" y="5440680"/>
-            <a:ext cx="2432304" cy="347472"/>
+            <a:off x="6531705" y="4937760"/>
+            <a:ext cx="2258568" cy="320040"/>
           </a:xfrm>
           <a:prstGeom prst="roundRect">
             <a:avLst>
@@ -7084,12 +7005,12 @@
           </a:fontRef>
         </p:style>
         <p:txBody>
-          <a:bodyPr rtlCol="0" anchor="ctr" tIns="25400" bIns="25400" lIns="101600" rIns="101600" wrap="none"/>
-          <a:lstStyle/>
-          <a:p>
-            <a:pPr algn="ctr"/>
-            <a:r>
-              <a:rPr sz="1100" b="0" i="0">
+          <a:bodyPr rtlCol="0" anchor="ctr" tIns="12700" bIns="12700" lIns="76200" rIns="76200" wrap="none"/>
+          <a:lstStyle/>
+          <a:p>
+            <a:pPr algn="ctr"/>
+            <a:r>
+              <a:rPr sz="1000" b="0" i="0">
                 <a:solidFill>
                   <a:srgbClr val="2E6FD6"/>
                 </a:solidFill>
@@ -7102,14 +7023,14 @@
       </p:sp>
       <p:sp>
         <p:nvSpPr>
-          <p:cNvPr id="35" name="Rounded Rectangle 34"/>
+          <p:cNvPr id="36" name="Rounded Rectangle 35"/>
           <p:cNvSpPr/>
           <p:nvPr/>
         </p:nvSpPr>
         <p:spPr>
           <a:xfrm>
-            <a:off x="8878824" y="5440680"/>
-            <a:ext cx="2048256" cy="347472"/>
+            <a:off x="8900001" y="4937760"/>
+            <a:ext cx="1901952" cy="320040"/>
           </a:xfrm>
           <a:prstGeom prst="roundRect">
             <a:avLst>
@@ -7140,12 +7061,12 @@
           </a:fontRef>
         </p:style>
         <p:txBody>
-          <a:bodyPr rtlCol="0" anchor="ctr" tIns="25400" bIns="25400" lIns="101600" rIns="101600" wrap="none"/>
-          <a:lstStyle/>
-          <a:p>
-            <a:pPr algn="ctr"/>
-            <a:r>
-              <a:rPr sz="1100" b="0" i="0">
+          <a:bodyPr rtlCol="0" anchor="ctr" tIns="12700" bIns="12700" lIns="76200" rIns="76200" wrap="none"/>
+          <a:lstStyle/>
+          <a:p>
+            <a:pPr algn="ctr"/>
+            <a:r>
+              <a:rPr sz="1000" b="0" i="0">
                 <a:solidFill>
                   <a:srgbClr val="2E6FD6"/>
                 </a:solidFill>
@@ -7158,14 +7079,14 @@
       </p:sp>
       <p:sp>
         <p:nvSpPr>
-          <p:cNvPr id="36" name="Rounded Rectangle 35"/>
+          <p:cNvPr id="37" name="Rounded Rectangle 36"/>
           <p:cNvSpPr/>
           <p:nvPr/>
         </p:nvSpPr>
         <p:spPr>
           <a:xfrm>
-            <a:off x="6309360" y="5833872"/>
-            <a:ext cx="1463040" cy="347472"/>
+            <a:off x="6531705" y="5285232"/>
+            <a:ext cx="1371600" cy="320040"/>
           </a:xfrm>
           <a:prstGeom prst="roundRect">
             <a:avLst>
@@ -7196,12 +7117,12 @@
           </a:fontRef>
         </p:style>
         <p:txBody>
-          <a:bodyPr rtlCol="0" anchor="ctr" tIns="25400" bIns="25400" lIns="101600" rIns="101600" wrap="none"/>
-          <a:lstStyle/>
-          <a:p>
-            <a:pPr algn="ctr"/>
-            <a:r>
-              <a:rPr sz="1100" b="0" i="0">
+          <a:bodyPr rtlCol="0" anchor="ctr" tIns="12700" bIns="12700" lIns="76200" rIns="76200" wrap="none"/>
+          <a:lstStyle/>
+          <a:p>
+            <a:pPr algn="ctr"/>
+            <a:r>
+              <a:rPr sz="1000" b="0" i="0">
                 <a:solidFill>
                   <a:srgbClr val="2E6FD6"/>
                 </a:solidFill>
@@ -7246,8 +7167,8 @@
         </p:nvSpPr>
         <p:spPr>
           <a:xfrm>
-            <a:off x="0" y="502920"/>
-            <a:ext cx="12191695" cy="12700"/>
+            <a:off x="0" y="475488"/>
+            <a:ext cx="12191695" cy="9525"/>
           </a:xfrm>
           <a:prstGeom prst="rect">
             <a:avLst/>
@@ -7281,87 +7202,9 @@
           </a:p>
         </p:txBody>
       </p:sp>
-      <p:sp>
-        <p:nvSpPr>
-          <p:cNvPr id="3" name="TextBox 2"/>
-          <p:cNvSpPr txBox="1"/>
-          <p:nvPr/>
-        </p:nvSpPr>
-        <p:spPr>
-          <a:xfrm>
-            <a:off x="548640" y="164592"/>
-            <a:ext cx="1371600" cy="320040"/>
-          </a:xfrm>
-          <a:prstGeom prst="rect">
-            <a:avLst/>
-          </a:prstGeom>
-          <a:noFill/>
-        </p:spPr>
-        <p:txBody>
-          <a:bodyPr wrap="square">
-            <a:spAutoFit/>
-          </a:bodyPr>
-          <a:lstStyle/>
-          <a:p>
-            <a:r>
-              <a:rPr sz="1600" b="1" i="0">
-                <a:solidFill>
-                  <a:srgbClr val="C8102E"/>
-                </a:solidFill>
-                <a:latin typeface="Segoe UI"/>
-              </a:rPr>
-              <a:t>SIX</a:t>
-            </a:r>
-            <a:r>
-              <a:rPr sz="1600" b="0" i="0">
-                <a:solidFill>
-                  <a:srgbClr val="475569"/>
-                </a:solidFill>
-                <a:latin typeface="Segoe UI"/>
-              </a:rPr>
-              <a:t> AI</a:t>
-            </a:r>
-          </a:p>
-        </p:txBody>
-      </p:sp>
-      <p:sp>
-        <p:nvSpPr>
-          <p:cNvPr id="4" name="TextBox 3"/>
-          <p:cNvSpPr txBox="1"/>
-          <p:nvPr/>
-        </p:nvSpPr>
-        <p:spPr>
-          <a:xfrm>
-            <a:off x="3657600" y="182880"/>
-            <a:ext cx="4876495" cy="274320"/>
-          </a:xfrm>
-          <a:prstGeom prst="rect">
-            <a:avLst/>
-          </a:prstGeom>
-          <a:noFill/>
-        </p:spPr>
-        <p:txBody>
-          <a:bodyPr wrap="square">
-            <a:spAutoFit/>
-          </a:bodyPr>
-          <a:lstStyle/>
-          <a:p>
-            <a:pPr algn="ctr"/>
-            <a:r>
-              <a:rPr sz="1000" b="0" i="0">
-                <a:solidFill>
-                  <a:srgbClr val="94A3B8"/>
-                </a:solidFill>
-                <a:latin typeface="Segoe UI"/>
-              </a:rPr>
-              <a:t>05 / 06 — LIVE DEMO</a:t>
-            </a:r>
-          </a:p>
-        </p:txBody>
-      </p:sp>
       <p:pic>
         <p:nvPicPr>
-          <p:cNvPr id="5" name="Picture 4" descr="pptx_slide2_Google_Shape_64_p14.png"/>
+          <p:cNvPr id="3" name="Picture 2" descr="six_logo_small.png"/>
           <p:cNvPicPr>
             <a:picLocks noChangeAspect="1"/>
           </p:cNvPicPr>
@@ -7375,8 +7218,8 @@
         </p:blipFill>
         <p:spPr>
           <a:xfrm>
-            <a:off x="10515600" y="109728"/>
-            <a:ext cx="1371600" cy="376460"/>
+            <a:off x="365760" y="128016"/>
+            <a:ext cx="457200" cy="228600"/>
           </a:xfrm>
           <a:prstGeom prst="rect">
             <a:avLst/>
@@ -7385,14 +7228,14 @@
       </p:pic>
       <p:sp>
         <p:nvSpPr>
-          <p:cNvPr id="6" name="TextBox 5"/>
+          <p:cNvPr id="4" name="TextBox 3"/>
           <p:cNvSpPr txBox="1"/>
           <p:nvPr/>
         </p:nvSpPr>
         <p:spPr>
           <a:xfrm>
-            <a:off x="731520" y="914400"/>
-            <a:ext cx="5029200" cy="274320"/>
+            <a:off x="822960" y="137160"/>
+            <a:ext cx="365760" cy="256032"/>
           </a:xfrm>
           <a:prstGeom prst="rect">
             <a:avLst/>
@@ -7405,36 +7248,28 @@
           </a:bodyPr>
           <a:lstStyle/>
           <a:p>
-            <a:pPr algn="l">
-              <a:spcBef>
-                <a:spcPts val="0"/>
-              </a:spcBef>
-              <a:spcAft>
-                <a:spcPts val="0"/>
-              </a:spcAft>
-            </a:pPr>
-            <a:r>
-              <a:rPr sz="1200" b="1" i="0">
-                <a:solidFill>
-                  <a:srgbClr val="C8102E"/>
-                </a:solidFill>
-                <a:latin typeface="Segoe UI"/>
-              </a:rPr>
-              <a:t>LIVE DEMO</a:t>
-            </a:r>
-          </a:p>
-        </p:txBody>
-      </p:sp>
-      <p:sp>
-        <p:nvSpPr>
-          <p:cNvPr id="7" name="TextBox 6"/>
+            <a:r>
+              <a:rPr sz="1300" b="0" i="0">
+                <a:solidFill>
+                  <a:srgbClr val="475569"/>
+                </a:solidFill>
+                <a:latin typeface="Segoe UI"/>
+              </a:rPr>
+              <a:t>AI</a:t>
+            </a:r>
+          </a:p>
+        </p:txBody>
+      </p:sp>
+      <p:sp>
+        <p:nvSpPr>
+          <p:cNvPr id="5" name="TextBox 4"/>
           <p:cNvSpPr txBox="1"/>
           <p:nvPr/>
         </p:nvSpPr>
         <p:spPr>
           <a:xfrm>
-            <a:off x="731520" y="1371600"/>
-            <a:ext cx="5029200" cy="914400"/>
+            <a:off x="2743200" y="155448"/>
+            <a:ext cx="6705295" cy="228600"/>
           </a:xfrm>
           <a:prstGeom prst="rect">
             <a:avLst/>
@@ -7447,37 +7282,53 @@
           </a:bodyPr>
           <a:lstStyle/>
           <a:p>
-            <a:r>
-              <a:rPr sz="3200" b="1" i="0">
-                <a:solidFill>
-                  <a:srgbClr val="0F172A"/>
-                </a:solidFill>
-                <a:latin typeface="Segoe UI"/>
-              </a:rPr>
-              <a:t>From CRM to advisory </a:t>
-            </a:r>
-            <a:r>
-              <a:rPr sz="3200" b="1" i="1">
-                <a:solidFill>
-                  <a:srgbClr val="C8102E"/>
-                </a:solidFill>
-                <a:latin typeface="Segoe UI"/>
-              </a:rPr>
-              <a:t>in 15 seconds</a:t>
-            </a:r>
-          </a:p>
-        </p:txBody>
-      </p:sp>
-      <p:sp>
-        <p:nvSpPr>
-          <p:cNvPr id="8" name="TextBox 7"/>
+            <a:pPr algn="ctr"/>
+            <a:r>
+              <a:rPr sz="900" b="0" i="0">
+                <a:solidFill>
+                  <a:srgbClr val="94A3B8"/>
+                </a:solidFill>
+                <a:latin typeface="Segoe UI"/>
+              </a:rPr>
+              <a:t>05 / 06 — LIVE DEMO</a:t>
+            </a:r>
+          </a:p>
+        </p:txBody>
+      </p:sp>
+      <p:pic>
+        <p:nvPicPr>
+          <p:cNvPr id="6" name="Picture 5" descr="pptx_slide2_Google_Shape_64_p14.png"/>
+          <p:cNvPicPr>
+            <a:picLocks noChangeAspect="1"/>
+          </p:cNvPicPr>
+          <p:nvPr/>
+        </p:nvPicPr>
+        <p:blipFill>
+          <a:blip r:embed="rId3"/>
+          <a:stretch>
+            <a:fillRect/>
+          </a:stretch>
+        </p:blipFill>
+        <p:spPr>
+          <a:xfrm>
+            <a:off x="10728655" y="91440"/>
+            <a:ext cx="1188720" cy="326266"/>
+          </a:xfrm>
+          <a:prstGeom prst="rect">
+            <a:avLst/>
+          </a:prstGeom>
+        </p:spPr>
+      </p:pic>
+      <p:sp>
+        <p:nvSpPr>
+          <p:cNvPr id="7" name="TextBox 6"/>
           <p:cNvSpPr txBox="1"/>
           <p:nvPr/>
         </p:nvSpPr>
         <p:spPr>
           <a:xfrm>
-            <a:off x="731520" y="2468880"/>
-            <a:ext cx="4754880" cy="640080"/>
+            <a:off x="731520" y="914400"/>
+            <a:ext cx="5303520" cy="274320"/>
           </a:xfrm>
           <a:prstGeom prst="rect">
             <a:avLst/>
@@ -7490,16 +7341,98 @@
           </a:bodyPr>
           <a:lstStyle/>
           <a:p>
-            <a:pPr algn="l">
-              <a:spcBef>
-                <a:spcPts val="0"/>
-              </a:spcBef>
-              <a:spcAft>
-                <a:spcPts val="0"/>
-              </a:spcAft>
-            </a:pPr>
-            <a:r>
-              <a:rPr sz="1400" b="0" i="0">
+            <a:pPr algn="l"/>
+            <a:r>
+              <a:rPr sz="1200" b="1" i="0">
+                <a:solidFill>
+                  <a:srgbClr val="C8102E"/>
+                </a:solidFill>
+                <a:latin typeface="Segoe UI"/>
+              </a:rPr>
+              <a:t>LIVE DEMO</a:t>
+            </a:r>
+          </a:p>
+        </p:txBody>
+      </p:sp>
+      <p:sp>
+        <p:nvSpPr>
+          <p:cNvPr id="8" name="TextBox 7"/>
+          <p:cNvSpPr txBox="1"/>
+          <p:nvPr/>
+        </p:nvSpPr>
+        <p:spPr>
+          <a:xfrm>
+            <a:off x="731520" y="1371600"/>
+            <a:ext cx="5303520" cy="914400"/>
+          </a:xfrm>
+          <a:prstGeom prst="rect">
+            <a:avLst/>
+          </a:prstGeom>
+          <a:noFill/>
+        </p:spPr>
+        <p:txBody>
+          <a:bodyPr wrap="square">
+            <a:spAutoFit/>
+          </a:bodyPr>
+          <a:lstStyle/>
+          <a:p>
+            <a:r>
+              <a:rPr sz="3000" b="1" i="0">
+                <a:solidFill>
+                  <a:srgbClr val="0F172A"/>
+                </a:solidFill>
+                <a:latin typeface="Segoe UI"/>
+              </a:rPr>
+              <a:t>From CRM to advisory </a:t>
+            </a:r>
+            <a:r>
+              <a:rPr sz="3000" b="1" i="1">
+                <a:solidFill>
+                  <a:srgbClr val="C8102E"/>
+                </a:solidFill>
+                <a:latin typeface="Segoe UI"/>
+              </a:rPr>
+              <a:t>in</a:t>
+            </a:r>
+          </a:p>
+          <a:p>
+            <a:r>
+              <a:rPr sz="3000" b="1" i="1">
+                <a:solidFill>
+                  <a:srgbClr val="C8102E"/>
+                </a:solidFill>
+                <a:latin typeface="Segoe UI"/>
+              </a:rPr>
+              <a:t>15 seconds</a:t>
+            </a:r>
+          </a:p>
+        </p:txBody>
+      </p:sp>
+      <p:sp>
+        <p:nvSpPr>
+          <p:cNvPr id="9" name="TextBox 8"/>
+          <p:cNvSpPr txBox="1"/>
+          <p:nvPr/>
+        </p:nvSpPr>
+        <p:spPr>
+          <a:xfrm>
+            <a:off x="731520" y="2560320"/>
+            <a:ext cx="5303520" cy="640080"/>
+          </a:xfrm>
+          <a:prstGeom prst="rect">
+            <a:avLst/>
+          </a:prstGeom>
+          <a:noFill/>
+        </p:spPr>
+        <p:txBody>
+          <a:bodyPr wrap="square">
+            <a:spAutoFit/>
+          </a:bodyPr>
+          <a:lstStyle/>
+          <a:p>
+            <a:pPr algn="l"/>
+            <a:r>
+              <a:rPr sz="1300" b="0" i="0">
                 <a:solidFill>
                   <a:srgbClr val="475569"/>
                 </a:solidFill>
@@ -7512,14 +7445,14 @@
       </p:sp>
       <p:sp>
         <p:nvSpPr>
-          <p:cNvPr id="9" name="Oval 8"/>
+          <p:cNvPr id="10" name="Oval 9"/>
           <p:cNvSpPr/>
           <p:nvPr/>
         </p:nvSpPr>
         <p:spPr>
           <a:xfrm>
-            <a:off x="731520" y="3291840"/>
-            <a:ext cx="274320" cy="274320"/>
+            <a:off x="731520" y="3474720"/>
+            <a:ext cx="256032" cy="256032"/>
           </a:xfrm>
           <a:prstGeom prst="ellipse">
             <a:avLst/>
@@ -7551,7 +7484,7 @@
           <a:p>
             <a:pPr algn="ctr"/>
             <a:r>
-              <a:rPr sz="1000" b="1" i="0">
+              <a:rPr sz="900" b="1" i="0">
                 <a:solidFill>
                   <a:srgbClr val="FFFFFF"/>
                 </a:solidFill>
@@ -7564,14 +7497,14 @@
       </p:sp>
       <p:sp>
         <p:nvSpPr>
-          <p:cNvPr id="10" name="TextBox 9"/>
+          <p:cNvPr id="11" name="TextBox 10"/>
           <p:cNvSpPr txBox="1"/>
           <p:nvPr/>
         </p:nvSpPr>
         <p:spPr>
           <a:xfrm>
-            <a:off x="1143000" y="3291840"/>
-            <a:ext cx="4572000" cy="365760"/>
+            <a:off x="1097280" y="3474720"/>
+            <a:ext cx="4937759" cy="320040"/>
           </a:xfrm>
           <a:prstGeom prst="rect">
             <a:avLst/>
@@ -7584,16 +7517,9 @@
           </a:bodyPr>
           <a:lstStyle/>
           <a:p>
-            <a:pPr algn="l">
-              <a:spcBef>
-                <a:spcPts val="0"/>
-              </a:spcBef>
-              <a:spcAft>
-                <a:spcPts val="0"/>
-              </a:spcAft>
-            </a:pPr>
-            <a:r>
-              <a:rPr sz="1200" b="0" i="0">
+            <a:pPr algn="l"/>
+            <a:r>
+              <a:rPr sz="1100" b="0" i="0">
                 <a:solidFill>
                   <a:srgbClr val="475569"/>
                 </a:solidFill>
@@ -7606,14 +7532,14 @@
       </p:sp>
       <p:sp>
         <p:nvSpPr>
-          <p:cNvPr id="11" name="Oval 10"/>
+          <p:cNvPr id="12" name="Oval 11"/>
           <p:cNvSpPr/>
           <p:nvPr/>
         </p:nvSpPr>
         <p:spPr>
           <a:xfrm>
-            <a:off x="731520" y="3749040"/>
-            <a:ext cx="274320" cy="274320"/>
+            <a:off x="731520" y="3858768"/>
+            <a:ext cx="256032" cy="256032"/>
           </a:xfrm>
           <a:prstGeom prst="ellipse">
             <a:avLst/>
@@ -7645,7 +7571,7 @@
           <a:p>
             <a:pPr algn="ctr"/>
             <a:r>
-              <a:rPr sz="1000" b="1" i="0">
+              <a:rPr sz="900" b="1" i="0">
                 <a:solidFill>
                   <a:srgbClr val="FFFFFF"/>
                 </a:solidFill>
@@ -7658,14 +7584,14 @@
       </p:sp>
       <p:sp>
         <p:nvSpPr>
-          <p:cNvPr id="12" name="TextBox 11"/>
+          <p:cNvPr id="13" name="TextBox 12"/>
           <p:cNvSpPr txBox="1"/>
           <p:nvPr/>
         </p:nvSpPr>
         <p:spPr>
           <a:xfrm>
-            <a:off x="1143000" y="3749040"/>
-            <a:ext cx="4572000" cy="365760"/>
+            <a:off x="1097280" y="3858768"/>
+            <a:ext cx="4937759" cy="320040"/>
           </a:xfrm>
           <a:prstGeom prst="rect">
             <a:avLst/>
@@ -7678,16 +7604,9 @@
           </a:bodyPr>
           <a:lstStyle/>
           <a:p>
-            <a:pPr algn="l">
-              <a:spcBef>
-                <a:spcPts val="0"/>
-              </a:spcBef>
-              <a:spcAft>
-                <a:spcPts val="0"/>
-              </a:spcAft>
-            </a:pPr>
-            <a:r>
-              <a:rPr sz="1200" b="0" i="0">
+            <a:pPr algn="l"/>
+            <a:r>
+              <a:rPr sz="1100" b="0" i="0">
                 <a:solidFill>
                   <a:srgbClr val="475569"/>
                 </a:solidFill>
@@ -7700,14 +7619,14 @@
       </p:sp>
       <p:sp>
         <p:nvSpPr>
-          <p:cNvPr id="13" name="Oval 12"/>
+          <p:cNvPr id="14" name="Oval 13"/>
           <p:cNvSpPr/>
           <p:nvPr/>
         </p:nvSpPr>
         <p:spPr>
           <a:xfrm>
-            <a:off x="731520" y="4206240"/>
-            <a:ext cx="274320" cy="274320"/>
+            <a:off x="731520" y="4242816"/>
+            <a:ext cx="256032" cy="256032"/>
           </a:xfrm>
           <a:prstGeom prst="ellipse">
             <a:avLst/>
@@ -7739,7 +7658,7 @@
           <a:p>
             <a:pPr algn="ctr"/>
             <a:r>
-              <a:rPr sz="1000" b="1" i="0">
+              <a:rPr sz="900" b="1" i="0">
                 <a:solidFill>
                   <a:srgbClr val="FFFFFF"/>
                 </a:solidFill>
@@ -7752,14 +7671,14 @@
       </p:sp>
       <p:sp>
         <p:nvSpPr>
-          <p:cNvPr id="14" name="TextBox 13"/>
+          <p:cNvPr id="15" name="TextBox 14"/>
           <p:cNvSpPr txBox="1"/>
           <p:nvPr/>
         </p:nvSpPr>
         <p:spPr>
           <a:xfrm>
-            <a:off x="1143000" y="4206240"/>
-            <a:ext cx="4572000" cy="365760"/>
+            <a:off x="1097280" y="4242816"/>
+            <a:ext cx="4937759" cy="320040"/>
           </a:xfrm>
           <a:prstGeom prst="rect">
             <a:avLst/>
@@ -7772,16 +7691,9 @@
           </a:bodyPr>
           <a:lstStyle/>
           <a:p>
-            <a:pPr algn="l">
-              <a:spcBef>
-                <a:spcPts val="0"/>
-              </a:spcBef>
-              <a:spcAft>
-                <a:spcPts val="0"/>
-              </a:spcAft>
-            </a:pPr>
-            <a:r>
-              <a:rPr sz="1200" b="0" i="0">
+            <a:pPr algn="l"/>
+            <a:r>
+              <a:rPr sz="1100" b="0" i="0">
                 <a:solidFill>
                   <a:srgbClr val="475569"/>
                 </a:solidFill>
@@ -7794,14 +7706,14 @@
       </p:sp>
       <p:sp>
         <p:nvSpPr>
-          <p:cNvPr id="15" name="Oval 14"/>
+          <p:cNvPr id="16" name="Oval 15"/>
           <p:cNvSpPr/>
           <p:nvPr/>
         </p:nvSpPr>
         <p:spPr>
           <a:xfrm>
-            <a:off x="731520" y="4663440"/>
-            <a:ext cx="274320" cy="274320"/>
+            <a:off x="731520" y="4626864"/>
+            <a:ext cx="256032" cy="256032"/>
           </a:xfrm>
           <a:prstGeom prst="ellipse">
             <a:avLst/>
@@ -7833,7 +7745,7 @@
           <a:p>
             <a:pPr algn="ctr"/>
             <a:r>
-              <a:rPr sz="1000" b="1" i="0">
+              <a:rPr sz="900" b="1" i="0">
                 <a:solidFill>
                   <a:srgbClr val="FFFFFF"/>
                 </a:solidFill>
@@ -7846,14 +7758,14 @@
       </p:sp>
       <p:sp>
         <p:nvSpPr>
-          <p:cNvPr id="16" name="TextBox 15"/>
+          <p:cNvPr id="17" name="TextBox 16"/>
           <p:cNvSpPr txBox="1"/>
           <p:nvPr/>
         </p:nvSpPr>
         <p:spPr>
           <a:xfrm>
-            <a:off x="1143000" y="4663440"/>
-            <a:ext cx="4572000" cy="365760"/>
+            <a:off x="1097280" y="4626864"/>
+            <a:ext cx="4937759" cy="320040"/>
           </a:xfrm>
           <a:prstGeom prst="rect">
             <a:avLst/>
@@ -7866,16 +7778,9 @@
           </a:bodyPr>
           <a:lstStyle/>
           <a:p>
-            <a:pPr algn="l">
-              <a:spcBef>
-                <a:spcPts val="0"/>
-              </a:spcBef>
-              <a:spcAft>
-                <a:spcPts val="0"/>
-              </a:spcAft>
-            </a:pPr>
-            <a:r>
-              <a:rPr sz="1200" b="0" i="0">
+            <a:pPr algn="l"/>
+            <a:r>
+              <a:rPr sz="1100" b="0" i="0">
                 <a:solidFill>
                   <a:srgbClr val="475569"/>
                 </a:solidFill>
@@ -7888,14 +7793,14 @@
       </p:sp>
       <p:sp>
         <p:nvSpPr>
-          <p:cNvPr id="17" name="Rounded Rectangle 16"/>
+          <p:cNvPr id="18" name="Rounded Rectangle 17"/>
           <p:cNvSpPr/>
           <p:nvPr/>
         </p:nvSpPr>
         <p:spPr>
           <a:xfrm>
-            <a:off x="731520" y="5394960"/>
-            <a:ext cx="2926080" cy="365760"/>
+            <a:off x="731520" y="5212080"/>
+            <a:ext cx="3200400" cy="347472"/>
           </a:xfrm>
           <a:prstGeom prst="roundRect">
             <a:avLst>
@@ -7905,7 +7810,7 @@
           <a:solidFill>
             <a:srgbClr val="F1F5F9"/>
           </a:solidFill>
-          <a:ln w="12700">
+          <a:ln w="9525">
             <a:solidFill>
               <a:srgbClr val="CBD5E1"/>
             </a:solidFill>
@@ -7935,14 +7840,14 @@
       </p:sp>
       <p:sp>
         <p:nvSpPr>
-          <p:cNvPr id="18" name="TextBox 17"/>
+          <p:cNvPr id="19" name="TextBox 18"/>
           <p:cNvSpPr txBox="1"/>
           <p:nvPr/>
         </p:nvSpPr>
         <p:spPr>
           <a:xfrm>
-            <a:off x="868680" y="5394960"/>
-            <a:ext cx="2743200" cy="365760"/>
+            <a:off x="868680" y="5230368"/>
+            <a:ext cx="3017520" cy="320040"/>
           </a:xfrm>
           <a:prstGeom prst="rect">
             <a:avLst/>
@@ -7956,7 +7861,7 @@
           <a:lstStyle/>
           <a:p>
             <a:r>
-              <a:rPr sz="1200" b="0" i="0">
+              <a:rPr sz="1100" b="0" i="0">
                 <a:solidFill>
                   <a:srgbClr val="16A34A"/>
                 </a:solidFill>
@@ -7965,7 +7870,7 @@
               <a:t>●  </a:t>
             </a:r>
             <a:r>
-              <a:rPr sz="1200" b="0" i="0">
+              <a:rPr sz="1100" b="0" i="0">
                 <a:solidFill>
                   <a:srgbClr val="475569"/>
                 </a:solidFill>
@@ -7978,7 +7883,7 @@
       </p:sp>
       <p:sp>
         <p:nvSpPr>
-          <p:cNvPr id="19" name="Rounded Rectangle 18"/>
+          <p:cNvPr id="20" name="Rounded Rectangle 19"/>
           <p:cNvSpPr/>
           <p:nvPr/>
         </p:nvSpPr>
@@ -7989,7 +7894,7 @@
           </a:xfrm>
           <a:prstGeom prst="roundRect">
             <a:avLst>
-              <a:gd name="adj" fmla="val 1500"/>
+              <a:gd name="adj" fmla="val 0"/>
             </a:avLst>
           </a:prstGeom>
           <a:solidFill>
@@ -8025,14 +7930,14 @@
       </p:sp>
       <p:sp>
         <p:nvSpPr>
-          <p:cNvPr id="20" name="Rounded Rectangle 19"/>
+          <p:cNvPr id="21" name="Rounded Rectangle 20"/>
           <p:cNvSpPr/>
           <p:nvPr/>
         </p:nvSpPr>
         <p:spPr>
           <a:xfrm>
             <a:off x="6400800" y="640080"/>
-            <a:ext cx="5425135" cy="5669280"/>
+            <a:ext cx="5516575" cy="5486400"/>
           </a:xfrm>
           <a:prstGeom prst="roundRect">
             <a:avLst>
@@ -8042,7 +7947,7 @@
           <a:solidFill>
             <a:srgbClr val="FFFFFF"/>
           </a:solidFill>
-          <a:ln w="12700">
+          <a:ln w="9525">
             <a:solidFill>
               <a:srgbClr val="CBD5E1"/>
             </a:solidFill>
@@ -8072,14 +7977,14 @@
       </p:sp>
       <p:sp>
         <p:nvSpPr>
-          <p:cNvPr id="21" name="Rounded Rectangle 20"/>
+          <p:cNvPr id="22" name="Rounded Rectangle 21"/>
           <p:cNvSpPr/>
           <p:nvPr/>
         </p:nvSpPr>
         <p:spPr>
           <a:xfrm>
             <a:off x="6400800" y="640080"/>
-            <a:ext cx="5425135" cy="411480"/>
+            <a:ext cx="5516575" cy="365760"/>
           </a:xfrm>
           <a:prstGeom prst="roundRect">
             <a:avLst>
@@ -8089,7 +7994,7 @@
           <a:solidFill>
             <a:srgbClr val="F1F5F9"/>
           </a:solidFill>
-          <a:ln w="12700">
+          <a:ln w="9525">
             <a:solidFill>
               <a:srgbClr val="CBD5E1"/>
             </a:solidFill>
@@ -8119,14 +8024,14 @@
       </p:sp>
       <p:sp>
         <p:nvSpPr>
-          <p:cNvPr id="22" name="Oval 21"/>
+          <p:cNvPr id="23" name="Oval 22"/>
           <p:cNvSpPr/>
           <p:nvPr/>
         </p:nvSpPr>
         <p:spPr>
           <a:xfrm>
-            <a:off x="6583680" y="758952"/>
-            <a:ext cx="137160" cy="137160"/>
+            <a:off x="6565392" y="749808"/>
+            <a:ext cx="118872" cy="118872"/>
           </a:xfrm>
           <a:prstGeom prst="ellipse">
             <a:avLst/>
@@ -8162,14 +8067,14 @@
       </p:sp>
       <p:sp>
         <p:nvSpPr>
-          <p:cNvPr id="23" name="Oval 22"/>
+          <p:cNvPr id="24" name="Oval 23"/>
           <p:cNvSpPr/>
           <p:nvPr/>
         </p:nvSpPr>
         <p:spPr>
           <a:xfrm>
-            <a:off x="6812280" y="758952"/>
-            <a:ext cx="137160" cy="137160"/>
+            <a:off x="6766559" y="749808"/>
+            <a:ext cx="118872" cy="118872"/>
           </a:xfrm>
           <a:prstGeom prst="ellipse">
             <a:avLst/>
@@ -8205,14 +8110,14 @@
       </p:sp>
       <p:sp>
         <p:nvSpPr>
-          <p:cNvPr id="24" name="Oval 23"/>
+          <p:cNvPr id="25" name="Oval 24"/>
           <p:cNvSpPr/>
           <p:nvPr/>
         </p:nvSpPr>
         <p:spPr>
           <a:xfrm>
-            <a:off x="7040880" y="758952"/>
-            <a:ext cx="137160" cy="137160"/>
+            <a:off x="6967728" y="749808"/>
+            <a:ext cx="118872" cy="118872"/>
           </a:xfrm>
           <a:prstGeom prst="ellipse">
             <a:avLst/>
@@ -8248,14 +8153,14 @@
       </p:sp>
       <p:sp>
         <p:nvSpPr>
-          <p:cNvPr id="25" name="Rounded Rectangle 24"/>
+          <p:cNvPr id="26" name="Rounded Rectangle 25"/>
           <p:cNvSpPr/>
           <p:nvPr/>
         </p:nvSpPr>
         <p:spPr>
           <a:xfrm>
-            <a:off x="7498080" y="749808"/>
-            <a:ext cx="2926080" cy="201168"/>
+            <a:off x="7315200" y="731520"/>
+            <a:ext cx="2560320" cy="182880"/>
           </a:xfrm>
           <a:prstGeom prst="roundRect">
             <a:avLst>
@@ -8265,7 +8170,7 @@
           <a:solidFill>
             <a:srgbClr val="FFFFFF"/>
           </a:solidFill>
-          <a:ln w="12700">
+          <a:ln w="6350">
             <a:solidFill>
               <a:srgbClr val="CBD5E1"/>
             </a:solidFill>
@@ -8291,7 +8196,7 @@
           <a:p>
             <a:pPr algn="ctr"/>
             <a:r>
-              <a:rPr sz="800" b="0" i="0">
+              <a:rPr sz="700" b="0" i="0">
                 <a:solidFill>
                   <a:srgbClr val="475569"/>
                 </a:solidFill>
@@ -8304,14 +8209,14 @@
       </p:sp>
       <p:sp>
         <p:nvSpPr>
-          <p:cNvPr id="26" name="Rounded Rectangle 25"/>
+          <p:cNvPr id="27" name="Rounded Rectangle 26"/>
           <p:cNvSpPr/>
           <p:nvPr/>
         </p:nvSpPr>
         <p:spPr>
           <a:xfrm>
-            <a:off x="6400800" y="1051560"/>
-            <a:ext cx="1463040" cy="5257800"/>
+            <a:off x="6400800" y="1005840"/>
+            <a:ext cx="1371600" cy="5120640"/>
           </a:xfrm>
           <a:prstGeom prst="roundRect">
             <a:avLst>
@@ -8321,7 +8226,7 @@
           <a:solidFill>
             <a:srgbClr val="F1F5F9"/>
           </a:solidFill>
-          <a:ln w="12700">
+          <a:ln w="9525">
             <a:solidFill>
               <a:srgbClr val="CBD5E1"/>
             </a:solidFill>
@@ -8351,14 +8256,14 @@
       </p:sp>
       <p:sp>
         <p:nvSpPr>
-          <p:cNvPr id="27" name="TextBox 26"/>
+          <p:cNvPr id="28" name="TextBox 27"/>
           <p:cNvSpPr txBox="1"/>
           <p:nvPr/>
         </p:nvSpPr>
         <p:spPr>
           <a:xfrm>
-            <a:off x="6510528" y="1097280"/>
-            <a:ext cx="1188720" cy="228600"/>
+            <a:off x="6492240" y="1051560"/>
+            <a:ext cx="1097280" cy="182880"/>
           </a:xfrm>
           <a:prstGeom prst="rect">
             <a:avLst/>
@@ -8370,18 +8275,57 @@
             <a:spAutoFit/>
           </a:bodyPr>
           <a:lstStyle/>
-          <a:p>
-            <a:r>
-              <a:rPr sz="900" b="1" i="0">
-                <a:solidFill>
-                  <a:srgbClr val="C8102E"/>
-                </a:solidFill>
-                <a:latin typeface="Segoe UI"/>
-              </a:rPr>
-              <a:t>SIX </a:t>
-            </a:r>
-            <a:r>
-              <a:rPr sz="900" b="0" i="0">
+          <a:p/>
+        </p:txBody>
+      </p:sp>
+      <p:pic>
+        <p:nvPicPr>
+          <p:cNvPr id="29" name="Picture 28" descr="six_logo_small.png"/>
+          <p:cNvPicPr>
+            <a:picLocks noChangeAspect="1"/>
+          </p:cNvPicPr>
+          <p:nvPr/>
+        </p:nvPicPr>
+        <p:blipFill>
+          <a:blip r:embed="rId2"/>
+          <a:stretch>
+            <a:fillRect/>
+          </a:stretch>
+        </p:blipFill>
+        <p:spPr>
+          <a:xfrm>
+            <a:off x="6492240" y="1069848"/>
+            <a:ext cx="320040" cy="155448"/>
+          </a:xfrm>
+          <a:prstGeom prst="rect">
+            <a:avLst/>
+          </a:prstGeom>
+        </p:spPr>
+      </p:pic>
+      <p:sp>
+        <p:nvSpPr>
+          <p:cNvPr id="30" name="TextBox 29"/>
+          <p:cNvSpPr txBox="1"/>
+          <p:nvPr/>
+        </p:nvSpPr>
+        <p:spPr>
+          <a:xfrm>
+            <a:off x="6812280" y="1051560"/>
+            <a:ext cx="274320" cy="182880"/>
+          </a:xfrm>
+          <a:prstGeom prst="rect">
+            <a:avLst/>
+          </a:prstGeom>
+          <a:noFill/>
+        </p:spPr>
+        <p:txBody>
+          <a:bodyPr wrap="square">
+            <a:spAutoFit/>
+          </a:bodyPr>
+          <a:lstStyle/>
+          <a:p>
+            <a:r>
+              <a:rPr sz="700" b="0" i="0">
                 <a:solidFill>
                   <a:srgbClr val="475569"/>
                 </a:solidFill>
@@ -8394,18 +8338,18 @@
       </p:sp>
       <p:sp>
         <p:nvSpPr>
-          <p:cNvPr id="28" name="Rounded Rectangle 27"/>
+          <p:cNvPr id="31" name="Rounded Rectangle 30"/>
           <p:cNvSpPr/>
           <p:nvPr/>
         </p:nvSpPr>
         <p:spPr>
           <a:xfrm>
-            <a:off x="6446520" y="1417320"/>
-            <a:ext cx="1371600" cy="384048"/>
+            <a:off x="6437376" y="1335024"/>
+            <a:ext cx="1298448" cy="365760"/>
           </a:xfrm>
           <a:prstGeom prst="roundRect">
             <a:avLst>
-              <a:gd name="adj" fmla="val 1500"/>
+              <a:gd name="adj" fmla="val 1000"/>
             </a:avLst>
           </a:prstGeom>
           <a:solidFill>
@@ -8441,14 +8385,14 @@
       </p:sp>
       <p:sp>
         <p:nvSpPr>
-          <p:cNvPr id="29" name="Oval 28"/>
+          <p:cNvPr id="32" name="Oval 31"/>
           <p:cNvSpPr/>
           <p:nvPr/>
         </p:nvSpPr>
         <p:spPr>
           <a:xfrm>
-            <a:off x="6510528" y="1463040"/>
-            <a:ext cx="237744" cy="237744"/>
+            <a:off x="6492240" y="1371600"/>
+            <a:ext cx="219456" cy="219456"/>
           </a:xfrm>
           <a:prstGeom prst="ellipse">
             <a:avLst/>
@@ -8480,7 +8424,7 @@
           <a:p>
             <a:pPr algn="ctr"/>
             <a:r>
-              <a:rPr sz="700" b="1" i="0">
+              <a:rPr sz="600" b="1" i="0">
                 <a:solidFill>
                   <a:srgbClr val="FFFFFF"/>
                 </a:solidFill>
@@ -8493,14 +8437,14 @@
       </p:sp>
       <p:sp>
         <p:nvSpPr>
-          <p:cNvPr id="30" name="TextBox 29"/>
+          <p:cNvPr id="33" name="TextBox 32"/>
           <p:cNvSpPr txBox="1"/>
           <p:nvPr/>
         </p:nvSpPr>
         <p:spPr>
           <a:xfrm>
-            <a:off x="6812280" y="1435608"/>
-            <a:ext cx="1005840" cy="320040"/>
+            <a:off x="6766560" y="1353312"/>
+            <a:ext cx="914400" cy="274320"/>
           </a:xfrm>
           <a:prstGeom prst="rect">
             <a:avLst/>
@@ -8513,16 +8457,9 @@
           </a:bodyPr>
           <a:lstStyle/>
           <a:p>
-            <a:pPr algn="l">
-              <a:spcBef>
-                <a:spcPts val="0"/>
-              </a:spcBef>
-              <a:spcAft>
-                <a:spcPts val="0"/>
-              </a:spcAft>
-            </a:pPr>
-            <a:r>
-              <a:rPr sz="800" b="1" i="0">
+            <a:pPr algn="l"/>
+            <a:r>
+              <a:rPr sz="700" b="1" i="0">
                 <a:solidFill>
                   <a:srgbClr val="0F172A"/>
                 </a:solidFill>
@@ -8532,16 +8469,9 @@
             </a:r>
           </a:p>
           <a:p>
-            <a:pPr algn="l">
-              <a:spcBef>
-                <a:spcPts val="0"/>
-              </a:spcBef>
-              <a:spcAft>
-                <a:spcPts val="0"/>
-              </a:spcAft>
-            </a:pPr>
-            <a:r>
-              <a:rPr sz="700" b="0" i="0">
+            <a:pPr algn="l"/>
+            <a:r>
+              <a:rPr sz="600" b="0" i="0">
                 <a:solidFill>
                   <a:srgbClr val="475569"/>
                 </a:solidFill>
@@ -8554,14 +8484,14 @@
       </p:sp>
       <p:sp>
         <p:nvSpPr>
-          <p:cNvPr id="31" name="Oval 30"/>
+          <p:cNvPr id="34" name="Oval 33"/>
           <p:cNvSpPr/>
           <p:nvPr/>
         </p:nvSpPr>
         <p:spPr>
           <a:xfrm>
-            <a:off x="6510528" y="1920240"/>
-            <a:ext cx="237744" cy="237744"/>
+            <a:off x="6492240" y="1783080"/>
+            <a:ext cx="219456" cy="219456"/>
           </a:xfrm>
           <a:prstGeom prst="ellipse">
             <a:avLst/>
@@ -8593,7 +8523,7 @@
           <a:p>
             <a:pPr algn="ctr"/>
             <a:r>
-              <a:rPr sz="700" b="1" i="0">
+              <a:rPr sz="600" b="1" i="0">
                 <a:solidFill>
                   <a:srgbClr val="FFFFFF"/>
                 </a:solidFill>
@@ -8606,14 +8536,14 @@
       </p:sp>
       <p:sp>
         <p:nvSpPr>
-          <p:cNvPr id="32" name="TextBox 31"/>
+          <p:cNvPr id="35" name="TextBox 34"/>
           <p:cNvSpPr txBox="1"/>
           <p:nvPr/>
         </p:nvSpPr>
         <p:spPr>
           <a:xfrm>
-            <a:off x="6812280" y="1892808"/>
-            <a:ext cx="1005840" cy="320040"/>
+            <a:off x="6766560" y="1764792"/>
+            <a:ext cx="914400" cy="274320"/>
           </a:xfrm>
           <a:prstGeom prst="rect">
             <a:avLst/>
@@ -8626,16 +8556,9 @@
           </a:bodyPr>
           <a:lstStyle/>
           <a:p>
-            <a:pPr algn="l">
-              <a:spcBef>
-                <a:spcPts val="0"/>
-              </a:spcBef>
-              <a:spcAft>
-                <a:spcPts val="0"/>
-              </a:spcAft>
-            </a:pPr>
-            <a:r>
-              <a:rPr sz="800" b="1" i="0">
+            <a:pPr algn="l"/>
+            <a:r>
+              <a:rPr sz="700" b="1" i="0">
                 <a:solidFill>
                   <a:srgbClr val="0F172A"/>
                 </a:solidFill>
@@ -8645,16 +8568,9 @@
             </a:r>
           </a:p>
           <a:p>
-            <a:pPr algn="l">
-              <a:spcBef>
-                <a:spcPts val="0"/>
-              </a:spcBef>
-              <a:spcAft>
-                <a:spcPts val="0"/>
-              </a:spcAft>
-            </a:pPr>
-            <a:r>
-              <a:rPr sz="700" b="0" i="0">
+            <a:pPr algn="l"/>
+            <a:r>
+              <a:rPr sz="600" b="0" i="0">
                 <a:solidFill>
                   <a:srgbClr val="475569"/>
                 </a:solidFill>
@@ -8667,14 +8583,14 @@
       </p:sp>
       <p:sp>
         <p:nvSpPr>
-          <p:cNvPr id="33" name="Oval 32"/>
+          <p:cNvPr id="36" name="Oval 35"/>
           <p:cNvSpPr/>
           <p:nvPr/>
         </p:nvSpPr>
         <p:spPr>
           <a:xfrm>
-            <a:off x="6510528" y="2377440"/>
-            <a:ext cx="237744" cy="237744"/>
+            <a:off x="6492240" y="2194560"/>
+            <a:ext cx="219456" cy="219456"/>
           </a:xfrm>
           <a:prstGeom prst="ellipse">
             <a:avLst/>
@@ -8706,7 +8622,7 @@
           <a:p>
             <a:pPr algn="ctr"/>
             <a:r>
-              <a:rPr sz="700" b="1" i="0">
+              <a:rPr sz="600" b="1" i="0">
                 <a:solidFill>
                   <a:srgbClr val="FFFFFF"/>
                 </a:solidFill>
@@ -8719,14 +8635,14 @@
       </p:sp>
       <p:sp>
         <p:nvSpPr>
-          <p:cNvPr id="34" name="TextBox 33"/>
+          <p:cNvPr id="37" name="TextBox 36"/>
           <p:cNvSpPr txBox="1"/>
           <p:nvPr/>
         </p:nvSpPr>
         <p:spPr>
           <a:xfrm>
-            <a:off x="6812280" y="2350008"/>
-            <a:ext cx="1005840" cy="320040"/>
+            <a:off x="6766560" y="2176272"/>
+            <a:ext cx="914400" cy="274320"/>
           </a:xfrm>
           <a:prstGeom prst="rect">
             <a:avLst/>
@@ -8739,16 +8655,9 @@
           </a:bodyPr>
           <a:lstStyle/>
           <a:p>
-            <a:pPr algn="l">
-              <a:spcBef>
-                <a:spcPts val="0"/>
-              </a:spcBef>
-              <a:spcAft>
-                <a:spcPts val="0"/>
-              </a:spcAft>
-            </a:pPr>
-            <a:r>
-              <a:rPr sz="800" b="1" i="0">
+            <a:pPr algn="l"/>
+            <a:r>
+              <a:rPr sz="700" b="1" i="0">
                 <a:solidFill>
                   <a:srgbClr val="0F172A"/>
                 </a:solidFill>
@@ -8758,16 +8667,9 @@
             </a:r>
           </a:p>
           <a:p>
-            <a:pPr algn="l">
-              <a:spcBef>
-                <a:spcPts val="0"/>
-              </a:spcBef>
-              <a:spcAft>
-                <a:spcPts val="0"/>
-              </a:spcAft>
-            </a:pPr>
-            <a:r>
-              <a:rPr sz="700" b="0" i="0">
+            <a:pPr algn="l"/>
+            <a:r>
+              <a:rPr sz="600" b="0" i="0">
                 <a:solidFill>
                   <a:srgbClr val="475569"/>
                 </a:solidFill>
@@ -8780,14 +8682,14 @@
       </p:sp>
       <p:sp>
         <p:nvSpPr>
-          <p:cNvPr id="35" name="Oval 34"/>
+          <p:cNvPr id="38" name="Oval 37"/>
           <p:cNvSpPr/>
           <p:nvPr/>
         </p:nvSpPr>
         <p:spPr>
           <a:xfrm>
-            <a:off x="6510528" y="2834640"/>
-            <a:ext cx="237744" cy="237744"/>
+            <a:off x="6492240" y="2606040"/>
+            <a:ext cx="219456" cy="219456"/>
           </a:xfrm>
           <a:prstGeom prst="ellipse">
             <a:avLst/>
@@ -8819,7 +8721,7 @@
           <a:p>
             <a:pPr algn="ctr"/>
             <a:r>
-              <a:rPr sz="700" b="1" i="0">
+              <a:rPr sz="600" b="1" i="0">
                 <a:solidFill>
                   <a:srgbClr val="FFFFFF"/>
                 </a:solidFill>
@@ -8832,14 +8734,14 @@
       </p:sp>
       <p:sp>
         <p:nvSpPr>
-          <p:cNvPr id="36" name="TextBox 35"/>
+          <p:cNvPr id="39" name="TextBox 38"/>
           <p:cNvSpPr txBox="1"/>
           <p:nvPr/>
         </p:nvSpPr>
         <p:spPr>
           <a:xfrm>
-            <a:off x="6812280" y="2807208"/>
-            <a:ext cx="1005840" cy="320040"/>
+            <a:off x="6766560" y="2587752"/>
+            <a:ext cx="914400" cy="274320"/>
           </a:xfrm>
           <a:prstGeom prst="rect">
             <a:avLst/>
@@ -8852,16 +8754,9 @@
           </a:bodyPr>
           <a:lstStyle/>
           <a:p>
-            <a:pPr algn="l">
-              <a:spcBef>
-                <a:spcPts val="0"/>
-              </a:spcBef>
-              <a:spcAft>
-                <a:spcPts val="0"/>
-              </a:spcAft>
-            </a:pPr>
-            <a:r>
-              <a:rPr sz="800" b="1" i="0">
+            <a:pPr algn="l"/>
+            <a:r>
+              <a:rPr sz="700" b="1" i="0">
                 <a:solidFill>
                   <a:srgbClr val="0F172A"/>
                 </a:solidFill>
@@ -8871,16 +8766,9 @@
             </a:r>
           </a:p>
           <a:p>
-            <a:pPr algn="l">
-              <a:spcBef>
-                <a:spcPts val="0"/>
-              </a:spcBef>
-              <a:spcAft>
-                <a:spcPts val="0"/>
-              </a:spcAft>
-            </a:pPr>
-            <a:r>
-              <a:rPr sz="700" b="0" i="0">
+            <a:pPr algn="l"/>
+            <a:r>
+              <a:rPr sz="600" b="0" i="0">
                 <a:solidFill>
                   <a:srgbClr val="475569"/>
                 </a:solidFill>
@@ -8893,14 +8781,14 @@
       </p:sp>
       <p:sp>
         <p:nvSpPr>
-          <p:cNvPr id="37" name="Rounded Rectangle 36"/>
+          <p:cNvPr id="40" name="Rounded Rectangle 39"/>
           <p:cNvSpPr/>
           <p:nvPr/>
         </p:nvSpPr>
         <p:spPr>
           <a:xfrm>
-            <a:off x="8092440" y="1143000"/>
-            <a:ext cx="3596335" cy="1097280"/>
+            <a:off x="7955279" y="1097280"/>
+            <a:ext cx="3870655" cy="914400"/>
           </a:xfrm>
           <a:prstGeom prst="roundRect">
             <a:avLst>
@@ -8910,7 +8798,7 @@
           <a:solidFill>
             <a:srgbClr val="FEF7F8"/>
           </a:solidFill>
-          <a:ln w="12700">
+          <a:ln w="9525">
             <a:solidFill>
               <a:srgbClr val="F0D0D5"/>
             </a:solidFill>
@@ -8940,14 +8828,14 @@
       </p:sp>
       <p:sp>
         <p:nvSpPr>
-          <p:cNvPr id="38" name="TextBox 37"/>
+          <p:cNvPr id="41" name="TextBox 40"/>
           <p:cNvSpPr txBox="1"/>
           <p:nvPr/>
         </p:nvSpPr>
         <p:spPr>
           <a:xfrm>
-            <a:off x="8229600" y="1188720"/>
-            <a:ext cx="3322015" cy="1005840"/>
+            <a:off x="8046719" y="1143000"/>
+            <a:ext cx="3687775" cy="822960"/>
           </a:xfrm>
           <a:prstGeom prst="rect">
             <a:avLst/>
@@ -8961,7 +8849,7 @@
           <a:lstStyle/>
           <a:p>
             <a:r>
-              <a:rPr sz="800" b="1" i="0">
+              <a:rPr sz="700" b="1" i="0">
                 <a:solidFill>
                   <a:srgbClr val="C8102E"/>
                 </a:solidFill>
@@ -8970,27 +8858,27 @@
               <a:t>Advisory Draft — </a:t>
             </a:r>
             <a:r>
-              <a:rPr sz="800" b="0" i="0">
+              <a:rPr sz="700" b="0" i="0">
                 <a:solidFill>
                   <a:srgbClr val="475569"/>
                 </a:solidFill>
                 <a:latin typeface="Segoe UI"/>
               </a:rPr>
-              <a:t>Dear Hubertus, the announced shutdown of AstraZeneca's chronic-illness research division directly conflicts with your foundation's mission. We recommend a swap into Roche Holding.</a:t>
-            </a:r>
-          </a:p>
-        </p:txBody>
-      </p:sp>
-      <p:sp>
-        <p:nvSpPr>
-          <p:cNvPr id="39" name="Rounded Rectangle 38"/>
+              <a:t>Dear Hubertus, the announced shutdown of AstraZeneca's chronic-illness research division directly conflicts with your foundation's mission. We recommend reviewing your exposure and suggest a swap into Roche Holding, CIO BUY-rated and aligned with your values.</a:t>
+            </a:r>
+          </a:p>
+        </p:txBody>
+      </p:sp>
+      <p:sp>
+        <p:nvSpPr>
+          <p:cNvPr id="42" name="Rounded Rectangle 41"/>
           <p:cNvSpPr/>
           <p:nvPr/>
         </p:nvSpPr>
         <p:spPr>
           <a:xfrm>
-            <a:off x="8092440" y="2331720"/>
-            <a:ext cx="3596335" cy="777240"/>
+            <a:off x="7955279" y="2103120"/>
+            <a:ext cx="3870655" cy="640080"/>
           </a:xfrm>
           <a:prstGeom prst="roundRect">
             <a:avLst>
@@ -9000,7 +8888,7 @@
           <a:solidFill>
             <a:srgbClr val="F1F5F9"/>
           </a:solidFill>
-          <a:ln w="12700">
+          <a:ln w="6350">
             <a:solidFill>
               <a:srgbClr val="CBD5E1"/>
             </a:solidFill>
@@ -9030,14 +8918,14 @@
       </p:sp>
       <p:sp>
         <p:nvSpPr>
-          <p:cNvPr id="40" name="TextBox 39"/>
+          <p:cNvPr id="43" name="TextBox 42"/>
           <p:cNvSpPr txBox="1"/>
           <p:nvPr/>
         </p:nvSpPr>
         <p:spPr>
           <a:xfrm>
-            <a:off x="8229600" y="2359152"/>
-            <a:ext cx="1828800" cy="228600"/>
+            <a:off x="8046719" y="2121408"/>
+            <a:ext cx="1371600" cy="182880"/>
           </a:xfrm>
           <a:prstGeom prst="rect">
             <a:avLst/>
@@ -9050,16 +8938,9 @@
           </a:bodyPr>
           <a:lstStyle/>
           <a:p>
-            <a:pPr algn="l">
-              <a:spcBef>
-                <a:spcPts val="0"/>
-              </a:spcBef>
-              <a:spcAft>
-                <a:spcPts val="0"/>
-              </a:spcAft>
-            </a:pPr>
-            <a:r>
-              <a:rPr sz="800" b="1" i="0">
+            <a:pPr algn="l"/>
+            <a:r>
+              <a:rPr sz="700" b="1" i="0">
                 <a:solidFill>
                   <a:srgbClr val="C8102E"/>
                 </a:solidFill>
@@ -9072,14 +8953,14 @@
       </p:sp>
       <p:sp>
         <p:nvSpPr>
-          <p:cNvPr id="41" name="Rounded Rectangle 40"/>
+          <p:cNvPr id="44" name="Rounded Rectangle 43"/>
           <p:cNvSpPr/>
           <p:nvPr/>
         </p:nvSpPr>
         <p:spPr>
           <a:xfrm>
-            <a:off x="8229600" y="2651760"/>
-            <a:ext cx="1188720" cy="256032"/>
+            <a:off x="8046719" y="2377440"/>
+            <a:ext cx="950976" cy="201168"/>
           </a:xfrm>
           <a:prstGeom prst="roundRect">
             <a:avLst>
@@ -9110,12 +8991,12 @@
           </a:fontRef>
         </p:style>
         <p:txBody>
-          <a:bodyPr rtlCol="0" anchor="ctr" tIns="25400" bIns="25400" lIns="101600" rIns="101600" wrap="none"/>
-          <a:lstStyle/>
-          <a:p>
-            <a:pPr algn="ctr"/>
-            <a:r>
-              <a:rPr sz="800" b="0" i="0">
+          <a:bodyPr rtlCol="0" anchor="ctr" tIns="12700" bIns="12700" lIns="76200" rIns="76200" wrap="none"/>
+          <a:lstStyle/>
+          <a:p>
+            <a:pPr algn="ctr"/>
+            <a:r>
+              <a:rPr sz="700" b="0" i="0">
                 <a:solidFill>
                   <a:srgbClr val="2E6FD6"/>
                 </a:solidFill>
@@ -9128,14 +9009,14 @@
       </p:sp>
       <p:sp>
         <p:nvSpPr>
-          <p:cNvPr id="42" name="Rounded Rectangle 41"/>
+          <p:cNvPr id="45" name="Rounded Rectangle 44"/>
           <p:cNvSpPr/>
           <p:nvPr/>
         </p:nvSpPr>
         <p:spPr>
           <a:xfrm>
-            <a:off x="9509760" y="2651760"/>
-            <a:ext cx="1188720" cy="256032"/>
+            <a:off x="9070847" y="2377440"/>
+            <a:ext cx="950976" cy="201168"/>
           </a:xfrm>
           <a:prstGeom prst="roundRect">
             <a:avLst>
@@ -9166,12 +9047,12 @@
           </a:fontRef>
         </p:style>
         <p:txBody>
-          <a:bodyPr rtlCol="0" anchor="ctr" tIns="25400" bIns="25400" lIns="101600" rIns="101600" wrap="none"/>
-          <a:lstStyle/>
-          <a:p>
-            <a:pPr algn="ctr"/>
-            <a:r>
-              <a:rPr sz="800" b="0" i="0">
+          <a:bodyPr rtlCol="0" anchor="ctr" tIns="12700" bIns="12700" lIns="76200" rIns="76200" wrap="none"/>
+          <a:lstStyle/>
+          <a:p>
+            <a:pPr algn="ctr"/>
+            <a:r>
+              <a:rPr sz="700" b="0" i="0">
                 <a:solidFill>
                   <a:srgbClr val="2E6FD6"/>
                 </a:solidFill>
@@ -9184,14 +9065,14 @@
       </p:sp>
       <p:sp>
         <p:nvSpPr>
-          <p:cNvPr id="43" name="Rounded Rectangle 42"/>
+          <p:cNvPr id="46" name="Rounded Rectangle 45"/>
           <p:cNvSpPr/>
           <p:nvPr/>
         </p:nvSpPr>
         <p:spPr>
           <a:xfrm>
-            <a:off x="10789920" y="2651760"/>
-            <a:ext cx="1005840" cy="256032"/>
+            <a:off x="10094976" y="2377440"/>
+            <a:ext cx="1463040" cy="201168"/>
           </a:xfrm>
           <a:prstGeom prst="roundRect">
             <a:avLst>
@@ -9222,32 +9103,32 @@
           </a:fontRef>
         </p:style>
         <p:txBody>
-          <a:bodyPr rtlCol="0" anchor="ctr" tIns="25400" bIns="25400" lIns="101600" rIns="101600" wrap="none"/>
-          <a:lstStyle/>
-          <a:p>
-            <a:pPr algn="ctr"/>
-            <a:r>
-              <a:rPr sz="800" b="0" i="0">
+          <a:bodyPr rtlCol="0" anchor="ctr" tIns="12700" bIns="12700" lIns="76200" rIns="76200" wrap="none"/>
+          <a:lstStyle/>
+          <a:p>
+            <a:pPr algn="ctr"/>
+            <a:r>
+              <a:rPr sz="700" b="0" i="0">
                 <a:solidFill>
                   <a:srgbClr val="C8102E"/>
                 </a:solidFill>
                 <a:latin typeface="Segoe UI"/>
               </a:rPr>
-              <a:t>pharma risk</a:t>
-            </a:r>
-          </a:p>
-        </p:txBody>
-      </p:sp>
-      <p:sp>
-        <p:nvSpPr>
-          <p:cNvPr id="44" name="Rounded Rectangle 43"/>
+              <a:t>pharma exposure risk</a:t>
+            </a:r>
+          </a:p>
+        </p:txBody>
+      </p:sp>
+      <p:sp>
+        <p:nvSpPr>
+          <p:cNvPr id="47" name="Rounded Rectangle 46"/>
           <p:cNvSpPr/>
           <p:nvPr/>
         </p:nvSpPr>
         <p:spPr>
           <a:xfrm>
-            <a:off x="11887200" y="2651760"/>
-            <a:ext cx="1554480" cy="256032"/>
+            <a:off x="11631167" y="2377440"/>
+            <a:ext cx="1243584" cy="201168"/>
           </a:xfrm>
           <a:prstGeom prst="roundRect">
             <a:avLst>
@@ -9278,12 +9159,12 @@
           </a:fontRef>
         </p:style>
         <p:txBody>
-          <a:bodyPr rtlCol="0" anchor="ctr" tIns="25400" bIns="25400" lIns="101600" rIns="101600" wrap="none"/>
-          <a:lstStyle/>
-          <a:p>
-            <a:pPr algn="ctr"/>
-            <a:r>
-              <a:rPr sz="800" b="0" i="0">
+          <a:bodyPr rtlCol="0" anchor="ctr" tIns="12700" bIns="12700" lIns="76200" rIns="76200" wrap="none"/>
+          <a:lstStyle/>
+          <a:p>
+            <a:pPr algn="ctr"/>
+            <a:r>
+              <a:rPr sz="700" b="0" i="0">
                 <a:solidFill>
                   <a:srgbClr val="7C3AED"/>
                 </a:solidFill>
@@ -9296,14 +9177,14 @@
       </p:sp>
       <p:sp>
         <p:nvSpPr>
-          <p:cNvPr id="45" name="Rounded Rectangle 44"/>
+          <p:cNvPr id="48" name="Rounded Rectangle 47"/>
           <p:cNvSpPr/>
           <p:nvPr/>
         </p:nvSpPr>
         <p:spPr>
           <a:xfrm>
-            <a:off x="8092440" y="3200400"/>
-            <a:ext cx="3596335" cy="457200"/>
+            <a:off x="7955279" y="2834640"/>
+            <a:ext cx="3870655" cy="320040"/>
           </a:xfrm>
           <a:prstGeom prst="roundRect">
             <a:avLst>
@@ -9313,7 +9194,7 @@
           <a:solidFill>
             <a:srgbClr val="FEF7F8"/>
           </a:solidFill>
-          <a:ln w="12700">
+          <a:ln w="6350">
             <a:solidFill>
               <a:srgbClr val="F0D0D5"/>
             </a:solidFill>
@@ -9343,14 +9224,14 @@
       </p:sp>
       <p:sp>
         <p:nvSpPr>
-          <p:cNvPr id="46" name="TextBox 45"/>
+          <p:cNvPr id="49" name="TextBox 48"/>
           <p:cNvSpPr txBox="1"/>
           <p:nvPr/>
         </p:nvSpPr>
         <p:spPr>
           <a:xfrm>
-            <a:off x="8229600" y="3218688"/>
-            <a:ext cx="3322015" cy="411480"/>
+            <a:off x="8046719" y="2852928"/>
+            <a:ext cx="3687775" cy="274320"/>
           </a:xfrm>
           <a:prstGeom prst="rect">
             <a:avLst/>
@@ -9363,16 +9244,9 @@
           </a:bodyPr>
           <a:lstStyle/>
           <a:p>
-            <a:pPr algn="l">
-              <a:spcBef>
-                <a:spcPts val="0"/>
-              </a:spcBef>
-              <a:spcAft>
-                <a:spcPts val="0"/>
-              </a:spcAft>
-            </a:pPr>
-            <a:r>
-              <a:rPr sz="800" b="0" i="0">
+            <a:pPr algn="l"/>
+            <a:r>
+              <a:rPr sz="700" b="0" i="0">
                 <a:solidFill>
                   <a:srgbClr val="9B0C23"/>
                 </a:solidFill>
@@ -9417,8 +9291,8 @@
         </p:nvSpPr>
         <p:spPr>
           <a:xfrm>
-            <a:off x="0" y="502920"/>
-            <a:ext cx="12191695" cy="12700"/>
+            <a:off x="0" y="475488"/>
+            <a:ext cx="12191695" cy="9525"/>
           </a:xfrm>
           <a:prstGeom prst="rect">
             <a:avLst/>
@@ -9452,87 +9326,9 @@
           </a:p>
         </p:txBody>
       </p:sp>
-      <p:sp>
-        <p:nvSpPr>
-          <p:cNvPr id="3" name="TextBox 2"/>
-          <p:cNvSpPr txBox="1"/>
-          <p:nvPr/>
-        </p:nvSpPr>
-        <p:spPr>
-          <a:xfrm>
-            <a:off x="548640" y="164592"/>
-            <a:ext cx="1371600" cy="320040"/>
-          </a:xfrm>
-          <a:prstGeom prst="rect">
-            <a:avLst/>
-          </a:prstGeom>
-          <a:noFill/>
-        </p:spPr>
-        <p:txBody>
-          <a:bodyPr wrap="square">
-            <a:spAutoFit/>
-          </a:bodyPr>
-          <a:lstStyle/>
-          <a:p>
-            <a:r>
-              <a:rPr sz="1600" b="1" i="0">
-                <a:solidFill>
-                  <a:srgbClr val="C8102E"/>
-                </a:solidFill>
-                <a:latin typeface="Segoe UI"/>
-              </a:rPr>
-              <a:t>SIX</a:t>
-            </a:r>
-            <a:r>
-              <a:rPr sz="1600" b="0" i="0">
-                <a:solidFill>
-                  <a:srgbClr val="475569"/>
-                </a:solidFill>
-                <a:latin typeface="Segoe UI"/>
-              </a:rPr>
-              <a:t> AI</a:t>
-            </a:r>
-          </a:p>
-        </p:txBody>
-      </p:sp>
-      <p:sp>
-        <p:nvSpPr>
-          <p:cNvPr id="4" name="TextBox 3"/>
-          <p:cNvSpPr txBox="1"/>
-          <p:nvPr/>
-        </p:nvSpPr>
-        <p:spPr>
-          <a:xfrm>
-            <a:off x="3657600" y="182880"/>
-            <a:ext cx="4876495" cy="274320"/>
-          </a:xfrm>
-          <a:prstGeom prst="rect">
-            <a:avLst/>
-          </a:prstGeom>
-          <a:noFill/>
-        </p:spPr>
-        <p:txBody>
-          <a:bodyPr wrap="square">
-            <a:spAutoFit/>
-          </a:bodyPr>
-          <a:lstStyle/>
-          <a:p>
-            <a:pPr algn="ctr"/>
-            <a:r>
-              <a:rPr sz="1000" b="0" i="0">
-                <a:solidFill>
-                  <a:srgbClr val="94A3B8"/>
-                </a:solidFill>
-                <a:latin typeface="Segoe UI"/>
-              </a:rPr>
-              <a:t>06 / 06 — Q&amp;A</a:t>
-            </a:r>
-          </a:p>
-        </p:txBody>
-      </p:sp>
       <p:pic>
         <p:nvPicPr>
-          <p:cNvPr id="5" name="Picture 4" descr="pptx_slide2_Google_Shape_64_p14.png"/>
+          <p:cNvPr id="3" name="Picture 2" descr="six_logo_small.png"/>
           <p:cNvPicPr>
             <a:picLocks noChangeAspect="1"/>
           </p:cNvPicPr>
@@ -9546,8 +9342,8 @@
         </p:blipFill>
         <p:spPr>
           <a:xfrm>
-            <a:off x="10515600" y="109728"/>
-            <a:ext cx="1371600" cy="376460"/>
+            <a:off x="365760" y="128016"/>
+            <a:ext cx="457200" cy="228600"/>
           </a:xfrm>
           <a:prstGeom prst="rect">
             <a:avLst/>
@@ -9556,14 +9352,14 @@
       </p:pic>
       <p:sp>
         <p:nvSpPr>
-          <p:cNvPr id="6" name="TextBox 5"/>
+          <p:cNvPr id="4" name="TextBox 3"/>
           <p:cNvSpPr txBox="1"/>
           <p:nvPr/>
         </p:nvSpPr>
         <p:spPr>
           <a:xfrm>
-            <a:off x="731520" y="777240"/>
-            <a:ext cx="10728655" cy="274320"/>
+            <a:off x="822960" y="137160"/>
+            <a:ext cx="365760" cy="256032"/>
           </a:xfrm>
           <a:prstGeom prst="rect">
             <a:avLst/>
@@ -9576,36 +9372,28 @@
           </a:bodyPr>
           <a:lstStyle/>
           <a:p>
-            <a:pPr algn="ctr">
-              <a:spcBef>
-                <a:spcPts val="0"/>
-              </a:spcBef>
-              <a:spcAft>
-                <a:spcPts val="0"/>
-              </a:spcAft>
-            </a:pPr>
-            <a:r>
-              <a:rPr sz="1200" b="1" i="0">
-                <a:solidFill>
-                  <a:srgbClr val="C8102E"/>
-                </a:solidFill>
-                <a:latin typeface="Segoe UI"/>
-              </a:rPr>
-              <a:t>THE TEAM</a:t>
-            </a:r>
-          </a:p>
-        </p:txBody>
-      </p:sp>
-      <p:sp>
-        <p:nvSpPr>
-          <p:cNvPr id="7" name="TextBox 6"/>
+            <a:r>
+              <a:rPr sz="1300" b="0" i="0">
+                <a:solidFill>
+                  <a:srgbClr val="475569"/>
+                </a:solidFill>
+                <a:latin typeface="Segoe UI"/>
+              </a:rPr>
+              <a:t>AI</a:t>
+            </a:r>
+          </a:p>
+        </p:txBody>
+      </p:sp>
+      <p:sp>
+        <p:nvSpPr>
+          <p:cNvPr id="5" name="TextBox 4"/>
           <p:cNvSpPr txBox="1"/>
           <p:nvPr/>
         </p:nvSpPr>
         <p:spPr>
           <a:xfrm>
-            <a:off x="1828800" y="1097280"/>
-            <a:ext cx="8534095" cy="640080"/>
+            <a:off x="2743200" y="155448"/>
+            <a:ext cx="6705295" cy="228600"/>
           </a:xfrm>
           <a:prstGeom prst="rect">
             <a:avLst/>
@@ -9620,36 +9408,51 @@
           <a:p>
             <a:pPr algn="ctr"/>
             <a:r>
-              <a:rPr sz="3600" b="1" i="0">
-                <a:solidFill>
-                  <a:srgbClr val="0F172A"/>
-                </a:solidFill>
-                <a:latin typeface="Segoe UI"/>
-              </a:rPr>
-              <a:t>Questions &amp; </a:t>
-            </a:r>
-            <a:r>
-              <a:rPr sz="3600" b="1" i="1">
-                <a:solidFill>
-                  <a:srgbClr val="C8102E"/>
-                </a:solidFill>
-                <a:latin typeface="Segoe UI"/>
-              </a:rPr>
-              <a:t>Answers</a:t>
-            </a:r>
-          </a:p>
-        </p:txBody>
-      </p:sp>
-      <p:sp>
-        <p:nvSpPr>
-          <p:cNvPr id="8" name="TextBox 7"/>
+              <a:rPr sz="900" b="0" i="0">
+                <a:solidFill>
+                  <a:srgbClr val="94A3B8"/>
+                </a:solidFill>
+                <a:latin typeface="Segoe UI"/>
+              </a:rPr>
+              <a:t>06 / 06 — Q&amp;A</a:t>
+            </a:r>
+          </a:p>
+        </p:txBody>
+      </p:sp>
+      <p:pic>
+        <p:nvPicPr>
+          <p:cNvPr id="6" name="Picture 5" descr="pptx_slide2_Google_Shape_64_p14.png"/>
+          <p:cNvPicPr>
+            <a:picLocks noChangeAspect="1"/>
+          </p:cNvPicPr>
+          <p:nvPr/>
+        </p:nvPicPr>
+        <p:blipFill>
+          <a:blip r:embed="rId3"/>
+          <a:stretch>
+            <a:fillRect/>
+          </a:stretch>
+        </p:blipFill>
+        <p:spPr>
+          <a:xfrm>
+            <a:off x="10728655" y="91440"/>
+            <a:ext cx="1188720" cy="326266"/>
+          </a:xfrm>
+          <a:prstGeom prst="rect">
+            <a:avLst/>
+          </a:prstGeom>
+        </p:spPr>
+      </p:pic>
+      <p:sp>
+        <p:nvSpPr>
+          <p:cNvPr id="7" name="TextBox 6"/>
           <p:cNvSpPr txBox="1"/>
           <p:nvPr/>
         </p:nvSpPr>
         <p:spPr>
           <a:xfrm>
-            <a:off x="1828800" y="1737360"/>
-            <a:ext cx="8534095" cy="365760"/>
+            <a:off x="914400" y="777240"/>
+            <a:ext cx="10362895" cy="274320"/>
           </a:xfrm>
           <a:prstGeom prst="rect">
             <a:avLst/>
@@ -9662,16 +9465,88 @@
           </a:bodyPr>
           <a:lstStyle/>
           <a:p>
-            <a:pPr algn="ctr">
-              <a:spcBef>
-                <a:spcPts val="0"/>
-              </a:spcBef>
-              <a:spcAft>
-                <a:spcPts val="0"/>
-              </a:spcAft>
-            </a:pPr>
-            <a:r>
-              <a:rPr sz="1500" b="0" i="0">
+            <a:pPr algn="ctr"/>
+            <a:r>
+              <a:rPr sz="1200" b="1" i="0">
+                <a:solidFill>
+                  <a:srgbClr val="C8102E"/>
+                </a:solidFill>
+                <a:latin typeface="Segoe UI"/>
+              </a:rPr>
+              <a:t>THE TEAM</a:t>
+            </a:r>
+          </a:p>
+        </p:txBody>
+      </p:sp>
+      <p:sp>
+        <p:nvSpPr>
+          <p:cNvPr id="8" name="TextBox 7"/>
+          <p:cNvSpPr txBox="1"/>
+          <p:nvPr/>
+        </p:nvSpPr>
+        <p:spPr>
+          <a:xfrm>
+            <a:off x="1828800" y="1051560"/>
+            <a:ext cx="8534095" cy="640080"/>
+          </a:xfrm>
+          <a:prstGeom prst="rect">
+            <a:avLst/>
+          </a:prstGeom>
+          <a:noFill/>
+        </p:spPr>
+        <p:txBody>
+          <a:bodyPr wrap="square">
+            <a:spAutoFit/>
+          </a:bodyPr>
+          <a:lstStyle/>
+          <a:p>
+            <a:pPr algn="ctr"/>
+            <a:r>
+              <a:rPr sz="3400" b="1" i="0">
+                <a:solidFill>
+                  <a:srgbClr val="0F172A"/>
+                </a:solidFill>
+                <a:latin typeface="Segoe UI"/>
+              </a:rPr>
+              <a:t>Questions &amp; </a:t>
+            </a:r>
+            <a:r>
+              <a:rPr sz="3400" b="1" i="1">
+                <a:solidFill>
+                  <a:srgbClr val="C8102E"/>
+                </a:solidFill>
+                <a:latin typeface="Segoe UI"/>
+              </a:rPr>
+              <a:t>Answers</a:t>
+            </a:r>
+          </a:p>
+        </p:txBody>
+      </p:sp>
+      <p:sp>
+        <p:nvSpPr>
+          <p:cNvPr id="9" name="TextBox 8"/>
+          <p:cNvSpPr txBox="1"/>
+          <p:nvPr/>
+        </p:nvSpPr>
+        <p:spPr>
+          <a:xfrm>
+            <a:off x="1828800" y="1645920"/>
+            <a:ext cx="8534095" cy="320040"/>
+          </a:xfrm>
+          <a:prstGeom prst="rect">
+            <a:avLst/>
+          </a:prstGeom>
+          <a:noFill/>
+        </p:spPr>
+        <p:txBody>
+          <a:bodyPr wrap="square">
+            <a:spAutoFit/>
+          </a:bodyPr>
+          <a:lstStyle/>
+          <a:p>
+            <a:pPr algn="ctr"/>
+            <a:r>
+              <a:rPr sz="1400" b="0" i="0">
                 <a:solidFill>
                   <a:srgbClr val="475569"/>
                 </a:solidFill>
@@ -9684,14 +9559,14 @@
       </p:sp>
       <p:sp>
         <p:nvSpPr>
-          <p:cNvPr id="9" name="Rounded Rectangle 8"/>
+          <p:cNvPr id="10" name="Rounded Rectangle 9"/>
           <p:cNvSpPr/>
           <p:nvPr/>
         </p:nvSpPr>
         <p:spPr>
           <a:xfrm>
-            <a:off x="1249527" y="2286000"/>
-            <a:ext cx="2926080" cy="3108960"/>
+            <a:off x="1889607" y="2103120"/>
+            <a:ext cx="2560320" cy="2743200"/>
           </a:xfrm>
           <a:prstGeom prst="roundRect">
             <a:avLst>
@@ -9731,22 +9606,22 @@
       </p:sp>
       <p:pic>
         <p:nvPicPr>
-          <p:cNvPr id="10" name="Picture 9" descr="boris.JPG"/>
+          <p:cNvPr id="11" name="Picture 10" descr="boris.JPG"/>
           <p:cNvPicPr>
             <a:picLocks noChangeAspect="1"/>
           </p:cNvPicPr>
           <p:nvPr/>
         </p:nvPicPr>
         <p:blipFill>
-          <a:blip r:embed="rId3"/>
+          <a:blip r:embed="rId4"/>
           <a:stretch>
             <a:fillRect/>
           </a:stretch>
         </p:blipFill>
         <p:spPr>
           <a:xfrm>
-            <a:off x="1889607" y="2560320"/>
-            <a:ext cx="1645920" cy="1645920"/>
+            <a:off x="2438247" y="2331720"/>
+            <a:ext cx="1463040" cy="1463040"/>
           </a:xfrm>
           <a:prstGeom prst="rect">
             <a:avLst/>
@@ -9755,14 +9630,14 @@
       </p:pic>
       <p:sp>
         <p:nvSpPr>
-          <p:cNvPr id="11" name="TextBox 10"/>
+          <p:cNvPr id="12" name="TextBox 11"/>
           <p:cNvSpPr txBox="1"/>
           <p:nvPr/>
         </p:nvSpPr>
         <p:spPr>
           <a:xfrm>
-            <a:off x="1249527" y="4297680"/>
-            <a:ext cx="2926080" cy="365760"/>
+            <a:off x="1889607" y="3931920"/>
+            <a:ext cx="2560320" cy="320040"/>
           </a:xfrm>
           <a:prstGeom prst="rect">
             <a:avLst/>
@@ -9775,16 +9650,9 @@
           </a:bodyPr>
           <a:lstStyle/>
           <a:p>
-            <a:pPr algn="ctr">
-              <a:spcBef>
-                <a:spcPts val="0"/>
-              </a:spcBef>
-              <a:spcAft>
-                <a:spcPts val="0"/>
-              </a:spcAft>
-            </a:pPr>
-            <a:r>
-              <a:rPr sz="1600" b="1" i="0">
+            <a:pPr algn="ctr"/>
+            <a:r>
+              <a:rPr sz="1500" b="1" i="0">
                 <a:solidFill>
                   <a:srgbClr val="0F172A"/>
                 </a:solidFill>
@@ -9797,14 +9665,14 @@
       </p:sp>
       <p:sp>
         <p:nvSpPr>
-          <p:cNvPr id="12" name="Rounded Rectangle 11"/>
+          <p:cNvPr id="13" name="Rounded Rectangle 12"/>
           <p:cNvSpPr/>
           <p:nvPr/>
         </p:nvSpPr>
         <p:spPr>
           <a:xfrm>
-            <a:off x="2136495" y="4754880"/>
-            <a:ext cx="1152144" cy="347472"/>
+            <a:off x="2634843" y="4297679"/>
+            <a:ext cx="1069848" cy="320040"/>
           </a:xfrm>
           <a:prstGeom prst="roundRect">
             <a:avLst>
@@ -9835,12 +9703,12 @@
           </a:fontRef>
         </p:style>
         <p:txBody>
-          <a:bodyPr rtlCol="0" anchor="ctr" tIns="25400" bIns="25400" lIns="101600" rIns="101600" wrap="none"/>
-          <a:lstStyle/>
-          <a:p>
-            <a:pPr algn="ctr"/>
-            <a:r>
-              <a:rPr sz="1100" b="0" i="0">
+          <a:bodyPr rtlCol="0" anchor="ctr" tIns="12700" bIns="12700" lIns="76200" rIns="76200" wrap="none"/>
+          <a:lstStyle/>
+          <a:p>
+            <a:pPr algn="ctr"/>
+            <a:r>
+              <a:rPr sz="1000" b="0" i="0">
                 <a:solidFill>
                   <a:srgbClr val="2E6FD6"/>
                 </a:solidFill>
@@ -9853,14 +9721,14 @@
       </p:sp>
       <p:sp>
         <p:nvSpPr>
-          <p:cNvPr id="13" name="Rounded Rectangle 12"/>
+          <p:cNvPr id="14" name="Rounded Rectangle 13"/>
           <p:cNvSpPr/>
           <p:nvPr/>
         </p:nvSpPr>
         <p:spPr>
           <a:xfrm>
-            <a:off x="4632807" y="2286000"/>
-            <a:ext cx="2926080" cy="3108960"/>
+            <a:off x="4815687" y="2103120"/>
+            <a:ext cx="2560320" cy="2743200"/>
           </a:xfrm>
           <a:prstGeom prst="roundRect">
             <a:avLst>
@@ -9900,22 +9768,22 @@
       </p:sp>
       <p:pic>
         <p:nvPicPr>
-          <p:cNvPr id="14" name="Picture 13" descr="hristo.jpeg"/>
+          <p:cNvPr id="15" name="Picture 14" descr="hristo.jpeg"/>
           <p:cNvPicPr>
             <a:picLocks noChangeAspect="1"/>
           </p:cNvPicPr>
           <p:nvPr/>
         </p:nvPicPr>
         <p:blipFill>
-          <a:blip r:embed="rId4"/>
+          <a:blip r:embed="rId5"/>
           <a:stretch>
             <a:fillRect/>
           </a:stretch>
         </p:blipFill>
         <p:spPr>
           <a:xfrm>
-            <a:off x="5272887" y="2560320"/>
-            <a:ext cx="1645920" cy="1645920"/>
+            <a:off x="5364327" y="2331720"/>
+            <a:ext cx="1463040" cy="1463040"/>
           </a:xfrm>
           <a:prstGeom prst="rect">
             <a:avLst/>
@@ -9924,14 +9792,14 @@
       </p:pic>
       <p:sp>
         <p:nvSpPr>
-          <p:cNvPr id="15" name="TextBox 14"/>
+          <p:cNvPr id="16" name="TextBox 15"/>
           <p:cNvSpPr txBox="1"/>
           <p:nvPr/>
         </p:nvSpPr>
         <p:spPr>
           <a:xfrm>
-            <a:off x="4632807" y="4297680"/>
-            <a:ext cx="2926080" cy="365760"/>
+            <a:off x="4815687" y="3931920"/>
+            <a:ext cx="2560320" cy="320040"/>
           </a:xfrm>
           <a:prstGeom prst="rect">
             <a:avLst/>
@@ -9944,16 +9812,9 @@
           </a:bodyPr>
           <a:lstStyle/>
           <a:p>
-            <a:pPr algn="ctr">
-              <a:spcBef>
-                <a:spcPts val="0"/>
-              </a:spcBef>
-              <a:spcAft>
-                <a:spcPts val="0"/>
-              </a:spcAft>
-            </a:pPr>
-            <a:r>
-              <a:rPr sz="1600" b="1" i="0">
+            <a:pPr algn="ctr"/>
+            <a:r>
+              <a:rPr sz="1500" b="1" i="0">
                 <a:solidFill>
                   <a:srgbClr val="0F172A"/>
                 </a:solidFill>
@@ -9966,14 +9827,14 @@
       </p:sp>
       <p:sp>
         <p:nvSpPr>
-          <p:cNvPr id="16" name="Rounded Rectangle 15"/>
+          <p:cNvPr id="17" name="Rounded Rectangle 16"/>
           <p:cNvSpPr/>
           <p:nvPr/>
         </p:nvSpPr>
         <p:spPr>
           <a:xfrm>
-            <a:off x="5547207" y="4754880"/>
-            <a:ext cx="1097280" cy="347472"/>
+            <a:off x="5592927" y="4297679"/>
+            <a:ext cx="1005840" cy="320040"/>
           </a:xfrm>
           <a:prstGeom prst="roundRect">
             <a:avLst>
@@ -10004,12 +9865,12 @@
           </a:fontRef>
         </p:style>
         <p:txBody>
-          <a:bodyPr rtlCol="0" anchor="ctr" tIns="25400" bIns="25400" lIns="101600" rIns="101600" wrap="none"/>
-          <a:lstStyle/>
-          <a:p>
-            <a:pPr algn="ctr"/>
-            <a:r>
-              <a:rPr sz="1100" b="0" i="0">
+          <a:bodyPr rtlCol="0" anchor="ctr" tIns="12700" bIns="12700" lIns="76200" rIns="76200" wrap="none"/>
+          <a:lstStyle/>
+          <a:p>
+            <a:pPr algn="ctr"/>
+            <a:r>
+              <a:rPr sz="1000" b="0" i="0">
                 <a:solidFill>
                   <a:srgbClr val="16A34A"/>
                 </a:solidFill>
@@ -10022,14 +9883,14 @@
       </p:sp>
       <p:sp>
         <p:nvSpPr>
-          <p:cNvPr id="17" name="Rounded Rectangle 16"/>
+          <p:cNvPr id="18" name="Rounded Rectangle 17"/>
           <p:cNvSpPr/>
           <p:nvPr/>
         </p:nvSpPr>
         <p:spPr>
           <a:xfrm>
-            <a:off x="8016087" y="2286000"/>
-            <a:ext cx="2926080" cy="3108960"/>
+            <a:off x="7741767" y="2103120"/>
+            <a:ext cx="2560320" cy="2743200"/>
           </a:xfrm>
           <a:prstGeom prst="roundRect">
             <a:avLst>
@@ -10069,22 +9930,22 @@
       </p:sp>
       <p:pic>
         <p:nvPicPr>
-          <p:cNvPr id="18" name="Picture 17" descr="nikola.jpeg"/>
+          <p:cNvPr id="19" name="Picture 18" descr="nikola.jpeg"/>
           <p:cNvPicPr>
             <a:picLocks noChangeAspect="1"/>
           </p:cNvPicPr>
           <p:nvPr/>
         </p:nvPicPr>
         <p:blipFill>
-          <a:blip r:embed="rId5"/>
+          <a:blip r:embed="rId6"/>
           <a:stretch>
             <a:fillRect/>
           </a:stretch>
         </p:blipFill>
         <p:spPr>
           <a:xfrm>
-            <a:off x="8656166" y="2560320"/>
-            <a:ext cx="1645920" cy="1645920"/>
+            <a:off x="8290407" y="2331720"/>
+            <a:ext cx="1463040" cy="1463040"/>
           </a:xfrm>
           <a:prstGeom prst="rect">
             <a:avLst/>
@@ -10093,14 +9954,14 @@
       </p:pic>
       <p:sp>
         <p:nvSpPr>
-          <p:cNvPr id="19" name="TextBox 18"/>
+          <p:cNvPr id="20" name="TextBox 19"/>
           <p:cNvSpPr txBox="1"/>
           <p:nvPr/>
         </p:nvSpPr>
         <p:spPr>
           <a:xfrm>
-            <a:off x="8016087" y="4297680"/>
-            <a:ext cx="2926080" cy="365760"/>
+            <a:off x="7741767" y="3931920"/>
+            <a:ext cx="2560320" cy="320040"/>
           </a:xfrm>
           <a:prstGeom prst="rect">
             <a:avLst/>
@@ -10113,16 +9974,9 @@
           </a:bodyPr>
           <a:lstStyle/>
           <a:p>
-            <a:pPr algn="ctr">
-              <a:spcBef>
-                <a:spcPts val="0"/>
-              </a:spcBef>
-              <a:spcAft>
-                <a:spcPts val="0"/>
-              </a:spcAft>
-            </a:pPr>
-            <a:r>
-              <a:rPr sz="1600" b="1" i="0">
+            <a:pPr algn="ctr"/>
+            <a:r>
+              <a:rPr sz="1500" b="1" i="0">
                 <a:solidFill>
                   <a:srgbClr val="0F172A"/>
                 </a:solidFill>
@@ -10135,14 +9989,14 @@
       </p:sp>
       <p:sp>
         <p:nvSpPr>
-          <p:cNvPr id="20" name="Rounded Rectangle 19"/>
+          <p:cNvPr id="21" name="Rounded Rectangle 20"/>
           <p:cNvSpPr/>
           <p:nvPr/>
         </p:nvSpPr>
         <p:spPr>
           <a:xfrm>
-            <a:off x="8930487" y="4754880"/>
-            <a:ext cx="1097280" cy="347472"/>
+            <a:off x="8519007" y="4297679"/>
+            <a:ext cx="1005840" cy="320040"/>
           </a:xfrm>
           <a:prstGeom prst="roundRect">
             <a:avLst>
@@ -10173,12 +10027,12 @@
           </a:fontRef>
         </p:style>
         <p:txBody>
-          <a:bodyPr rtlCol="0" anchor="ctr" tIns="25400" bIns="25400" lIns="101600" rIns="101600" wrap="none"/>
-          <a:lstStyle/>
-          <a:p>
-            <a:pPr algn="ctr"/>
-            <a:r>
-              <a:rPr sz="1100" b="0" i="0">
+          <a:bodyPr rtlCol="0" anchor="ctr" tIns="12700" bIns="12700" lIns="76200" rIns="76200" wrap="none"/>
+          <a:lstStyle/>
+          <a:p>
+            <a:pPr algn="ctr"/>
+            <a:r>
+              <a:rPr sz="1000" b="0" i="0">
                 <a:solidFill>
                   <a:srgbClr val="D97706"/>
                 </a:solidFill>
@@ -10191,14 +10045,14 @@
       </p:sp>
       <p:sp>
         <p:nvSpPr>
-          <p:cNvPr id="21" name="TextBox 20"/>
+          <p:cNvPr id="22" name="TextBox 21"/>
           <p:cNvSpPr txBox="1"/>
           <p:nvPr/>
         </p:nvSpPr>
         <p:spPr>
           <a:xfrm>
-            <a:off x="1828800" y="5623560"/>
-            <a:ext cx="8534095" cy="457200"/>
+            <a:off x="1828800" y="5120640"/>
+            <a:ext cx="8534095" cy="411480"/>
           </a:xfrm>
           <a:prstGeom prst="rect">
             <a:avLst/>
@@ -10211,16 +10065,9 @@
           </a:bodyPr>
           <a:lstStyle/>
           <a:p>
-            <a:pPr algn="ctr">
-              <a:spcBef>
-                <a:spcPts val="0"/>
-              </a:spcBef>
-              <a:spcAft>
-                <a:spcPts val="0"/>
-              </a:spcAft>
-            </a:pPr>
-            <a:r>
-              <a:rPr sz="2000" b="1" i="0">
+            <a:pPr algn="ctr"/>
+            <a:r>
+              <a:rPr sz="1800" b="1" i="0">
                 <a:solidFill>
                   <a:srgbClr val="0F172A"/>
                 </a:solidFill>
@@ -10233,14 +10080,14 @@
       </p:sp>
       <p:sp>
         <p:nvSpPr>
-          <p:cNvPr id="22" name="TextBox 21"/>
+          <p:cNvPr id="23" name="TextBox 22"/>
           <p:cNvSpPr txBox="1"/>
           <p:nvPr/>
         </p:nvSpPr>
         <p:spPr>
           <a:xfrm>
-            <a:off x="3657600" y="6126480"/>
-            <a:ext cx="4876495" cy="365760"/>
+            <a:off x="2743200" y="5623560"/>
+            <a:ext cx="6705295" cy="320040"/>
           </a:xfrm>
           <a:prstGeom prst="rect">
             <a:avLst/>
@@ -10253,22 +10100,50 @@
           </a:bodyPr>
           <a:lstStyle/>
           <a:p>
-            <a:pPr algn="ctr">
-              <a:spcBef>
-                <a:spcPts val="0"/>
-              </a:spcBef>
-              <a:spcAft>
-                <a:spcPts val="0"/>
-              </a:spcAft>
-            </a:pPr>
-            <a:r>
-              <a:rPr sz="1600" b="1" i="0">
+            <a:pPr algn="ctr"/>
+            <a:r>
+              <a:rPr sz="1500" b="1" i="0">
                 <a:solidFill>
                   <a:srgbClr val="475569"/>
                 </a:solidFill>
                 <a:latin typeface="Segoe UI"/>
               </a:rPr>
               <a:t>💬  Questions?</a:t>
+            </a:r>
+          </a:p>
+        </p:txBody>
+      </p:sp>
+      <p:sp>
+        <p:nvSpPr>
+          <p:cNvPr id="24" name="TextBox 23"/>
+          <p:cNvSpPr txBox="1"/>
+          <p:nvPr/>
+        </p:nvSpPr>
+        <p:spPr>
+          <a:xfrm>
+            <a:off x="2743200" y="6080760"/>
+            <a:ext cx="6705295" cy="274320"/>
+          </a:xfrm>
+          <a:prstGeom prst="rect">
+            <a:avLst/>
+          </a:prstGeom>
+          <a:noFill/>
+        </p:spPr>
+        <p:txBody>
+          <a:bodyPr wrap="square">
+            <a:spAutoFit/>
+          </a:bodyPr>
+          <a:lstStyle/>
+          <a:p>
+            <a:pPr algn="ctr"/>
+            <a:r>
+              <a:rPr sz="900" b="0" i="0">
+                <a:solidFill>
+                  <a:srgbClr val="94A3B8"/>
+                </a:solidFill>
+                <a:latin typeface="Segoe UI"/>
+              </a:rPr>
+              <a:t>Powered by SIX Financial Data • SwissHacks 2026</a:t>
             </a:r>
           </a:p>
         </p:txBody>
